--- a/reference/archie/presentations/NPQG Fundamentals - Energy.pptx
+++ b/reference/archie/presentations/NPQG Fundamentals - Energy.pptx
@@ -3,25 +3,19 @@
 <p:presentation xmlns:a="http://schemas.openxmlformats.org/drawingml/2006/main" xmlns:r="http://schemas.openxmlformats.org/officeDocument/2006/relationships" xmlns:p="http://schemas.openxmlformats.org/presentationml/2006/main" saveSubsetFonts="1" autoCompressPictures="0">
   <p:sldMasterIdLst>
     <p:sldMasterId id="2147483648" r:id="rId1"/>
-    <p:sldMasterId id="2147483664" r:id="rId2"/>
   </p:sldMasterIdLst>
   <p:notesMasterIdLst>
-    <p:notesMasterId r:id="rId16"/>
+    <p:notesMasterId r:id="rId10"/>
   </p:notesMasterIdLst>
   <p:sldIdLst>
-    <p:sldId id="807" r:id="rId3"/>
-    <p:sldId id="730" r:id="rId4"/>
-    <p:sldId id="813" r:id="rId5"/>
-    <p:sldId id="809" r:id="rId6"/>
-    <p:sldId id="382" r:id="rId7"/>
-    <p:sldId id="771" r:id="rId8"/>
-    <p:sldId id="810" r:id="rId9"/>
-    <p:sldId id="811" r:id="rId10"/>
-    <p:sldId id="812" r:id="rId11"/>
-    <p:sldId id="881" r:id="rId12"/>
-    <p:sldId id="883" r:id="rId13"/>
-    <p:sldId id="884" r:id="rId14"/>
-    <p:sldId id="882" r:id="rId15"/>
+    <p:sldId id="730" r:id="rId2"/>
+    <p:sldId id="809" r:id="rId3"/>
+    <p:sldId id="771" r:id="rId4"/>
+    <p:sldId id="810" r:id="rId5"/>
+    <p:sldId id="811" r:id="rId6"/>
+    <p:sldId id="812" r:id="rId7"/>
+    <p:sldId id="881" r:id="rId8"/>
+    <p:sldId id="884" r:id="rId9"/>
   </p:sldIdLst>
   <p:sldSz cx="12192000" cy="6858000"/>
   <p:notesSz cx="6858000" cy="9144000"/>
@@ -221,7 +215,7 @@
           <a:p>
             <a:fld id="{BBBDA440-6FDE-5E41-BA40-A3C0E02BAB9F}" type="datetimeFigureOut">
               <a:rPr lang="en-US" smtClean="0"/>
-              <a:t>1/5/25</a:t>
+              <a:t>7/3/26</a:t>
             </a:fld>
             <a:endParaRPr lang="en-US"/>
           </a:p>
@@ -532,144 +526,6 @@
           <a:bodyPr/>
           <a:lstStyle/>
           <a:p>
-            <a:r>
-              <a:rPr lang="en-US" dirty="0"/>
-              <a:t>Hi. Welcome to this episode of Emergent Nature. </a:t>
-            </a:r>
-          </a:p>
-          <a:p>
-            <a:endParaRPr lang="en-US" dirty="0"/>
-          </a:p>
-          <a:p>
-            <a:r>
-              <a:rPr lang="en-US" dirty="0"/>
-              <a:t>My name is J Mark Morris. I go by Mark.</a:t>
-            </a:r>
-          </a:p>
-          <a:p>
-            <a:endParaRPr lang="en-US" dirty="0"/>
-          </a:p>
-          <a:p>
-            <a:r>
-              <a:rPr lang="en-US" dirty="0"/>
-              <a:t>In this episode I’ll discuss the error that caused science to go off track into general relativity and quantum mechanics.</a:t>
-            </a:r>
-          </a:p>
-          <a:p>
-            <a:endParaRPr lang="en-US" dirty="0"/>
-          </a:p>
-          <a:p>
-            <a:r>
-              <a:rPr lang="en-US" dirty="0"/>
-              <a:t>That may seem like an unusual thing to say, since general relativity and quantum theory are generally considered to be successful effective theories.</a:t>
-            </a:r>
-          </a:p>
-          <a:p>
-            <a:endParaRPr lang="en-US" dirty="0"/>
-          </a:p>
-          <a:p>
-            <a:r>
-              <a:rPr lang="en-US" dirty="0"/>
-              <a:t>However, as we will see, an error circa 1900 threw science off track.</a:t>
-            </a:r>
-          </a:p>
-          <a:p>
-            <a:endParaRPr lang="en-US" dirty="0"/>
-          </a:p>
-          <a:p>
-            <a:r>
-              <a:rPr lang="en-US" dirty="0"/>
-              <a:t>There is a parsimonious solution to nature.</a:t>
-            </a:r>
-          </a:p>
-          <a:p>
-            <a:endParaRPr lang="en-US" dirty="0"/>
-          </a:p>
-          <a:p>
-            <a:endParaRPr lang="en-US" dirty="0"/>
-          </a:p>
-        </p:txBody>
-      </p:sp>
-      <p:sp>
-        <p:nvSpPr>
-          <p:cNvPr id="4" name="Slide Number Placeholder 3"/>
-          <p:cNvSpPr>
-            <a:spLocks noGrp="1"/>
-          </p:cNvSpPr>
-          <p:nvPr>
-            <p:ph type="sldNum" sz="quarter" idx="5"/>
-          </p:nvPr>
-        </p:nvSpPr>
-        <p:spPr/>
-        <p:txBody>
-          <a:bodyPr/>
-          <a:lstStyle/>
-          <a:p>
-            <a:fld id="{4DC398A3-AF21-A342-B6A8-6929C36BB1BF}" type="slidenum">
-              <a:rPr lang="en-US" smtClean="0"/>
-              <a:t>1</a:t>
-            </a:fld>
-            <a:endParaRPr lang="en-US"/>
-          </a:p>
-        </p:txBody>
-      </p:sp>
-    </p:spTree>
-    <p:extLst>
-      <p:ext uri="{BB962C8B-B14F-4D97-AF65-F5344CB8AC3E}">
-        <p14:creationId xmlns:p14="http://schemas.microsoft.com/office/powerpoint/2010/main" val="11801368"/>
-      </p:ext>
-    </p:extLst>
-  </p:cSld>
-  <p:clrMapOvr>
-    <a:masterClrMapping/>
-  </p:clrMapOvr>
-</p:notes>
-</file>
-
-<file path=ppt/notesSlides/notesSlide2.xml><?xml version="1.0" encoding="utf-8"?>
-<p:notes xmlns:a="http://schemas.openxmlformats.org/drawingml/2006/main" xmlns:r="http://schemas.openxmlformats.org/officeDocument/2006/relationships" xmlns:p="http://schemas.openxmlformats.org/presentationml/2006/main">
-  <p:cSld>
-    <p:spTree>
-      <p:nvGrpSpPr>
-        <p:cNvPr id="1" name=""/>
-        <p:cNvGrpSpPr/>
-        <p:nvPr/>
-      </p:nvGrpSpPr>
-      <p:grpSpPr>
-        <a:xfrm>
-          <a:off x="0" y="0"/>
-          <a:ext cx="0" cy="0"/>
-          <a:chOff x="0" y="0"/>
-          <a:chExt cx="0" cy="0"/>
-        </a:xfrm>
-      </p:grpSpPr>
-      <p:sp>
-        <p:nvSpPr>
-          <p:cNvPr id="2" name="Slide Image Placeholder 1"/>
-          <p:cNvSpPr>
-            <a:spLocks noGrp="1" noRot="1" noChangeAspect="1"/>
-          </p:cNvSpPr>
-          <p:nvPr>
-            <p:ph type="sldImg"/>
-          </p:nvPr>
-        </p:nvSpPr>
-        <p:spPr/>
-      </p:sp>
-      <p:sp>
-        <p:nvSpPr>
-          <p:cNvPr id="3" name="Notes Placeholder 2"/>
-          <p:cNvSpPr>
-            <a:spLocks noGrp="1"/>
-          </p:cNvSpPr>
-          <p:nvPr>
-            <p:ph type="body" idx="1"/>
-          </p:nvPr>
-        </p:nvSpPr>
-        <p:spPr/>
-        <p:txBody>
-          <a:bodyPr/>
-          <a:lstStyle/>
-          <a:p>
             <a:endParaRPr lang="en-US"/>
           </a:p>
         </p:txBody>
@@ -738,7 +594,7 @@
                 <a:tabLst/>
                 <a:defRPr/>
               </a:pPr>
-              <a:t>2</a:t>
+              <a:t>1</a:t>
             </a:fld>
             <a:endParaRPr kumimoji="0" lang="en-US" sz="1200" b="0" i="0" u="none" strike="noStrike" kern="1200" cap="none" spc="0" normalizeH="0" baseline="0" noProof="0">
               <a:ln>
@@ -761,168 +617,6 @@
     <p:extLst>
       <p:ext uri="{BB962C8B-B14F-4D97-AF65-F5344CB8AC3E}">
         <p14:creationId xmlns:p14="http://schemas.microsoft.com/office/powerpoint/2010/main" val="2015686713"/>
-      </p:ext>
-    </p:extLst>
-  </p:cSld>
-  <p:clrMapOvr>
-    <a:masterClrMapping/>
-  </p:clrMapOvr>
-</p:notes>
-</file>
-
-<file path=ppt/notesSlides/notesSlide3.xml><?xml version="1.0" encoding="utf-8"?>
-<p:notes xmlns:a="http://schemas.openxmlformats.org/drawingml/2006/main" xmlns:r="http://schemas.openxmlformats.org/officeDocument/2006/relationships" xmlns:p="http://schemas.openxmlformats.org/presentationml/2006/main">
-  <p:cSld>
-    <p:spTree>
-      <p:nvGrpSpPr>
-        <p:cNvPr id="1" name="">
-          <a:extLst>
-            <a:ext uri="{FF2B5EF4-FFF2-40B4-BE49-F238E27FC236}">
-              <a16:creationId xmlns:a16="http://schemas.microsoft.com/office/drawing/2014/main" id="{86FE86AA-95FF-A495-A214-35B7DBF6EA58}"/>
-            </a:ext>
-          </a:extLst>
-        </p:cNvPr>
-        <p:cNvGrpSpPr/>
-        <p:nvPr/>
-      </p:nvGrpSpPr>
-      <p:grpSpPr>
-        <a:xfrm>
-          <a:off x="0" y="0"/>
-          <a:ext cx="0" cy="0"/>
-          <a:chOff x="0" y="0"/>
-          <a:chExt cx="0" cy="0"/>
-        </a:xfrm>
-      </p:grpSpPr>
-      <p:sp>
-        <p:nvSpPr>
-          <p:cNvPr id="2" name="Slide Image Placeholder 1">
-            <a:extLst>
-              <a:ext uri="{FF2B5EF4-FFF2-40B4-BE49-F238E27FC236}">
-                <a16:creationId xmlns:a16="http://schemas.microsoft.com/office/drawing/2014/main" id="{67EDF82A-5C23-DD57-B461-A212307D90F5}"/>
-              </a:ext>
-            </a:extLst>
-          </p:cNvPr>
-          <p:cNvSpPr>
-            <a:spLocks noGrp="1" noRot="1" noChangeAspect="1"/>
-          </p:cNvSpPr>
-          <p:nvPr>
-            <p:ph type="sldImg"/>
-          </p:nvPr>
-        </p:nvSpPr>
-        <p:spPr/>
-      </p:sp>
-      <p:sp>
-        <p:nvSpPr>
-          <p:cNvPr id="3" name="Notes Placeholder 2">
-            <a:extLst>
-              <a:ext uri="{FF2B5EF4-FFF2-40B4-BE49-F238E27FC236}">
-                <a16:creationId xmlns:a16="http://schemas.microsoft.com/office/drawing/2014/main" id="{706BE8A1-0A61-4E37-214B-3CFF29481253}"/>
-              </a:ext>
-            </a:extLst>
-          </p:cNvPr>
-          <p:cNvSpPr>
-            <a:spLocks noGrp="1"/>
-          </p:cNvSpPr>
-          <p:nvPr>
-            <p:ph type="body" idx="1"/>
-          </p:nvPr>
-        </p:nvSpPr>
-        <p:spPr/>
-        <p:txBody>
-          <a:bodyPr/>
-          <a:lstStyle/>
-          <a:p>
-            <a:r>
-              <a:rPr lang="en-US" dirty="0"/>
-              <a:t>Hi. Welcome to this episode of Emergent Nature. </a:t>
-            </a:r>
-          </a:p>
-          <a:p>
-            <a:endParaRPr lang="en-US" dirty="0"/>
-          </a:p>
-          <a:p>
-            <a:r>
-              <a:rPr lang="en-US" dirty="0"/>
-              <a:t>My name is J Mark Morris. I go by Mark.</a:t>
-            </a:r>
-          </a:p>
-          <a:p>
-            <a:endParaRPr lang="en-US" dirty="0"/>
-          </a:p>
-          <a:p>
-            <a:r>
-              <a:rPr lang="en-US" dirty="0"/>
-              <a:t>In this episode I’ll discuss the error that caused science to go off track into general relativity and quantum mechanics.</a:t>
-            </a:r>
-          </a:p>
-          <a:p>
-            <a:endParaRPr lang="en-US" dirty="0"/>
-          </a:p>
-          <a:p>
-            <a:r>
-              <a:rPr lang="en-US" dirty="0"/>
-              <a:t>That may seem like an unusual thing to say, since general relativity and quantum theory are generally considered to be successful effective theories.</a:t>
-            </a:r>
-          </a:p>
-          <a:p>
-            <a:endParaRPr lang="en-US" dirty="0"/>
-          </a:p>
-          <a:p>
-            <a:r>
-              <a:rPr lang="en-US" dirty="0"/>
-              <a:t>However, as we will see, an error circa 1900 threw science off track.</a:t>
-            </a:r>
-          </a:p>
-          <a:p>
-            <a:endParaRPr lang="en-US" dirty="0"/>
-          </a:p>
-          <a:p>
-            <a:r>
-              <a:rPr lang="en-US" dirty="0"/>
-              <a:t>There is a parsimonious solution to nature.</a:t>
-            </a:r>
-          </a:p>
-          <a:p>
-            <a:endParaRPr lang="en-US" dirty="0"/>
-          </a:p>
-          <a:p>
-            <a:endParaRPr lang="en-US" dirty="0"/>
-          </a:p>
-        </p:txBody>
-      </p:sp>
-      <p:sp>
-        <p:nvSpPr>
-          <p:cNvPr id="4" name="Slide Number Placeholder 3">
-            <a:extLst>
-              <a:ext uri="{FF2B5EF4-FFF2-40B4-BE49-F238E27FC236}">
-                <a16:creationId xmlns:a16="http://schemas.microsoft.com/office/drawing/2014/main" id="{86427D8E-E965-071C-4BBF-52D6F231731B}"/>
-              </a:ext>
-            </a:extLst>
-          </p:cNvPr>
-          <p:cNvSpPr>
-            <a:spLocks noGrp="1"/>
-          </p:cNvSpPr>
-          <p:nvPr>
-            <p:ph type="sldNum" sz="quarter" idx="5"/>
-          </p:nvPr>
-        </p:nvSpPr>
-        <p:spPr/>
-        <p:txBody>
-          <a:bodyPr/>
-          <a:lstStyle/>
-          <a:p>
-            <a:fld id="{4DC398A3-AF21-A342-B6A8-6929C36BB1BF}" type="slidenum">
-              <a:rPr lang="en-US" smtClean="0"/>
-              <a:t>3</a:t>
-            </a:fld>
-            <a:endParaRPr lang="en-US"/>
-          </a:p>
-        </p:txBody>
-      </p:sp>
-    </p:spTree>
-    <p:extLst>
-      <p:ext uri="{BB962C8B-B14F-4D97-AF65-F5344CB8AC3E}">
-        <p14:creationId xmlns:p14="http://schemas.microsoft.com/office/powerpoint/2010/main" val="2731294002"/>
       </p:ext>
     </p:extLst>
   </p:cSld>
@@ -1079,7 +773,7 @@
           <a:p>
             <a:fld id="{CB70D3E6-D921-5B44-AC8D-B7FDAFC8A532}" type="datetimeFigureOut">
               <a:rPr lang="en-US" smtClean="0"/>
-              <a:t>1/5/25</a:t>
+              <a:t>7/3/26</a:t>
             </a:fld>
             <a:endParaRPr lang="en-US"/>
           </a:p>
@@ -1277,7 +971,7 @@
           <a:p>
             <a:fld id="{CB70D3E6-D921-5B44-AC8D-B7FDAFC8A532}" type="datetimeFigureOut">
               <a:rPr lang="en-US" smtClean="0"/>
-              <a:t>1/5/25</a:t>
+              <a:t>7/3/26</a:t>
             </a:fld>
             <a:endParaRPr lang="en-US"/>
           </a:p>
@@ -1485,7 +1179,7 @@
           <a:p>
             <a:fld id="{CB70D3E6-D921-5B44-AC8D-B7FDAFC8A532}" type="datetimeFigureOut">
               <a:rPr lang="en-US" smtClean="0"/>
-              <a:t>1/5/25</a:t>
+              <a:t>7/3/26</a:t>
             </a:fld>
             <a:endParaRPr lang="en-US"/>
           </a:p>
@@ -1549,597 +1243,6 @@
     <p:extLst>
       <p:ext uri="{BB962C8B-B14F-4D97-AF65-F5344CB8AC3E}">
         <p14:creationId xmlns:p14="http://schemas.microsoft.com/office/powerpoint/2010/main" val="2063727443"/>
-      </p:ext>
-    </p:extLst>
-  </p:cSld>
-  <p:clrMapOvr>
-    <a:masterClrMapping/>
-  </p:clrMapOvr>
-</p:sldLayout>
-</file>
-
-<file path=ppt/slideLayouts/slideLayout12.xml><?xml version="1.0" encoding="utf-8"?>
-<p:sldLayout xmlns:a="http://schemas.openxmlformats.org/drawingml/2006/main" xmlns:r="http://schemas.openxmlformats.org/officeDocument/2006/relationships" xmlns:p="http://schemas.openxmlformats.org/presentationml/2006/main" type="title" preserve="1">
-  <p:cSld name="Title Slide">
-    <p:spTree>
-      <p:nvGrpSpPr>
-        <p:cNvPr id="1" name=""/>
-        <p:cNvGrpSpPr/>
-        <p:nvPr/>
-      </p:nvGrpSpPr>
-      <p:grpSpPr>
-        <a:xfrm>
-          <a:off x="0" y="0"/>
-          <a:ext cx="0" cy="0"/>
-          <a:chOff x="0" y="0"/>
-          <a:chExt cx="0" cy="0"/>
-        </a:xfrm>
-      </p:grpSpPr>
-      <p:sp>
-        <p:nvSpPr>
-          <p:cNvPr id="2" name="Title 1">
-            <a:extLst>
-              <a:ext uri="{FF2B5EF4-FFF2-40B4-BE49-F238E27FC236}">
-                <a16:creationId xmlns:a16="http://schemas.microsoft.com/office/drawing/2014/main" id="{08FC2668-EBEB-AE41-BF76-89062B014B13}"/>
-              </a:ext>
-            </a:extLst>
-          </p:cNvPr>
-          <p:cNvSpPr>
-            <a:spLocks noGrp="1"/>
-          </p:cNvSpPr>
-          <p:nvPr>
-            <p:ph type="ctrTitle"/>
-          </p:nvPr>
-        </p:nvSpPr>
-        <p:spPr>
-          <a:xfrm>
-            <a:off x="1524000" y="1122363"/>
-            <a:ext cx="9144000" cy="2387600"/>
-          </a:xfrm>
-        </p:spPr>
-        <p:txBody>
-          <a:bodyPr anchor="b"/>
-          <a:lstStyle>
-            <a:lvl1pPr algn="ctr">
-              <a:defRPr sz="6000"/>
-            </a:lvl1pPr>
-          </a:lstStyle>
-          <a:p>
-            <a:r>
-              <a:rPr lang="en-US" dirty="0"/>
-              <a:t>Click to edit Master title style</a:t>
-            </a:r>
-          </a:p>
-        </p:txBody>
-      </p:sp>
-      <p:sp>
-        <p:nvSpPr>
-          <p:cNvPr id="3" name="Subtitle 2">
-            <a:extLst>
-              <a:ext uri="{FF2B5EF4-FFF2-40B4-BE49-F238E27FC236}">
-                <a16:creationId xmlns:a16="http://schemas.microsoft.com/office/drawing/2014/main" id="{C8C28A4C-0805-8E44-B54E-3B6F671F8D01}"/>
-              </a:ext>
-            </a:extLst>
-          </p:cNvPr>
-          <p:cNvSpPr>
-            <a:spLocks noGrp="1"/>
-          </p:cNvSpPr>
-          <p:nvPr>
-            <p:ph type="subTitle" idx="1"/>
-          </p:nvPr>
-        </p:nvSpPr>
-        <p:spPr>
-          <a:xfrm>
-            <a:off x="1524000" y="3602038"/>
-            <a:ext cx="9144000" cy="1655762"/>
-          </a:xfrm>
-        </p:spPr>
-        <p:txBody>
-          <a:bodyPr/>
-          <a:lstStyle>
-            <a:lvl1pPr marL="0" indent="0" algn="ctr">
-              <a:buNone/>
-              <a:defRPr sz="2400"/>
-            </a:lvl1pPr>
-            <a:lvl2pPr marL="457200" indent="0" algn="ctr">
-              <a:buNone/>
-              <a:defRPr sz="2000"/>
-            </a:lvl2pPr>
-            <a:lvl3pPr marL="914400" indent="0" algn="ctr">
-              <a:buNone/>
-              <a:defRPr sz="1800"/>
-            </a:lvl3pPr>
-            <a:lvl4pPr marL="1371600" indent="0" algn="ctr">
-              <a:buNone/>
-              <a:defRPr sz="1600"/>
-            </a:lvl4pPr>
-            <a:lvl5pPr marL="1828800" indent="0" algn="ctr">
-              <a:buNone/>
-              <a:defRPr sz="1600"/>
-            </a:lvl5pPr>
-            <a:lvl6pPr marL="2286000" indent="0" algn="ctr">
-              <a:buNone/>
-              <a:defRPr sz="1600"/>
-            </a:lvl6pPr>
-            <a:lvl7pPr marL="2743200" indent="0" algn="ctr">
-              <a:buNone/>
-              <a:defRPr sz="1600"/>
-            </a:lvl7pPr>
-            <a:lvl8pPr marL="3200400" indent="0" algn="ctr">
-              <a:buNone/>
-              <a:defRPr sz="1600"/>
-            </a:lvl8pPr>
-            <a:lvl9pPr marL="3657600" indent="0" algn="ctr">
-              <a:buNone/>
-              <a:defRPr sz="1600"/>
-            </a:lvl9pPr>
-          </a:lstStyle>
-          <a:p>
-            <a:r>
-              <a:rPr lang="en-US"/>
-              <a:t>Click to edit Master subtitle style</a:t>
-            </a:r>
-          </a:p>
-        </p:txBody>
-      </p:sp>
-      <p:sp>
-        <p:nvSpPr>
-          <p:cNvPr id="4" name="Date Placeholder 3">
-            <a:extLst>
-              <a:ext uri="{FF2B5EF4-FFF2-40B4-BE49-F238E27FC236}">
-                <a16:creationId xmlns:a16="http://schemas.microsoft.com/office/drawing/2014/main" id="{293B74C2-6265-7F41-BB8F-D8A0A0C89A63}"/>
-              </a:ext>
-            </a:extLst>
-          </p:cNvPr>
-          <p:cNvSpPr>
-            <a:spLocks noGrp="1"/>
-          </p:cNvSpPr>
-          <p:nvPr>
-            <p:ph type="dt" sz="half" idx="10"/>
-          </p:nvPr>
-        </p:nvSpPr>
-        <p:spPr/>
-        <p:txBody>
-          <a:bodyPr/>
-          <a:lstStyle/>
-          <a:p>
-            <a:fld id="{B1CFC895-F8E0-4049-8BEE-E5499394E46C}" type="datetime1">
-              <a:rPr lang="en-US" smtClean="0"/>
-              <a:t>1/5/25</a:t>
-            </a:fld>
-            <a:endParaRPr lang="en-US"/>
-          </a:p>
-        </p:txBody>
-      </p:sp>
-      <p:sp>
-        <p:nvSpPr>
-          <p:cNvPr id="5" name="Footer Placeholder 4">
-            <a:extLst>
-              <a:ext uri="{FF2B5EF4-FFF2-40B4-BE49-F238E27FC236}">
-                <a16:creationId xmlns:a16="http://schemas.microsoft.com/office/drawing/2014/main" id="{74C53590-4180-6C42-A6BF-707655C15A1D}"/>
-              </a:ext>
-            </a:extLst>
-          </p:cNvPr>
-          <p:cNvSpPr>
-            <a:spLocks noGrp="1"/>
-          </p:cNvSpPr>
-          <p:nvPr>
-            <p:ph type="ftr" sz="quarter" idx="11"/>
-          </p:nvPr>
-        </p:nvSpPr>
-        <p:spPr/>
-        <p:txBody>
-          <a:bodyPr/>
-          <a:lstStyle>
-            <a:lvl1pPr>
-              <a:defRPr/>
-            </a:lvl1pPr>
-          </a:lstStyle>
-          <a:p>
-            <a:r>
-              <a:rPr lang="en-US"/>
-              <a:t>J Mark Morris - Model of Nature - April 2019</a:t>
-            </a:r>
-          </a:p>
-        </p:txBody>
-      </p:sp>
-      <p:sp>
-        <p:nvSpPr>
-          <p:cNvPr id="6" name="Slide Number Placeholder 5">
-            <a:extLst>
-              <a:ext uri="{FF2B5EF4-FFF2-40B4-BE49-F238E27FC236}">
-                <a16:creationId xmlns:a16="http://schemas.microsoft.com/office/drawing/2014/main" id="{93A81401-8545-2D4E-A7FB-31AFC7A8DB71}"/>
-              </a:ext>
-            </a:extLst>
-          </p:cNvPr>
-          <p:cNvSpPr>
-            <a:spLocks noGrp="1"/>
-          </p:cNvSpPr>
-          <p:nvPr>
-            <p:ph type="sldNum" sz="quarter" idx="12"/>
-          </p:nvPr>
-        </p:nvSpPr>
-        <p:spPr/>
-        <p:txBody>
-          <a:bodyPr/>
-          <a:lstStyle/>
-          <a:p>
-            <a:fld id="{D73D4D4B-2FF7-BE46-958C-B004BD45EF6F}" type="slidenum">
-              <a:rPr lang="en-US" smtClean="0"/>
-              <a:t>‹#›</a:t>
-            </a:fld>
-            <a:endParaRPr lang="en-US"/>
-          </a:p>
-        </p:txBody>
-      </p:sp>
-    </p:spTree>
-    <p:extLst>
-      <p:ext uri="{BB962C8B-B14F-4D97-AF65-F5344CB8AC3E}">
-        <p14:creationId xmlns:p14="http://schemas.microsoft.com/office/powerpoint/2010/main" val="3372916978"/>
-      </p:ext>
-    </p:extLst>
-  </p:cSld>
-  <p:clrMapOvr>
-    <a:masterClrMapping/>
-  </p:clrMapOvr>
-</p:sldLayout>
-</file>
-
-<file path=ppt/slideLayouts/slideLayout13.xml><?xml version="1.0" encoding="utf-8"?>
-<p:sldLayout xmlns:a="http://schemas.openxmlformats.org/drawingml/2006/main" xmlns:r="http://schemas.openxmlformats.org/officeDocument/2006/relationships" xmlns:p="http://schemas.openxmlformats.org/presentationml/2006/main" type="obj" preserve="1">
-  <p:cSld name="Title and Content">
-    <p:spTree>
-      <p:nvGrpSpPr>
-        <p:cNvPr id="1" name=""/>
-        <p:cNvGrpSpPr/>
-        <p:nvPr/>
-      </p:nvGrpSpPr>
-      <p:grpSpPr>
-        <a:xfrm>
-          <a:off x="0" y="0"/>
-          <a:ext cx="0" cy="0"/>
-          <a:chOff x="0" y="0"/>
-          <a:chExt cx="0" cy="0"/>
-        </a:xfrm>
-      </p:grpSpPr>
-      <p:sp>
-        <p:nvSpPr>
-          <p:cNvPr id="2" name="Title 1">
-            <a:extLst>
-              <a:ext uri="{FF2B5EF4-FFF2-40B4-BE49-F238E27FC236}">
-                <a16:creationId xmlns:a16="http://schemas.microsoft.com/office/drawing/2014/main" id="{EDF560F9-C770-5C4C-9C93-102EC332DBA4}"/>
-              </a:ext>
-            </a:extLst>
-          </p:cNvPr>
-          <p:cNvSpPr>
-            <a:spLocks noGrp="1"/>
-          </p:cNvSpPr>
-          <p:nvPr>
-            <p:ph type="title"/>
-          </p:nvPr>
-        </p:nvSpPr>
-        <p:spPr>
-          <a:xfrm>
-            <a:off x="838200" y="365125"/>
-            <a:ext cx="10515600" cy="777875"/>
-          </a:xfrm>
-        </p:spPr>
-        <p:txBody>
-          <a:bodyPr/>
-          <a:lstStyle/>
-          <a:p>
-            <a:r>
-              <a:rPr lang="en-US" dirty="0"/>
-              <a:t>Click to edit Master title style</a:t>
-            </a:r>
-          </a:p>
-        </p:txBody>
-      </p:sp>
-      <p:sp>
-        <p:nvSpPr>
-          <p:cNvPr id="3" name="Content Placeholder 2">
-            <a:extLst>
-              <a:ext uri="{FF2B5EF4-FFF2-40B4-BE49-F238E27FC236}">
-                <a16:creationId xmlns:a16="http://schemas.microsoft.com/office/drawing/2014/main" id="{80D38EDA-56F1-1C40-B81E-28B921C4E99F}"/>
-              </a:ext>
-            </a:extLst>
-          </p:cNvPr>
-          <p:cNvSpPr>
-            <a:spLocks noGrp="1"/>
-          </p:cNvSpPr>
-          <p:nvPr>
-            <p:ph idx="1"/>
-          </p:nvPr>
-        </p:nvSpPr>
-        <p:spPr>
-          <a:xfrm>
-            <a:off x="838200" y="1295400"/>
-            <a:ext cx="10515600" cy="4881563"/>
-          </a:xfrm>
-        </p:spPr>
-        <p:txBody>
-          <a:bodyPr/>
-          <a:lstStyle/>
-          <a:p>
-            <a:pPr lvl="0"/>
-            <a:r>
-              <a:rPr lang="en-US" dirty="0"/>
-              <a:t>Edit Master text styles</a:t>
-            </a:r>
-          </a:p>
-          <a:p>
-            <a:pPr lvl="1"/>
-            <a:r>
-              <a:rPr lang="en-US" dirty="0"/>
-              <a:t>Second level</a:t>
-            </a:r>
-          </a:p>
-          <a:p>
-            <a:pPr lvl="2"/>
-            <a:r>
-              <a:rPr lang="en-US" dirty="0"/>
-              <a:t>Third level</a:t>
-            </a:r>
-          </a:p>
-          <a:p>
-            <a:pPr lvl="3"/>
-            <a:r>
-              <a:rPr lang="en-US" dirty="0"/>
-              <a:t>Fourth level</a:t>
-            </a:r>
-          </a:p>
-          <a:p>
-            <a:pPr lvl="4"/>
-            <a:r>
-              <a:rPr lang="en-US" dirty="0"/>
-              <a:t>Fifth level</a:t>
-            </a:r>
-          </a:p>
-        </p:txBody>
-      </p:sp>
-      <p:sp>
-        <p:nvSpPr>
-          <p:cNvPr id="4" name="Date Placeholder 3">
-            <a:extLst>
-              <a:ext uri="{FF2B5EF4-FFF2-40B4-BE49-F238E27FC236}">
-                <a16:creationId xmlns:a16="http://schemas.microsoft.com/office/drawing/2014/main" id="{0AD42772-5D80-F641-A1BB-6048573C4E88}"/>
-              </a:ext>
-            </a:extLst>
-          </p:cNvPr>
-          <p:cNvSpPr>
-            <a:spLocks noGrp="1"/>
-          </p:cNvSpPr>
-          <p:nvPr>
-            <p:ph type="dt" sz="half" idx="10"/>
-          </p:nvPr>
-        </p:nvSpPr>
-        <p:spPr/>
-        <p:txBody>
-          <a:bodyPr/>
-          <a:lstStyle/>
-          <a:p>
-            <a:fld id="{A91F55E2-A889-F24B-B1FE-1E878178F308}" type="datetime1">
-              <a:rPr lang="en-US" smtClean="0"/>
-              <a:t>1/5/25</a:t>
-            </a:fld>
-            <a:endParaRPr lang="en-US"/>
-          </a:p>
-        </p:txBody>
-      </p:sp>
-      <p:sp>
-        <p:nvSpPr>
-          <p:cNvPr id="5" name="Footer Placeholder 4">
-            <a:extLst>
-              <a:ext uri="{FF2B5EF4-FFF2-40B4-BE49-F238E27FC236}">
-                <a16:creationId xmlns:a16="http://schemas.microsoft.com/office/drawing/2014/main" id="{C68FC4AF-90CF-484C-B6C7-5CE1A016FB49}"/>
-              </a:ext>
-            </a:extLst>
-          </p:cNvPr>
-          <p:cNvSpPr>
-            <a:spLocks noGrp="1"/>
-          </p:cNvSpPr>
-          <p:nvPr>
-            <p:ph type="ftr" sz="quarter" idx="11"/>
-          </p:nvPr>
-        </p:nvSpPr>
-        <p:spPr/>
-        <p:txBody>
-          <a:bodyPr/>
-          <a:lstStyle/>
-          <a:p>
-            <a:r>
-              <a:rPr lang="en-US"/>
-              <a:t>J Mark Morris - Model of Nature - April 2019</a:t>
-            </a:r>
-          </a:p>
-        </p:txBody>
-      </p:sp>
-      <p:sp>
-        <p:nvSpPr>
-          <p:cNvPr id="6" name="Slide Number Placeholder 5">
-            <a:extLst>
-              <a:ext uri="{FF2B5EF4-FFF2-40B4-BE49-F238E27FC236}">
-                <a16:creationId xmlns:a16="http://schemas.microsoft.com/office/drawing/2014/main" id="{8169AF1E-33D8-3041-A601-1384C718A8B5}"/>
-              </a:ext>
-            </a:extLst>
-          </p:cNvPr>
-          <p:cNvSpPr>
-            <a:spLocks noGrp="1"/>
-          </p:cNvSpPr>
-          <p:nvPr>
-            <p:ph type="sldNum" sz="quarter" idx="12"/>
-          </p:nvPr>
-        </p:nvSpPr>
-        <p:spPr/>
-        <p:txBody>
-          <a:bodyPr/>
-          <a:lstStyle/>
-          <a:p>
-            <a:fld id="{D73D4D4B-2FF7-BE46-958C-B004BD45EF6F}" type="slidenum">
-              <a:rPr lang="en-US" smtClean="0"/>
-              <a:t>‹#›</a:t>
-            </a:fld>
-            <a:endParaRPr lang="en-US"/>
-          </a:p>
-        </p:txBody>
-      </p:sp>
-    </p:spTree>
-    <p:extLst>
-      <p:ext uri="{BB962C8B-B14F-4D97-AF65-F5344CB8AC3E}">
-        <p14:creationId xmlns:p14="http://schemas.microsoft.com/office/powerpoint/2010/main" val="497139919"/>
-      </p:ext>
-    </p:extLst>
-  </p:cSld>
-  <p:clrMapOvr>
-    <a:masterClrMapping/>
-  </p:clrMapOvr>
-</p:sldLayout>
-</file>
-
-<file path=ppt/slideLayouts/slideLayout14.xml><?xml version="1.0" encoding="utf-8"?>
-<p:sldLayout xmlns:a="http://schemas.openxmlformats.org/drawingml/2006/main" xmlns:r="http://schemas.openxmlformats.org/officeDocument/2006/relationships" xmlns:p="http://schemas.openxmlformats.org/presentationml/2006/main" type="titleOnly" preserve="1">
-  <p:cSld name="Title Only">
-    <p:spTree>
-      <p:nvGrpSpPr>
-        <p:cNvPr id="1" name=""/>
-        <p:cNvGrpSpPr/>
-        <p:nvPr/>
-      </p:nvGrpSpPr>
-      <p:grpSpPr>
-        <a:xfrm>
-          <a:off x="0" y="0"/>
-          <a:ext cx="0" cy="0"/>
-          <a:chOff x="0" y="0"/>
-          <a:chExt cx="0" cy="0"/>
-        </a:xfrm>
-      </p:grpSpPr>
-      <p:sp>
-        <p:nvSpPr>
-          <p:cNvPr id="2" name="Title 1">
-            <a:extLst>
-              <a:ext uri="{FF2B5EF4-FFF2-40B4-BE49-F238E27FC236}">
-                <a16:creationId xmlns:a16="http://schemas.microsoft.com/office/drawing/2014/main" id="{5821822D-6D7A-1342-98EF-890C6F2DA174}"/>
-              </a:ext>
-            </a:extLst>
-          </p:cNvPr>
-          <p:cNvSpPr>
-            <a:spLocks noGrp="1"/>
-          </p:cNvSpPr>
-          <p:nvPr>
-            <p:ph type="title"/>
-          </p:nvPr>
-        </p:nvSpPr>
-        <p:spPr>
-          <a:xfrm>
-            <a:off x="838200" y="365125"/>
-            <a:ext cx="10515600" cy="777875"/>
-          </a:xfrm>
-        </p:spPr>
-        <p:txBody>
-          <a:bodyPr/>
-          <a:lstStyle/>
-          <a:p>
-            <a:r>
-              <a:rPr lang="en-US"/>
-              <a:t>Click to edit Master title style</a:t>
-            </a:r>
-          </a:p>
-        </p:txBody>
-      </p:sp>
-      <p:sp>
-        <p:nvSpPr>
-          <p:cNvPr id="3" name="Date Placeholder 2">
-            <a:extLst>
-              <a:ext uri="{FF2B5EF4-FFF2-40B4-BE49-F238E27FC236}">
-                <a16:creationId xmlns:a16="http://schemas.microsoft.com/office/drawing/2014/main" id="{74CF19EA-9170-5B4B-814F-7425C8E22823}"/>
-              </a:ext>
-            </a:extLst>
-          </p:cNvPr>
-          <p:cNvSpPr>
-            <a:spLocks noGrp="1"/>
-          </p:cNvSpPr>
-          <p:nvPr>
-            <p:ph type="dt" sz="half" idx="10"/>
-          </p:nvPr>
-        </p:nvSpPr>
-        <p:spPr/>
-        <p:txBody>
-          <a:bodyPr/>
-          <a:lstStyle/>
-          <a:p>
-            <a:fld id="{C6E8461C-3391-334C-9885-001B32D724C4}" type="datetime1">
-              <a:rPr lang="en-US" smtClean="0"/>
-              <a:t>1/5/25</a:t>
-            </a:fld>
-            <a:endParaRPr lang="en-US"/>
-          </a:p>
-        </p:txBody>
-      </p:sp>
-      <p:sp>
-        <p:nvSpPr>
-          <p:cNvPr id="4" name="Footer Placeholder 3">
-            <a:extLst>
-              <a:ext uri="{FF2B5EF4-FFF2-40B4-BE49-F238E27FC236}">
-                <a16:creationId xmlns:a16="http://schemas.microsoft.com/office/drawing/2014/main" id="{5882B1FB-ECDF-AD43-9020-0267ED91C04E}"/>
-              </a:ext>
-            </a:extLst>
-          </p:cNvPr>
-          <p:cNvSpPr>
-            <a:spLocks noGrp="1"/>
-          </p:cNvSpPr>
-          <p:nvPr>
-            <p:ph type="ftr" sz="quarter" idx="11"/>
-          </p:nvPr>
-        </p:nvSpPr>
-        <p:spPr/>
-        <p:txBody>
-          <a:bodyPr/>
-          <a:lstStyle>
-            <a:lvl1pPr>
-              <a:defRPr/>
-            </a:lvl1pPr>
-          </a:lstStyle>
-          <a:p>
-            <a:r>
-              <a:rPr lang="en-US"/>
-              <a:t>J Mark Morris - Model of Nature - April 2019</a:t>
-            </a:r>
-          </a:p>
-        </p:txBody>
-      </p:sp>
-      <p:sp>
-        <p:nvSpPr>
-          <p:cNvPr id="5" name="Slide Number Placeholder 4">
-            <a:extLst>
-              <a:ext uri="{FF2B5EF4-FFF2-40B4-BE49-F238E27FC236}">
-                <a16:creationId xmlns:a16="http://schemas.microsoft.com/office/drawing/2014/main" id="{D949C470-5AF0-5246-81E7-95EAEE5639EF}"/>
-              </a:ext>
-            </a:extLst>
-          </p:cNvPr>
-          <p:cNvSpPr>
-            <a:spLocks noGrp="1"/>
-          </p:cNvSpPr>
-          <p:nvPr>
-            <p:ph type="sldNum" sz="quarter" idx="12"/>
-          </p:nvPr>
-        </p:nvSpPr>
-        <p:spPr/>
-        <p:txBody>
-          <a:bodyPr/>
-          <a:lstStyle/>
-          <a:p>
-            <a:fld id="{D73D4D4B-2FF7-BE46-958C-B004BD45EF6F}" type="slidenum">
-              <a:rPr lang="en-US" smtClean="0"/>
-              <a:t>‹#›</a:t>
-            </a:fld>
-            <a:endParaRPr lang="en-US"/>
-          </a:p>
-        </p:txBody>
-      </p:sp>
-    </p:spTree>
-    <p:extLst>
-      <p:ext uri="{BB962C8B-B14F-4D97-AF65-F5344CB8AC3E}">
-        <p14:creationId xmlns:p14="http://schemas.microsoft.com/office/powerpoint/2010/main" val="1963469369"/>
       </p:ext>
     </p:extLst>
   </p:cSld>
@@ -2274,7 +1377,7 @@
           <a:p>
             <a:fld id="{CB70D3E6-D921-5B44-AC8D-B7FDAFC8A532}" type="datetimeFigureOut">
               <a:rPr lang="en-US" smtClean="0"/>
-              <a:t>1/5/25</a:t>
+              <a:t>7/3/26</a:t>
             </a:fld>
             <a:endParaRPr lang="en-US"/>
           </a:p>
@@ -2549,7 +1652,7 @@
           <a:p>
             <a:fld id="{CB70D3E6-D921-5B44-AC8D-B7FDAFC8A532}" type="datetimeFigureOut">
               <a:rPr lang="en-US" smtClean="0"/>
-              <a:t>1/5/25</a:t>
+              <a:t>7/3/26</a:t>
             </a:fld>
             <a:endParaRPr lang="en-US"/>
           </a:p>
@@ -2814,7 +1917,7 @@
           <a:p>
             <a:fld id="{CB70D3E6-D921-5B44-AC8D-B7FDAFC8A532}" type="datetimeFigureOut">
               <a:rPr lang="en-US" smtClean="0"/>
-              <a:t>1/5/25</a:t>
+              <a:t>7/3/26</a:t>
             </a:fld>
             <a:endParaRPr lang="en-US"/>
           </a:p>
@@ -3226,7 +2329,7 @@
           <a:p>
             <a:fld id="{CB70D3E6-D921-5B44-AC8D-B7FDAFC8A532}" type="datetimeFigureOut">
               <a:rPr lang="en-US" smtClean="0"/>
-              <a:t>1/5/25</a:t>
+              <a:t>7/3/26</a:t>
             </a:fld>
             <a:endParaRPr lang="en-US"/>
           </a:p>
@@ -3367,7 +2470,7 @@
           <a:p>
             <a:fld id="{CB70D3E6-D921-5B44-AC8D-B7FDAFC8A532}" type="datetimeFigureOut">
               <a:rPr lang="en-US" smtClean="0"/>
-              <a:t>1/5/25</a:t>
+              <a:t>7/3/26</a:t>
             </a:fld>
             <a:endParaRPr lang="en-US"/>
           </a:p>
@@ -3480,7 +2583,7 @@
           <a:p>
             <a:fld id="{CB70D3E6-D921-5B44-AC8D-B7FDAFC8A532}" type="datetimeFigureOut">
               <a:rPr lang="en-US" smtClean="0"/>
-              <a:t>1/5/25</a:t>
+              <a:t>7/3/26</a:t>
             </a:fld>
             <a:endParaRPr lang="en-US"/>
           </a:p>
@@ -3791,7 +2894,7 @@
           <a:p>
             <a:fld id="{CB70D3E6-D921-5B44-AC8D-B7FDAFC8A532}" type="datetimeFigureOut">
               <a:rPr lang="en-US" smtClean="0"/>
-              <a:t>1/5/25</a:t>
+              <a:t>7/3/26</a:t>
             </a:fld>
             <a:endParaRPr lang="en-US"/>
           </a:p>
@@ -4079,7 +3182,7 @@
           <a:p>
             <a:fld id="{CB70D3E6-D921-5B44-AC8D-B7FDAFC8A532}" type="datetimeFigureOut">
               <a:rPr lang="en-US" smtClean="0"/>
-              <a:t>1/5/25</a:t>
+              <a:t>7/3/26</a:t>
             </a:fld>
             <a:endParaRPr lang="en-US"/>
           </a:p>
@@ -4320,7 +3423,7 @@
           <a:p>
             <a:fld id="{CB70D3E6-D921-5B44-AC8D-B7FDAFC8A532}" type="datetimeFigureOut">
               <a:rPr lang="en-US" smtClean="0"/>
-              <a:t>1/5/25</a:t>
+              <a:t>7/3/26</a:t>
             </a:fld>
             <a:endParaRPr lang="en-US"/>
           </a:p>
@@ -4720,3576 +3823,7 @@
 </p:sldMaster>
 </file>
 
-<file path=ppt/slideMasters/slideMaster2.xml><?xml version="1.0" encoding="utf-8"?>
-<p:sldMaster xmlns:a="http://schemas.openxmlformats.org/drawingml/2006/main" xmlns:r="http://schemas.openxmlformats.org/officeDocument/2006/relationships" xmlns:p="http://schemas.openxmlformats.org/presentationml/2006/main">
-  <p:cSld>
-    <p:bg>
-      <p:bgRef idx="1001">
-        <a:schemeClr val="bg1"/>
-      </p:bgRef>
-    </p:bg>
-    <p:spTree>
-      <p:nvGrpSpPr>
-        <p:cNvPr id="1" name=""/>
-        <p:cNvGrpSpPr/>
-        <p:nvPr/>
-      </p:nvGrpSpPr>
-      <p:grpSpPr>
-        <a:xfrm>
-          <a:off x="0" y="0"/>
-          <a:ext cx="0" cy="0"/>
-          <a:chOff x="0" y="0"/>
-          <a:chExt cx="0" cy="0"/>
-        </a:xfrm>
-      </p:grpSpPr>
-      <p:sp>
-        <p:nvSpPr>
-          <p:cNvPr id="2" name="Title Placeholder 1">
-            <a:extLst>
-              <a:ext uri="{FF2B5EF4-FFF2-40B4-BE49-F238E27FC236}">
-                <a16:creationId xmlns:a16="http://schemas.microsoft.com/office/drawing/2014/main" id="{4C79A1DB-155B-0846-9CED-8B75F56E0E58}"/>
-              </a:ext>
-            </a:extLst>
-          </p:cNvPr>
-          <p:cNvSpPr>
-            <a:spLocks noGrp="1"/>
-          </p:cNvSpPr>
-          <p:nvPr>
-            <p:ph type="title"/>
-          </p:nvPr>
-        </p:nvSpPr>
-        <p:spPr>
-          <a:xfrm>
-            <a:off x="838200" y="365125"/>
-            <a:ext cx="10515600" cy="1325563"/>
-          </a:xfrm>
-          <a:prstGeom prst="rect">
-            <a:avLst/>
-          </a:prstGeom>
-        </p:spPr>
-        <p:txBody>
-          <a:bodyPr vert="horz" lIns="91440" tIns="45720" rIns="91440" bIns="45720" rtlCol="0" anchor="ctr">
-            <a:normAutofit/>
-          </a:bodyPr>
-          <a:lstStyle/>
-          <a:p>
-            <a:r>
-              <a:rPr lang="en-US" dirty="0"/>
-              <a:t>Click to edit Master title style</a:t>
-            </a:r>
-          </a:p>
-        </p:txBody>
-      </p:sp>
-      <p:sp>
-        <p:nvSpPr>
-          <p:cNvPr id="3" name="Text Placeholder 2">
-            <a:extLst>
-              <a:ext uri="{FF2B5EF4-FFF2-40B4-BE49-F238E27FC236}">
-                <a16:creationId xmlns:a16="http://schemas.microsoft.com/office/drawing/2014/main" id="{FD69736F-08D5-7643-A656-ABAEB9457A7A}"/>
-              </a:ext>
-            </a:extLst>
-          </p:cNvPr>
-          <p:cNvSpPr>
-            <a:spLocks noGrp="1"/>
-          </p:cNvSpPr>
-          <p:nvPr>
-            <p:ph type="body" idx="1"/>
-          </p:nvPr>
-        </p:nvSpPr>
-        <p:spPr>
-          <a:xfrm>
-            <a:off x="838200" y="1825625"/>
-            <a:ext cx="10515600" cy="4351338"/>
-          </a:xfrm>
-          <a:prstGeom prst="rect">
-            <a:avLst/>
-          </a:prstGeom>
-        </p:spPr>
-        <p:txBody>
-          <a:bodyPr vert="horz" lIns="91440" tIns="45720" rIns="91440" bIns="45720" rtlCol="0">
-            <a:normAutofit/>
-          </a:bodyPr>
-          <a:lstStyle/>
-          <a:p>
-            <a:pPr lvl="0"/>
-            <a:r>
-              <a:rPr lang="en-US"/>
-              <a:t>Edit Master text styles</a:t>
-            </a:r>
-          </a:p>
-          <a:p>
-            <a:pPr lvl="1"/>
-            <a:r>
-              <a:rPr lang="en-US"/>
-              <a:t>Second level</a:t>
-            </a:r>
-          </a:p>
-          <a:p>
-            <a:pPr lvl="2"/>
-            <a:r>
-              <a:rPr lang="en-US"/>
-              <a:t>Third level</a:t>
-            </a:r>
-          </a:p>
-          <a:p>
-            <a:pPr lvl="3"/>
-            <a:r>
-              <a:rPr lang="en-US"/>
-              <a:t>Fourth level</a:t>
-            </a:r>
-          </a:p>
-          <a:p>
-            <a:pPr lvl="4"/>
-            <a:r>
-              <a:rPr lang="en-US"/>
-              <a:t>Fifth level</a:t>
-            </a:r>
-          </a:p>
-        </p:txBody>
-      </p:sp>
-      <p:sp>
-        <p:nvSpPr>
-          <p:cNvPr id="4" name="Date Placeholder 3">
-            <a:extLst>
-              <a:ext uri="{FF2B5EF4-FFF2-40B4-BE49-F238E27FC236}">
-                <a16:creationId xmlns:a16="http://schemas.microsoft.com/office/drawing/2014/main" id="{C0433D04-66F5-D74B-8EEA-459FDC00D1E4}"/>
-              </a:ext>
-            </a:extLst>
-          </p:cNvPr>
-          <p:cNvSpPr>
-            <a:spLocks noGrp="1"/>
-          </p:cNvSpPr>
-          <p:nvPr>
-            <p:ph type="dt" sz="half" idx="2"/>
-          </p:nvPr>
-        </p:nvSpPr>
-        <p:spPr>
-          <a:xfrm>
-            <a:off x="838200" y="6356350"/>
-            <a:ext cx="2743200" cy="365125"/>
-          </a:xfrm>
-          <a:prstGeom prst="rect">
-            <a:avLst/>
-          </a:prstGeom>
-        </p:spPr>
-        <p:txBody>
-          <a:bodyPr vert="horz" lIns="91440" tIns="45720" rIns="91440" bIns="45720" rtlCol="0" anchor="ctr"/>
-          <a:lstStyle>
-            <a:lvl1pPr algn="l">
-              <a:defRPr sz="1200">
-                <a:solidFill>
-                  <a:schemeClr val="tx1">
-                    <a:tint val="75000"/>
-                  </a:schemeClr>
-                </a:solidFill>
-                <a:latin typeface="Helvetica Neue" panose="02000503000000020004" pitchFamily="2" charset="0"/>
-                <a:ea typeface="Helvetica Neue" panose="02000503000000020004" pitchFamily="2" charset="0"/>
-                <a:cs typeface="Helvetica Neue" panose="02000503000000020004" pitchFamily="2" charset="0"/>
-              </a:defRPr>
-            </a:lvl1pPr>
-          </a:lstStyle>
-          <a:p>
-            <a:fld id="{2005EE61-3907-C44D-8624-D47E09E871DB}" type="datetime1">
-              <a:rPr lang="en-US" smtClean="0"/>
-              <a:t>1/5/25</a:t>
-            </a:fld>
-            <a:endParaRPr lang="en-US"/>
-          </a:p>
-        </p:txBody>
-      </p:sp>
-      <p:sp>
-        <p:nvSpPr>
-          <p:cNvPr id="5" name="Footer Placeholder 4">
-            <a:extLst>
-              <a:ext uri="{FF2B5EF4-FFF2-40B4-BE49-F238E27FC236}">
-                <a16:creationId xmlns:a16="http://schemas.microsoft.com/office/drawing/2014/main" id="{9FDE6E67-6F97-E149-8437-635D11E7ED43}"/>
-              </a:ext>
-            </a:extLst>
-          </p:cNvPr>
-          <p:cNvSpPr>
-            <a:spLocks noGrp="1"/>
-          </p:cNvSpPr>
-          <p:nvPr>
-            <p:ph type="ftr" sz="quarter" idx="3"/>
-          </p:nvPr>
-        </p:nvSpPr>
-        <p:spPr>
-          <a:xfrm>
-            <a:off x="4038600" y="6356350"/>
-            <a:ext cx="4114800" cy="365125"/>
-          </a:xfrm>
-          <a:prstGeom prst="rect">
-            <a:avLst/>
-          </a:prstGeom>
-        </p:spPr>
-        <p:txBody>
-          <a:bodyPr vert="horz" lIns="91440" tIns="45720" rIns="91440" bIns="45720" rtlCol="0" anchor="ctr"/>
-          <a:lstStyle>
-            <a:lvl1pPr algn="ctr">
-              <a:defRPr sz="1200">
-                <a:solidFill>
-                  <a:schemeClr val="tx1">
-                    <a:tint val="75000"/>
-                  </a:schemeClr>
-                </a:solidFill>
-                <a:latin typeface="Helvetica Neue" panose="02000503000000020004" pitchFamily="2" charset="0"/>
-                <a:ea typeface="Helvetica Neue" panose="02000503000000020004" pitchFamily="2" charset="0"/>
-                <a:cs typeface="Helvetica Neue" panose="02000503000000020004" pitchFamily="2" charset="0"/>
-              </a:defRPr>
-            </a:lvl1pPr>
-          </a:lstStyle>
-          <a:p>
-            <a:r>
-              <a:rPr lang="en-US"/>
-              <a:t>J Mark Morris - Model of Nature - April 2019</a:t>
-            </a:r>
-          </a:p>
-        </p:txBody>
-      </p:sp>
-      <p:sp>
-        <p:nvSpPr>
-          <p:cNvPr id="6" name="Slide Number Placeholder 5">
-            <a:extLst>
-              <a:ext uri="{FF2B5EF4-FFF2-40B4-BE49-F238E27FC236}">
-                <a16:creationId xmlns:a16="http://schemas.microsoft.com/office/drawing/2014/main" id="{D585CC1E-0AB1-F34A-83C6-0956BF9B4AF3}"/>
-              </a:ext>
-            </a:extLst>
-          </p:cNvPr>
-          <p:cNvSpPr>
-            <a:spLocks noGrp="1"/>
-          </p:cNvSpPr>
-          <p:nvPr>
-            <p:ph type="sldNum" sz="quarter" idx="4"/>
-          </p:nvPr>
-        </p:nvSpPr>
-        <p:spPr>
-          <a:xfrm>
-            <a:off x="8610600" y="6356350"/>
-            <a:ext cx="2743200" cy="365125"/>
-          </a:xfrm>
-          <a:prstGeom prst="rect">
-            <a:avLst/>
-          </a:prstGeom>
-        </p:spPr>
-        <p:txBody>
-          <a:bodyPr vert="horz" lIns="91440" tIns="45720" rIns="91440" bIns="45720" rtlCol="0" anchor="ctr"/>
-          <a:lstStyle>
-            <a:lvl1pPr algn="r">
-              <a:defRPr sz="1200">
-                <a:solidFill>
-                  <a:schemeClr val="tx1">
-                    <a:tint val="75000"/>
-                  </a:schemeClr>
-                </a:solidFill>
-                <a:latin typeface="Helvetica Neue" panose="02000503000000020004" pitchFamily="2" charset="0"/>
-                <a:ea typeface="Helvetica Neue" panose="02000503000000020004" pitchFamily="2" charset="0"/>
-                <a:cs typeface="Helvetica Neue" panose="02000503000000020004" pitchFamily="2" charset="0"/>
-              </a:defRPr>
-            </a:lvl1pPr>
-          </a:lstStyle>
-          <a:p>
-            <a:fld id="{D73D4D4B-2FF7-BE46-958C-B004BD45EF6F}" type="slidenum">
-              <a:rPr lang="en-US" smtClean="0"/>
-              <a:pPr/>
-              <a:t>‹#›</a:t>
-            </a:fld>
-            <a:endParaRPr lang="en-US"/>
-          </a:p>
-        </p:txBody>
-      </p:sp>
-    </p:spTree>
-    <p:extLst>
-      <p:ext uri="{BB962C8B-B14F-4D97-AF65-F5344CB8AC3E}">
-        <p14:creationId xmlns:p14="http://schemas.microsoft.com/office/powerpoint/2010/main" val="4188259015"/>
-      </p:ext>
-    </p:extLst>
-  </p:cSld>
-  <p:clrMap bg1="lt1" tx1="dk1" bg2="lt2" tx2="dk2" accent1="accent1" accent2="accent2" accent3="accent3" accent4="accent4" accent5="accent5" accent6="accent6" hlink="hlink" folHlink="folHlink"/>
-  <p:sldLayoutIdLst>
-    <p:sldLayoutId id="2147483665" r:id="rId1"/>
-    <p:sldLayoutId id="2147483666" r:id="rId2"/>
-    <p:sldLayoutId id="2147483667" r:id="rId3"/>
-  </p:sldLayoutIdLst>
-  <p:hf sldNum="0" hdr="0" dt="0"/>
-  <p:txStyles>
-    <p:titleStyle>
-      <a:lvl1pPr algn="l" defTabSz="914400" rtl="0" eaLnBrk="1" latinLnBrk="0" hangingPunct="1">
-        <a:lnSpc>
-          <a:spcPct val="90000"/>
-        </a:lnSpc>
-        <a:spcBef>
-          <a:spcPct val="0"/>
-        </a:spcBef>
-        <a:buNone/>
-        <a:defRPr sz="4400" kern="1200">
-          <a:solidFill>
-            <a:schemeClr val="tx1"/>
-          </a:solidFill>
-          <a:latin typeface="Helvetica Neue" panose="02000503000000020004" pitchFamily="2" charset="0"/>
-          <a:ea typeface="Helvetica Neue" panose="02000503000000020004" pitchFamily="2" charset="0"/>
-          <a:cs typeface="Helvetica Neue" panose="02000503000000020004" pitchFamily="2" charset="0"/>
-        </a:defRPr>
-      </a:lvl1pPr>
-    </p:titleStyle>
-    <p:bodyStyle>
-      <a:lvl1pPr marL="228600" indent="-228600" algn="l" defTabSz="914400" rtl="0" eaLnBrk="1" latinLnBrk="0" hangingPunct="1">
-        <a:lnSpc>
-          <a:spcPct val="90000"/>
-        </a:lnSpc>
-        <a:spcBef>
-          <a:spcPts val="1000"/>
-        </a:spcBef>
-        <a:buFont typeface="Arial" panose="020B0604020202020204" pitchFamily="34" charset="0"/>
-        <a:buChar char="•"/>
-        <a:defRPr sz="2800" kern="1200">
-          <a:solidFill>
-            <a:schemeClr val="tx1"/>
-          </a:solidFill>
-          <a:latin typeface="Helvetica Neue" panose="02000503000000020004" pitchFamily="2" charset="0"/>
-          <a:ea typeface="Helvetica Neue" panose="02000503000000020004" pitchFamily="2" charset="0"/>
-          <a:cs typeface="Helvetica Neue" panose="02000503000000020004" pitchFamily="2" charset="0"/>
-        </a:defRPr>
-      </a:lvl1pPr>
-      <a:lvl2pPr marL="685800" indent="-228600" algn="l" defTabSz="914400" rtl="0" eaLnBrk="1" latinLnBrk="0" hangingPunct="1">
-        <a:lnSpc>
-          <a:spcPct val="90000"/>
-        </a:lnSpc>
-        <a:spcBef>
-          <a:spcPts val="500"/>
-        </a:spcBef>
-        <a:buFont typeface="Arial" panose="020B0604020202020204" pitchFamily="34" charset="0"/>
-        <a:buChar char="•"/>
-        <a:defRPr sz="2400" kern="1200">
-          <a:solidFill>
-            <a:schemeClr val="tx1"/>
-          </a:solidFill>
-          <a:latin typeface="Helvetica Neue" panose="02000503000000020004" pitchFamily="2" charset="0"/>
-          <a:ea typeface="Helvetica Neue" panose="02000503000000020004" pitchFamily="2" charset="0"/>
-          <a:cs typeface="Helvetica Neue" panose="02000503000000020004" pitchFamily="2" charset="0"/>
-        </a:defRPr>
-      </a:lvl2pPr>
-      <a:lvl3pPr marL="1143000" indent="-228600" algn="l" defTabSz="914400" rtl="0" eaLnBrk="1" latinLnBrk="0" hangingPunct="1">
-        <a:lnSpc>
-          <a:spcPct val="90000"/>
-        </a:lnSpc>
-        <a:spcBef>
-          <a:spcPts val="500"/>
-        </a:spcBef>
-        <a:buFont typeface="Arial" panose="020B0604020202020204" pitchFamily="34" charset="0"/>
-        <a:buChar char="•"/>
-        <a:defRPr sz="2000" kern="1200">
-          <a:solidFill>
-            <a:schemeClr val="tx1"/>
-          </a:solidFill>
-          <a:latin typeface="Helvetica Neue" panose="02000503000000020004" pitchFamily="2" charset="0"/>
-          <a:ea typeface="Helvetica Neue" panose="02000503000000020004" pitchFamily="2" charset="0"/>
-          <a:cs typeface="Helvetica Neue" panose="02000503000000020004" pitchFamily="2" charset="0"/>
-        </a:defRPr>
-      </a:lvl3pPr>
-      <a:lvl4pPr marL="1600200" indent="-228600" algn="l" defTabSz="914400" rtl="0" eaLnBrk="1" latinLnBrk="0" hangingPunct="1">
-        <a:lnSpc>
-          <a:spcPct val="90000"/>
-        </a:lnSpc>
-        <a:spcBef>
-          <a:spcPts val="500"/>
-        </a:spcBef>
-        <a:buFont typeface="Arial" panose="020B0604020202020204" pitchFamily="34" charset="0"/>
-        <a:buChar char="•"/>
-        <a:defRPr sz="1800" kern="1200">
-          <a:solidFill>
-            <a:schemeClr val="tx1"/>
-          </a:solidFill>
-          <a:latin typeface="Helvetica Neue" panose="02000503000000020004" pitchFamily="2" charset="0"/>
-          <a:ea typeface="Helvetica Neue" panose="02000503000000020004" pitchFamily="2" charset="0"/>
-          <a:cs typeface="Helvetica Neue" panose="02000503000000020004" pitchFamily="2" charset="0"/>
-        </a:defRPr>
-      </a:lvl4pPr>
-      <a:lvl5pPr marL="2057400" indent="-228600" algn="l" defTabSz="914400" rtl="0" eaLnBrk="1" latinLnBrk="0" hangingPunct="1">
-        <a:lnSpc>
-          <a:spcPct val="90000"/>
-        </a:lnSpc>
-        <a:spcBef>
-          <a:spcPts val="500"/>
-        </a:spcBef>
-        <a:buFont typeface="Arial" panose="020B0604020202020204" pitchFamily="34" charset="0"/>
-        <a:buChar char="•"/>
-        <a:defRPr sz="1800" kern="1200">
-          <a:solidFill>
-            <a:schemeClr val="tx1"/>
-          </a:solidFill>
-          <a:latin typeface="Helvetica Neue" panose="02000503000000020004" pitchFamily="2" charset="0"/>
-          <a:ea typeface="Helvetica Neue" panose="02000503000000020004" pitchFamily="2" charset="0"/>
-          <a:cs typeface="Helvetica Neue" panose="02000503000000020004" pitchFamily="2" charset="0"/>
-        </a:defRPr>
-      </a:lvl5pPr>
-      <a:lvl6pPr marL="2514600" indent="-228600" algn="l" defTabSz="914400" rtl="0" eaLnBrk="1" latinLnBrk="0" hangingPunct="1">
-        <a:lnSpc>
-          <a:spcPct val="90000"/>
-        </a:lnSpc>
-        <a:spcBef>
-          <a:spcPts val="500"/>
-        </a:spcBef>
-        <a:buFont typeface="Arial" panose="020B0604020202020204" pitchFamily="34" charset="0"/>
-        <a:buChar char="•"/>
-        <a:defRPr sz="1800" kern="1200">
-          <a:solidFill>
-            <a:schemeClr val="tx1"/>
-          </a:solidFill>
-          <a:latin typeface="+mn-lt"/>
-          <a:ea typeface="+mn-ea"/>
-          <a:cs typeface="+mn-cs"/>
-        </a:defRPr>
-      </a:lvl6pPr>
-      <a:lvl7pPr marL="2971800" indent="-228600" algn="l" defTabSz="914400" rtl="0" eaLnBrk="1" latinLnBrk="0" hangingPunct="1">
-        <a:lnSpc>
-          <a:spcPct val="90000"/>
-        </a:lnSpc>
-        <a:spcBef>
-          <a:spcPts val="500"/>
-        </a:spcBef>
-        <a:buFont typeface="Arial" panose="020B0604020202020204" pitchFamily="34" charset="0"/>
-        <a:buChar char="•"/>
-        <a:defRPr sz="1800" kern="1200">
-          <a:solidFill>
-            <a:schemeClr val="tx1"/>
-          </a:solidFill>
-          <a:latin typeface="+mn-lt"/>
-          <a:ea typeface="+mn-ea"/>
-          <a:cs typeface="+mn-cs"/>
-        </a:defRPr>
-      </a:lvl7pPr>
-      <a:lvl8pPr marL="3429000" indent="-228600" algn="l" defTabSz="914400" rtl="0" eaLnBrk="1" latinLnBrk="0" hangingPunct="1">
-        <a:lnSpc>
-          <a:spcPct val="90000"/>
-        </a:lnSpc>
-        <a:spcBef>
-          <a:spcPts val="500"/>
-        </a:spcBef>
-        <a:buFont typeface="Arial" panose="020B0604020202020204" pitchFamily="34" charset="0"/>
-        <a:buChar char="•"/>
-        <a:defRPr sz="1800" kern="1200">
-          <a:solidFill>
-            <a:schemeClr val="tx1"/>
-          </a:solidFill>
-          <a:latin typeface="+mn-lt"/>
-          <a:ea typeface="+mn-ea"/>
-          <a:cs typeface="+mn-cs"/>
-        </a:defRPr>
-      </a:lvl8pPr>
-      <a:lvl9pPr marL="3886200" indent="-228600" algn="l" defTabSz="914400" rtl="0" eaLnBrk="1" latinLnBrk="0" hangingPunct="1">
-        <a:lnSpc>
-          <a:spcPct val="90000"/>
-        </a:lnSpc>
-        <a:spcBef>
-          <a:spcPts val="500"/>
-        </a:spcBef>
-        <a:buFont typeface="Arial" panose="020B0604020202020204" pitchFamily="34" charset="0"/>
-        <a:buChar char="•"/>
-        <a:defRPr sz="1800" kern="1200">
-          <a:solidFill>
-            <a:schemeClr val="tx1"/>
-          </a:solidFill>
-          <a:latin typeface="+mn-lt"/>
-          <a:ea typeface="+mn-ea"/>
-          <a:cs typeface="+mn-cs"/>
-        </a:defRPr>
-      </a:lvl9pPr>
-    </p:bodyStyle>
-    <p:otherStyle>
-      <a:defPPr>
-        <a:defRPr lang="en-US"/>
-      </a:defPPr>
-      <a:lvl1pPr marL="0" algn="l" defTabSz="914400" rtl="0" eaLnBrk="1" latinLnBrk="0" hangingPunct="1">
-        <a:defRPr sz="1800" kern="1200">
-          <a:solidFill>
-            <a:schemeClr val="tx1"/>
-          </a:solidFill>
-          <a:latin typeface="+mn-lt"/>
-          <a:ea typeface="+mn-ea"/>
-          <a:cs typeface="+mn-cs"/>
-        </a:defRPr>
-      </a:lvl1pPr>
-      <a:lvl2pPr marL="457200" algn="l" defTabSz="914400" rtl="0" eaLnBrk="1" latinLnBrk="0" hangingPunct="1">
-        <a:defRPr sz="1800" kern="1200">
-          <a:solidFill>
-            <a:schemeClr val="tx1"/>
-          </a:solidFill>
-          <a:latin typeface="+mn-lt"/>
-          <a:ea typeface="+mn-ea"/>
-          <a:cs typeface="+mn-cs"/>
-        </a:defRPr>
-      </a:lvl2pPr>
-      <a:lvl3pPr marL="914400" algn="l" defTabSz="914400" rtl="0" eaLnBrk="1" latinLnBrk="0" hangingPunct="1">
-        <a:defRPr sz="1800" kern="1200">
-          <a:solidFill>
-            <a:schemeClr val="tx1"/>
-          </a:solidFill>
-          <a:latin typeface="+mn-lt"/>
-          <a:ea typeface="+mn-ea"/>
-          <a:cs typeface="+mn-cs"/>
-        </a:defRPr>
-      </a:lvl3pPr>
-      <a:lvl4pPr marL="1371600" algn="l" defTabSz="914400" rtl="0" eaLnBrk="1" latinLnBrk="0" hangingPunct="1">
-        <a:defRPr sz="1800" kern="1200">
-          <a:solidFill>
-            <a:schemeClr val="tx1"/>
-          </a:solidFill>
-          <a:latin typeface="+mn-lt"/>
-          <a:ea typeface="+mn-ea"/>
-          <a:cs typeface="+mn-cs"/>
-        </a:defRPr>
-      </a:lvl4pPr>
-      <a:lvl5pPr marL="1828800" algn="l" defTabSz="914400" rtl="0" eaLnBrk="1" latinLnBrk="0" hangingPunct="1">
-        <a:defRPr sz="1800" kern="1200">
-          <a:solidFill>
-            <a:schemeClr val="tx1"/>
-          </a:solidFill>
-          <a:latin typeface="+mn-lt"/>
-          <a:ea typeface="+mn-ea"/>
-          <a:cs typeface="+mn-cs"/>
-        </a:defRPr>
-      </a:lvl5pPr>
-      <a:lvl6pPr marL="2286000" algn="l" defTabSz="914400" rtl="0" eaLnBrk="1" latinLnBrk="0" hangingPunct="1">
-        <a:defRPr sz="1800" kern="1200">
-          <a:solidFill>
-            <a:schemeClr val="tx1"/>
-          </a:solidFill>
-          <a:latin typeface="+mn-lt"/>
-          <a:ea typeface="+mn-ea"/>
-          <a:cs typeface="+mn-cs"/>
-        </a:defRPr>
-      </a:lvl6pPr>
-      <a:lvl7pPr marL="2743200" algn="l" defTabSz="914400" rtl="0" eaLnBrk="1" latinLnBrk="0" hangingPunct="1">
-        <a:defRPr sz="1800" kern="1200">
-          <a:solidFill>
-            <a:schemeClr val="tx1"/>
-          </a:solidFill>
-          <a:latin typeface="+mn-lt"/>
-          <a:ea typeface="+mn-ea"/>
-          <a:cs typeface="+mn-cs"/>
-        </a:defRPr>
-      </a:lvl7pPr>
-      <a:lvl8pPr marL="3200400" algn="l" defTabSz="914400" rtl="0" eaLnBrk="1" latinLnBrk="0" hangingPunct="1">
-        <a:defRPr sz="1800" kern="1200">
-          <a:solidFill>
-            <a:schemeClr val="tx1"/>
-          </a:solidFill>
-          <a:latin typeface="+mn-lt"/>
-          <a:ea typeface="+mn-ea"/>
-          <a:cs typeface="+mn-cs"/>
-        </a:defRPr>
-      </a:lvl8pPr>
-      <a:lvl9pPr marL="3657600" algn="l" defTabSz="914400" rtl="0" eaLnBrk="1" latinLnBrk="0" hangingPunct="1">
-        <a:defRPr sz="1800" kern="1200">
-          <a:solidFill>
-            <a:schemeClr val="tx1"/>
-          </a:solidFill>
-          <a:latin typeface="+mn-lt"/>
-          <a:ea typeface="+mn-ea"/>
-          <a:cs typeface="+mn-cs"/>
-        </a:defRPr>
-      </a:lvl9pPr>
-    </p:otherStyle>
-  </p:txStyles>
-</p:sldMaster>
-</file>
-
 <file path=ppt/slides/slide1.xml><?xml version="1.0" encoding="utf-8"?>
-<p:sld xmlns:a="http://schemas.openxmlformats.org/drawingml/2006/main" xmlns:r="http://schemas.openxmlformats.org/officeDocument/2006/relationships" xmlns:p="http://schemas.openxmlformats.org/presentationml/2006/main">
-  <p:cSld>
-    <p:bg>
-      <p:bgPr>
-        <a:solidFill>
-          <a:srgbClr val="7030A0"/>
-        </a:solidFill>
-        <a:effectLst/>
-      </p:bgPr>
-    </p:bg>
-    <p:spTree>
-      <p:nvGrpSpPr>
-        <p:cNvPr id="1" name=""/>
-        <p:cNvGrpSpPr/>
-        <p:nvPr/>
-      </p:nvGrpSpPr>
-      <p:grpSpPr>
-        <a:xfrm>
-          <a:off x="0" y="0"/>
-          <a:ext cx="0" cy="0"/>
-          <a:chOff x="0" y="0"/>
-          <a:chExt cx="0" cy="0"/>
-        </a:xfrm>
-      </p:grpSpPr>
-      <p:sp>
-        <p:nvSpPr>
-          <p:cNvPr id="2" name="TextBox 1">
-            <a:extLst>
-              <a:ext uri="{FF2B5EF4-FFF2-40B4-BE49-F238E27FC236}">
-                <a16:creationId xmlns:a16="http://schemas.microsoft.com/office/drawing/2014/main" id="{1D77ACA5-3691-8FEB-0266-8D47BBCCF4C6}"/>
-              </a:ext>
-            </a:extLst>
-          </p:cNvPr>
-          <p:cNvSpPr txBox="1"/>
-          <p:nvPr/>
-        </p:nvSpPr>
-        <p:spPr>
-          <a:xfrm>
-            <a:off x="0" y="358254"/>
-            <a:ext cx="12191999" cy="2785378"/>
-          </a:xfrm>
-          <a:prstGeom prst="rect">
-            <a:avLst/>
-          </a:prstGeom>
-          <a:noFill/>
-        </p:spPr>
-        <p:txBody>
-          <a:bodyPr wrap="square" rtlCol="0">
-            <a:spAutoFit/>
-          </a:bodyPr>
-          <a:lstStyle/>
-          <a:p>
-            <a:pPr marL="0" marR="0" lvl="0" indent="0" algn="ctr" defTabSz="914400" rtl="0" eaLnBrk="1" fontAlgn="auto" latinLnBrk="0" hangingPunct="1">
-              <a:lnSpc>
-                <a:spcPts val="11000"/>
-              </a:lnSpc>
-              <a:spcBef>
-                <a:spcPts val="0"/>
-              </a:spcBef>
-              <a:spcAft>
-                <a:spcPts val="0"/>
-              </a:spcAft>
-              <a:buClrTx/>
-              <a:buSzTx/>
-              <a:buFontTx/>
-              <a:buNone/>
-              <a:tabLst/>
-              <a:defRPr/>
-            </a:pPr>
-            <a:r>
-              <a:rPr kumimoji="0" lang="en-US" sz="11500" b="0" i="0" u="none" strike="noStrike" kern="1200" cap="none" spc="0" normalizeH="0" baseline="0" noProof="0" dirty="0">
-                <a:ln>
-                  <a:noFill/>
-                </a:ln>
-                <a:solidFill>
-                  <a:prstClr val="white"/>
-                </a:solidFill>
-                <a:effectLst/>
-                <a:uLnTx/>
-                <a:uFillTx/>
-                <a:latin typeface="Helvetica Neue UltraLight" panose="02000206000000020004" pitchFamily="2" charset="0"/>
-                <a:ea typeface="Helvetica Neue UltraLight" panose="02000206000000020004" pitchFamily="2" charset="0"/>
-                <a:cs typeface="Helvetica Neue" panose="02000503000000020004" pitchFamily="2" charset="0"/>
-              </a:rPr>
-              <a:t>neoclassical.ai</a:t>
-            </a:r>
-          </a:p>
-          <a:p>
-            <a:pPr marL="0" marR="0" lvl="0" indent="0" algn="ctr" defTabSz="914400" rtl="0" eaLnBrk="1" fontAlgn="auto" latinLnBrk="0" hangingPunct="1">
-              <a:lnSpc>
-                <a:spcPts val="10000"/>
-              </a:lnSpc>
-              <a:spcBef>
-                <a:spcPts val="0"/>
-              </a:spcBef>
-              <a:spcAft>
-                <a:spcPts val="0"/>
-              </a:spcAft>
-              <a:buClrTx/>
-              <a:buSzTx/>
-              <a:buFontTx/>
-              <a:buNone/>
-              <a:tabLst/>
-              <a:defRPr/>
-            </a:pPr>
-            <a:r>
-              <a:rPr kumimoji="0" lang="en-US" sz="9600" b="1" i="0" u="none" strike="noStrike" kern="1200" cap="none" spc="0" normalizeH="0" baseline="0" noProof="0" dirty="0">
-                <a:ln>
-                  <a:noFill/>
-                </a:ln>
-                <a:solidFill>
-                  <a:srgbClr val="FFC000"/>
-                </a:solidFill>
-                <a:effectLst/>
-                <a:uLnTx/>
-                <a:uFillTx/>
-                <a:latin typeface="Helvetica Neue Condensed Black" panose="02000503000000020004" pitchFamily="2" charset="0"/>
-                <a:ea typeface="Helvetica Neue Condensed Black" panose="02000503000000020004" pitchFamily="2" charset="0"/>
-                <a:cs typeface="Helvetica Neue Condensed Black" panose="02000503000000020004" pitchFamily="2" charset="0"/>
-              </a:rPr>
-              <a:t>Energy</a:t>
-            </a:r>
-            <a:endParaRPr kumimoji="0" lang="en-US" sz="9600" b="1" i="0" u="none" strike="noStrike" kern="1200" cap="none" spc="0" normalizeH="0" baseline="0" noProof="0" dirty="0">
-              <a:ln>
-                <a:noFill/>
-              </a:ln>
-              <a:solidFill>
-                <a:srgbClr val="FF8AD8"/>
-              </a:solidFill>
-              <a:effectLst/>
-              <a:uLnTx/>
-              <a:uFillTx/>
-              <a:latin typeface="Helvetica Neue Condensed Black" panose="02000503000000020004" pitchFamily="2" charset="0"/>
-              <a:ea typeface="Helvetica Neue Condensed Black" panose="02000503000000020004" pitchFamily="2" charset="0"/>
-              <a:cs typeface="Helvetica Neue Condensed Black" panose="02000503000000020004" pitchFamily="2" charset="0"/>
-            </a:endParaRPr>
-          </a:p>
-        </p:txBody>
-      </p:sp>
-    </p:spTree>
-    <p:extLst>
-      <p:ext uri="{BB962C8B-B14F-4D97-AF65-F5344CB8AC3E}">
-        <p14:creationId xmlns:p14="http://schemas.microsoft.com/office/powerpoint/2010/main" val="2348934641"/>
-      </p:ext>
-    </p:extLst>
-  </p:cSld>
-  <p:clrMapOvr>
-    <a:masterClrMapping/>
-  </p:clrMapOvr>
-</p:sld>
-</file>
-
-<file path=ppt/slides/slide10.xml><?xml version="1.0" encoding="utf-8"?>
-<p:sld xmlns:a="http://schemas.openxmlformats.org/drawingml/2006/main" xmlns:r="http://schemas.openxmlformats.org/officeDocument/2006/relationships" xmlns:p="http://schemas.openxmlformats.org/presentationml/2006/main">
-  <p:cSld>
-    <p:bg>
-      <p:bgPr>
-        <a:solidFill>
-          <a:srgbClr val="7030A0"/>
-        </a:solidFill>
-        <a:effectLst/>
-      </p:bgPr>
-    </p:bg>
-    <p:spTree>
-      <p:nvGrpSpPr>
-        <p:cNvPr id="1" name="">
-          <a:extLst>
-            <a:ext uri="{FF2B5EF4-FFF2-40B4-BE49-F238E27FC236}">
-              <a16:creationId xmlns:a16="http://schemas.microsoft.com/office/drawing/2014/main" id="{15AB8420-5829-AE65-35FD-B9B726396AE6}"/>
-            </a:ext>
-          </a:extLst>
-        </p:cNvPr>
-        <p:cNvGrpSpPr/>
-        <p:nvPr/>
-      </p:nvGrpSpPr>
-      <p:grpSpPr>
-        <a:xfrm>
-          <a:off x="0" y="0"/>
-          <a:ext cx="0" cy="0"/>
-          <a:chOff x="0" y="0"/>
-          <a:chExt cx="0" cy="0"/>
-        </a:xfrm>
-      </p:grpSpPr>
-      <p:sp>
-        <p:nvSpPr>
-          <p:cNvPr id="5" name="Footer Placeholder 3">
-            <a:extLst>
-              <a:ext uri="{FF2B5EF4-FFF2-40B4-BE49-F238E27FC236}">
-                <a16:creationId xmlns:a16="http://schemas.microsoft.com/office/drawing/2014/main" id="{CCB07F1B-345A-682C-7786-B93DA7229F70}"/>
-              </a:ext>
-            </a:extLst>
-          </p:cNvPr>
-          <p:cNvSpPr txBox="1">
-            <a:spLocks/>
-          </p:cNvSpPr>
-          <p:nvPr/>
-        </p:nvSpPr>
-        <p:spPr>
-          <a:xfrm>
-            <a:off x="10924248" y="6388602"/>
-            <a:ext cx="1142262" cy="365125"/>
-          </a:xfrm>
-          <a:prstGeom prst="rect">
-            <a:avLst/>
-          </a:prstGeom>
-        </p:spPr>
-        <p:txBody>
-          <a:bodyPr vert="horz" lIns="91440" tIns="45720" rIns="91440" bIns="45720" rtlCol="0" anchor="ctr"/>
-          <a:lstStyle>
-            <a:defPPr>
-              <a:defRPr lang="en-US"/>
-            </a:defPPr>
-            <a:lvl1pPr marL="0" algn="ctr" defTabSz="914400" rtl="0" eaLnBrk="1" latinLnBrk="0" hangingPunct="1">
-              <a:defRPr sz="1200" kern="1200">
-                <a:solidFill>
-                  <a:schemeClr val="tx1">
-                    <a:tint val="75000"/>
-                  </a:schemeClr>
-                </a:solidFill>
-                <a:latin typeface="+mn-lt"/>
-                <a:ea typeface="+mn-ea"/>
-                <a:cs typeface="+mn-cs"/>
-              </a:defRPr>
-            </a:lvl1pPr>
-            <a:lvl2pPr marL="457200" algn="l" defTabSz="914400" rtl="0" eaLnBrk="1" latinLnBrk="0" hangingPunct="1">
-              <a:defRPr sz="1800" kern="1200">
-                <a:solidFill>
-                  <a:schemeClr val="tx1"/>
-                </a:solidFill>
-                <a:latin typeface="+mn-lt"/>
-                <a:ea typeface="+mn-ea"/>
-                <a:cs typeface="+mn-cs"/>
-              </a:defRPr>
-            </a:lvl2pPr>
-            <a:lvl3pPr marL="914400" algn="l" defTabSz="914400" rtl="0" eaLnBrk="1" latinLnBrk="0" hangingPunct="1">
-              <a:defRPr sz="1800" kern="1200">
-                <a:solidFill>
-                  <a:schemeClr val="tx1"/>
-                </a:solidFill>
-                <a:latin typeface="+mn-lt"/>
-                <a:ea typeface="+mn-ea"/>
-                <a:cs typeface="+mn-cs"/>
-              </a:defRPr>
-            </a:lvl3pPr>
-            <a:lvl4pPr marL="1371600" algn="l" defTabSz="914400" rtl="0" eaLnBrk="1" latinLnBrk="0" hangingPunct="1">
-              <a:defRPr sz="1800" kern="1200">
-                <a:solidFill>
-                  <a:schemeClr val="tx1"/>
-                </a:solidFill>
-                <a:latin typeface="+mn-lt"/>
-                <a:ea typeface="+mn-ea"/>
-                <a:cs typeface="+mn-cs"/>
-              </a:defRPr>
-            </a:lvl4pPr>
-            <a:lvl5pPr marL="1828800" algn="l" defTabSz="914400" rtl="0" eaLnBrk="1" latinLnBrk="0" hangingPunct="1">
-              <a:defRPr sz="1800" kern="1200">
-                <a:solidFill>
-                  <a:schemeClr val="tx1"/>
-                </a:solidFill>
-                <a:latin typeface="+mn-lt"/>
-                <a:ea typeface="+mn-ea"/>
-                <a:cs typeface="+mn-cs"/>
-              </a:defRPr>
-            </a:lvl5pPr>
-            <a:lvl6pPr marL="2286000" algn="l" defTabSz="914400" rtl="0" eaLnBrk="1" latinLnBrk="0" hangingPunct="1">
-              <a:defRPr sz="1800" kern="1200">
-                <a:solidFill>
-                  <a:schemeClr val="tx1"/>
-                </a:solidFill>
-                <a:latin typeface="+mn-lt"/>
-                <a:ea typeface="+mn-ea"/>
-                <a:cs typeface="+mn-cs"/>
-              </a:defRPr>
-            </a:lvl6pPr>
-            <a:lvl7pPr marL="2743200" algn="l" defTabSz="914400" rtl="0" eaLnBrk="1" latinLnBrk="0" hangingPunct="1">
-              <a:defRPr sz="1800" kern="1200">
-                <a:solidFill>
-                  <a:schemeClr val="tx1"/>
-                </a:solidFill>
-                <a:latin typeface="+mn-lt"/>
-                <a:ea typeface="+mn-ea"/>
-                <a:cs typeface="+mn-cs"/>
-              </a:defRPr>
-            </a:lvl7pPr>
-            <a:lvl8pPr marL="3200400" algn="l" defTabSz="914400" rtl="0" eaLnBrk="1" latinLnBrk="0" hangingPunct="1">
-              <a:defRPr sz="1800" kern="1200">
-                <a:solidFill>
-                  <a:schemeClr val="tx1"/>
-                </a:solidFill>
-                <a:latin typeface="+mn-lt"/>
-                <a:ea typeface="+mn-ea"/>
-                <a:cs typeface="+mn-cs"/>
-              </a:defRPr>
-            </a:lvl8pPr>
-            <a:lvl9pPr marL="3657600" algn="l" defTabSz="914400" rtl="0" eaLnBrk="1" latinLnBrk="0" hangingPunct="1">
-              <a:defRPr sz="1800" kern="1200">
-                <a:solidFill>
-                  <a:schemeClr val="tx1"/>
-                </a:solidFill>
-                <a:latin typeface="+mn-lt"/>
-                <a:ea typeface="+mn-ea"/>
-                <a:cs typeface="+mn-cs"/>
-              </a:defRPr>
-            </a:lvl9pPr>
-          </a:lstStyle>
-          <a:p>
-            <a:pPr marL="0" marR="0" lvl="0" indent="0" algn="ctr" defTabSz="914400" rtl="0" eaLnBrk="1" fontAlgn="auto" latinLnBrk="0" hangingPunct="1">
-              <a:lnSpc>
-                <a:spcPct val="100000"/>
-              </a:lnSpc>
-              <a:spcBef>
-                <a:spcPts val="0"/>
-              </a:spcBef>
-              <a:spcAft>
-                <a:spcPts val="0"/>
-              </a:spcAft>
-              <a:buClrTx/>
-              <a:buSzTx/>
-              <a:buFontTx/>
-              <a:buNone/>
-              <a:tabLst/>
-              <a:defRPr/>
-            </a:pPr>
-            <a:r>
-              <a:rPr kumimoji="0" lang="en-US" sz="1200" b="0" i="0" u="none" strike="noStrike" kern="1200" cap="none" spc="0" normalizeH="0" baseline="0" noProof="0" dirty="0">
-                <a:ln>
-                  <a:noFill/>
-                </a:ln>
-                <a:solidFill>
-                  <a:prstClr val="black">
-                    <a:tint val="75000"/>
-                  </a:prstClr>
-                </a:solidFill>
-                <a:effectLst/>
-                <a:uLnTx/>
-                <a:uFillTx/>
-                <a:latin typeface="Helvetica Neue" panose="02000503000000020004" pitchFamily="2" charset="0"/>
-                <a:ea typeface="Helvetica Neue" panose="02000503000000020004" pitchFamily="2" charset="0"/>
-                <a:cs typeface="Helvetica Neue" panose="02000503000000020004" pitchFamily="2" charset="0"/>
-              </a:rPr>
-              <a:t>J Mark Morris</a:t>
-            </a:r>
-          </a:p>
-        </p:txBody>
-      </p:sp>
-      <p:sp>
-        <p:nvSpPr>
-          <p:cNvPr id="19" name="Rectangle 18">
-            <a:extLst>
-              <a:ext uri="{FF2B5EF4-FFF2-40B4-BE49-F238E27FC236}">
-                <a16:creationId xmlns:a16="http://schemas.microsoft.com/office/drawing/2014/main" id="{9178114D-FA61-2425-6DA6-903E1E0EEAEF}"/>
-              </a:ext>
-            </a:extLst>
-          </p:cNvPr>
-          <p:cNvSpPr/>
-          <p:nvPr/>
-        </p:nvSpPr>
-        <p:spPr>
-          <a:xfrm>
-            <a:off x="2473327" y="378829"/>
-            <a:ext cx="7245446" cy="523220"/>
-          </a:xfrm>
-          <a:prstGeom prst="rect">
-            <a:avLst/>
-          </a:prstGeom>
-          <a:noFill/>
-        </p:spPr>
-        <p:txBody>
-          <a:bodyPr wrap="none">
-            <a:spAutoFit/>
-          </a:bodyPr>
-          <a:lstStyle/>
-          <a:p>
-            <a:pPr marL="0" marR="0" lvl="0" indent="0" algn="ctr" defTabSz="914400" rtl="0" eaLnBrk="1" fontAlgn="auto" latinLnBrk="0" hangingPunct="1">
-              <a:lnSpc>
-                <a:spcPct val="100000"/>
-              </a:lnSpc>
-              <a:spcBef>
-                <a:spcPts val="0"/>
-              </a:spcBef>
-              <a:spcAft>
-                <a:spcPts val="0"/>
-              </a:spcAft>
-              <a:buClrTx/>
-              <a:buSzTx/>
-              <a:buFontTx/>
-              <a:buNone/>
-              <a:tabLst/>
-              <a:defRPr/>
-            </a:pPr>
-            <a:r>
-              <a:rPr kumimoji="0" lang="en-US" sz="2800" b="1" i="0" u="none" strike="noStrike" kern="1200" cap="none" spc="0" normalizeH="0" baseline="0" noProof="0" dirty="0">
-                <a:ln>
-                  <a:noFill/>
-                </a:ln>
-                <a:solidFill>
-                  <a:prstClr val="white"/>
-                </a:solidFill>
-                <a:effectLst/>
-                <a:uLnTx/>
-                <a:uFillTx/>
-                <a:latin typeface="Helvetica Neue" panose="02000503000000020004" pitchFamily="2" charset="0"/>
-                <a:ea typeface="Helvetica Neue" panose="02000503000000020004" pitchFamily="2" charset="0"/>
-                <a:cs typeface="Helvetica Neue" panose="02000503000000020004" pitchFamily="2" charset="0"/>
-              </a:rPr>
-              <a:t>Binary Energy Equalization to Equilibrium</a:t>
-            </a:r>
-          </a:p>
-        </p:txBody>
-      </p:sp>
-      <p:sp>
-        <p:nvSpPr>
-          <p:cNvPr id="2" name="TextBox 1">
-            <a:extLst>
-              <a:ext uri="{FF2B5EF4-FFF2-40B4-BE49-F238E27FC236}">
-                <a16:creationId xmlns:a16="http://schemas.microsoft.com/office/drawing/2014/main" id="{2EEF71A6-14E1-8A45-1EEC-76EE6482016F}"/>
-              </a:ext>
-            </a:extLst>
-          </p:cNvPr>
-          <p:cNvSpPr txBox="1"/>
-          <p:nvPr/>
-        </p:nvSpPr>
-        <p:spPr>
-          <a:xfrm>
-            <a:off x="317359" y="1166842"/>
-            <a:ext cx="11874641" cy="5016758"/>
-          </a:xfrm>
-          <a:prstGeom prst="rect">
-            <a:avLst/>
-          </a:prstGeom>
-          <a:noFill/>
-        </p:spPr>
-        <p:txBody>
-          <a:bodyPr wrap="square" rtlCol="0">
-            <a:spAutoFit/>
-          </a:bodyPr>
-          <a:lstStyle/>
-          <a:p>
-            <a:pPr marL="457200" marR="0" lvl="0" indent="-457200" algn="l" defTabSz="914400" rtl="0" eaLnBrk="1" fontAlgn="auto" latinLnBrk="0" hangingPunct="1">
-              <a:lnSpc>
-                <a:spcPct val="100000"/>
-              </a:lnSpc>
-              <a:spcBef>
-                <a:spcPts val="0"/>
-              </a:spcBef>
-              <a:spcAft>
-                <a:spcPts val="0"/>
-              </a:spcAft>
-              <a:buClrTx/>
-              <a:buSzTx/>
-              <a:buFont typeface="Arial" panose="020B0604020202020204" pitchFamily="34" charset="0"/>
-              <a:buChar char="•"/>
-              <a:tabLst/>
-              <a:defRPr/>
-            </a:pPr>
-            <a:r>
-              <a:rPr kumimoji="0" lang="en-US" sz="2000" b="0" i="0" u="none" strike="noStrike" kern="1200" cap="none" spc="0" normalizeH="0" baseline="0" noProof="0" dirty="0">
-                <a:ln>
-                  <a:noFill/>
-                </a:ln>
-                <a:solidFill>
-                  <a:prstClr val="white"/>
-                </a:solidFill>
-                <a:effectLst/>
-                <a:uLnTx/>
-                <a:uFillTx/>
-                <a:latin typeface="Helvetica Neue" panose="02000503000000020004" pitchFamily="2" charset="0"/>
-                <a:ea typeface="Helvetica Neue" panose="02000503000000020004" pitchFamily="2" charset="0"/>
-                <a:cs typeface="Helvetica Neue" panose="02000503000000020004" pitchFamily="2" charset="0"/>
-              </a:rPr>
-              <a:t>Quantum </a:t>
-            </a:r>
-            <a:r>
-              <a:rPr kumimoji="0" lang="en-US" sz="2000" b="0" i="0" u="none" strike="noStrike" kern="1200" cap="none" spc="0" normalizeH="0" baseline="0" noProof="0" dirty="0" err="1">
-                <a:ln>
-                  <a:noFill/>
-                </a:ln>
-                <a:solidFill>
-                  <a:prstClr val="white"/>
-                </a:solidFill>
-                <a:effectLst/>
-                <a:uLnTx/>
-                <a:uFillTx/>
-                <a:latin typeface="Helvetica Neue" panose="02000503000000020004" pitchFamily="2" charset="0"/>
-                <a:ea typeface="Helvetica Neue" panose="02000503000000020004" pitchFamily="2" charset="0"/>
-                <a:cs typeface="Helvetica Neue" panose="02000503000000020004" pitchFamily="2" charset="0"/>
-              </a:rPr>
-              <a:t>behaviour</a:t>
-            </a:r>
-            <a:r>
-              <a:rPr kumimoji="0" lang="en-US" sz="2000" b="0" i="0" u="none" strike="noStrike" kern="1200" cap="none" spc="0" normalizeH="0" baseline="0" noProof="0" dirty="0">
-                <a:ln>
-                  <a:noFill/>
-                </a:ln>
-                <a:solidFill>
-                  <a:prstClr val="white"/>
-                </a:solidFill>
-                <a:effectLst/>
-                <a:uLnTx/>
-                <a:uFillTx/>
-                <a:latin typeface="Helvetica Neue" panose="02000503000000020004" pitchFamily="2" charset="0"/>
-                <a:ea typeface="Helvetica Neue" panose="02000503000000020004" pitchFamily="2" charset="0"/>
-                <a:cs typeface="Helvetica Neue" panose="02000503000000020004" pitchFamily="2" charset="0"/>
-              </a:rPr>
-              <a:t> emerges from a continuous geometry.</a:t>
-            </a:r>
-          </a:p>
-          <a:p>
-            <a:pPr marL="457200" marR="0" lvl="0" indent="-457200" algn="l" defTabSz="914400" rtl="0" eaLnBrk="1" fontAlgn="auto" latinLnBrk="0" hangingPunct="1">
-              <a:lnSpc>
-                <a:spcPct val="100000"/>
-              </a:lnSpc>
-              <a:spcBef>
-                <a:spcPts val="0"/>
-              </a:spcBef>
-              <a:spcAft>
-                <a:spcPts val="0"/>
-              </a:spcAft>
-              <a:buClrTx/>
-              <a:buSzTx/>
-              <a:buFont typeface="Arial" panose="020B0604020202020204" pitchFamily="34" charset="0"/>
-              <a:buChar char="•"/>
-              <a:tabLst/>
-              <a:defRPr/>
-            </a:pPr>
-            <a:r>
-              <a:rPr kumimoji="0" lang="en-US" sz="2000" b="0" i="0" u="none" strike="noStrike" kern="1200" cap="none" spc="0" normalizeH="0" baseline="0" noProof="0" dirty="0">
-                <a:ln>
-                  <a:noFill/>
-                </a:ln>
-                <a:solidFill>
-                  <a:prstClr val="white"/>
-                </a:solidFill>
-                <a:effectLst/>
-                <a:uLnTx/>
-                <a:uFillTx/>
-                <a:latin typeface="Helvetica Neue" panose="02000503000000020004" pitchFamily="2" charset="0"/>
-                <a:ea typeface="Helvetica Neue" panose="02000503000000020004" pitchFamily="2" charset="0"/>
-                <a:cs typeface="Helvetica Neue" panose="02000503000000020004" pitchFamily="2" charset="0"/>
-              </a:rPr>
-              <a:t>The neighborhood of spacetime Noether cores are attempting to equalize apparent energy.</a:t>
-            </a:r>
-          </a:p>
-          <a:p>
-            <a:pPr marL="914400" marR="0" lvl="1" indent="-457200" algn="l" defTabSz="914400" rtl="0" eaLnBrk="1" fontAlgn="auto" latinLnBrk="0" hangingPunct="1">
-              <a:lnSpc>
-                <a:spcPct val="100000"/>
-              </a:lnSpc>
-              <a:spcBef>
-                <a:spcPts val="0"/>
-              </a:spcBef>
-              <a:spcAft>
-                <a:spcPts val="0"/>
-              </a:spcAft>
-              <a:buClrTx/>
-              <a:buSzTx/>
-              <a:buFont typeface="Arial" panose="020B0604020202020204" pitchFamily="34" charset="0"/>
-              <a:buChar char="•"/>
-              <a:tabLst/>
-              <a:defRPr/>
-            </a:pPr>
-            <a:r>
-              <a:rPr kumimoji="0" lang="en-US" sz="2000" b="0" i="0" u="none" strike="noStrike" kern="1200" cap="none" spc="0" normalizeH="0" baseline="0" noProof="0" dirty="0">
-                <a:ln>
-                  <a:noFill/>
-                </a:ln>
-                <a:solidFill>
-                  <a:prstClr val="white"/>
-                </a:solidFill>
-                <a:effectLst/>
-                <a:uLnTx/>
-                <a:uFillTx/>
-                <a:latin typeface="Helvetica Neue" panose="02000503000000020004" pitchFamily="2" charset="0"/>
-                <a:ea typeface="Helvetica Neue" panose="02000503000000020004" pitchFamily="2" charset="0"/>
-                <a:cs typeface="Helvetica Neue" panose="02000503000000020004" pitchFamily="2" charset="0"/>
-              </a:rPr>
-              <a:t>They are all trading in quanta of energy in pi/2 state increments</a:t>
-            </a:r>
-          </a:p>
-          <a:p>
-            <a:pPr marL="914400" marR="0" lvl="1" indent="-457200" algn="l" defTabSz="914400" rtl="0" eaLnBrk="1" fontAlgn="auto" latinLnBrk="0" hangingPunct="1">
-              <a:lnSpc>
-                <a:spcPct val="100000"/>
-              </a:lnSpc>
-              <a:spcBef>
-                <a:spcPts val="0"/>
-              </a:spcBef>
-              <a:spcAft>
-                <a:spcPts val="0"/>
-              </a:spcAft>
-              <a:buClrTx/>
-              <a:buSzTx/>
-              <a:buFont typeface="Arial" panose="020B0604020202020204" pitchFamily="34" charset="0"/>
-              <a:buChar char="•"/>
-              <a:tabLst/>
-              <a:defRPr/>
-            </a:pPr>
-            <a:r>
-              <a:rPr kumimoji="0" lang="en-US" sz="2000" b="0" i="0" u="none" strike="noStrike" kern="1200" cap="none" spc="0" normalizeH="0" baseline="0" noProof="0" dirty="0">
-                <a:ln>
-                  <a:noFill/>
-                </a:ln>
-                <a:solidFill>
-                  <a:prstClr val="white"/>
-                </a:solidFill>
-                <a:effectLst/>
-                <a:uLnTx/>
-                <a:uFillTx/>
-                <a:latin typeface="Helvetica Neue" panose="02000503000000020004" pitchFamily="2" charset="0"/>
-                <a:ea typeface="Helvetica Neue" panose="02000503000000020004" pitchFamily="2" charset="0"/>
-                <a:cs typeface="Helvetica Neue" panose="02000503000000020004" pitchFamily="2" charset="0"/>
-              </a:rPr>
-              <a:t>They operate like a slipping transmission, forward or backward. </a:t>
-            </a:r>
-          </a:p>
-          <a:p>
-            <a:pPr marL="914400" marR="0" lvl="1" indent="-457200" algn="l" defTabSz="914400" rtl="0" eaLnBrk="1" fontAlgn="auto" latinLnBrk="0" hangingPunct="1">
-              <a:lnSpc>
-                <a:spcPct val="100000"/>
-              </a:lnSpc>
-              <a:spcBef>
-                <a:spcPts val="0"/>
-              </a:spcBef>
-              <a:spcAft>
-                <a:spcPts val="0"/>
-              </a:spcAft>
-              <a:buClrTx/>
-              <a:buSzTx/>
-              <a:buFont typeface="Arial" panose="020B0604020202020204" pitchFamily="34" charset="0"/>
-              <a:buChar char="•"/>
-              <a:tabLst/>
-              <a:defRPr/>
-            </a:pPr>
-            <a:r>
-              <a:rPr kumimoji="0" lang="en-US" sz="2000" b="0" i="0" u="none" strike="noStrike" kern="1200" cap="none" spc="0" normalizeH="0" baseline="0" noProof="0" dirty="0">
-                <a:ln>
-                  <a:noFill/>
-                </a:ln>
-                <a:solidFill>
-                  <a:prstClr val="white"/>
-                </a:solidFill>
-                <a:effectLst/>
-                <a:uLnTx/>
-                <a:uFillTx/>
-                <a:latin typeface="Helvetica Neue" panose="02000503000000020004" pitchFamily="2" charset="0"/>
-                <a:ea typeface="Helvetica Neue" panose="02000503000000020004" pitchFamily="2" charset="0"/>
-                <a:cs typeface="Helvetica Neue" panose="02000503000000020004" pitchFamily="2" charset="0"/>
-              </a:rPr>
-              <a:t>In a local neighborhood, assemblies quickly reach equilibrium.</a:t>
-            </a:r>
-          </a:p>
-          <a:p>
-            <a:pPr marL="457200" marR="0" lvl="0" indent="-457200" algn="l" defTabSz="914400" rtl="0" eaLnBrk="1" fontAlgn="auto" latinLnBrk="0" hangingPunct="1">
-              <a:lnSpc>
-                <a:spcPct val="100000"/>
-              </a:lnSpc>
-              <a:spcBef>
-                <a:spcPts val="0"/>
-              </a:spcBef>
-              <a:spcAft>
-                <a:spcPts val="0"/>
-              </a:spcAft>
-              <a:buClrTx/>
-              <a:buSzTx/>
-              <a:buFont typeface="Arial" panose="020B0604020202020204" pitchFamily="34" charset="0"/>
-              <a:buChar char="•"/>
-              <a:tabLst/>
-              <a:defRPr/>
-            </a:pPr>
-            <a:r>
-              <a:rPr kumimoji="0" lang="en-US" sz="2000" b="0" i="0" u="none" strike="noStrike" kern="1200" cap="none" spc="0" normalizeH="0" baseline="0" noProof="0" dirty="0">
-                <a:ln>
-                  <a:noFill/>
-                </a:ln>
-                <a:solidFill>
-                  <a:prstClr val="white"/>
-                </a:solidFill>
-                <a:effectLst/>
-                <a:uLnTx/>
-                <a:uFillTx/>
-                <a:latin typeface="Helvetica Neue" panose="02000503000000020004" pitchFamily="2" charset="0"/>
-                <a:ea typeface="Helvetica Neue" panose="02000503000000020004" pitchFamily="2" charset="0"/>
-                <a:cs typeface="Helvetica Neue" panose="02000503000000020004" pitchFamily="2" charset="0"/>
-              </a:rPr>
-              <a:t>At the fundamental level, below these assemblies, it is a continuous system.</a:t>
-            </a:r>
-          </a:p>
-          <a:p>
-            <a:pPr marL="457200" marR="0" lvl="0" indent="-457200" algn="l" defTabSz="914400" rtl="0" eaLnBrk="1" fontAlgn="auto" latinLnBrk="0" hangingPunct="1">
-              <a:lnSpc>
-                <a:spcPct val="100000"/>
-              </a:lnSpc>
-              <a:spcBef>
-                <a:spcPts val="0"/>
-              </a:spcBef>
-              <a:spcAft>
-                <a:spcPts val="0"/>
-              </a:spcAft>
-              <a:buClrTx/>
-              <a:buSzTx/>
-              <a:buFont typeface="Arial" panose="020B0604020202020204" pitchFamily="34" charset="0"/>
-              <a:buChar char="•"/>
-              <a:tabLst/>
-              <a:defRPr/>
-            </a:pPr>
-            <a:r>
-              <a:rPr kumimoji="0" lang="en-US" sz="2000" b="0" i="0" u="none" strike="noStrike" kern="1200" cap="none" spc="0" normalizeH="0" baseline="0" noProof="0" dirty="0">
-                <a:ln>
-                  <a:noFill/>
-                </a:ln>
-                <a:solidFill>
-                  <a:prstClr val="white"/>
-                </a:solidFill>
-                <a:effectLst/>
-                <a:uLnTx/>
-                <a:uFillTx/>
-                <a:latin typeface="Helvetica Neue" panose="02000503000000020004" pitchFamily="2" charset="0"/>
-                <a:ea typeface="Helvetica Neue" panose="02000503000000020004" pitchFamily="2" charset="0"/>
-                <a:cs typeface="Helvetica Neue" panose="02000503000000020004" pitchFamily="2" charset="0"/>
-              </a:rPr>
-              <a:t>Where do the mathematical implications of skipping a beat apply?</a:t>
-            </a:r>
-          </a:p>
-          <a:p>
-            <a:pPr marL="457200" marR="0" lvl="0" indent="-457200" algn="l" defTabSz="914400" rtl="0" eaLnBrk="1" fontAlgn="auto" latinLnBrk="0" hangingPunct="1">
-              <a:lnSpc>
-                <a:spcPct val="100000"/>
-              </a:lnSpc>
-              <a:spcBef>
-                <a:spcPts val="0"/>
-              </a:spcBef>
-              <a:spcAft>
-                <a:spcPts val="0"/>
-              </a:spcAft>
-              <a:buClrTx/>
-              <a:buSzTx/>
-              <a:buFont typeface="Arial" panose="020B0604020202020204" pitchFamily="34" charset="0"/>
-              <a:buChar char="•"/>
-              <a:tabLst/>
-              <a:defRPr/>
-            </a:pPr>
-            <a:r>
-              <a:rPr kumimoji="0" lang="en-US" sz="2000" b="0" i="0" u="none" strike="noStrike" kern="1200" cap="none" spc="0" normalizeH="0" baseline="0" noProof="0" dirty="0">
-                <a:ln>
-                  <a:noFill/>
-                </a:ln>
-                <a:solidFill>
-                  <a:prstClr val="white"/>
-                </a:solidFill>
-                <a:effectLst/>
-                <a:uLnTx/>
-                <a:uFillTx/>
-                <a:latin typeface="Helvetica Neue" panose="02000503000000020004" pitchFamily="2" charset="0"/>
-                <a:ea typeface="Helvetica Neue" panose="02000503000000020004" pitchFamily="2" charset="0"/>
-                <a:cs typeface="Helvetica Neue" panose="02000503000000020004" pitchFamily="2" charset="0"/>
-              </a:rPr>
-              <a:t>The skipping a beat is the well exercised conditions at the end of each state.</a:t>
-            </a:r>
-          </a:p>
-          <a:p>
-            <a:pPr marL="457200" marR="0" lvl="0" indent="-457200" algn="l" defTabSz="914400" rtl="0" eaLnBrk="1" fontAlgn="auto" latinLnBrk="0" hangingPunct="1">
-              <a:lnSpc>
-                <a:spcPct val="100000"/>
-              </a:lnSpc>
-              <a:spcBef>
-                <a:spcPts val="0"/>
-              </a:spcBef>
-              <a:spcAft>
-                <a:spcPts val="0"/>
-              </a:spcAft>
-              <a:buClrTx/>
-              <a:buSzTx/>
-              <a:buFont typeface="Arial" panose="020B0604020202020204" pitchFamily="34" charset="0"/>
-              <a:buChar char="•"/>
-              <a:tabLst/>
-              <a:defRPr/>
-            </a:pPr>
-            <a:r>
-              <a:rPr kumimoji="0" lang="en-US" sz="2000" b="0" i="0" u="none" strike="noStrike" kern="1200" cap="none" spc="0" normalizeH="0" baseline="0" noProof="0" dirty="0">
-                <a:ln>
-                  <a:noFill/>
-                </a:ln>
-                <a:solidFill>
-                  <a:prstClr val="white"/>
-                </a:solidFill>
-                <a:effectLst/>
-                <a:uLnTx/>
-                <a:uFillTx/>
-                <a:latin typeface="Helvetica Neue" panose="02000503000000020004" pitchFamily="2" charset="0"/>
-                <a:ea typeface="Helvetica Neue" panose="02000503000000020004" pitchFamily="2" charset="0"/>
-                <a:cs typeface="Helvetica Neue" panose="02000503000000020004" pitchFamily="2" charset="0"/>
-              </a:rPr>
-              <a:t>Arriving potential spheres influence the quantum choices.</a:t>
-            </a:r>
-          </a:p>
-          <a:p>
-            <a:pPr marL="457200" marR="0" lvl="0" indent="-457200" algn="l" defTabSz="914400" rtl="0" eaLnBrk="1" fontAlgn="auto" latinLnBrk="0" hangingPunct="1">
-              <a:lnSpc>
-                <a:spcPct val="100000"/>
-              </a:lnSpc>
-              <a:spcBef>
-                <a:spcPts val="0"/>
-              </a:spcBef>
-              <a:spcAft>
-                <a:spcPts val="0"/>
-              </a:spcAft>
-              <a:buClrTx/>
-              <a:buSzTx/>
-              <a:buFont typeface="Arial" panose="020B0604020202020204" pitchFamily="34" charset="0"/>
-              <a:buChar char="•"/>
-              <a:tabLst/>
-              <a:defRPr/>
-            </a:pPr>
-            <a:r>
-              <a:rPr kumimoji="0" lang="en-US" sz="2000" b="0" i="0" u="none" strike="noStrike" kern="1200" cap="none" spc="0" normalizeH="0" baseline="0" noProof="0" dirty="0">
-                <a:ln>
-                  <a:noFill/>
-                </a:ln>
-                <a:solidFill>
-                  <a:prstClr val="white"/>
-                </a:solidFill>
-                <a:effectLst/>
-                <a:uLnTx/>
-                <a:uFillTx/>
-                <a:latin typeface="Helvetica Neue" panose="02000503000000020004" pitchFamily="2" charset="0"/>
-                <a:ea typeface="Helvetica Neue" panose="02000503000000020004" pitchFamily="2" charset="0"/>
-                <a:cs typeface="Helvetica Neue" panose="02000503000000020004" pitchFamily="2" charset="0"/>
-              </a:rPr>
-              <a:t>In a lightly perturbed locality, the assemblies quickly arrive at equilibrium. </a:t>
-            </a:r>
-          </a:p>
-          <a:p>
-            <a:pPr marL="457200" marR="0" lvl="0" indent="-457200" algn="l" defTabSz="914400" rtl="0" eaLnBrk="1" fontAlgn="auto" latinLnBrk="0" hangingPunct="1">
-              <a:lnSpc>
-                <a:spcPct val="100000"/>
-              </a:lnSpc>
-              <a:spcBef>
-                <a:spcPts val="0"/>
-              </a:spcBef>
-              <a:spcAft>
-                <a:spcPts val="0"/>
-              </a:spcAft>
-              <a:buClrTx/>
-              <a:buSzTx/>
-              <a:buFont typeface="Arial" panose="020B0604020202020204" pitchFamily="34" charset="0"/>
-              <a:buChar char="•"/>
-              <a:tabLst/>
-              <a:defRPr/>
-            </a:pPr>
-            <a:r>
-              <a:rPr kumimoji="0" lang="en-US" sz="2000" b="0" i="0" u="none" strike="noStrike" kern="1200" cap="none" spc="0" normalizeH="0" baseline="0" noProof="0" dirty="0">
-                <a:ln>
-                  <a:noFill/>
-                </a:ln>
-                <a:solidFill>
-                  <a:prstClr val="white"/>
-                </a:solidFill>
-                <a:effectLst/>
-                <a:uLnTx/>
-                <a:uFillTx/>
-                <a:latin typeface="Helvetica Neue" panose="02000503000000020004" pitchFamily="2" charset="0"/>
-                <a:ea typeface="Helvetica Neue" panose="02000503000000020004" pitchFamily="2" charset="0"/>
-                <a:cs typeface="Helvetica Neue" panose="02000503000000020004" pitchFamily="2" charset="0"/>
-              </a:rPr>
-              <a:t>IDEA: the denser the point potentials, the more energy they capture.</a:t>
-            </a:r>
-          </a:p>
-          <a:p>
-            <a:pPr marL="457200" marR="0" lvl="0" indent="-457200" algn="l" defTabSz="914400" rtl="0" eaLnBrk="1" fontAlgn="auto" latinLnBrk="0" hangingPunct="1">
-              <a:lnSpc>
-                <a:spcPct val="100000"/>
-              </a:lnSpc>
-              <a:spcBef>
-                <a:spcPts val="0"/>
-              </a:spcBef>
-              <a:spcAft>
-                <a:spcPts val="0"/>
-              </a:spcAft>
-              <a:buClrTx/>
-              <a:buSzTx/>
-              <a:buFont typeface="Arial" panose="020B0604020202020204" pitchFamily="34" charset="0"/>
-              <a:buChar char="•"/>
-              <a:tabLst/>
-              <a:defRPr/>
-            </a:pPr>
-            <a:r>
-              <a:rPr kumimoji="0" lang="en-US" sz="2000" b="0" i="0" u="none" strike="noStrike" kern="1200" cap="none" spc="0" normalizeH="0" baseline="0" noProof="0" dirty="0">
-                <a:ln>
-                  <a:noFill/>
-                </a:ln>
-                <a:solidFill>
-                  <a:prstClr val="white"/>
-                </a:solidFill>
-                <a:effectLst/>
-                <a:uLnTx/>
-                <a:uFillTx/>
-                <a:latin typeface="Helvetica Neue" panose="02000503000000020004" pitchFamily="2" charset="0"/>
-                <a:ea typeface="Helvetica Neue" panose="02000503000000020004" pitchFamily="2" charset="0"/>
-                <a:cs typeface="Helvetica Neue" panose="02000503000000020004" pitchFamily="2" charset="0"/>
-              </a:rPr>
-              <a:t>An isolated point potential, distant from others, has little influence</a:t>
-            </a:r>
-          </a:p>
-          <a:p>
-            <a:pPr marL="457200" marR="0" lvl="0" indent="-457200" algn="l" defTabSz="914400" rtl="0" eaLnBrk="1" fontAlgn="auto" latinLnBrk="0" hangingPunct="1">
-              <a:lnSpc>
-                <a:spcPct val="100000"/>
-              </a:lnSpc>
-              <a:spcBef>
-                <a:spcPts val="0"/>
-              </a:spcBef>
-              <a:spcAft>
-                <a:spcPts val="0"/>
-              </a:spcAft>
-              <a:buClrTx/>
-              <a:buSzTx/>
-              <a:buFont typeface="Arial" panose="020B0604020202020204" pitchFamily="34" charset="0"/>
-              <a:buChar char="•"/>
-              <a:tabLst/>
-              <a:defRPr/>
-            </a:pPr>
-            <a:r>
-              <a:rPr kumimoji="0" lang="en-US" sz="2000" b="0" i="0" u="none" strike="noStrike" kern="1200" cap="none" spc="0" normalizeH="0" baseline="0" noProof="0" dirty="0">
-                <a:ln>
-                  <a:noFill/>
-                </a:ln>
-                <a:solidFill>
-                  <a:prstClr val="white"/>
-                </a:solidFill>
-                <a:effectLst/>
-                <a:uLnTx/>
-                <a:uFillTx/>
-                <a:latin typeface="Helvetica Neue" panose="02000503000000020004" pitchFamily="2" charset="0"/>
-                <a:ea typeface="Helvetica Neue" panose="02000503000000020004" pitchFamily="2" charset="0"/>
-                <a:cs typeface="Helvetica Neue" panose="02000503000000020004" pitchFamily="2" charset="0"/>
-              </a:rPr>
-              <a:t>A point potential in the local neighborhood causes significant action</a:t>
-            </a:r>
-          </a:p>
-          <a:p>
-            <a:pPr marL="457200" marR="0" lvl="0" indent="-457200" algn="l" defTabSz="914400" rtl="0" eaLnBrk="1" fontAlgn="auto" latinLnBrk="0" hangingPunct="1">
-              <a:lnSpc>
-                <a:spcPct val="100000"/>
-              </a:lnSpc>
-              <a:spcBef>
-                <a:spcPts val="0"/>
-              </a:spcBef>
-              <a:spcAft>
-                <a:spcPts val="0"/>
-              </a:spcAft>
-              <a:buClrTx/>
-              <a:buSzTx/>
-              <a:buFont typeface="Arial" panose="020B0604020202020204" pitchFamily="34" charset="0"/>
-              <a:buChar char="•"/>
-              <a:tabLst/>
-              <a:defRPr/>
-            </a:pPr>
-            <a:endParaRPr kumimoji="0" lang="en-US" sz="2000" b="0" i="0" u="none" strike="noStrike" kern="1200" cap="none" spc="0" normalizeH="0" baseline="0" noProof="0" dirty="0">
-              <a:ln>
-                <a:noFill/>
-              </a:ln>
-              <a:solidFill>
-                <a:prstClr val="white"/>
-              </a:solidFill>
-              <a:effectLst/>
-              <a:uLnTx/>
-              <a:uFillTx/>
-              <a:latin typeface="Helvetica Neue" panose="02000503000000020004" pitchFamily="2" charset="0"/>
-              <a:ea typeface="Helvetica Neue" panose="02000503000000020004" pitchFamily="2" charset="0"/>
-              <a:cs typeface="Helvetica Neue" panose="02000503000000020004" pitchFamily="2" charset="0"/>
-            </a:endParaRPr>
-          </a:p>
-          <a:p>
-            <a:pPr marL="457200" marR="0" lvl="0" indent="-457200" algn="l" defTabSz="914400" rtl="0" eaLnBrk="1" fontAlgn="auto" latinLnBrk="0" hangingPunct="1">
-              <a:lnSpc>
-                <a:spcPct val="100000"/>
-              </a:lnSpc>
-              <a:spcBef>
-                <a:spcPts val="0"/>
-              </a:spcBef>
-              <a:spcAft>
-                <a:spcPts val="0"/>
-              </a:spcAft>
-              <a:buClrTx/>
-              <a:buSzTx/>
-              <a:buFont typeface="Arial" panose="020B0604020202020204" pitchFamily="34" charset="0"/>
-              <a:buChar char="•"/>
-              <a:tabLst/>
-              <a:defRPr/>
-            </a:pPr>
-            <a:endParaRPr kumimoji="0" lang="en-US" sz="2000" b="0" i="0" u="none" strike="noStrike" kern="1200" cap="none" spc="0" normalizeH="0" baseline="0" noProof="0" dirty="0">
-              <a:ln>
-                <a:noFill/>
-              </a:ln>
-              <a:solidFill>
-                <a:prstClr val="white"/>
-              </a:solidFill>
-              <a:effectLst/>
-              <a:uLnTx/>
-              <a:uFillTx/>
-              <a:latin typeface="Helvetica Neue" panose="02000503000000020004" pitchFamily="2" charset="0"/>
-              <a:ea typeface="Helvetica Neue" panose="02000503000000020004" pitchFamily="2" charset="0"/>
-              <a:cs typeface="Helvetica Neue" panose="02000503000000020004" pitchFamily="2" charset="0"/>
-            </a:endParaRPr>
-          </a:p>
-          <a:p>
-            <a:pPr marL="457200" marR="0" lvl="0" indent="-457200" algn="l" defTabSz="914400" rtl="0" eaLnBrk="1" fontAlgn="auto" latinLnBrk="0" hangingPunct="1">
-              <a:lnSpc>
-                <a:spcPct val="100000"/>
-              </a:lnSpc>
-              <a:spcBef>
-                <a:spcPts val="0"/>
-              </a:spcBef>
-              <a:spcAft>
-                <a:spcPts val="0"/>
-              </a:spcAft>
-              <a:buClrTx/>
-              <a:buSzTx/>
-              <a:buFont typeface="Arial" panose="020B0604020202020204" pitchFamily="34" charset="0"/>
-              <a:buChar char="•"/>
-              <a:tabLst/>
-              <a:defRPr/>
-            </a:pPr>
-            <a:endParaRPr kumimoji="0" lang="en-US" sz="2000" b="0" i="0" u="none" strike="noStrike" kern="1200" cap="none" spc="0" normalizeH="0" baseline="0" noProof="0" dirty="0">
-              <a:ln>
-                <a:noFill/>
-              </a:ln>
-              <a:solidFill>
-                <a:prstClr val="white"/>
-              </a:solidFill>
-              <a:effectLst/>
-              <a:uLnTx/>
-              <a:uFillTx/>
-              <a:latin typeface="Helvetica Neue" panose="02000503000000020004" pitchFamily="2" charset="0"/>
-              <a:ea typeface="Helvetica Neue" panose="02000503000000020004" pitchFamily="2" charset="0"/>
-              <a:cs typeface="Helvetica Neue" panose="02000503000000020004" pitchFamily="2" charset="0"/>
-            </a:endParaRPr>
-          </a:p>
-        </p:txBody>
-      </p:sp>
-    </p:spTree>
-    <p:extLst>
-      <p:ext uri="{BB962C8B-B14F-4D97-AF65-F5344CB8AC3E}">
-        <p14:creationId xmlns:p14="http://schemas.microsoft.com/office/powerpoint/2010/main" val="2436473042"/>
-      </p:ext>
-    </p:extLst>
-  </p:cSld>
-  <p:clrMapOvr>
-    <a:masterClrMapping/>
-  </p:clrMapOvr>
-</p:sld>
-</file>
-
-<file path=ppt/slides/slide11.xml><?xml version="1.0" encoding="utf-8"?>
-<p:sld xmlns:a="http://schemas.openxmlformats.org/drawingml/2006/main" xmlns:r="http://schemas.openxmlformats.org/officeDocument/2006/relationships" xmlns:p="http://schemas.openxmlformats.org/presentationml/2006/main">
-  <p:cSld>
-    <p:bg>
-      <p:bgPr>
-        <a:solidFill>
-          <a:srgbClr val="7030A0"/>
-        </a:solidFill>
-        <a:effectLst/>
-      </p:bgPr>
-    </p:bg>
-    <p:spTree>
-      <p:nvGrpSpPr>
-        <p:cNvPr id="1" name="">
-          <a:extLst>
-            <a:ext uri="{FF2B5EF4-FFF2-40B4-BE49-F238E27FC236}">
-              <a16:creationId xmlns:a16="http://schemas.microsoft.com/office/drawing/2014/main" id="{1C41F001-811A-D667-B922-F1D2D0A887A3}"/>
-            </a:ext>
-          </a:extLst>
-        </p:cNvPr>
-        <p:cNvGrpSpPr/>
-        <p:nvPr/>
-      </p:nvGrpSpPr>
-      <p:grpSpPr>
-        <a:xfrm>
-          <a:off x="0" y="0"/>
-          <a:ext cx="0" cy="0"/>
-          <a:chOff x="0" y="0"/>
-          <a:chExt cx="0" cy="0"/>
-        </a:xfrm>
-      </p:grpSpPr>
-      <p:sp>
-        <p:nvSpPr>
-          <p:cNvPr id="5" name="Footer Placeholder 3">
-            <a:extLst>
-              <a:ext uri="{FF2B5EF4-FFF2-40B4-BE49-F238E27FC236}">
-                <a16:creationId xmlns:a16="http://schemas.microsoft.com/office/drawing/2014/main" id="{8A1E872B-1B7B-235F-98D7-34D5BEDC988E}"/>
-              </a:ext>
-            </a:extLst>
-          </p:cNvPr>
-          <p:cNvSpPr txBox="1">
-            <a:spLocks/>
-          </p:cNvSpPr>
-          <p:nvPr/>
-        </p:nvSpPr>
-        <p:spPr>
-          <a:xfrm>
-            <a:off x="10924248" y="6388602"/>
-            <a:ext cx="1142262" cy="365125"/>
-          </a:xfrm>
-          <a:prstGeom prst="rect">
-            <a:avLst/>
-          </a:prstGeom>
-        </p:spPr>
-        <p:txBody>
-          <a:bodyPr vert="horz" lIns="91440" tIns="45720" rIns="91440" bIns="45720" rtlCol="0" anchor="ctr"/>
-          <a:lstStyle>
-            <a:defPPr>
-              <a:defRPr lang="en-US"/>
-            </a:defPPr>
-            <a:lvl1pPr marL="0" algn="ctr" defTabSz="914400" rtl="0" eaLnBrk="1" latinLnBrk="0" hangingPunct="1">
-              <a:defRPr sz="1200" kern="1200">
-                <a:solidFill>
-                  <a:schemeClr val="tx1">
-                    <a:tint val="75000"/>
-                  </a:schemeClr>
-                </a:solidFill>
-                <a:latin typeface="+mn-lt"/>
-                <a:ea typeface="+mn-ea"/>
-                <a:cs typeface="+mn-cs"/>
-              </a:defRPr>
-            </a:lvl1pPr>
-            <a:lvl2pPr marL="457200" algn="l" defTabSz="914400" rtl="0" eaLnBrk="1" latinLnBrk="0" hangingPunct="1">
-              <a:defRPr sz="1800" kern="1200">
-                <a:solidFill>
-                  <a:schemeClr val="tx1"/>
-                </a:solidFill>
-                <a:latin typeface="+mn-lt"/>
-                <a:ea typeface="+mn-ea"/>
-                <a:cs typeface="+mn-cs"/>
-              </a:defRPr>
-            </a:lvl2pPr>
-            <a:lvl3pPr marL="914400" algn="l" defTabSz="914400" rtl="0" eaLnBrk="1" latinLnBrk="0" hangingPunct="1">
-              <a:defRPr sz="1800" kern="1200">
-                <a:solidFill>
-                  <a:schemeClr val="tx1"/>
-                </a:solidFill>
-                <a:latin typeface="+mn-lt"/>
-                <a:ea typeface="+mn-ea"/>
-                <a:cs typeface="+mn-cs"/>
-              </a:defRPr>
-            </a:lvl3pPr>
-            <a:lvl4pPr marL="1371600" algn="l" defTabSz="914400" rtl="0" eaLnBrk="1" latinLnBrk="0" hangingPunct="1">
-              <a:defRPr sz="1800" kern="1200">
-                <a:solidFill>
-                  <a:schemeClr val="tx1"/>
-                </a:solidFill>
-                <a:latin typeface="+mn-lt"/>
-                <a:ea typeface="+mn-ea"/>
-                <a:cs typeface="+mn-cs"/>
-              </a:defRPr>
-            </a:lvl4pPr>
-            <a:lvl5pPr marL="1828800" algn="l" defTabSz="914400" rtl="0" eaLnBrk="1" latinLnBrk="0" hangingPunct="1">
-              <a:defRPr sz="1800" kern="1200">
-                <a:solidFill>
-                  <a:schemeClr val="tx1"/>
-                </a:solidFill>
-                <a:latin typeface="+mn-lt"/>
-                <a:ea typeface="+mn-ea"/>
-                <a:cs typeface="+mn-cs"/>
-              </a:defRPr>
-            </a:lvl5pPr>
-            <a:lvl6pPr marL="2286000" algn="l" defTabSz="914400" rtl="0" eaLnBrk="1" latinLnBrk="0" hangingPunct="1">
-              <a:defRPr sz="1800" kern="1200">
-                <a:solidFill>
-                  <a:schemeClr val="tx1"/>
-                </a:solidFill>
-                <a:latin typeface="+mn-lt"/>
-                <a:ea typeface="+mn-ea"/>
-                <a:cs typeface="+mn-cs"/>
-              </a:defRPr>
-            </a:lvl6pPr>
-            <a:lvl7pPr marL="2743200" algn="l" defTabSz="914400" rtl="0" eaLnBrk="1" latinLnBrk="0" hangingPunct="1">
-              <a:defRPr sz="1800" kern="1200">
-                <a:solidFill>
-                  <a:schemeClr val="tx1"/>
-                </a:solidFill>
-                <a:latin typeface="+mn-lt"/>
-                <a:ea typeface="+mn-ea"/>
-                <a:cs typeface="+mn-cs"/>
-              </a:defRPr>
-            </a:lvl7pPr>
-            <a:lvl8pPr marL="3200400" algn="l" defTabSz="914400" rtl="0" eaLnBrk="1" latinLnBrk="0" hangingPunct="1">
-              <a:defRPr sz="1800" kern="1200">
-                <a:solidFill>
-                  <a:schemeClr val="tx1"/>
-                </a:solidFill>
-                <a:latin typeface="+mn-lt"/>
-                <a:ea typeface="+mn-ea"/>
-                <a:cs typeface="+mn-cs"/>
-              </a:defRPr>
-            </a:lvl8pPr>
-            <a:lvl9pPr marL="3657600" algn="l" defTabSz="914400" rtl="0" eaLnBrk="1" latinLnBrk="0" hangingPunct="1">
-              <a:defRPr sz="1800" kern="1200">
-                <a:solidFill>
-                  <a:schemeClr val="tx1"/>
-                </a:solidFill>
-                <a:latin typeface="+mn-lt"/>
-                <a:ea typeface="+mn-ea"/>
-                <a:cs typeface="+mn-cs"/>
-              </a:defRPr>
-            </a:lvl9pPr>
-          </a:lstStyle>
-          <a:p>
-            <a:pPr marL="0" marR="0" lvl="0" indent="0" algn="ctr" defTabSz="914400" rtl="0" eaLnBrk="1" fontAlgn="auto" latinLnBrk="0" hangingPunct="1">
-              <a:lnSpc>
-                <a:spcPct val="100000"/>
-              </a:lnSpc>
-              <a:spcBef>
-                <a:spcPts val="0"/>
-              </a:spcBef>
-              <a:spcAft>
-                <a:spcPts val="0"/>
-              </a:spcAft>
-              <a:buClrTx/>
-              <a:buSzTx/>
-              <a:buFontTx/>
-              <a:buNone/>
-              <a:tabLst/>
-              <a:defRPr/>
-            </a:pPr>
-            <a:r>
-              <a:rPr kumimoji="0" lang="en-US" sz="1200" b="0" i="0" u="none" strike="noStrike" kern="1200" cap="none" spc="0" normalizeH="0" baseline="0" noProof="0" dirty="0">
-                <a:ln>
-                  <a:noFill/>
-                </a:ln>
-                <a:solidFill>
-                  <a:prstClr val="black">
-                    <a:tint val="75000"/>
-                  </a:prstClr>
-                </a:solidFill>
-                <a:effectLst/>
-                <a:uLnTx/>
-                <a:uFillTx/>
-                <a:latin typeface="Helvetica Neue" panose="02000503000000020004" pitchFamily="2" charset="0"/>
-                <a:ea typeface="Helvetica Neue" panose="02000503000000020004" pitchFamily="2" charset="0"/>
-                <a:cs typeface="Helvetica Neue" panose="02000503000000020004" pitchFamily="2" charset="0"/>
-              </a:rPr>
-              <a:t>J Mark Morris</a:t>
-            </a:r>
-          </a:p>
-        </p:txBody>
-      </p:sp>
-      <p:sp>
-        <p:nvSpPr>
-          <p:cNvPr id="19" name="Rectangle 18">
-            <a:extLst>
-              <a:ext uri="{FF2B5EF4-FFF2-40B4-BE49-F238E27FC236}">
-                <a16:creationId xmlns:a16="http://schemas.microsoft.com/office/drawing/2014/main" id="{D679D6B0-B5A3-1A84-B690-E862842077BB}"/>
-              </a:ext>
-            </a:extLst>
-          </p:cNvPr>
-          <p:cNvSpPr/>
-          <p:nvPr/>
-        </p:nvSpPr>
-        <p:spPr>
-          <a:xfrm>
-            <a:off x="5221356" y="378829"/>
-            <a:ext cx="1749390" cy="523220"/>
-          </a:xfrm>
-          <a:prstGeom prst="rect">
-            <a:avLst/>
-          </a:prstGeom>
-          <a:noFill/>
-        </p:spPr>
-        <p:txBody>
-          <a:bodyPr wrap="none">
-            <a:spAutoFit/>
-          </a:bodyPr>
-          <a:lstStyle/>
-          <a:p>
-            <a:pPr marL="0" marR="0" lvl="0" indent="0" algn="ctr" defTabSz="914400" rtl="0" eaLnBrk="1" fontAlgn="auto" latinLnBrk="0" hangingPunct="1">
-              <a:lnSpc>
-                <a:spcPct val="100000"/>
-              </a:lnSpc>
-              <a:spcBef>
-                <a:spcPts val="0"/>
-              </a:spcBef>
-              <a:spcAft>
-                <a:spcPts val="0"/>
-              </a:spcAft>
-              <a:buClrTx/>
-              <a:buSzTx/>
-              <a:buFontTx/>
-              <a:buNone/>
-              <a:tabLst/>
-              <a:defRPr/>
-            </a:pPr>
-            <a:r>
-              <a:rPr kumimoji="0" lang="en-US" sz="2800" b="1" i="0" u="none" strike="noStrike" kern="1200" cap="none" spc="0" normalizeH="0" baseline="0" noProof="0" dirty="0">
-                <a:ln>
-                  <a:noFill/>
-                </a:ln>
-                <a:solidFill>
-                  <a:prstClr val="white"/>
-                </a:solidFill>
-                <a:effectLst/>
-                <a:uLnTx/>
-                <a:uFillTx/>
-                <a:latin typeface="Helvetica Neue" panose="02000503000000020004" pitchFamily="2" charset="0"/>
-                <a:ea typeface="Helvetica Neue" panose="02000503000000020004" pitchFamily="2" charset="0"/>
-                <a:cs typeface="Helvetica Neue" panose="02000503000000020004" pitchFamily="2" charset="0"/>
-              </a:rPr>
-              <a:t>Template</a:t>
-            </a:r>
-          </a:p>
-        </p:txBody>
-      </p:sp>
-      <p:sp>
-        <p:nvSpPr>
-          <p:cNvPr id="2" name="TextBox 1">
-            <a:extLst>
-              <a:ext uri="{FF2B5EF4-FFF2-40B4-BE49-F238E27FC236}">
-                <a16:creationId xmlns:a16="http://schemas.microsoft.com/office/drawing/2014/main" id="{C337343D-971C-8C20-DBD6-FC8C41C0D215}"/>
-              </a:ext>
-            </a:extLst>
-          </p:cNvPr>
-          <p:cNvSpPr txBox="1"/>
-          <p:nvPr/>
-        </p:nvSpPr>
-        <p:spPr>
-          <a:xfrm>
-            <a:off x="317359" y="1166842"/>
-            <a:ext cx="11874641" cy="1323439"/>
-          </a:xfrm>
-          <a:prstGeom prst="rect">
-            <a:avLst/>
-          </a:prstGeom>
-          <a:noFill/>
-        </p:spPr>
-        <p:txBody>
-          <a:bodyPr wrap="square" rtlCol="0">
-            <a:spAutoFit/>
-          </a:bodyPr>
-          <a:lstStyle/>
-          <a:p>
-            <a:pPr marL="457200" marR="0" lvl="0" indent="-457200" algn="l" defTabSz="914400" rtl="0" eaLnBrk="1" fontAlgn="auto" latinLnBrk="0" hangingPunct="1">
-              <a:lnSpc>
-                <a:spcPct val="100000"/>
-              </a:lnSpc>
-              <a:spcBef>
-                <a:spcPts val="0"/>
-              </a:spcBef>
-              <a:spcAft>
-                <a:spcPts val="0"/>
-              </a:spcAft>
-              <a:buClrTx/>
-              <a:buSzTx/>
-              <a:buFont typeface="Arial" panose="020B0604020202020204" pitchFamily="34" charset="0"/>
-              <a:buChar char="•"/>
-              <a:tabLst/>
-              <a:defRPr/>
-            </a:pPr>
-            <a:r>
-              <a:rPr kumimoji="0" lang="en-US" sz="2000" b="0" i="0" u="none" strike="noStrike" kern="1200" cap="none" spc="0" normalizeH="0" baseline="0" noProof="0" dirty="0">
-                <a:ln>
-                  <a:noFill/>
-                </a:ln>
-                <a:solidFill>
-                  <a:prstClr val="white"/>
-                </a:solidFill>
-                <a:effectLst/>
-                <a:uLnTx/>
-                <a:uFillTx/>
-                <a:latin typeface="Helvetica Neue" panose="02000503000000020004" pitchFamily="2" charset="0"/>
-                <a:ea typeface="Helvetica Neue" panose="02000503000000020004" pitchFamily="2" charset="0"/>
-                <a:cs typeface="Helvetica Neue" panose="02000503000000020004" pitchFamily="2" charset="0"/>
-              </a:rPr>
-              <a:t>x</a:t>
-            </a:r>
-          </a:p>
-          <a:p>
-            <a:pPr marL="457200" marR="0" lvl="0" indent="-457200" algn="l" defTabSz="914400" rtl="0" eaLnBrk="1" fontAlgn="auto" latinLnBrk="0" hangingPunct="1">
-              <a:lnSpc>
-                <a:spcPct val="100000"/>
-              </a:lnSpc>
-              <a:spcBef>
-                <a:spcPts val="0"/>
-              </a:spcBef>
-              <a:spcAft>
-                <a:spcPts val="0"/>
-              </a:spcAft>
-              <a:buClrTx/>
-              <a:buSzTx/>
-              <a:buFont typeface="Arial" panose="020B0604020202020204" pitchFamily="34" charset="0"/>
-              <a:buChar char="•"/>
-              <a:tabLst/>
-              <a:defRPr/>
-            </a:pPr>
-            <a:endParaRPr kumimoji="0" lang="en-US" sz="2000" b="0" i="0" u="none" strike="noStrike" kern="1200" cap="none" spc="0" normalizeH="0" baseline="0" noProof="0" dirty="0">
-              <a:ln>
-                <a:noFill/>
-              </a:ln>
-              <a:solidFill>
-                <a:prstClr val="white"/>
-              </a:solidFill>
-              <a:effectLst/>
-              <a:uLnTx/>
-              <a:uFillTx/>
-              <a:latin typeface="Helvetica Neue" panose="02000503000000020004" pitchFamily="2" charset="0"/>
-              <a:ea typeface="Helvetica Neue" panose="02000503000000020004" pitchFamily="2" charset="0"/>
-              <a:cs typeface="Helvetica Neue" panose="02000503000000020004" pitchFamily="2" charset="0"/>
-            </a:endParaRPr>
-          </a:p>
-          <a:p>
-            <a:pPr marL="457200" marR="0" lvl="0" indent="-457200" algn="l" defTabSz="914400" rtl="0" eaLnBrk="1" fontAlgn="auto" latinLnBrk="0" hangingPunct="1">
-              <a:lnSpc>
-                <a:spcPct val="100000"/>
-              </a:lnSpc>
-              <a:spcBef>
-                <a:spcPts val="0"/>
-              </a:spcBef>
-              <a:spcAft>
-                <a:spcPts val="0"/>
-              </a:spcAft>
-              <a:buClrTx/>
-              <a:buSzTx/>
-              <a:buFont typeface="Arial" panose="020B0604020202020204" pitchFamily="34" charset="0"/>
-              <a:buChar char="•"/>
-              <a:tabLst/>
-              <a:defRPr/>
-            </a:pPr>
-            <a:endParaRPr kumimoji="0" lang="en-US" sz="2000" b="0" i="0" u="none" strike="noStrike" kern="1200" cap="none" spc="0" normalizeH="0" baseline="0" noProof="0" dirty="0">
-              <a:ln>
-                <a:noFill/>
-              </a:ln>
-              <a:solidFill>
-                <a:prstClr val="white"/>
-              </a:solidFill>
-              <a:effectLst/>
-              <a:uLnTx/>
-              <a:uFillTx/>
-              <a:latin typeface="Helvetica Neue" panose="02000503000000020004" pitchFamily="2" charset="0"/>
-              <a:ea typeface="Helvetica Neue" panose="02000503000000020004" pitchFamily="2" charset="0"/>
-              <a:cs typeface="Helvetica Neue" panose="02000503000000020004" pitchFamily="2" charset="0"/>
-            </a:endParaRPr>
-          </a:p>
-          <a:p>
-            <a:pPr marL="457200" marR="0" lvl="0" indent="-457200" algn="l" defTabSz="914400" rtl="0" eaLnBrk="1" fontAlgn="auto" latinLnBrk="0" hangingPunct="1">
-              <a:lnSpc>
-                <a:spcPct val="100000"/>
-              </a:lnSpc>
-              <a:spcBef>
-                <a:spcPts val="0"/>
-              </a:spcBef>
-              <a:spcAft>
-                <a:spcPts val="0"/>
-              </a:spcAft>
-              <a:buClrTx/>
-              <a:buSzTx/>
-              <a:buFont typeface="Arial" panose="020B0604020202020204" pitchFamily="34" charset="0"/>
-              <a:buChar char="•"/>
-              <a:tabLst/>
-              <a:defRPr/>
-            </a:pPr>
-            <a:endParaRPr kumimoji="0" lang="en-US" sz="2000" b="0" i="0" u="none" strike="noStrike" kern="1200" cap="none" spc="0" normalizeH="0" baseline="0" noProof="0" dirty="0">
-              <a:ln>
-                <a:noFill/>
-              </a:ln>
-              <a:solidFill>
-                <a:prstClr val="white"/>
-              </a:solidFill>
-              <a:effectLst/>
-              <a:uLnTx/>
-              <a:uFillTx/>
-              <a:latin typeface="Helvetica Neue" panose="02000503000000020004" pitchFamily="2" charset="0"/>
-              <a:ea typeface="Helvetica Neue" panose="02000503000000020004" pitchFamily="2" charset="0"/>
-              <a:cs typeface="Helvetica Neue" panose="02000503000000020004" pitchFamily="2" charset="0"/>
-            </a:endParaRPr>
-          </a:p>
-        </p:txBody>
-      </p:sp>
-    </p:spTree>
-    <p:extLst>
-      <p:ext uri="{BB962C8B-B14F-4D97-AF65-F5344CB8AC3E}">
-        <p14:creationId xmlns:p14="http://schemas.microsoft.com/office/powerpoint/2010/main" val="3755576508"/>
-      </p:ext>
-    </p:extLst>
-  </p:cSld>
-  <p:clrMapOvr>
-    <a:masterClrMapping/>
-  </p:clrMapOvr>
-</p:sld>
-</file>
-
-<file path=ppt/slides/slide12.xml><?xml version="1.0" encoding="utf-8"?>
-<p:sld xmlns:a="http://schemas.openxmlformats.org/drawingml/2006/main" xmlns:r="http://schemas.openxmlformats.org/officeDocument/2006/relationships" xmlns:p="http://schemas.openxmlformats.org/presentationml/2006/main">
-  <p:cSld>
-    <p:bg>
-      <p:bgPr>
-        <a:solidFill>
-          <a:srgbClr val="7030A0"/>
-        </a:solidFill>
-        <a:effectLst/>
-      </p:bgPr>
-    </p:bg>
-    <p:spTree>
-      <p:nvGrpSpPr>
-        <p:cNvPr id="1" name="">
-          <a:extLst>
-            <a:ext uri="{FF2B5EF4-FFF2-40B4-BE49-F238E27FC236}">
-              <a16:creationId xmlns:a16="http://schemas.microsoft.com/office/drawing/2014/main" id="{F1C52D0E-7D5D-C1E8-B3FC-06030AF548D6}"/>
-            </a:ext>
-          </a:extLst>
-        </p:cNvPr>
-        <p:cNvGrpSpPr/>
-        <p:nvPr/>
-      </p:nvGrpSpPr>
-      <p:grpSpPr>
-        <a:xfrm>
-          <a:off x="0" y="0"/>
-          <a:ext cx="0" cy="0"/>
-          <a:chOff x="0" y="0"/>
-          <a:chExt cx="0" cy="0"/>
-        </a:xfrm>
-      </p:grpSpPr>
-      <p:sp>
-        <p:nvSpPr>
-          <p:cNvPr id="5" name="Footer Placeholder 3">
-            <a:extLst>
-              <a:ext uri="{FF2B5EF4-FFF2-40B4-BE49-F238E27FC236}">
-                <a16:creationId xmlns:a16="http://schemas.microsoft.com/office/drawing/2014/main" id="{ACA2C156-0E3D-FFC8-797A-AEA6E32F32A3}"/>
-              </a:ext>
-            </a:extLst>
-          </p:cNvPr>
-          <p:cNvSpPr txBox="1">
-            <a:spLocks/>
-          </p:cNvSpPr>
-          <p:nvPr/>
-        </p:nvSpPr>
-        <p:spPr>
-          <a:xfrm>
-            <a:off x="10924248" y="6388602"/>
-            <a:ext cx="1142262" cy="365125"/>
-          </a:xfrm>
-          <a:prstGeom prst="rect">
-            <a:avLst/>
-          </a:prstGeom>
-        </p:spPr>
-        <p:txBody>
-          <a:bodyPr vert="horz" lIns="91440" tIns="45720" rIns="91440" bIns="45720" rtlCol="0" anchor="ctr"/>
-          <a:lstStyle>
-            <a:defPPr>
-              <a:defRPr lang="en-US"/>
-            </a:defPPr>
-            <a:lvl1pPr marL="0" algn="ctr" defTabSz="914400" rtl="0" eaLnBrk="1" latinLnBrk="0" hangingPunct="1">
-              <a:defRPr sz="1200" kern="1200">
-                <a:solidFill>
-                  <a:schemeClr val="tx1">
-                    <a:tint val="75000"/>
-                  </a:schemeClr>
-                </a:solidFill>
-                <a:latin typeface="+mn-lt"/>
-                <a:ea typeface="+mn-ea"/>
-                <a:cs typeface="+mn-cs"/>
-              </a:defRPr>
-            </a:lvl1pPr>
-            <a:lvl2pPr marL="457200" algn="l" defTabSz="914400" rtl="0" eaLnBrk="1" latinLnBrk="0" hangingPunct="1">
-              <a:defRPr sz="1800" kern="1200">
-                <a:solidFill>
-                  <a:schemeClr val="tx1"/>
-                </a:solidFill>
-                <a:latin typeface="+mn-lt"/>
-                <a:ea typeface="+mn-ea"/>
-                <a:cs typeface="+mn-cs"/>
-              </a:defRPr>
-            </a:lvl2pPr>
-            <a:lvl3pPr marL="914400" algn="l" defTabSz="914400" rtl="0" eaLnBrk="1" latinLnBrk="0" hangingPunct="1">
-              <a:defRPr sz="1800" kern="1200">
-                <a:solidFill>
-                  <a:schemeClr val="tx1"/>
-                </a:solidFill>
-                <a:latin typeface="+mn-lt"/>
-                <a:ea typeface="+mn-ea"/>
-                <a:cs typeface="+mn-cs"/>
-              </a:defRPr>
-            </a:lvl3pPr>
-            <a:lvl4pPr marL="1371600" algn="l" defTabSz="914400" rtl="0" eaLnBrk="1" latinLnBrk="0" hangingPunct="1">
-              <a:defRPr sz="1800" kern="1200">
-                <a:solidFill>
-                  <a:schemeClr val="tx1"/>
-                </a:solidFill>
-                <a:latin typeface="+mn-lt"/>
-                <a:ea typeface="+mn-ea"/>
-                <a:cs typeface="+mn-cs"/>
-              </a:defRPr>
-            </a:lvl4pPr>
-            <a:lvl5pPr marL="1828800" algn="l" defTabSz="914400" rtl="0" eaLnBrk="1" latinLnBrk="0" hangingPunct="1">
-              <a:defRPr sz="1800" kern="1200">
-                <a:solidFill>
-                  <a:schemeClr val="tx1"/>
-                </a:solidFill>
-                <a:latin typeface="+mn-lt"/>
-                <a:ea typeface="+mn-ea"/>
-                <a:cs typeface="+mn-cs"/>
-              </a:defRPr>
-            </a:lvl5pPr>
-            <a:lvl6pPr marL="2286000" algn="l" defTabSz="914400" rtl="0" eaLnBrk="1" latinLnBrk="0" hangingPunct="1">
-              <a:defRPr sz="1800" kern="1200">
-                <a:solidFill>
-                  <a:schemeClr val="tx1"/>
-                </a:solidFill>
-                <a:latin typeface="+mn-lt"/>
-                <a:ea typeface="+mn-ea"/>
-                <a:cs typeface="+mn-cs"/>
-              </a:defRPr>
-            </a:lvl6pPr>
-            <a:lvl7pPr marL="2743200" algn="l" defTabSz="914400" rtl="0" eaLnBrk="1" latinLnBrk="0" hangingPunct="1">
-              <a:defRPr sz="1800" kern="1200">
-                <a:solidFill>
-                  <a:schemeClr val="tx1"/>
-                </a:solidFill>
-                <a:latin typeface="+mn-lt"/>
-                <a:ea typeface="+mn-ea"/>
-                <a:cs typeface="+mn-cs"/>
-              </a:defRPr>
-            </a:lvl7pPr>
-            <a:lvl8pPr marL="3200400" algn="l" defTabSz="914400" rtl="0" eaLnBrk="1" latinLnBrk="0" hangingPunct="1">
-              <a:defRPr sz="1800" kern="1200">
-                <a:solidFill>
-                  <a:schemeClr val="tx1"/>
-                </a:solidFill>
-                <a:latin typeface="+mn-lt"/>
-                <a:ea typeface="+mn-ea"/>
-                <a:cs typeface="+mn-cs"/>
-              </a:defRPr>
-            </a:lvl8pPr>
-            <a:lvl9pPr marL="3657600" algn="l" defTabSz="914400" rtl="0" eaLnBrk="1" latinLnBrk="0" hangingPunct="1">
-              <a:defRPr sz="1800" kern="1200">
-                <a:solidFill>
-                  <a:schemeClr val="tx1"/>
-                </a:solidFill>
-                <a:latin typeface="+mn-lt"/>
-                <a:ea typeface="+mn-ea"/>
-                <a:cs typeface="+mn-cs"/>
-              </a:defRPr>
-            </a:lvl9pPr>
-          </a:lstStyle>
-          <a:p>
-            <a:pPr marL="0" marR="0" lvl="0" indent="0" algn="ctr" defTabSz="914400" rtl="0" eaLnBrk="1" fontAlgn="auto" latinLnBrk="0" hangingPunct="1">
-              <a:lnSpc>
-                <a:spcPct val="100000"/>
-              </a:lnSpc>
-              <a:spcBef>
-                <a:spcPts val="0"/>
-              </a:spcBef>
-              <a:spcAft>
-                <a:spcPts val="0"/>
-              </a:spcAft>
-              <a:buClrTx/>
-              <a:buSzTx/>
-              <a:buFontTx/>
-              <a:buNone/>
-              <a:tabLst/>
-              <a:defRPr/>
-            </a:pPr>
-            <a:r>
-              <a:rPr kumimoji="0" lang="en-US" sz="1200" b="0" i="0" u="none" strike="noStrike" kern="1200" cap="none" spc="0" normalizeH="0" baseline="0" noProof="0" dirty="0">
-                <a:ln>
-                  <a:noFill/>
-                </a:ln>
-                <a:solidFill>
-                  <a:prstClr val="black">
-                    <a:tint val="75000"/>
-                  </a:prstClr>
-                </a:solidFill>
-                <a:effectLst/>
-                <a:uLnTx/>
-                <a:uFillTx/>
-                <a:latin typeface="Helvetica Neue" panose="02000503000000020004" pitchFamily="2" charset="0"/>
-                <a:ea typeface="Helvetica Neue" panose="02000503000000020004" pitchFamily="2" charset="0"/>
-                <a:cs typeface="Helvetica Neue" panose="02000503000000020004" pitchFamily="2" charset="0"/>
-              </a:rPr>
-              <a:t>J Mark Morris</a:t>
-            </a:r>
-          </a:p>
-        </p:txBody>
-      </p:sp>
-      <p:sp>
-        <p:nvSpPr>
-          <p:cNvPr id="19" name="Rectangle 18">
-            <a:extLst>
-              <a:ext uri="{FF2B5EF4-FFF2-40B4-BE49-F238E27FC236}">
-                <a16:creationId xmlns:a16="http://schemas.microsoft.com/office/drawing/2014/main" id="{487F020D-D17B-D7C7-0950-4C1355A7F023}"/>
-              </a:ext>
-            </a:extLst>
-          </p:cNvPr>
-          <p:cNvSpPr/>
-          <p:nvPr/>
-        </p:nvSpPr>
-        <p:spPr>
-          <a:xfrm>
-            <a:off x="1878554" y="281107"/>
-            <a:ext cx="8141844" cy="646331"/>
-          </a:xfrm>
-          <a:prstGeom prst="rect">
-            <a:avLst/>
-          </a:prstGeom>
-          <a:noFill/>
-        </p:spPr>
-        <p:txBody>
-          <a:bodyPr wrap="none">
-            <a:spAutoFit/>
-          </a:bodyPr>
-          <a:lstStyle/>
-          <a:p>
-            <a:pPr marL="0" marR="0" lvl="0" indent="0" algn="ctr" defTabSz="914400" rtl="0" eaLnBrk="1" fontAlgn="auto" latinLnBrk="0" hangingPunct="1">
-              <a:lnSpc>
-                <a:spcPct val="100000"/>
-              </a:lnSpc>
-              <a:spcBef>
-                <a:spcPts val="0"/>
-              </a:spcBef>
-              <a:spcAft>
-                <a:spcPts val="0"/>
-              </a:spcAft>
-              <a:buClrTx/>
-              <a:buSzTx/>
-              <a:buFontTx/>
-              <a:buNone/>
-              <a:tabLst/>
-              <a:defRPr/>
-            </a:pPr>
-            <a:r>
-              <a:rPr kumimoji="0" lang="en-US" sz="3600" b="1" i="0" u="none" strike="noStrike" kern="1200" cap="none" spc="0" normalizeH="0" baseline="0" noProof="0" dirty="0">
-                <a:ln>
-                  <a:noFill/>
-                </a:ln>
-                <a:solidFill>
-                  <a:prstClr val="white"/>
-                </a:solidFill>
-                <a:effectLst/>
-                <a:uLnTx/>
-                <a:uFillTx/>
-                <a:latin typeface="Helvetica Neue" panose="02000503000000020004" pitchFamily="2" charset="0"/>
-                <a:ea typeface="Helvetica Neue" panose="02000503000000020004" pitchFamily="2" charset="0"/>
-                <a:cs typeface="Helvetica Neue" panose="02000503000000020004" pitchFamily="2" charset="0"/>
-              </a:rPr>
-              <a:t>Analysis of Energy in an Ideal Binary</a:t>
-            </a:r>
-          </a:p>
-        </p:txBody>
-      </p:sp>
-      <p:sp>
-        <p:nvSpPr>
-          <p:cNvPr id="2" name="TextBox 1">
-            <a:extLst>
-              <a:ext uri="{FF2B5EF4-FFF2-40B4-BE49-F238E27FC236}">
-                <a16:creationId xmlns:a16="http://schemas.microsoft.com/office/drawing/2014/main" id="{17E5F500-9630-DE5B-4156-454D4ACDDF86}"/>
-              </a:ext>
-            </a:extLst>
-          </p:cNvPr>
-          <p:cNvSpPr txBox="1"/>
-          <p:nvPr/>
-        </p:nvSpPr>
-        <p:spPr>
-          <a:xfrm>
-            <a:off x="317359" y="1331402"/>
-            <a:ext cx="11874641" cy="5016758"/>
-          </a:xfrm>
-          <a:prstGeom prst="rect">
-            <a:avLst/>
-          </a:prstGeom>
-          <a:noFill/>
-        </p:spPr>
-        <p:txBody>
-          <a:bodyPr wrap="square" rtlCol="0">
-            <a:spAutoFit/>
-          </a:bodyPr>
-          <a:lstStyle/>
-          <a:p>
-            <a:pPr marL="457200" marR="0" lvl="0" indent="-457200" algn="l" defTabSz="914400" rtl="0" eaLnBrk="1" fontAlgn="auto" latinLnBrk="0" hangingPunct="1">
-              <a:lnSpc>
-                <a:spcPct val="100000"/>
-              </a:lnSpc>
-              <a:spcBef>
-                <a:spcPts val="0"/>
-              </a:spcBef>
-              <a:spcAft>
-                <a:spcPts val="0"/>
-              </a:spcAft>
-              <a:buClrTx/>
-              <a:buSzTx/>
-              <a:buFont typeface="Arial" panose="020B0604020202020204" pitchFamily="34" charset="0"/>
-              <a:buChar char="•"/>
-              <a:tabLst/>
-              <a:defRPr/>
-            </a:pPr>
-            <a:r>
-              <a:rPr kumimoji="0" lang="en-US" sz="2000" b="0" i="0" u="none" strike="noStrike" kern="1200" cap="none" spc="0" normalizeH="0" baseline="0" noProof="0" dirty="0">
-                <a:ln>
-                  <a:noFill/>
-                </a:ln>
-                <a:solidFill>
-                  <a:prstClr val="white"/>
-                </a:solidFill>
-                <a:effectLst/>
-                <a:uLnTx/>
-                <a:uFillTx/>
-                <a:latin typeface="Helvetica Neue" panose="02000503000000020004" pitchFamily="2" charset="0"/>
-                <a:ea typeface="Helvetica Neue" panose="02000503000000020004" pitchFamily="2" charset="0"/>
-                <a:cs typeface="Helvetica Neue" panose="02000503000000020004" pitchFamily="2" charset="0"/>
-              </a:rPr>
-              <a:t>The natural unperturbed ideal spiral is the self powered spiral with two regions.</a:t>
-            </a:r>
-          </a:p>
-          <a:p>
-            <a:pPr marL="914400" lvl="1" indent="-457200">
-              <a:buFont typeface="Arial" panose="020B0604020202020204" pitchFamily="34" charset="0"/>
-              <a:buChar char="•"/>
-              <a:defRPr/>
-            </a:pPr>
-            <a:r>
-              <a:rPr kumimoji="0" lang="en-US" sz="2000" b="0" i="0" u="none" strike="noStrike" kern="1200" cap="none" spc="0" normalizeH="0" baseline="0" noProof="0" dirty="0">
-                <a:ln>
-                  <a:noFill/>
-                </a:ln>
-                <a:solidFill>
-                  <a:prstClr val="white"/>
-                </a:solidFill>
-                <a:effectLst/>
-                <a:uLnTx/>
-                <a:uFillTx/>
-                <a:latin typeface="Helvetica Neue" panose="02000503000000020004" pitchFamily="2" charset="0"/>
-                <a:ea typeface="Helvetica Neue" panose="02000503000000020004" pitchFamily="2" charset="0"/>
-                <a:cs typeface="Helvetica Neue" panose="02000503000000020004" pitchFamily="2" charset="0"/>
-              </a:rPr>
-              <a:t>CFT Region : rate per spiral cycle = h (partner action)</a:t>
-            </a:r>
-          </a:p>
-          <a:p>
-            <a:pPr marL="914400" lvl="1" indent="-457200">
-              <a:buFont typeface="Arial" panose="020B0604020202020204" pitchFamily="34" charset="0"/>
-              <a:buChar char="•"/>
-              <a:defRPr/>
-            </a:pPr>
-            <a:r>
-              <a:rPr lang="en-US" sz="2000" dirty="0">
-                <a:solidFill>
-                  <a:prstClr val="white"/>
-                </a:solidFill>
-                <a:latin typeface="Helvetica Neue" panose="02000503000000020004" pitchFamily="2" charset="0"/>
-                <a:ea typeface="Helvetica Neue" panose="02000503000000020004" pitchFamily="2" charset="0"/>
-                <a:cs typeface="Helvetica Neue" panose="02000503000000020004" pitchFamily="2" charset="0"/>
-              </a:rPr>
-              <a:t>AdS Region : rate per spiral cycle = h (partner action) + g (self action)</a:t>
-            </a:r>
-          </a:p>
-          <a:p>
-            <a:pPr marL="914400" lvl="1" indent="-457200">
-              <a:buFont typeface="Arial" panose="020B0604020202020204" pitchFamily="34" charset="0"/>
-              <a:buChar char="•"/>
-              <a:defRPr/>
-            </a:pPr>
-            <a:r>
-              <a:rPr kumimoji="0" lang="en-US" sz="2000" b="0" i="0" u="none" strike="noStrike" kern="1200" cap="none" spc="0" normalizeH="0" baseline="0" noProof="0" dirty="0">
-                <a:ln>
-                  <a:noFill/>
-                </a:ln>
-                <a:solidFill>
-                  <a:prstClr val="white"/>
-                </a:solidFill>
-                <a:effectLst/>
-                <a:uLnTx/>
-                <a:uFillTx/>
-                <a:latin typeface="Helvetica Neue" panose="02000503000000020004" pitchFamily="2" charset="0"/>
-                <a:ea typeface="Helvetica Neue" panose="02000503000000020004" pitchFamily="2" charset="0"/>
-                <a:cs typeface="Helvetica Neue" panose="02000503000000020004" pitchFamily="2" charset="0"/>
-              </a:rPr>
-              <a:t>radius, frequency, velocity all have first and second degree derivatives</a:t>
-            </a:r>
-          </a:p>
-          <a:p>
-            <a:pPr marL="914400" lvl="1" indent="-457200">
-              <a:buFont typeface="Arial" panose="020B0604020202020204" pitchFamily="34" charset="0"/>
-              <a:buChar char="•"/>
-              <a:defRPr/>
-            </a:pPr>
-            <a:r>
-              <a:rPr lang="en-US" sz="2000" dirty="0">
-                <a:solidFill>
-                  <a:prstClr val="white"/>
-                </a:solidFill>
-                <a:latin typeface="Helvetica Neue" panose="02000503000000020004" pitchFamily="2" charset="0"/>
-                <a:ea typeface="Helvetica Neue" panose="02000503000000020004" pitchFamily="2" charset="0"/>
-                <a:cs typeface="Helvetica Neue" panose="02000503000000020004" pitchFamily="2" charset="0"/>
-              </a:rPr>
-              <a:t>this defines a natural emergent timeline – our rate of time vs the natural rate.</a:t>
-            </a:r>
-            <a:endParaRPr kumimoji="0" lang="en-US" sz="2000" b="0" i="0" u="none" strike="noStrike" kern="1200" cap="none" spc="0" normalizeH="0" baseline="0" noProof="0" dirty="0">
-              <a:ln>
-                <a:noFill/>
-              </a:ln>
-              <a:solidFill>
-                <a:prstClr val="white"/>
-              </a:solidFill>
-              <a:effectLst/>
-              <a:uLnTx/>
-              <a:uFillTx/>
-              <a:latin typeface="Helvetica Neue" panose="02000503000000020004" pitchFamily="2" charset="0"/>
-              <a:ea typeface="Helvetica Neue" panose="02000503000000020004" pitchFamily="2" charset="0"/>
-              <a:cs typeface="Helvetica Neue" panose="02000503000000020004" pitchFamily="2" charset="0"/>
-            </a:endParaRPr>
-          </a:p>
-          <a:p>
-            <a:pPr marL="457200" marR="0" lvl="0" indent="-457200" algn="l" defTabSz="914400" rtl="0" eaLnBrk="1" fontAlgn="auto" latinLnBrk="0" hangingPunct="1">
-              <a:lnSpc>
-                <a:spcPct val="100000"/>
-              </a:lnSpc>
-              <a:spcBef>
-                <a:spcPts val="0"/>
-              </a:spcBef>
-              <a:spcAft>
-                <a:spcPts val="0"/>
-              </a:spcAft>
-              <a:buClrTx/>
-              <a:buSzTx/>
-              <a:buFont typeface="Arial" panose="020B0604020202020204" pitchFamily="34" charset="0"/>
-              <a:buChar char="•"/>
-              <a:tabLst/>
-              <a:defRPr/>
-            </a:pPr>
-            <a:r>
-              <a:rPr lang="en-US" sz="2000" dirty="0">
-                <a:solidFill>
-                  <a:prstClr val="white"/>
-                </a:solidFill>
-                <a:latin typeface="Helvetica Neue" panose="02000503000000020004" pitchFamily="2" charset="0"/>
-                <a:ea typeface="Helvetica Neue" panose="02000503000000020004" pitchFamily="2" charset="0"/>
-                <a:cs typeface="Helvetica Neue" panose="02000503000000020004" pitchFamily="2" charset="0"/>
-              </a:rPr>
-              <a:t>For ideal c</a:t>
-            </a:r>
-            <a:r>
-              <a:rPr kumimoji="0" lang="en-US" sz="2000" b="0" i="0" u="none" strike="noStrike" kern="1200" cap="none" spc="0" normalizeH="0" baseline="0" noProof="0" dirty="0">
-                <a:ln>
-                  <a:noFill/>
-                </a:ln>
-                <a:solidFill>
-                  <a:prstClr val="white"/>
-                </a:solidFill>
-                <a:effectLst/>
-                <a:uLnTx/>
-                <a:uFillTx/>
-                <a:latin typeface="Helvetica Neue" panose="02000503000000020004" pitchFamily="2" charset="0"/>
-                <a:ea typeface="Helvetica Neue" panose="02000503000000020004" pitchFamily="2" charset="0"/>
-                <a:cs typeface="Helvetica Neue" panose="02000503000000020004" pitchFamily="2" charset="0"/>
-              </a:rPr>
-              <a:t>onstant rate gains of energy in the form of angular momentum, </a:t>
-            </a:r>
-          </a:p>
-          <a:p>
-            <a:pPr marL="914400" lvl="1" indent="-457200">
-              <a:buFont typeface="Arial" panose="020B0604020202020204" pitchFamily="34" charset="0"/>
-              <a:buChar char="•"/>
-              <a:defRPr/>
-            </a:pPr>
-            <a:r>
-              <a:rPr kumimoji="0" lang="en-US" sz="2000" b="0" i="0" u="none" strike="noStrike" kern="1200" cap="none" spc="0" normalizeH="0" baseline="0" noProof="0" dirty="0">
-                <a:ln>
-                  <a:noFill/>
-                </a:ln>
-                <a:solidFill>
-                  <a:prstClr val="white"/>
-                </a:solidFill>
-                <a:effectLst/>
-                <a:uLnTx/>
-                <a:uFillTx/>
-                <a:latin typeface="Helvetica Neue" panose="02000503000000020004" pitchFamily="2" charset="0"/>
-                <a:ea typeface="Helvetica Neue" panose="02000503000000020004" pitchFamily="2" charset="0"/>
-                <a:cs typeface="Helvetica Neue" panose="02000503000000020004" pitchFamily="2" charset="0"/>
-              </a:rPr>
-              <a:t>radius will get smaller more quickly,</a:t>
-            </a:r>
-          </a:p>
-          <a:p>
-            <a:pPr marL="914400" lvl="1" indent="-457200">
-              <a:buFont typeface="Arial" panose="020B0604020202020204" pitchFamily="34" charset="0"/>
-              <a:buChar char="•"/>
-              <a:defRPr/>
-            </a:pPr>
-            <a:r>
-              <a:rPr lang="en-US" sz="2000" dirty="0">
-                <a:solidFill>
-                  <a:prstClr val="white"/>
-                </a:solidFill>
-                <a:latin typeface="Helvetica Neue" panose="02000503000000020004" pitchFamily="2" charset="0"/>
-                <a:ea typeface="Helvetica Neue" panose="02000503000000020004" pitchFamily="2" charset="0"/>
-                <a:cs typeface="Helvetica Neue" panose="02000503000000020004" pitchFamily="2" charset="0"/>
-              </a:rPr>
-              <a:t>frequency and orbital velocity will get faster more quickly</a:t>
-            </a:r>
-          </a:p>
-          <a:p>
-            <a:pPr marL="457200" marR="0" lvl="0" indent="-457200" algn="l" defTabSz="914400" rtl="0" eaLnBrk="1" fontAlgn="auto" latinLnBrk="0" hangingPunct="1">
-              <a:lnSpc>
-                <a:spcPct val="100000"/>
-              </a:lnSpc>
-              <a:spcBef>
-                <a:spcPts val="0"/>
-              </a:spcBef>
-              <a:spcAft>
-                <a:spcPts val="0"/>
-              </a:spcAft>
-              <a:buClrTx/>
-              <a:buSzTx/>
-              <a:buFont typeface="Arial" panose="020B0604020202020204" pitchFamily="34" charset="0"/>
-              <a:buChar char="•"/>
-              <a:tabLst/>
-              <a:defRPr/>
-            </a:pPr>
-            <a:r>
-              <a:rPr lang="en-US" sz="2000" dirty="0">
-                <a:solidFill>
-                  <a:prstClr val="white"/>
-                </a:solidFill>
-                <a:latin typeface="Helvetica Neue" panose="02000503000000020004" pitchFamily="2" charset="0"/>
-                <a:ea typeface="Helvetica Neue" panose="02000503000000020004" pitchFamily="2" charset="0"/>
-                <a:cs typeface="Helvetica Neue" panose="02000503000000020004" pitchFamily="2" charset="0"/>
-              </a:rPr>
-              <a:t>For ideal c</a:t>
-            </a:r>
-            <a:r>
-              <a:rPr kumimoji="0" lang="en-US" sz="2000" b="0" i="0" u="none" strike="noStrike" kern="1200" cap="none" spc="0" normalizeH="0" baseline="0" noProof="0" dirty="0">
-                <a:ln>
-                  <a:noFill/>
-                </a:ln>
-                <a:solidFill>
-                  <a:prstClr val="white"/>
-                </a:solidFill>
-                <a:effectLst/>
-                <a:uLnTx/>
-                <a:uFillTx/>
-                <a:latin typeface="Helvetica Neue" panose="02000503000000020004" pitchFamily="2" charset="0"/>
-                <a:ea typeface="Helvetica Neue" panose="02000503000000020004" pitchFamily="2" charset="0"/>
-                <a:cs typeface="Helvetica Neue" panose="02000503000000020004" pitchFamily="2" charset="0"/>
-              </a:rPr>
-              <a:t>onstant rate losses of energy in the form of angular momentum, </a:t>
-            </a:r>
-          </a:p>
-          <a:p>
-            <a:pPr marL="914400" lvl="1" indent="-457200">
-              <a:buFont typeface="Arial" panose="020B0604020202020204" pitchFamily="34" charset="0"/>
-              <a:buChar char="•"/>
-              <a:defRPr/>
-            </a:pPr>
-            <a:r>
-              <a:rPr kumimoji="0" lang="en-US" sz="2000" b="0" i="0" u="none" strike="noStrike" kern="1200" cap="none" spc="0" normalizeH="0" baseline="0" noProof="0" dirty="0">
-                <a:ln>
-                  <a:noFill/>
-                </a:ln>
-                <a:solidFill>
-                  <a:prstClr val="white"/>
-                </a:solidFill>
-                <a:effectLst/>
-                <a:uLnTx/>
-                <a:uFillTx/>
-                <a:latin typeface="Helvetica Neue" panose="02000503000000020004" pitchFamily="2" charset="0"/>
-                <a:ea typeface="Helvetica Neue" panose="02000503000000020004" pitchFamily="2" charset="0"/>
-                <a:cs typeface="Helvetica Neue" panose="02000503000000020004" pitchFamily="2" charset="0"/>
-              </a:rPr>
-              <a:t>radius will get larger more quickly,</a:t>
-            </a:r>
-          </a:p>
-          <a:p>
-            <a:pPr marL="914400" lvl="1" indent="-457200">
-              <a:buFont typeface="Arial" panose="020B0604020202020204" pitchFamily="34" charset="0"/>
-              <a:buChar char="•"/>
-              <a:defRPr/>
-            </a:pPr>
-            <a:r>
-              <a:rPr lang="en-US" sz="2000" dirty="0">
-                <a:solidFill>
-                  <a:prstClr val="white"/>
-                </a:solidFill>
-                <a:latin typeface="Helvetica Neue" panose="02000503000000020004" pitchFamily="2" charset="0"/>
-                <a:ea typeface="Helvetica Neue" panose="02000503000000020004" pitchFamily="2" charset="0"/>
-                <a:cs typeface="Helvetica Neue" panose="02000503000000020004" pitchFamily="2" charset="0"/>
-              </a:rPr>
-              <a:t>frequency and orbital velocity will get slower more quickly</a:t>
-            </a:r>
-            <a:endParaRPr kumimoji="0" lang="en-US" sz="2000" b="0" i="0" u="none" strike="noStrike" kern="1200" cap="none" spc="0" normalizeH="0" baseline="0" noProof="0" dirty="0">
-              <a:ln>
-                <a:noFill/>
-              </a:ln>
-              <a:solidFill>
-                <a:prstClr val="white"/>
-              </a:solidFill>
-              <a:effectLst/>
-              <a:uLnTx/>
-              <a:uFillTx/>
-              <a:latin typeface="Helvetica Neue" panose="02000503000000020004" pitchFamily="2" charset="0"/>
-              <a:ea typeface="Helvetica Neue" panose="02000503000000020004" pitchFamily="2" charset="0"/>
-              <a:cs typeface="Helvetica Neue" panose="02000503000000020004" pitchFamily="2" charset="0"/>
-            </a:endParaRPr>
-          </a:p>
-          <a:p>
-            <a:pPr marL="457200" indent="-457200">
-              <a:buFont typeface="Arial" panose="020B0604020202020204" pitchFamily="34" charset="0"/>
-              <a:buChar char="•"/>
-              <a:defRPr/>
-            </a:pPr>
-            <a:endParaRPr kumimoji="0" lang="en-US" sz="2000" b="0" i="0" u="none" strike="noStrike" kern="1200" cap="none" spc="0" normalizeH="0" baseline="0" noProof="0" dirty="0">
-              <a:ln>
-                <a:noFill/>
-              </a:ln>
-              <a:solidFill>
-                <a:prstClr val="white"/>
-              </a:solidFill>
-              <a:effectLst/>
-              <a:uLnTx/>
-              <a:uFillTx/>
-              <a:latin typeface="Helvetica Neue" panose="02000503000000020004" pitchFamily="2" charset="0"/>
-              <a:ea typeface="Helvetica Neue" panose="02000503000000020004" pitchFamily="2" charset="0"/>
-              <a:cs typeface="Helvetica Neue" panose="02000503000000020004" pitchFamily="2" charset="0"/>
-            </a:endParaRPr>
-          </a:p>
-          <a:p>
-            <a:pPr marL="914400" lvl="1" indent="-457200">
-              <a:buFont typeface="Arial" panose="020B0604020202020204" pitchFamily="34" charset="0"/>
-              <a:buChar char="•"/>
-              <a:defRPr/>
-            </a:pPr>
-            <a:endParaRPr kumimoji="0" lang="en-US" sz="2000" b="0" i="0" u="none" strike="noStrike" kern="1200" cap="none" spc="0" normalizeH="0" baseline="0" noProof="0" dirty="0">
-              <a:ln>
-                <a:noFill/>
-              </a:ln>
-              <a:solidFill>
-                <a:prstClr val="white"/>
-              </a:solidFill>
-              <a:effectLst/>
-              <a:uLnTx/>
-              <a:uFillTx/>
-              <a:latin typeface="Helvetica Neue" panose="02000503000000020004" pitchFamily="2" charset="0"/>
-              <a:ea typeface="Helvetica Neue" panose="02000503000000020004" pitchFamily="2" charset="0"/>
-              <a:cs typeface="Helvetica Neue" panose="02000503000000020004" pitchFamily="2" charset="0"/>
-            </a:endParaRPr>
-          </a:p>
-          <a:p>
-            <a:pPr marL="457200" marR="0" lvl="0" indent="-457200" algn="l" defTabSz="914400" rtl="0" eaLnBrk="1" fontAlgn="auto" latinLnBrk="0" hangingPunct="1">
-              <a:lnSpc>
-                <a:spcPct val="100000"/>
-              </a:lnSpc>
-              <a:spcBef>
-                <a:spcPts val="0"/>
-              </a:spcBef>
-              <a:spcAft>
-                <a:spcPts val="0"/>
-              </a:spcAft>
-              <a:buClrTx/>
-              <a:buSzTx/>
-              <a:buFont typeface="Arial" panose="020B0604020202020204" pitchFamily="34" charset="0"/>
-              <a:buChar char="•"/>
-              <a:tabLst/>
-              <a:defRPr/>
-            </a:pPr>
-            <a:endParaRPr kumimoji="0" lang="en-US" sz="2000" b="0" i="0" u="none" strike="noStrike" kern="1200" cap="none" spc="0" normalizeH="0" baseline="0" noProof="0" dirty="0">
-              <a:ln>
-                <a:noFill/>
-              </a:ln>
-              <a:solidFill>
-                <a:prstClr val="white"/>
-              </a:solidFill>
-              <a:effectLst/>
-              <a:uLnTx/>
-              <a:uFillTx/>
-              <a:latin typeface="Helvetica Neue" panose="02000503000000020004" pitchFamily="2" charset="0"/>
-              <a:ea typeface="Helvetica Neue" panose="02000503000000020004" pitchFamily="2" charset="0"/>
-              <a:cs typeface="Helvetica Neue" panose="02000503000000020004" pitchFamily="2" charset="0"/>
-            </a:endParaRPr>
-          </a:p>
-          <a:p>
-            <a:pPr marL="457200" marR="0" lvl="0" indent="-457200" algn="l" defTabSz="914400" rtl="0" eaLnBrk="1" fontAlgn="auto" latinLnBrk="0" hangingPunct="1">
-              <a:lnSpc>
-                <a:spcPct val="100000"/>
-              </a:lnSpc>
-              <a:spcBef>
-                <a:spcPts val="0"/>
-              </a:spcBef>
-              <a:spcAft>
-                <a:spcPts val="0"/>
-              </a:spcAft>
-              <a:buClrTx/>
-              <a:buSzTx/>
-              <a:buFont typeface="Arial" panose="020B0604020202020204" pitchFamily="34" charset="0"/>
-              <a:buChar char="•"/>
-              <a:tabLst/>
-              <a:defRPr/>
-            </a:pPr>
-            <a:endParaRPr kumimoji="0" lang="en-US" sz="2000" b="0" i="0" u="none" strike="noStrike" kern="1200" cap="none" spc="0" normalizeH="0" baseline="0" noProof="0" dirty="0">
-              <a:ln>
-                <a:noFill/>
-              </a:ln>
-              <a:solidFill>
-                <a:prstClr val="white"/>
-              </a:solidFill>
-              <a:effectLst/>
-              <a:uLnTx/>
-              <a:uFillTx/>
-              <a:latin typeface="Helvetica Neue" panose="02000503000000020004" pitchFamily="2" charset="0"/>
-              <a:ea typeface="Helvetica Neue" panose="02000503000000020004" pitchFamily="2" charset="0"/>
-              <a:cs typeface="Helvetica Neue" panose="02000503000000020004" pitchFamily="2" charset="0"/>
-            </a:endParaRPr>
-          </a:p>
-          <a:p>
-            <a:pPr marL="457200" marR="0" lvl="0" indent="-457200" algn="l" defTabSz="914400" rtl="0" eaLnBrk="1" fontAlgn="auto" latinLnBrk="0" hangingPunct="1">
-              <a:lnSpc>
-                <a:spcPct val="100000"/>
-              </a:lnSpc>
-              <a:spcBef>
-                <a:spcPts val="0"/>
-              </a:spcBef>
-              <a:spcAft>
-                <a:spcPts val="0"/>
-              </a:spcAft>
-              <a:buClrTx/>
-              <a:buSzTx/>
-              <a:buFont typeface="Arial" panose="020B0604020202020204" pitchFamily="34" charset="0"/>
-              <a:buChar char="•"/>
-              <a:tabLst/>
-              <a:defRPr/>
-            </a:pPr>
-            <a:endParaRPr kumimoji="0" lang="en-US" sz="2000" b="0" i="0" u="none" strike="noStrike" kern="1200" cap="none" spc="0" normalizeH="0" baseline="0" noProof="0" dirty="0">
-              <a:ln>
-                <a:noFill/>
-              </a:ln>
-              <a:solidFill>
-                <a:prstClr val="white"/>
-              </a:solidFill>
-              <a:effectLst/>
-              <a:uLnTx/>
-              <a:uFillTx/>
-              <a:latin typeface="Helvetica Neue" panose="02000503000000020004" pitchFamily="2" charset="0"/>
-              <a:ea typeface="Helvetica Neue" panose="02000503000000020004" pitchFamily="2" charset="0"/>
-              <a:cs typeface="Helvetica Neue" panose="02000503000000020004" pitchFamily="2" charset="0"/>
-            </a:endParaRPr>
-          </a:p>
-        </p:txBody>
-      </p:sp>
-      <p:sp>
-        <p:nvSpPr>
-          <p:cNvPr id="4" name="TextBox 3">
-            <a:extLst>
-              <a:ext uri="{FF2B5EF4-FFF2-40B4-BE49-F238E27FC236}">
-                <a16:creationId xmlns:a16="http://schemas.microsoft.com/office/drawing/2014/main" id="{7A2175A5-74A8-2670-C353-E09D4CB21198}"/>
-              </a:ext>
-            </a:extLst>
-          </p:cNvPr>
-          <p:cNvSpPr txBox="1"/>
-          <p:nvPr/>
-        </p:nvSpPr>
-        <p:spPr>
-          <a:xfrm>
-            <a:off x="-14368639" y="-5417"/>
-            <a:ext cx="14368639" cy="4401205"/>
-          </a:xfrm>
-          <a:prstGeom prst="rect">
-            <a:avLst/>
-          </a:prstGeom>
-          <a:noFill/>
-        </p:spPr>
-        <p:txBody>
-          <a:bodyPr wrap="square">
-            <a:spAutoFit/>
-          </a:bodyPr>
-          <a:lstStyle/>
-          <a:p>
-            <a:pPr marL="457200" marR="0" lvl="0" indent="-457200" algn="l" defTabSz="914400" rtl="0" eaLnBrk="1" fontAlgn="auto" latinLnBrk="0" hangingPunct="1">
-              <a:lnSpc>
-                <a:spcPct val="100000"/>
-              </a:lnSpc>
-              <a:spcBef>
-                <a:spcPts val="0"/>
-              </a:spcBef>
-              <a:spcAft>
-                <a:spcPts val="0"/>
-              </a:spcAft>
-              <a:buClrTx/>
-              <a:buSzTx/>
-              <a:buFont typeface="Arial" panose="020B0604020202020204" pitchFamily="34" charset="0"/>
-              <a:buChar char="•"/>
-              <a:tabLst/>
-              <a:defRPr/>
-            </a:pPr>
-            <a:r>
-              <a:rPr lang="en-US" sz="2000" dirty="0">
-                <a:solidFill>
-                  <a:srgbClr val="FFC000"/>
-                </a:solidFill>
-                <a:latin typeface="Helvetica Neue" panose="02000503000000020004" pitchFamily="2" charset="0"/>
-                <a:ea typeface="Helvetica Neue" panose="02000503000000020004" pitchFamily="2" charset="0"/>
-                <a:cs typeface="Helvetica Neue" panose="02000503000000020004" pitchFamily="2" charset="0"/>
-              </a:rPr>
-              <a:t>Known physics may correctly assess that the binary would spiral to what they thought was oblivion for various reasons.</a:t>
-            </a:r>
-          </a:p>
-          <a:p>
-            <a:pPr marL="457200" marR="0" lvl="0" indent="-457200" algn="l" defTabSz="914400" rtl="0" eaLnBrk="1" fontAlgn="auto" latinLnBrk="0" hangingPunct="1">
-              <a:lnSpc>
-                <a:spcPct val="100000"/>
-              </a:lnSpc>
-              <a:spcBef>
-                <a:spcPts val="0"/>
-              </a:spcBef>
-              <a:spcAft>
-                <a:spcPts val="0"/>
-              </a:spcAft>
-              <a:buClrTx/>
-              <a:buSzTx/>
-              <a:buFont typeface="Arial" panose="020B0604020202020204" pitchFamily="34" charset="0"/>
-              <a:buChar char="•"/>
-              <a:tabLst/>
-              <a:defRPr/>
-            </a:pPr>
-            <a:r>
-              <a:rPr lang="en-US" sz="2000" dirty="0">
-                <a:solidFill>
-                  <a:srgbClr val="FFC000"/>
-                </a:solidFill>
-                <a:latin typeface="Helvetica Neue" panose="02000503000000020004" pitchFamily="2" charset="0"/>
-                <a:ea typeface="Helvetica Neue" panose="02000503000000020004" pitchFamily="2" charset="0"/>
-                <a:cs typeface="Helvetica Neue" panose="02000503000000020004" pitchFamily="2" charset="0"/>
-              </a:rPr>
-              <a:t>But they didn’t understand that was merely the symmetry breaking point between the CFT and AdS regions</a:t>
-            </a:r>
-          </a:p>
-          <a:p>
-            <a:pPr marL="457200" indent="-457200">
-              <a:buFont typeface="Arial" panose="020B0604020202020204" pitchFamily="34" charset="0"/>
-              <a:buChar char="•"/>
-              <a:defRPr/>
-            </a:pPr>
-            <a:r>
-              <a:rPr kumimoji="0" lang="en-US" sz="2000" b="0" i="0" u="none" strike="noStrike" kern="1200" cap="none" spc="0" normalizeH="0" baseline="0" noProof="0" dirty="0">
-                <a:ln>
-                  <a:noFill/>
-                </a:ln>
-                <a:solidFill>
-                  <a:srgbClr val="FFC000"/>
-                </a:solidFill>
-                <a:effectLst/>
-                <a:uLnTx/>
-                <a:uFillTx/>
-                <a:latin typeface="Helvetica Neue" panose="02000503000000020004" pitchFamily="2" charset="0"/>
-                <a:ea typeface="Helvetica Neue" panose="02000503000000020004" pitchFamily="2" charset="0"/>
-                <a:cs typeface="Helvetica Neue" panose="02000503000000020004" pitchFamily="2" charset="0"/>
-              </a:rPr>
-              <a:t>We can leverage this into a more abstract and yet correct energy analysis.</a:t>
-            </a:r>
-          </a:p>
-          <a:p>
-            <a:pPr marL="914400" lvl="1" indent="-457200">
-              <a:buFont typeface="Arial" panose="020B0604020202020204" pitchFamily="34" charset="0"/>
-              <a:buChar char="•"/>
-              <a:defRPr/>
-            </a:pPr>
-            <a:r>
-              <a:rPr lang="en-US" sz="2000" dirty="0">
-                <a:solidFill>
-                  <a:srgbClr val="FFC000"/>
-                </a:solidFill>
-                <a:latin typeface="Helvetica Neue" panose="02000503000000020004" pitchFamily="2" charset="0"/>
-                <a:ea typeface="Helvetica Neue" panose="02000503000000020004" pitchFamily="2" charset="0"/>
-                <a:cs typeface="Helvetica Neue" panose="02000503000000020004" pitchFamily="2" charset="0"/>
-              </a:rPr>
-              <a:t>i.e., add an h, frequency increases from 0 to 1, what did we learn?</a:t>
-            </a:r>
-          </a:p>
-          <a:p>
-            <a:pPr marL="914400" lvl="1" indent="-457200">
-              <a:buFont typeface="Arial" panose="020B0604020202020204" pitchFamily="34" charset="0"/>
-              <a:buChar char="•"/>
-              <a:defRPr/>
-            </a:pPr>
-            <a:r>
-              <a:rPr kumimoji="0" lang="en-US" sz="2000" b="0" i="0" u="none" strike="noStrike" kern="1200" cap="none" spc="0" normalizeH="0" baseline="0" noProof="0" dirty="0">
-                <a:ln>
-                  <a:noFill/>
-                </a:ln>
-                <a:solidFill>
-                  <a:srgbClr val="FFC000"/>
-                </a:solidFill>
-                <a:effectLst/>
-                <a:uLnTx/>
-                <a:uFillTx/>
-                <a:latin typeface="Helvetica Neue" panose="02000503000000020004" pitchFamily="2" charset="0"/>
-                <a:ea typeface="Helvetica Neue" panose="02000503000000020004" pitchFamily="2" charset="0"/>
-                <a:cs typeface="Helvetica Neue" panose="02000503000000020004" pitchFamily="2" charset="0"/>
-              </a:rPr>
-              <a:t>these are points on the natural spiral so we know they are valid. </a:t>
-            </a:r>
-          </a:p>
-          <a:p>
-            <a:pPr marL="914400" lvl="1" indent="-457200">
-              <a:buFont typeface="Arial" panose="020B0604020202020204" pitchFamily="34" charset="0"/>
-              <a:buChar char="•"/>
-              <a:defRPr/>
-            </a:pPr>
-            <a:r>
-              <a:rPr lang="en-US" sz="2000" dirty="0">
-                <a:solidFill>
-                  <a:srgbClr val="FFC000"/>
-                </a:solidFill>
-                <a:latin typeface="Helvetica Neue" panose="02000503000000020004" pitchFamily="2" charset="0"/>
-                <a:ea typeface="Helvetica Neue" panose="02000503000000020004" pitchFamily="2" charset="0"/>
-                <a:cs typeface="Helvetica Neue" panose="02000503000000020004" pitchFamily="2" charset="0"/>
-              </a:rPr>
-              <a:t>we must be cautious to remember that stability is the natural spiral behaviour</a:t>
-            </a:r>
-          </a:p>
-          <a:p>
-            <a:pPr marL="457200" indent="-457200">
-              <a:buFont typeface="Arial" panose="020B0604020202020204" pitchFamily="34" charset="0"/>
-              <a:buChar char="•"/>
-              <a:defRPr/>
-            </a:pPr>
-            <a:r>
-              <a:rPr kumimoji="0" lang="en-US" sz="2000" b="0" i="0" u="none" strike="noStrike" kern="1200" cap="none" spc="0" normalizeH="0" baseline="0" noProof="0" dirty="0">
-                <a:ln>
-                  <a:noFill/>
-                </a:ln>
-                <a:solidFill>
-                  <a:srgbClr val="FFC000"/>
-                </a:solidFill>
-                <a:effectLst/>
-                <a:uLnTx/>
-                <a:uFillTx/>
-                <a:latin typeface="Helvetica Neue" panose="02000503000000020004" pitchFamily="2" charset="0"/>
-                <a:ea typeface="Helvetica Neue" panose="02000503000000020004" pitchFamily="2" charset="0"/>
-                <a:cs typeface="Helvetica Neue" panose="02000503000000020004" pitchFamily="2" charset="0"/>
-              </a:rPr>
-              <a:t>I think what is possibly confusing is that there are natural rates of change, in fact two of them</a:t>
-            </a:r>
-          </a:p>
-          <a:p>
-            <a:pPr marL="457200" indent="-457200">
-              <a:buFont typeface="Arial" panose="020B0604020202020204" pitchFamily="34" charset="0"/>
-              <a:buChar char="•"/>
-              <a:defRPr/>
-            </a:pPr>
-            <a:endParaRPr lang="en-US" sz="2000" dirty="0">
-              <a:solidFill>
-                <a:srgbClr val="FFC000"/>
-              </a:solidFill>
-              <a:latin typeface="Helvetica Neue" panose="02000503000000020004" pitchFamily="2" charset="0"/>
-              <a:ea typeface="Helvetica Neue" panose="02000503000000020004" pitchFamily="2" charset="0"/>
-              <a:cs typeface="Helvetica Neue" panose="02000503000000020004" pitchFamily="2" charset="0"/>
-            </a:endParaRPr>
-          </a:p>
-          <a:p>
-            <a:pPr marL="457200" indent="-457200">
-              <a:buFont typeface="Arial" panose="020B0604020202020204" pitchFamily="34" charset="0"/>
-              <a:buChar char="•"/>
-              <a:defRPr/>
-            </a:pPr>
-            <a:r>
-              <a:rPr kumimoji="0" lang="en-US" sz="2000" b="0" i="0" u="none" strike="noStrike" kern="1200" cap="none" spc="0" normalizeH="0" baseline="0" noProof="0" dirty="0">
-                <a:ln>
-                  <a:noFill/>
-                </a:ln>
-                <a:solidFill>
-                  <a:srgbClr val="FFC000"/>
-                </a:solidFill>
-                <a:effectLst/>
-                <a:uLnTx/>
-                <a:uFillTx/>
-                <a:latin typeface="Helvetica Neue" panose="02000503000000020004" pitchFamily="2" charset="0"/>
-                <a:ea typeface="Helvetica Neue" panose="02000503000000020004" pitchFamily="2" charset="0"/>
-                <a:cs typeface="Helvetica Neue" panose="02000503000000020004" pitchFamily="2" charset="0"/>
-              </a:rPr>
-              <a:t>so when we apply more energy that is changing the rate at which things were changing, thus an acceleration or deceleration.</a:t>
-            </a:r>
-          </a:p>
-          <a:p>
-            <a:pPr marL="457200" indent="-457200">
-              <a:buFont typeface="Arial" panose="020B0604020202020204" pitchFamily="34" charset="0"/>
-              <a:buChar char="•"/>
-              <a:defRPr/>
-            </a:pPr>
-            <a:r>
-              <a:rPr lang="en-US" sz="2000" dirty="0">
-                <a:solidFill>
-                  <a:srgbClr val="FFC000"/>
-                </a:solidFill>
-                <a:latin typeface="Helvetica Neue" panose="02000503000000020004" pitchFamily="2" charset="0"/>
-                <a:ea typeface="Helvetica Neue" panose="02000503000000020004" pitchFamily="2" charset="0"/>
-                <a:cs typeface="Helvetica Neue" panose="02000503000000020004" pitchFamily="2" charset="0"/>
-              </a:rPr>
-              <a:t>once the energy transfer stops, then those changes are locked in and we continue the natural progression from there.  </a:t>
-            </a:r>
-          </a:p>
-          <a:p>
-            <a:pPr>
-              <a:defRPr/>
-            </a:pPr>
-            <a:endParaRPr lang="en-US" sz="2000" dirty="0">
-              <a:solidFill>
-                <a:srgbClr val="FFC000"/>
-              </a:solidFill>
-              <a:latin typeface="Helvetica Neue" panose="02000503000000020004" pitchFamily="2" charset="0"/>
-              <a:ea typeface="Helvetica Neue" panose="02000503000000020004" pitchFamily="2" charset="0"/>
-              <a:cs typeface="Helvetica Neue" panose="02000503000000020004" pitchFamily="2" charset="0"/>
-            </a:endParaRPr>
-          </a:p>
-          <a:p>
-            <a:pPr marL="457200" indent="-457200">
-              <a:buFont typeface="Arial" panose="020B0604020202020204" pitchFamily="34" charset="0"/>
-              <a:buChar char="•"/>
-              <a:defRPr/>
-            </a:pPr>
-            <a:r>
-              <a:rPr kumimoji="0" lang="en-US" sz="2000" b="0" i="0" u="none" strike="noStrike" kern="1200" cap="none" spc="0" normalizeH="0" baseline="0" noProof="0" dirty="0">
-                <a:ln>
-                  <a:noFill/>
-                </a:ln>
-                <a:solidFill>
-                  <a:srgbClr val="FFC000"/>
-                </a:solidFill>
-                <a:effectLst/>
-                <a:uLnTx/>
-                <a:uFillTx/>
-                <a:latin typeface="Helvetica Neue" panose="02000503000000020004" pitchFamily="2" charset="0"/>
-                <a:ea typeface="Helvetica Neue" panose="02000503000000020004" pitchFamily="2" charset="0"/>
-                <a:cs typeface="Helvetica Neue" panose="02000503000000020004" pitchFamily="2" charset="0"/>
-              </a:rPr>
-              <a:t>Vector potential q/(vr) intersecting a point potential with an eightball. What happens.</a:t>
-            </a:r>
-          </a:p>
-          <a:p>
-            <a:pPr marL="914400" lvl="1" indent="-457200">
-              <a:buFont typeface="Arial" panose="020B0604020202020204" pitchFamily="34" charset="0"/>
-              <a:buChar char="•"/>
-              <a:defRPr/>
-            </a:pPr>
-            <a:endParaRPr kumimoji="0" lang="en-US" sz="2000" b="0" i="0" u="none" strike="noStrike" kern="1200" cap="none" spc="0" normalizeH="0" baseline="0" noProof="0" dirty="0">
-              <a:ln>
-                <a:noFill/>
-              </a:ln>
-              <a:solidFill>
-                <a:srgbClr val="FFC000"/>
-              </a:solidFill>
-              <a:effectLst/>
-              <a:uLnTx/>
-              <a:uFillTx/>
-              <a:latin typeface="Helvetica Neue" panose="02000503000000020004" pitchFamily="2" charset="0"/>
-              <a:ea typeface="Helvetica Neue" panose="02000503000000020004" pitchFamily="2" charset="0"/>
-              <a:cs typeface="Helvetica Neue" panose="02000503000000020004" pitchFamily="2" charset="0"/>
-            </a:endParaRPr>
-          </a:p>
-        </p:txBody>
-      </p:sp>
-    </p:spTree>
-    <p:extLst>
-      <p:ext uri="{BB962C8B-B14F-4D97-AF65-F5344CB8AC3E}">
-        <p14:creationId xmlns:p14="http://schemas.microsoft.com/office/powerpoint/2010/main" val="2018786501"/>
-      </p:ext>
-    </p:extLst>
-  </p:cSld>
-  <p:clrMapOvr>
-    <a:masterClrMapping/>
-  </p:clrMapOvr>
-</p:sld>
-</file>
-
-<file path=ppt/slides/slide13.xml><?xml version="1.0" encoding="utf-8"?>
-<p:sld xmlns:a="http://schemas.openxmlformats.org/drawingml/2006/main" xmlns:r="http://schemas.openxmlformats.org/officeDocument/2006/relationships" xmlns:p="http://schemas.openxmlformats.org/presentationml/2006/main">
-  <p:cSld>
-    <p:bg>
-      <p:bgPr>
-        <a:solidFill>
-          <a:schemeClr val="tx1"/>
-        </a:solidFill>
-        <a:effectLst/>
-      </p:bgPr>
-    </p:bg>
-    <p:spTree>
-      <p:nvGrpSpPr>
-        <p:cNvPr id="1" name="">
-          <a:extLst>
-            <a:ext uri="{FF2B5EF4-FFF2-40B4-BE49-F238E27FC236}">
-              <a16:creationId xmlns:a16="http://schemas.microsoft.com/office/drawing/2014/main" id="{B42687C2-1ACA-4221-3A05-E1E762C02C80}"/>
-            </a:ext>
-          </a:extLst>
-        </p:cNvPr>
-        <p:cNvGrpSpPr/>
-        <p:nvPr/>
-      </p:nvGrpSpPr>
-      <p:grpSpPr>
-        <a:xfrm>
-          <a:off x="0" y="0"/>
-          <a:ext cx="0" cy="0"/>
-          <a:chOff x="0" y="0"/>
-          <a:chExt cx="0" cy="0"/>
-        </a:xfrm>
-      </p:grpSpPr>
-      <p:sp>
-        <p:nvSpPr>
-          <p:cNvPr id="9" name="Rectangle 8">
-            <a:extLst>
-              <a:ext uri="{FF2B5EF4-FFF2-40B4-BE49-F238E27FC236}">
-                <a16:creationId xmlns:a16="http://schemas.microsoft.com/office/drawing/2014/main" id="{1AF6C2A7-F0B0-8E51-48DD-B3758D933ADD}"/>
-              </a:ext>
-              <a:ext uri="{C183D7F6-B498-43B3-948B-1728B52AA6E4}">
-                <adec:decorative xmlns:adec="http://schemas.microsoft.com/office/drawing/2017/decorative" val="1"/>
-              </a:ext>
-            </a:extLst>
-          </p:cNvPr>
-          <p:cNvSpPr>
-            <a:spLocks noGrp="1" noRot="1" noChangeAspect="1" noMove="1" noResize="1" noEditPoints="1" noAdjustHandles="1" noChangeArrowheads="1" noChangeShapeType="1" noTextEdit="1"/>
-          </p:cNvSpPr>
-          <p:nvPr>
-            <p:extLst>
-              <p:ext uri="{386F3935-93C4-4BCD-93E2-E3B085C9AB24}">
-                <p16:designElem xmlns:p16="http://schemas.microsoft.com/office/powerpoint/2015/main" val="1"/>
-              </p:ext>
-            </p:extLst>
-          </p:nvPr>
-        </p:nvSpPr>
-        <p:spPr>
-          <a:xfrm>
-            <a:off x="0" y="-3324"/>
-            <a:ext cx="12192000" cy="6861324"/>
-          </a:xfrm>
-          <a:prstGeom prst="rect">
-            <a:avLst/>
-          </a:prstGeom>
-          <a:solidFill>
-            <a:schemeClr val="tx1"/>
-          </a:solidFill>
-          <a:ln>
-            <a:noFill/>
-          </a:ln>
-        </p:spPr>
-        <p:style>
-          <a:lnRef idx="2">
-            <a:schemeClr val="accent1">
-              <a:shade val="50000"/>
-            </a:schemeClr>
-          </a:lnRef>
-          <a:fillRef idx="1">
-            <a:schemeClr val="accent1"/>
-          </a:fillRef>
-          <a:effectRef idx="0">
-            <a:schemeClr val="accent1"/>
-          </a:effectRef>
-          <a:fontRef idx="minor">
-            <a:schemeClr val="lt1"/>
-          </a:fontRef>
-        </p:style>
-        <p:txBody>
-          <a:bodyPr rtlCol="0" anchor="ctr"/>
-          <a:lstStyle/>
-          <a:p>
-            <a:pPr marL="0" marR="0" lvl="0" indent="0" algn="ctr" defTabSz="914400" rtl="0" eaLnBrk="1" fontAlgn="auto" latinLnBrk="0" hangingPunct="1">
-              <a:lnSpc>
-                <a:spcPct val="100000"/>
-              </a:lnSpc>
-              <a:spcBef>
-                <a:spcPts val="0"/>
-              </a:spcBef>
-              <a:spcAft>
-                <a:spcPts val="0"/>
-              </a:spcAft>
-              <a:buClrTx/>
-              <a:buSzTx/>
-              <a:buFontTx/>
-              <a:buNone/>
-              <a:tabLst/>
-              <a:defRPr/>
-            </a:pPr>
-            <a:endParaRPr kumimoji="0" lang="en-US" sz="1800" b="0" i="0" u="none" strike="noStrike" kern="1200" cap="none" spc="0" normalizeH="0" baseline="0" noProof="0">
-              <a:ln>
-                <a:noFill/>
-              </a:ln>
-              <a:solidFill>
-                <a:prstClr val="white"/>
-              </a:solidFill>
-              <a:effectLst/>
-              <a:uLnTx/>
-              <a:uFillTx/>
-              <a:latin typeface="Calibri" panose="020F0502020204030204"/>
-              <a:ea typeface="+mn-ea"/>
-              <a:cs typeface="+mn-cs"/>
-            </a:endParaRPr>
-          </a:p>
-        </p:txBody>
-      </p:sp>
-      <p:sp>
-        <p:nvSpPr>
-          <p:cNvPr id="11" name="Rectangle 10">
-            <a:extLst>
-              <a:ext uri="{FF2B5EF4-FFF2-40B4-BE49-F238E27FC236}">
-                <a16:creationId xmlns:a16="http://schemas.microsoft.com/office/drawing/2014/main" id="{248E2E7A-20EB-9181-C8A0-E3AF09267045}"/>
-              </a:ext>
-              <a:ext uri="{C183D7F6-B498-43B3-948B-1728B52AA6E4}">
-                <adec:decorative xmlns:adec="http://schemas.microsoft.com/office/drawing/2017/decorative" val="1"/>
-              </a:ext>
-            </a:extLst>
-          </p:cNvPr>
-          <p:cNvSpPr>
-            <a:spLocks noGrp="1" noRot="1" noChangeAspect="1" noMove="1" noResize="1" noEditPoints="1" noAdjustHandles="1" noChangeArrowheads="1" noChangeShapeType="1" noTextEdit="1"/>
-          </p:cNvSpPr>
-          <p:nvPr>
-            <p:extLst>
-              <p:ext uri="{386F3935-93C4-4BCD-93E2-E3B085C9AB24}">
-                <p16:designElem xmlns:p16="http://schemas.microsoft.com/office/powerpoint/2015/main" val="1"/>
-              </p:ext>
-            </p:extLst>
-          </p:nvPr>
-        </p:nvSpPr>
-        <p:spPr bwMode="ltGray">
-          <a:xfrm>
-            <a:off x="321734" y="321733"/>
-            <a:ext cx="11573488" cy="6214534"/>
-          </a:xfrm>
-          <a:prstGeom prst="rect">
-            <a:avLst/>
-          </a:prstGeom>
-          <a:solidFill>
-            <a:schemeClr val="bg1">
-              <a:lumMod val="75000"/>
-              <a:lumOff val="25000"/>
-            </a:schemeClr>
-          </a:solidFill>
-          <a:ln w="127000" cap="sq" cmpd="thinThick">
-            <a:solidFill>
-              <a:schemeClr val="bg1">
-                <a:lumMod val="75000"/>
-                <a:lumOff val="25000"/>
-              </a:schemeClr>
-            </a:solidFill>
-          </a:ln>
-        </p:spPr>
-        <p:style>
-          <a:lnRef idx="2">
-            <a:schemeClr val="accent1">
-              <a:shade val="50000"/>
-            </a:schemeClr>
-          </a:lnRef>
-          <a:fillRef idx="1">
-            <a:schemeClr val="accent1"/>
-          </a:fillRef>
-          <a:effectRef idx="0">
-            <a:schemeClr val="accent1"/>
-          </a:effectRef>
-          <a:fontRef idx="minor">
-            <a:schemeClr val="lt1"/>
-          </a:fontRef>
-        </p:style>
-        <p:txBody>
-          <a:bodyPr rtlCol="0" anchor="ctr"/>
-          <a:lstStyle/>
-          <a:p>
-            <a:pPr marL="0" marR="0" lvl="0" indent="0" algn="ctr" defTabSz="914400" rtl="0" eaLnBrk="1" fontAlgn="auto" latinLnBrk="0" hangingPunct="1">
-              <a:lnSpc>
-                <a:spcPct val="100000"/>
-              </a:lnSpc>
-              <a:spcBef>
-                <a:spcPts val="0"/>
-              </a:spcBef>
-              <a:spcAft>
-                <a:spcPts val="0"/>
-              </a:spcAft>
-              <a:buClrTx/>
-              <a:buSzTx/>
-              <a:buFontTx/>
-              <a:buNone/>
-              <a:tabLst/>
-              <a:defRPr/>
-            </a:pPr>
-            <a:endParaRPr kumimoji="0" lang="en-US" sz="1800" b="0" i="0" u="none" strike="noStrike" kern="1200" cap="none" spc="0" normalizeH="0" baseline="0" noProof="0">
-              <a:ln>
-                <a:noFill/>
-              </a:ln>
-              <a:solidFill>
-                <a:prstClr val="white"/>
-              </a:solidFill>
-              <a:effectLst/>
-              <a:uLnTx/>
-              <a:uFillTx/>
-              <a:latin typeface="Calibri" panose="020F0502020204030204"/>
-              <a:ea typeface="+mn-ea"/>
-              <a:cs typeface="+mn-cs"/>
-            </a:endParaRPr>
-          </a:p>
-        </p:txBody>
-      </p:sp>
-      <p:sp>
-        <p:nvSpPr>
-          <p:cNvPr id="2" name="Title 1">
-            <a:extLst>
-              <a:ext uri="{FF2B5EF4-FFF2-40B4-BE49-F238E27FC236}">
-                <a16:creationId xmlns:a16="http://schemas.microsoft.com/office/drawing/2014/main" id="{012F44F7-D857-C73A-E74F-A30024A8011A}"/>
-              </a:ext>
-            </a:extLst>
-          </p:cNvPr>
-          <p:cNvSpPr>
-            <a:spLocks noGrp="1"/>
-          </p:cNvSpPr>
-          <p:nvPr>
-            <p:ph type="ctrTitle"/>
-          </p:nvPr>
-        </p:nvSpPr>
-        <p:spPr>
-          <a:xfrm>
-            <a:off x="1524000" y="1122362"/>
-            <a:ext cx="9144000" cy="2840037"/>
-          </a:xfrm>
-        </p:spPr>
-        <p:txBody>
-          <a:bodyPr>
-            <a:normAutofit/>
-          </a:bodyPr>
-          <a:lstStyle/>
-          <a:p>
-            <a:r>
-              <a:rPr lang="en-US" sz="5800" dirty="0"/>
-              <a:t>Thank You</a:t>
-            </a:r>
-          </a:p>
-        </p:txBody>
-      </p:sp>
-      <p:sp>
-        <p:nvSpPr>
-          <p:cNvPr id="3" name="Subtitle 2">
-            <a:extLst>
-              <a:ext uri="{FF2B5EF4-FFF2-40B4-BE49-F238E27FC236}">
-                <a16:creationId xmlns:a16="http://schemas.microsoft.com/office/drawing/2014/main" id="{35A07F9E-DC7D-E27C-C733-06F4496CD544}"/>
-              </a:ext>
-            </a:extLst>
-          </p:cNvPr>
-          <p:cNvSpPr>
-            <a:spLocks noGrp="1"/>
-          </p:cNvSpPr>
-          <p:nvPr>
-            <p:ph type="subTitle" idx="1"/>
-          </p:nvPr>
-        </p:nvSpPr>
-        <p:spPr>
-          <a:xfrm>
-            <a:off x="1524000" y="4256436"/>
-            <a:ext cx="9144000" cy="1600818"/>
-          </a:xfrm>
-        </p:spPr>
-        <p:txBody>
-          <a:bodyPr>
-            <a:normAutofit/>
-          </a:bodyPr>
-          <a:lstStyle/>
-          <a:p>
-            <a:r>
-              <a:rPr lang="en-US" dirty="0"/>
-              <a:t>Questions?</a:t>
-            </a:r>
-          </a:p>
-        </p:txBody>
-      </p:sp>
-      <p:cxnSp>
-        <p:nvCxnSpPr>
-          <p:cNvPr id="13" name="Straight Connector 12">
-            <a:extLst>
-              <a:ext uri="{FF2B5EF4-FFF2-40B4-BE49-F238E27FC236}">
-                <a16:creationId xmlns:a16="http://schemas.microsoft.com/office/drawing/2014/main" id="{EB341B4C-755E-8B3B-D91F-72AAAB35D0C2}"/>
-              </a:ext>
-              <a:ext uri="{C183D7F6-B498-43B3-948B-1728B52AA6E4}">
-                <adec:decorative xmlns:adec="http://schemas.microsoft.com/office/drawing/2017/decorative" val="1"/>
-              </a:ext>
-            </a:extLst>
-          </p:cNvPr>
-          <p:cNvCxnSpPr>
-            <a:cxnSpLocks noGrp="1" noRot="1" noChangeAspect="1" noMove="1" noResize="1" noEditPoints="1" noAdjustHandles="1" noChangeArrowheads="1" noChangeShapeType="1"/>
-          </p:cNvCxnSpPr>
-          <p:nvPr>
-            <p:extLst>
-              <p:ext uri="{386F3935-93C4-4BCD-93E2-E3B085C9AB24}">
-                <p16:designElem xmlns:p16="http://schemas.microsoft.com/office/powerpoint/2015/main" val="1"/>
-              </p:ext>
-            </p:extLst>
-          </p:nvPr>
-        </p:nvCxnSpPr>
-        <p:spPr>
-          <a:xfrm>
-            <a:off x="4724400" y="4109417"/>
-            <a:ext cx="2743200" cy="0"/>
-          </a:xfrm>
-          <a:prstGeom prst="line">
-            <a:avLst/>
-          </a:prstGeom>
-          <a:ln w="12700">
-            <a:solidFill>
-              <a:schemeClr val="tx1">
-                <a:lumMod val="85000"/>
-              </a:schemeClr>
-            </a:solidFill>
-          </a:ln>
-        </p:spPr>
-        <p:style>
-          <a:lnRef idx="1">
-            <a:schemeClr val="accent1"/>
-          </a:lnRef>
-          <a:fillRef idx="0">
-            <a:schemeClr val="accent1"/>
-          </a:fillRef>
-          <a:effectRef idx="0">
-            <a:schemeClr val="accent1"/>
-          </a:effectRef>
-          <a:fontRef idx="minor">
-            <a:schemeClr val="tx1"/>
-          </a:fontRef>
-        </p:style>
-      </p:cxnSp>
-      <p:sp>
-        <p:nvSpPr>
-          <p:cNvPr id="4" name="Footer Placeholder 3">
-            <a:extLst>
-              <a:ext uri="{FF2B5EF4-FFF2-40B4-BE49-F238E27FC236}">
-                <a16:creationId xmlns:a16="http://schemas.microsoft.com/office/drawing/2014/main" id="{13562932-CE27-9AD5-AFD9-084854760187}"/>
-              </a:ext>
-            </a:extLst>
-          </p:cNvPr>
-          <p:cNvSpPr>
-            <a:spLocks noGrp="1"/>
-          </p:cNvSpPr>
-          <p:nvPr>
-            <p:ph type="ftr" sz="quarter" idx="11"/>
-          </p:nvPr>
-        </p:nvSpPr>
-        <p:spPr>
-          <a:xfrm>
-            <a:off x="4038600" y="6159710"/>
-            <a:ext cx="4114800" cy="365125"/>
-          </a:xfrm>
-        </p:spPr>
-        <p:txBody>
-          <a:bodyPr>
-            <a:normAutofit/>
-          </a:bodyPr>
-          <a:lstStyle/>
-          <a:p>
-            <a:pPr marL="0" marR="0" lvl="0" indent="0" algn="ctr" defTabSz="914400" rtl="0" eaLnBrk="1" fontAlgn="auto" latinLnBrk="0" hangingPunct="1">
-              <a:lnSpc>
-                <a:spcPct val="100000"/>
-              </a:lnSpc>
-              <a:spcBef>
-                <a:spcPts val="0"/>
-              </a:spcBef>
-              <a:spcAft>
-                <a:spcPts val="600"/>
-              </a:spcAft>
-              <a:buClrTx/>
-              <a:buSzTx/>
-              <a:buFontTx/>
-              <a:buNone/>
-              <a:tabLst/>
-              <a:defRPr/>
-            </a:pPr>
-            <a:r>
-              <a:rPr kumimoji="0" lang="en-US" sz="1200" b="0" i="0" u="none" strike="noStrike" kern="1200" cap="none" spc="0" normalizeH="0" baseline="0" noProof="0" dirty="0">
-                <a:ln>
-                  <a:noFill/>
-                </a:ln>
-                <a:solidFill>
-                  <a:prstClr val="white">
-                    <a:tint val="75000"/>
-                  </a:prstClr>
-                </a:solidFill>
-                <a:effectLst/>
-                <a:uLnTx/>
-                <a:uFillTx/>
-                <a:latin typeface="Helvetica Neue" panose="02000503000000020004" pitchFamily="2" charset="0"/>
-                <a:ea typeface="Helvetica Neue" panose="02000503000000020004" pitchFamily="2" charset="0"/>
-                <a:cs typeface="Helvetica Neue" panose="02000503000000020004" pitchFamily="2" charset="0"/>
-              </a:rPr>
-              <a:t>J Mark Morris - Model of Nature</a:t>
-            </a:r>
-          </a:p>
-        </p:txBody>
-      </p:sp>
-    </p:spTree>
-    <p:extLst>
-      <p:ext uri="{BB962C8B-B14F-4D97-AF65-F5344CB8AC3E}">
-        <p14:creationId xmlns:p14="http://schemas.microsoft.com/office/powerpoint/2010/main" val="2568037380"/>
-      </p:ext>
-    </p:extLst>
-  </p:cSld>
-  <p:clrMapOvr>
-    <a:overrideClrMapping bg1="dk1" tx1="lt1" bg2="dk2" tx2="lt2" accent1="accent1" accent2="accent2" accent3="accent3" accent4="accent4" accent5="accent5" accent6="accent6" hlink="hlink" folHlink="folHlink"/>
-  </p:clrMapOvr>
-</p:sld>
-</file>
-
-<file path=ppt/slides/slide2.xml><?xml version="1.0" encoding="utf-8"?>
 <p:sld xmlns:a="http://schemas.openxmlformats.org/drawingml/2006/main" xmlns:r="http://schemas.openxmlformats.org/officeDocument/2006/relationships" xmlns:p="http://schemas.openxmlformats.org/presentationml/2006/main">
   <p:cSld>
     <p:bg>
@@ -12908,166 +8442,7 @@
 </p:sld>
 </file>
 
-<file path=ppt/slides/slide3.xml><?xml version="1.0" encoding="utf-8"?>
-<p:sld xmlns:a="http://schemas.openxmlformats.org/drawingml/2006/main" xmlns:r="http://schemas.openxmlformats.org/officeDocument/2006/relationships" xmlns:p="http://schemas.openxmlformats.org/presentationml/2006/main">
-  <p:cSld>
-    <p:bg>
-      <p:bgPr>
-        <a:solidFill>
-          <a:srgbClr val="7030A0"/>
-        </a:solidFill>
-        <a:effectLst/>
-      </p:bgPr>
-    </p:bg>
-    <p:spTree>
-      <p:nvGrpSpPr>
-        <p:cNvPr id="1" name="">
-          <a:extLst>
-            <a:ext uri="{FF2B5EF4-FFF2-40B4-BE49-F238E27FC236}">
-              <a16:creationId xmlns:a16="http://schemas.microsoft.com/office/drawing/2014/main" id="{CA7B9E01-B119-4CB2-7592-D53888C75F99}"/>
-            </a:ext>
-          </a:extLst>
-        </p:cNvPr>
-        <p:cNvGrpSpPr/>
-        <p:nvPr/>
-      </p:nvGrpSpPr>
-      <p:grpSpPr>
-        <a:xfrm>
-          <a:off x="0" y="0"/>
-          <a:ext cx="0" cy="0"/>
-          <a:chOff x="0" y="0"/>
-          <a:chExt cx="0" cy="0"/>
-        </a:xfrm>
-      </p:grpSpPr>
-      <p:sp>
-        <p:nvSpPr>
-          <p:cNvPr id="2" name="TextBox 1">
-            <a:extLst>
-              <a:ext uri="{FF2B5EF4-FFF2-40B4-BE49-F238E27FC236}">
-                <a16:creationId xmlns:a16="http://schemas.microsoft.com/office/drawing/2014/main" id="{4F14A8A5-2B2E-7901-77C5-1C6B5AC2E383}"/>
-              </a:ext>
-            </a:extLst>
-          </p:cNvPr>
-          <p:cNvSpPr txBox="1"/>
-          <p:nvPr/>
-        </p:nvSpPr>
-        <p:spPr>
-          <a:xfrm>
-            <a:off x="0" y="358254"/>
-            <a:ext cx="12191999" cy="2785378"/>
-          </a:xfrm>
-          <a:prstGeom prst="rect">
-            <a:avLst/>
-          </a:prstGeom>
-          <a:noFill/>
-        </p:spPr>
-        <p:txBody>
-          <a:bodyPr wrap="square" rtlCol="0">
-            <a:spAutoFit/>
-          </a:bodyPr>
-          <a:lstStyle/>
-          <a:p>
-            <a:pPr marL="0" marR="0" lvl="0" indent="0" algn="ctr" defTabSz="914400" rtl="0" eaLnBrk="1" fontAlgn="auto" latinLnBrk="0" hangingPunct="1">
-              <a:lnSpc>
-                <a:spcPts val="11000"/>
-              </a:lnSpc>
-              <a:spcBef>
-                <a:spcPts val="0"/>
-              </a:spcBef>
-              <a:spcAft>
-                <a:spcPts val="0"/>
-              </a:spcAft>
-              <a:buClrTx/>
-              <a:buSzTx/>
-              <a:buFontTx/>
-              <a:buNone/>
-              <a:tabLst/>
-              <a:defRPr/>
-            </a:pPr>
-            <a:r>
-              <a:rPr kumimoji="0" lang="en-US" sz="11500" b="0" i="0" u="none" strike="noStrike" kern="1200" cap="none" spc="0" normalizeH="0" baseline="0" noProof="0" dirty="0">
-                <a:ln>
-                  <a:noFill/>
-                </a:ln>
-                <a:solidFill>
-                  <a:prstClr val="white"/>
-                </a:solidFill>
-                <a:effectLst/>
-                <a:uLnTx/>
-                <a:uFillTx/>
-                <a:latin typeface="Helvetica Neue UltraLight" panose="02000206000000020004" pitchFamily="2" charset="0"/>
-                <a:ea typeface="Helvetica Neue UltraLight" panose="02000206000000020004" pitchFamily="2" charset="0"/>
-                <a:cs typeface="Helvetica Neue" panose="02000503000000020004" pitchFamily="2" charset="0"/>
-              </a:rPr>
-              <a:t>neoclassical.ai</a:t>
-            </a:r>
-          </a:p>
-          <a:p>
-            <a:pPr marL="0" marR="0" lvl="0" indent="0" algn="ctr" defTabSz="914400" rtl="0" eaLnBrk="1" fontAlgn="auto" latinLnBrk="0" hangingPunct="1">
-              <a:lnSpc>
-                <a:spcPts val="10000"/>
-              </a:lnSpc>
-              <a:spcBef>
-                <a:spcPts val="0"/>
-              </a:spcBef>
-              <a:spcAft>
-                <a:spcPts val="0"/>
-              </a:spcAft>
-              <a:buClrTx/>
-              <a:buSzTx/>
-              <a:buFontTx/>
-              <a:buNone/>
-              <a:tabLst/>
-              <a:defRPr/>
-            </a:pPr>
-            <a:r>
-              <a:rPr kumimoji="0" lang="en-US" sz="9600" b="1" i="0" u="none" strike="noStrike" kern="1200" cap="none" spc="0" normalizeH="0" baseline="0" noProof="0" dirty="0">
-                <a:ln>
-                  <a:noFill/>
-                </a:ln>
-                <a:solidFill>
-                  <a:srgbClr val="FFC000"/>
-                </a:solidFill>
-                <a:effectLst/>
-                <a:uLnTx/>
-                <a:uFillTx/>
-                <a:latin typeface="Helvetica Neue Condensed Black" panose="02000503000000020004" pitchFamily="2" charset="0"/>
-                <a:ea typeface="Helvetica Neue Condensed Black" panose="02000503000000020004" pitchFamily="2" charset="0"/>
-                <a:cs typeface="Helvetica Neue Condensed Black" panose="02000503000000020004" pitchFamily="2" charset="0"/>
-              </a:rPr>
-              <a:t>Hamiltonian</a:t>
-            </a:r>
-            <a:endParaRPr kumimoji="0" lang="en-US" sz="9600" b="1" i="0" u="none" strike="noStrike" kern="1200" cap="none" spc="0" normalizeH="0" baseline="0" noProof="0" dirty="0">
-              <a:ln>
-                <a:noFill/>
-              </a:ln>
-              <a:solidFill>
-                <a:srgbClr val="FF8AD8"/>
-              </a:solidFill>
-              <a:effectLst/>
-              <a:uLnTx/>
-              <a:uFillTx/>
-              <a:latin typeface="Helvetica Neue Condensed Black" panose="02000503000000020004" pitchFamily="2" charset="0"/>
-              <a:ea typeface="Helvetica Neue Condensed Black" panose="02000503000000020004" pitchFamily="2" charset="0"/>
-              <a:cs typeface="Helvetica Neue Condensed Black" panose="02000503000000020004" pitchFamily="2" charset="0"/>
-            </a:endParaRPr>
-          </a:p>
-        </p:txBody>
-      </p:sp>
-    </p:spTree>
-    <p:extLst>
-      <p:ext uri="{BB962C8B-B14F-4D97-AF65-F5344CB8AC3E}">
-        <p14:creationId xmlns:p14="http://schemas.microsoft.com/office/powerpoint/2010/main" val="2135446065"/>
-      </p:ext>
-    </p:extLst>
-  </p:cSld>
-  <p:clrMapOvr>
-    <a:masterClrMapping/>
-  </p:clrMapOvr>
-</p:sld>
-</file>
-
-<file path=ppt/slides/slide4.xml><?xml version="1.0" encoding="utf-8"?>
+<file path=ppt/slides/slide2.xml><?xml version="1.0" encoding="utf-8"?>
 <p:sld xmlns:a="http://schemas.openxmlformats.org/drawingml/2006/main" xmlns:r="http://schemas.openxmlformats.org/officeDocument/2006/relationships" xmlns:p="http://schemas.openxmlformats.org/presentationml/2006/main">
   <p:cSld>
     <p:bg>
@@ -13586,428 +8961,7 @@
 </p:sld>
 </file>
 
-<file path=ppt/slides/slide5.xml><?xml version="1.0" encoding="utf-8"?>
-<p:sld xmlns:a="http://schemas.openxmlformats.org/drawingml/2006/main" xmlns:r="http://schemas.openxmlformats.org/officeDocument/2006/relationships" xmlns:p="http://schemas.openxmlformats.org/presentationml/2006/main">
-  <p:cSld>
-    <p:bg>
-      <p:bgPr>
-        <a:solidFill>
-          <a:schemeClr val="tx1"/>
-        </a:solidFill>
-        <a:effectLst/>
-      </p:bgPr>
-    </p:bg>
-    <p:spTree>
-      <p:nvGrpSpPr>
-        <p:cNvPr id="1" name=""/>
-        <p:cNvGrpSpPr/>
-        <p:nvPr/>
-      </p:nvGrpSpPr>
-      <p:grpSpPr>
-        <a:xfrm>
-          <a:off x="0" y="0"/>
-          <a:ext cx="0" cy="0"/>
-          <a:chOff x="0" y="0"/>
-          <a:chExt cx="0" cy="0"/>
-        </a:xfrm>
-      </p:grpSpPr>
-      <p:sp>
-        <p:nvSpPr>
-          <p:cNvPr id="9" name="Rectangle 8">
-            <a:extLst>
-              <a:ext uri="{FF2B5EF4-FFF2-40B4-BE49-F238E27FC236}">
-                <a16:creationId xmlns:a16="http://schemas.microsoft.com/office/drawing/2014/main" id="{2A8AA5BC-4F7A-4226-8F99-6D824B226A97}"/>
-              </a:ext>
-              <a:ext uri="{C183D7F6-B498-43B3-948B-1728B52AA6E4}">
-                <adec:decorative xmlns:adec="http://schemas.microsoft.com/office/drawing/2017/decorative" val="1"/>
-              </a:ext>
-            </a:extLst>
-          </p:cNvPr>
-          <p:cNvSpPr>
-            <a:spLocks noGrp="1" noRot="1" noChangeAspect="1" noMove="1" noResize="1" noEditPoints="1" noAdjustHandles="1" noChangeArrowheads="1" noChangeShapeType="1" noTextEdit="1"/>
-          </p:cNvSpPr>
-          <p:nvPr>
-            <p:extLst>
-              <p:ext uri="{386F3935-93C4-4BCD-93E2-E3B085C9AB24}">
-                <p16:designElem xmlns:p16="http://schemas.microsoft.com/office/powerpoint/2015/main" val="1"/>
-              </p:ext>
-            </p:extLst>
-          </p:nvPr>
-        </p:nvSpPr>
-        <p:spPr>
-          <a:xfrm>
-            <a:off x="0" y="-3324"/>
-            <a:ext cx="12192000" cy="6861324"/>
-          </a:xfrm>
-          <a:prstGeom prst="rect">
-            <a:avLst/>
-          </a:prstGeom>
-          <a:solidFill>
-            <a:schemeClr val="tx1"/>
-          </a:solidFill>
-          <a:ln>
-            <a:noFill/>
-          </a:ln>
-        </p:spPr>
-        <p:style>
-          <a:lnRef idx="2">
-            <a:schemeClr val="accent1">
-              <a:shade val="50000"/>
-            </a:schemeClr>
-          </a:lnRef>
-          <a:fillRef idx="1">
-            <a:schemeClr val="accent1"/>
-          </a:fillRef>
-          <a:effectRef idx="0">
-            <a:schemeClr val="accent1"/>
-          </a:effectRef>
-          <a:fontRef idx="minor">
-            <a:schemeClr val="lt1"/>
-          </a:fontRef>
-        </p:style>
-        <p:txBody>
-          <a:bodyPr rtlCol="0" anchor="ctr"/>
-          <a:lstStyle/>
-          <a:p>
-            <a:pPr marL="0" marR="0" lvl="0" indent="0" algn="ctr" defTabSz="914400" rtl="0" eaLnBrk="1" fontAlgn="auto" latinLnBrk="0" hangingPunct="1">
-              <a:lnSpc>
-                <a:spcPct val="100000"/>
-              </a:lnSpc>
-              <a:spcBef>
-                <a:spcPts val="0"/>
-              </a:spcBef>
-              <a:spcAft>
-                <a:spcPts val="0"/>
-              </a:spcAft>
-              <a:buClrTx/>
-              <a:buSzTx/>
-              <a:buFontTx/>
-              <a:buNone/>
-              <a:tabLst/>
-              <a:defRPr/>
-            </a:pPr>
-            <a:endParaRPr kumimoji="0" lang="en-US" sz="1800" b="0" i="0" u="none" strike="noStrike" kern="1200" cap="none" spc="0" normalizeH="0" baseline="0" noProof="0">
-              <a:ln>
-                <a:noFill/>
-              </a:ln>
-              <a:solidFill>
-                <a:prstClr val="white"/>
-              </a:solidFill>
-              <a:effectLst/>
-              <a:uLnTx/>
-              <a:uFillTx/>
-              <a:latin typeface="Calibri" panose="020F0502020204030204"/>
-              <a:ea typeface="+mn-ea"/>
-              <a:cs typeface="+mn-cs"/>
-            </a:endParaRPr>
-          </a:p>
-        </p:txBody>
-      </p:sp>
-      <p:sp>
-        <p:nvSpPr>
-          <p:cNvPr id="11" name="Rectangle 10">
-            <a:extLst>
-              <a:ext uri="{FF2B5EF4-FFF2-40B4-BE49-F238E27FC236}">
-                <a16:creationId xmlns:a16="http://schemas.microsoft.com/office/drawing/2014/main" id="{3E5445C6-DD42-4979-86FF-03730E8C6DB0}"/>
-              </a:ext>
-              <a:ext uri="{C183D7F6-B498-43B3-948B-1728B52AA6E4}">
-                <adec:decorative xmlns:adec="http://schemas.microsoft.com/office/drawing/2017/decorative" val="1"/>
-              </a:ext>
-            </a:extLst>
-          </p:cNvPr>
-          <p:cNvSpPr>
-            <a:spLocks noGrp="1" noRot="1" noChangeAspect="1" noMove="1" noResize="1" noEditPoints="1" noAdjustHandles="1" noChangeArrowheads="1" noChangeShapeType="1" noTextEdit="1"/>
-          </p:cNvSpPr>
-          <p:nvPr>
-            <p:extLst>
-              <p:ext uri="{386F3935-93C4-4BCD-93E2-E3B085C9AB24}">
-                <p16:designElem xmlns:p16="http://schemas.microsoft.com/office/powerpoint/2015/main" val="1"/>
-              </p:ext>
-            </p:extLst>
-          </p:nvPr>
-        </p:nvSpPr>
-        <p:spPr bwMode="ltGray">
-          <a:xfrm>
-            <a:off x="321734" y="321733"/>
-            <a:ext cx="11573488" cy="6214534"/>
-          </a:xfrm>
-          <a:prstGeom prst="rect">
-            <a:avLst/>
-          </a:prstGeom>
-          <a:solidFill>
-            <a:schemeClr val="bg1">
-              <a:lumMod val="75000"/>
-              <a:lumOff val="25000"/>
-            </a:schemeClr>
-          </a:solidFill>
-          <a:ln w="127000" cap="sq" cmpd="thinThick">
-            <a:solidFill>
-              <a:schemeClr val="bg1">
-                <a:lumMod val="75000"/>
-                <a:lumOff val="25000"/>
-              </a:schemeClr>
-            </a:solidFill>
-          </a:ln>
-        </p:spPr>
-        <p:style>
-          <a:lnRef idx="2">
-            <a:schemeClr val="accent1">
-              <a:shade val="50000"/>
-            </a:schemeClr>
-          </a:lnRef>
-          <a:fillRef idx="1">
-            <a:schemeClr val="accent1"/>
-          </a:fillRef>
-          <a:effectRef idx="0">
-            <a:schemeClr val="accent1"/>
-          </a:effectRef>
-          <a:fontRef idx="minor">
-            <a:schemeClr val="lt1"/>
-          </a:fontRef>
-        </p:style>
-        <p:txBody>
-          <a:bodyPr rtlCol="0" anchor="ctr"/>
-          <a:lstStyle/>
-          <a:p>
-            <a:pPr marL="0" marR="0" lvl="0" indent="0" algn="ctr" defTabSz="914400" rtl="0" eaLnBrk="1" fontAlgn="auto" latinLnBrk="0" hangingPunct="1">
-              <a:lnSpc>
-                <a:spcPct val="100000"/>
-              </a:lnSpc>
-              <a:spcBef>
-                <a:spcPts val="0"/>
-              </a:spcBef>
-              <a:spcAft>
-                <a:spcPts val="0"/>
-              </a:spcAft>
-              <a:buClrTx/>
-              <a:buSzTx/>
-              <a:buFontTx/>
-              <a:buNone/>
-              <a:tabLst/>
-              <a:defRPr/>
-            </a:pPr>
-            <a:endParaRPr kumimoji="0" lang="en-US" sz="1800" b="0" i="0" u="none" strike="noStrike" kern="1200" cap="none" spc="0" normalizeH="0" baseline="0" noProof="0">
-              <a:ln>
-                <a:noFill/>
-              </a:ln>
-              <a:solidFill>
-                <a:prstClr val="white"/>
-              </a:solidFill>
-              <a:effectLst/>
-              <a:uLnTx/>
-              <a:uFillTx/>
-              <a:latin typeface="Calibri" panose="020F0502020204030204"/>
-              <a:ea typeface="+mn-ea"/>
-              <a:cs typeface="+mn-cs"/>
-            </a:endParaRPr>
-          </a:p>
-        </p:txBody>
-      </p:sp>
-      <p:sp>
-        <p:nvSpPr>
-          <p:cNvPr id="2" name="Title 1">
-            <a:extLst>
-              <a:ext uri="{FF2B5EF4-FFF2-40B4-BE49-F238E27FC236}">
-                <a16:creationId xmlns:a16="http://schemas.microsoft.com/office/drawing/2014/main" id="{7710B119-EC53-BA46-BAA3-CB758CDEDAF5}"/>
-              </a:ext>
-            </a:extLst>
-          </p:cNvPr>
-          <p:cNvSpPr>
-            <a:spLocks noGrp="1"/>
-          </p:cNvSpPr>
-          <p:nvPr>
-            <p:ph type="ctrTitle"/>
-          </p:nvPr>
-        </p:nvSpPr>
-        <p:spPr>
-          <a:xfrm>
-            <a:off x="1524000" y="1122362"/>
-            <a:ext cx="9144000" cy="2840037"/>
-          </a:xfrm>
-        </p:spPr>
-        <p:txBody>
-          <a:bodyPr>
-            <a:normAutofit/>
-          </a:bodyPr>
-          <a:lstStyle/>
-          <a:p>
-            <a:r>
-              <a:rPr lang="en-US" sz="5800" dirty="0"/>
-              <a:t>Thank You</a:t>
-            </a:r>
-          </a:p>
-        </p:txBody>
-      </p:sp>
-      <p:sp>
-        <p:nvSpPr>
-          <p:cNvPr id="3" name="Subtitle 2">
-            <a:extLst>
-              <a:ext uri="{FF2B5EF4-FFF2-40B4-BE49-F238E27FC236}">
-                <a16:creationId xmlns:a16="http://schemas.microsoft.com/office/drawing/2014/main" id="{44E6BC0E-0DB7-C346-A0CC-E3CB36C29A54}"/>
-              </a:ext>
-            </a:extLst>
-          </p:cNvPr>
-          <p:cNvSpPr>
-            <a:spLocks noGrp="1"/>
-          </p:cNvSpPr>
-          <p:nvPr>
-            <p:ph type="subTitle" idx="1"/>
-          </p:nvPr>
-        </p:nvSpPr>
-        <p:spPr>
-          <a:xfrm>
-            <a:off x="1524000" y="4256436"/>
-            <a:ext cx="9144000" cy="1600818"/>
-          </a:xfrm>
-        </p:spPr>
-        <p:txBody>
-          <a:bodyPr>
-            <a:normAutofit/>
-          </a:bodyPr>
-          <a:lstStyle/>
-          <a:p>
-            <a:r>
-              <a:rPr lang="en-US" dirty="0"/>
-              <a:t>Questions?</a:t>
-            </a:r>
-          </a:p>
-        </p:txBody>
-      </p:sp>
-      <p:cxnSp>
-        <p:nvCxnSpPr>
-          <p:cNvPr id="13" name="Straight Connector 12">
-            <a:extLst>
-              <a:ext uri="{FF2B5EF4-FFF2-40B4-BE49-F238E27FC236}">
-                <a16:creationId xmlns:a16="http://schemas.microsoft.com/office/drawing/2014/main" id="{45000665-DFC7-417E-8FD7-516A0F15C975}"/>
-              </a:ext>
-              <a:ext uri="{C183D7F6-B498-43B3-948B-1728B52AA6E4}">
-                <adec:decorative xmlns:adec="http://schemas.microsoft.com/office/drawing/2017/decorative" val="1"/>
-              </a:ext>
-            </a:extLst>
-          </p:cNvPr>
-          <p:cNvCxnSpPr>
-            <a:cxnSpLocks noGrp="1" noRot="1" noChangeAspect="1" noMove="1" noResize="1" noEditPoints="1" noAdjustHandles="1" noChangeArrowheads="1" noChangeShapeType="1"/>
-          </p:cNvCxnSpPr>
-          <p:nvPr>
-            <p:extLst>
-              <p:ext uri="{386F3935-93C4-4BCD-93E2-E3B085C9AB24}">
-                <p16:designElem xmlns:p16="http://schemas.microsoft.com/office/powerpoint/2015/main" val="1"/>
-              </p:ext>
-            </p:extLst>
-          </p:nvPr>
-        </p:nvCxnSpPr>
-        <p:spPr>
-          <a:xfrm>
-            <a:off x="4724400" y="4109417"/>
-            <a:ext cx="2743200" cy="0"/>
-          </a:xfrm>
-          <a:prstGeom prst="line">
-            <a:avLst/>
-          </a:prstGeom>
-          <a:ln w="12700">
-            <a:solidFill>
-              <a:schemeClr val="tx1">
-                <a:lumMod val="85000"/>
-              </a:schemeClr>
-            </a:solidFill>
-          </a:ln>
-        </p:spPr>
-        <p:style>
-          <a:lnRef idx="1">
-            <a:schemeClr val="accent1"/>
-          </a:lnRef>
-          <a:fillRef idx="0">
-            <a:schemeClr val="accent1"/>
-          </a:fillRef>
-          <a:effectRef idx="0">
-            <a:schemeClr val="accent1"/>
-          </a:effectRef>
-          <a:fontRef idx="minor">
-            <a:schemeClr val="tx1"/>
-          </a:fontRef>
-        </p:style>
-      </p:cxnSp>
-      <p:sp>
-        <p:nvSpPr>
-          <p:cNvPr id="4" name="Footer Placeholder 3">
-            <a:extLst>
-              <a:ext uri="{FF2B5EF4-FFF2-40B4-BE49-F238E27FC236}">
-                <a16:creationId xmlns:a16="http://schemas.microsoft.com/office/drawing/2014/main" id="{9E726E67-7B90-B642-8D26-6DDF890C4785}"/>
-              </a:ext>
-            </a:extLst>
-          </p:cNvPr>
-          <p:cNvSpPr>
-            <a:spLocks noGrp="1"/>
-          </p:cNvSpPr>
-          <p:nvPr>
-            <p:ph type="ftr" sz="quarter" idx="11"/>
-          </p:nvPr>
-        </p:nvSpPr>
-        <p:spPr>
-          <a:xfrm>
-            <a:off x="4038600" y="6159710"/>
-            <a:ext cx="4114800" cy="365125"/>
-          </a:xfrm>
-        </p:spPr>
-        <p:txBody>
-          <a:bodyPr>
-            <a:normAutofit/>
-          </a:bodyPr>
-          <a:lstStyle/>
-          <a:p>
-            <a:pPr marL="0" marR="0" lvl="0" indent="0" algn="ctr" defTabSz="914400" rtl="0" eaLnBrk="1" fontAlgn="auto" latinLnBrk="0" hangingPunct="1">
-              <a:lnSpc>
-                <a:spcPct val="100000"/>
-              </a:lnSpc>
-              <a:spcBef>
-                <a:spcPts val="0"/>
-              </a:spcBef>
-              <a:spcAft>
-                <a:spcPts val="600"/>
-              </a:spcAft>
-              <a:buClrTx/>
-              <a:buSzTx/>
-              <a:buFontTx/>
-              <a:buNone/>
-              <a:tabLst/>
-              <a:defRPr/>
-            </a:pPr>
-            <a:r>
-              <a:rPr kumimoji="0" lang="en-US" sz="1200" b="0" i="0" u="none" strike="noStrike" kern="1200" cap="none" spc="0" normalizeH="0" baseline="0" noProof="0" dirty="0">
-                <a:ln>
-                  <a:noFill/>
-                </a:ln>
-                <a:solidFill>
-                  <a:prstClr val="white">
-                    <a:tint val="75000"/>
-                  </a:prstClr>
-                </a:solidFill>
-                <a:effectLst/>
-                <a:uLnTx/>
-                <a:uFillTx/>
-                <a:latin typeface="Helvetica Neue" panose="02000503000000020004" pitchFamily="2" charset="0"/>
-                <a:ea typeface="Helvetica Neue" panose="02000503000000020004" pitchFamily="2" charset="0"/>
-                <a:cs typeface="Helvetica Neue" panose="02000503000000020004" pitchFamily="2" charset="0"/>
-              </a:rPr>
-              <a:t>J Mark Morris - Model of Nature</a:t>
-            </a:r>
-          </a:p>
-        </p:txBody>
-      </p:sp>
-    </p:spTree>
-    <p:extLst>
-      <p:ext uri="{BB962C8B-B14F-4D97-AF65-F5344CB8AC3E}">
-        <p14:creationId xmlns:p14="http://schemas.microsoft.com/office/powerpoint/2010/main" val="3747833275"/>
-      </p:ext>
-    </p:extLst>
-  </p:cSld>
-  <p:clrMapOvr>
-    <a:overrideClrMapping bg1="dk1" tx1="lt1" bg2="dk2" tx2="lt2" accent1="accent1" accent2="accent2" accent3="accent3" accent4="accent4" accent5="accent5" accent6="accent6" hlink="hlink" folHlink="folHlink"/>
-  </p:clrMapOvr>
-</p:sld>
-</file>
-
-<file path=ppt/slides/slide6.xml><?xml version="1.0" encoding="utf-8"?>
+<file path=ppt/slides/slide3.xml><?xml version="1.0" encoding="utf-8"?>
 <p:sld xmlns:a="http://schemas.openxmlformats.org/drawingml/2006/main" xmlns:r="http://schemas.openxmlformats.org/officeDocument/2006/relationships" xmlns:p="http://schemas.openxmlformats.org/presentationml/2006/main">
   <p:cSld>
     <p:bg>
@@ -15109,7 +10063,7 @@
 </p:sld>
 </file>
 
-<file path=ppt/slides/slide7.xml><?xml version="1.0" encoding="utf-8"?>
+<file path=ppt/slides/slide4.xml><?xml version="1.0" encoding="utf-8"?>
 <p:sld xmlns:a="http://schemas.openxmlformats.org/drawingml/2006/main" xmlns:r="http://schemas.openxmlformats.org/officeDocument/2006/relationships" xmlns:p="http://schemas.openxmlformats.org/presentationml/2006/main">
   <p:cSld>
     <p:bg>
@@ -16061,7 +11015,7 @@
 </p:sld>
 </file>
 
-<file path=ppt/slides/slide8.xml><?xml version="1.0" encoding="utf-8"?>
+<file path=ppt/slides/slide5.xml><?xml version="1.0" encoding="utf-8"?>
 <p:sld xmlns:a="http://schemas.openxmlformats.org/drawingml/2006/main" xmlns:r="http://schemas.openxmlformats.org/officeDocument/2006/relationships" xmlns:p="http://schemas.openxmlformats.org/presentationml/2006/main">
   <p:cSld>
     <p:bg>
@@ -16637,7 +11591,7 @@
 </p:sld>
 </file>
 
-<file path=ppt/slides/slide9.xml><?xml version="1.0" encoding="utf-8"?>
+<file path=ppt/slides/slide6.xml><?xml version="1.0" encoding="utf-8"?>
 <p:sld xmlns:a="http://schemas.openxmlformats.org/drawingml/2006/main" xmlns:r="http://schemas.openxmlformats.org/officeDocument/2006/relationships" xmlns:p="http://schemas.openxmlformats.org/presentationml/2006/main">
   <p:cSld>
     <p:bg>
@@ -17329,6 +12283,1986 @@
     <p:extLst>
       <p:ext uri="{BB962C8B-B14F-4D97-AF65-F5344CB8AC3E}">
         <p14:creationId xmlns:p14="http://schemas.microsoft.com/office/powerpoint/2010/main" val="2872470597"/>
+      </p:ext>
+    </p:extLst>
+  </p:cSld>
+  <p:clrMapOvr>
+    <a:masterClrMapping/>
+  </p:clrMapOvr>
+</p:sld>
+</file>
+
+<file path=ppt/slides/slide7.xml><?xml version="1.0" encoding="utf-8"?>
+<p:sld xmlns:a="http://schemas.openxmlformats.org/drawingml/2006/main" xmlns:r="http://schemas.openxmlformats.org/officeDocument/2006/relationships" xmlns:p="http://schemas.openxmlformats.org/presentationml/2006/main">
+  <p:cSld>
+    <p:bg>
+      <p:bgPr>
+        <a:solidFill>
+          <a:srgbClr val="7030A0"/>
+        </a:solidFill>
+        <a:effectLst/>
+      </p:bgPr>
+    </p:bg>
+    <p:spTree>
+      <p:nvGrpSpPr>
+        <p:cNvPr id="1" name="">
+          <a:extLst>
+            <a:ext uri="{FF2B5EF4-FFF2-40B4-BE49-F238E27FC236}">
+              <a16:creationId xmlns:a16="http://schemas.microsoft.com/office/drawing/2014/main" id="{15AB8420-5829-AE65-35FD-B9B726396AE6}"/>
+            </a:ext>
+          </a:extLst>
+        </p:cNvPr>
+        <p:cNvGrpSpPr/>
+        <p:nvPr/>
+      </p:nvGrpSpPr>
+      <p:grpSpPr>
+        <a:xfrm>
+          <a:off x="0" y="0"/>
+          <a:ext cx="0" cy="0"/>
+          <a:chOff x="0" y="0"/>
+          <a:chExt cx="0" cy="0"/>
+        </a:xfrm>
+      </p:grpSpPr>
+      <p:sp>
+        <p:nvSpPr>
+          <p:cNvPr id="5" name="Footer Placeholder 3">
+            <a:extLst>
+              <a:ext uri="{FF2B5EF4-FFF2-40B4-BE49-F238E27FC236}">
+                <a16:creationId xmlns:a16="http://schemas.microsoft.com/office/drawing/2014/main" id="{CCB07F1B-345A-682C-7786-B93DA7229F70}"/>
+              </a:ext>
+            </a:extLst>
+          </p:cNvPr>
+          <p:cNvSpPr txBox="1">
+            <a:spLocks/>
+          </p:cNvSpPr>
+          <p:nvPr/>
+        </p:nvSpPr>
+        <p:spPr>
+          <a:xfrm>
+            <a:off x="10924248" y="6388602"/>
+            <a:ext cx="1142262" cy="365125"/>
+          </a:xfrm>
+          <a:prstGeom prst="rect">
+            <a:avLst/>
+          </a:prstGeom>
+        </p:spPr>
+        <p:txBody>
+          <a:bodyPr vert="horz" lIns="91440" tIns="45720" rIns="91440" bIns="45720" rtlCol="0" anchor="ctr"/>
+          <a:lstStyle>
+            <a:defPPr>
+              <a:defRPr lang="en-US"/>
+            </a:defPPr>
+            <a:lvl1pPr marL="0" algn="ctr" defTabSz="914400" rtl="0" eaLnBrk="1" latinLnBrk="0" hangingPunct="1">
+              <a:defRPr sz="1200" kern="1200">
+                <a:solidFill>
+                  <a:schemeClr val="tx1">
+                    <a:tint val="75000"/>
+                  </a:schemeClr>
+                </a:solidFill>
+                <a:latin typeface="+mn-lt"/>
+                <a:ea typeface="+mn-ea"/>
+                <a:cs typeface="+mn-cs"/>
+              </a:defRPr>
+            </a:lvl1pPr>
+            <a:lvl2pPr marL="457200" algn="l" defTabSz="914400" rtl="0" eaLnBrk="1" latinLnBrk="0" hangingPunct="1">
+              <a:defRPr sz="1800" kern="1200">
+                <a:solidFill>
+                  <a:schemeClr val="tx1"/>
+                </a:solidFill>
+                <a:latin typeface="+mn-lt"/>
+                <a:ea typeface="+mn-ea"/>
+                <a:cs typeface="+mn-cs"/>
+              </a:defRPr>
+            </a:lvl2pPr>
+            <a:lvl3pPr marL="914400" algn="l" defTabSz="914400" rtl="0" eaLnBrk="1" latinLnBrk="0" hangingPunct="1">
+              <a:defRPr sz="1800" kern="1200">
+                <a:solidFill>
+                  <a:schemeClr val="tx1"/>
+                </a:solidFill>
+                <a:latin typeface="+mn-lt"/>
+                <a:ea typeface="+mn-ea"/>
+                <a:cs typeface="+mn-cs"/>
+              </a:defRPr>
+            </a:lvl3pPr>
+            <a:lvl4pPr marL="1371600" algn="l" defTabSz="914400" rtl="0" eaLnBrk="1" latinLnBrk="0" hangingPunct="1">
+              <a:defRPr sz="1800" kern="1200">
+                <a:solidFill>
+                  <a:schemeClr val="tx1"/>
+                </a:solidFill>
+                <a:latin typeface="+mn-lt"/>
+                <a:ea typeface="+mn-ea"/>
+                <a:cs typeface="+mn-cs"/>
+              </a:defRPr>
+            </a:lvl4pPr>
+            <a:lvl5pPr marL="1828800" algn="l" defTabSz="914400" rtl="0" eaLnBrk="1" latinLnBrk="0" hangingPunct="1">
+              <a:defRPr sz="1800" kern="1200">
+                <a:solidFill>
+                  <a:schemeClr val="tx1"/>
+                </a:solidFill>
+                <a:latin typeface="+mn-lt"/>
+                <a:ea typeface="+mn-ea"/>
+                <a:cs typeface="+mn-cs"/>
+              </a:defRPr>
+            </a:lvl5pPr>
+            <a:lvl6pPr marL="2286000" algn="l" defTabSz="914400" rtl="0" eaLnBrk="1" latinLnBrk="0" hangingPunct="1">
+              <a:defRPr sz="1800" kern="1200">
+                <a:solidFill>
+                  <a:schemeClr val="tx1"/>
+                </a:solidFill>
+                <a:latin typeface="+mn-lt"/>
+                <a:ea typeface="+mn-ea"/>
+                <a:cs typeface="+mn-cs"/>
+              </a:defRPr>
+            </a:lvl6pPr>
+            <a:lvl7pPr marL="2743200" algn="l" defTabSz="914400" rtl="0" eaLnBrk="1" latinLnBrk="0" hangingPunct="1">
+              <a:defRPr sz="1800" kern="1200">
+                <a:solidFill>
+                  <a:schemeClr val="tx1"/>
+                </a:solidFill>
+                <a:latin typeface="+mn-lt"/>
+                <a:ea typeface="+mn-ea"/>
+                <a:cs typeface="+mn-cs"/>
+              </a:defRPr>
+            </a:lvl7pPr>
+            <a:lvl8pPr marL="3200400" algn="l" defTabSz="914400" rtl="0" eaLnBrk="1" latinLnBrk="0" hangingPunct="1">
+              <a:defRPr sz="1800" kern="1200">
+                <a:solidFill>
+                  <a:schemeClr val="tx1"/>
+                </a:solidFill>
+                <a:latin typeface="+mn-lt"/>
+                <a:ea typeface="+mn-ea"/>
+                <a:cs typeface="+mn-cs"/>
+              </a:defRPr>
+            </a:lvl8pPr>
+            <a:lvl9pPr marL="3657600" algn="l" defTabSz="914400" rtl="0" eaLnBrk="1" latinLnBrk="0" hangingPunct="1">
+              <a:defRPr sz="1800" kern="1200">
+                <a:solidFill>
+                  <a:schemeClr val="tx1"/>
+                </a:solidFill>
+                <a:latin typeface="+mn-lt"/>
+                <a:ea typeface="+mn-ea"/>
+                <a:cs typeface="+mn-cs"/>
+              </a:defRPr>
+            </a:lvl9pPr>
+          </a:lstStyle>
+          <a:p>
+            <a:pPr marL="0" marR="0" lvl="0" indent="0" algn="ctr" defTabSz="914400" rtl="0" eaLnBrk="1" fontAlgn="auto" latinLnBrk="0" hangingPunct="1">
+              <a:lnSpc>
+                <a:spcPct val="100000"/>
+              </a:lnSpc>
+              <a:spcBef>
+                <a:spcPts val="0"/>
+              </a:spcBef>
+              <a:spcAft>
+                <a:spcPts val="0"/>
+              </a:spcAft>
+              <a:buClrTx/>
+              <a:buSzTx/>
+              <a:buFontTx/>
+              <a:buNone/>
+              <a:tabLst/>
+              <a:defRPr/>
+            </a:pPr>
+            <a:r>
+              <a:rPr kumimoji="0" lang="en-US" sz="1200" b="0" i="0" u="none" strike="noStrike" kern="1200" cap="none" spc="0" normalizeH="0" baseline="0" noProof="0" dirty="0">
+                <a:ln>
+                  <a:noFill/>
+                </a:ln>
+                <a:solidFill>
+                  <a:prstClr val="black">
+                    <a:tint val="75000"/>
+                  </a:prstClr>
+                </a:solidFill>
+                <a:effectLst/>
+                <a:uLnTx/>
+                <a:uFillTx/>
+                <a:latin typeface="Helvetica Neue" panose="02000503000000020004" pitchFamily="2" charset="0"/>
+                <a:ea typeface="Helvetica Neue" panose="02000503000000020004" pitchFamily="2" charset="0"/>
+                <a:cs typeface="Helvetica Neue" panose="02000503000000020004" pitchFamily="2" charset="0"/>
+              </a:rPr>
+              <a:t>J Mark Morris</a:t>
+            </a:r>
+          </a:p>
+        </p:txBody>
+      </p:sp>
+      <p:sp>
+        <p:nvSpPr>
+          <p:cNvPr id="19" name="Rectangle 18">
+            <a:extLst>
+              <a:ext uri="{FF2B5EF4-FFF2-40B4-BE49-F238E27FC236}">
+                <a16:creationId xmlns:a16="http://schemas.microsoft.com/office/drawing/2014/main" id="{9178114D-FA61-2425-6DA6-903E1E0EEAEF}"/>
+              </a:ext>
+            </a:extLst>
+          </p:cNvPr>
+          <p:cNvSpPr/>
+          <p:nvPr/>
+        </p:nvSpPr>
+        <p:spPr>
+          <a:xfrm>
+            <a:off x="2473327" y="378829"/>
+            <a:ext cx="7245446" cy="523220"/>
+          </a:xfrm>
+          <a:prstGeom prst="rect">
+            <a:avLst/>
+          </a:prstGeom>
+          <a:noFill/>
+        </p:spPr>
+        <p:txBody>
+          <a:bodyPr wrap="none">
+            <a:spAutoFit/>
+          </a:bodyPr>
+          <a:lstStyle/>
+          <a:p>
+            <a:pPr marL="0" marR="0" lvl="0" indent="0" algn="ctr" defTabSz="914400" rtl="0" eaLnBrk="1" fontAlgn="auto" latinLnBrk="0" hangingPunct="1">
+              <a:lnSpc>
+                <a:spcPct val="100000"/>
+              </a:lnSpc>
+              <a:spcBef>
+                <a:spcPts val="0"/>
+              </a:spcBef>
+              <a:spcAft>
+                <a:spcPts val="0"/>
+              </a:spcAft>
+              <a:buClrTx/>
+              <a:buSzTx/>
+              <a:buFontTx/>
+              <a:buNone/>
+              <a:tabLst/>
+              <a:defRPr/>
+            </a:pPr>
+            <a:r>
+              <a:rPr kumimoji="0" lang="en-US" sz="2800" b="1" i="0" u="none" strike="noStrike" kern="1200" cap="none" spc="0" normalizeH="0" baseline="0" noProof="0" dirty="0">
+                <a:ln>
+                  <a:noFill/>
+                </a:ln>
+                <a:solidFill>
+                  <a:prstClr val="white"/>
+                </a:solidFill>
+                <a:effectLst/>
+                <a:uLnTx/>
+                <a:uFillTx/>
+                <a:latin typeface="Helvetica Neue" panose="02000503000000020004" pitchFamily="2" charset="0"/>
+                <a:ea typeface="Helvetica Neue" panose="02000503000000020004" pitchFamily="2" charset="0"/>
+                <a:cs typeface="Helvetica Neue" panose="02000503000000020004" pitchFamily="2" charset="0"/>
+              </a:rPr>
+              <a:t>Binary Energy Equalization to Equilibrium</a:t>
+            </a:r>
+          </a:p>
+        </p:txBody>
+      </p:sp>
+      <p:sp>
+        <p:nvSpPr>
+          <p:cNvPr id="2" name="TextBox 1">
+            <a:extLst>
+              <a:ext uri="{FF2B5EF4-FFF2-40B4-BE49-F238E27FC236}">
+                <a16:creationId xmlns:a16="http://schemas.microsoft.com/office/drawing/2014/main" id="{2EEF71A6-14E1-8A45-1EEC-76EE6482016F}"/>
+              </a:ext>
+            </a:extLst>
+          </p:cNvPr>
+          <p:cNvSpPr txBox="1"/>
+          <p:nvPr/>
+        </p:nvSpPr>
+        <p:spPr>
+          <a:xfrm>
+            <a:off x="317359" y="1166842"/>
+            <a:ext cx="11874641" cy="5016758"/>
+          </a:xfrm>
+          <a:prstGeom prst="rect">
+            <a:avLst/>
+          </a:prstGeom>
+          <a:noFill/>
+        </p:spPr>
+        <p:txBody>
+          <a:bodyPr wrap="square" rtlCol="0">
+            <a:spAutoFit/>
+          </a:bodyPr>
+          <a:lstStyle/>
+          <a:p>
+            <a:pPr marL="457200" marR="0" lvl="0" indent="-457200" algn="l" defTabSz="914400" rtl="0" eaLnBrk="1" fontAlgn="auto" latinLnBrk="0" hangingPunct="1">
+              <a:lnSpc>
+                <a:spcPct val="100000"/>
+              </a:lnSpc>
+              <a:spcBef>
+                <a:spcPts val="0"/>
+              </a:spcBef>
+              <a:spcAft>
+                <a:spcPts val="0"/>
+              </a:spcAft>
+              <a:buClrTx/>
+              <a:buSzTx/>
+              <a:buFont typeface="Arial" panose="020B0604020202020204" pitchFamily="34" charset="0"/>
+              <a:buChar char="•"/>
+              <a:tabLst/>
+              <a:defRPr/>
+            </a:pPr>
+            <a:r>
+              <a:rPr kumimoji="0" lang="en-US" sz="2000" b="0" i="0" u="none" strike="noStrike" kern="1200" cap="none" spc="0" normalizeH="0" baseline="0" noProof="0" dirty="0">
+                <a:ln>
+                  <a:noFill/>
+                </a:ln>
+                <a:solidFill>
+                  <a:prstClr val="white"/>
+                </a:solidFill>
+                <a:effectLst/>
+                <a:uLnTx/>
+                <a:uFillTx/>
+                <a:latin typeface="Helvetica Neue" panose="02000503000000020004" pitchFamily="2" charset="0"/>
+                <a:ea typeface="Helvetica Neue" panose="02000503000000020004" pitchFamily="2" charset="0"/>
+                <a:cs typeface="Helvetica Neue" panose="02000503000000020004" pitchFamily="2" charset="0"/>
+              </a:rPr>
+              <a:t>Quantum </a:t>
+            </a:r>
+            <a:r>
+              <a:rPr kumimoji="0" lang="en-US" sz="2000" b="0" i="0" u="none" strike="noStrike" kern="1200" cap="none" spc="0" normalizeH="0" baseline="0" noProof="0" dirty="0" err="1">
+                <a:ln>
+                  <a:noFill/>
+                </a:ln>
+                <a:solidFill>
+                  <a:prstClr val="white"/>
+                </a:solidFill>
+                <a:effectLst/>
+                <a:uLnTx/>
+                <a:uFillTx/>
+                <a:latin typeface="Helvetica Neue" panose="02000503000000020004" pitchFamily="2" charset="0"/>
+                <a:ea typeface="Helvetica Neue" panose="02000503000000020004" pitchFamily="2" charset="0"/>
+                <a:cs typeface="Helvetica Neue" panose="02000503000000020004" pitchFamily="2" charset="0"/>
+              </a:rPr>
+              <a:t>behaviour</a:t>
+            </a:r>
+            <a:r>
+              <a:rPr kumimoji="0" lang="en-US" sz="2000" b="0" i="0" u="none" strike="noStrike" kern="1200" cap="none" spc="0" normalizeH="0" baseline="0" noProof="0" dirty="0">
+                <a:ln>
+                  <a:noFill/>
+                </a:ln>
+                <a:solidFill>
+                  <a:prstClr val="white"/>
+                </a:solidFill>
+                <a:effectLst/>
+                <a:uLnTx/>
+                <a:uFillTx/>
+                <a:latin typeface="Helvetica Neue" panose="02000503000000020004" pitchFamily="2" charset="0"/>
+                <a:ea typeface="Helvetica Neue" panose="02000503000000020004" pitchFamily="2" charset="0"/>
+                <a:cs typeface="Helvetica Neue" panose="02000503000000020004" pitchFamily="2" charset="0"/>
+              </a:rPr>
+              <a:t> emerges from a continuous geometry.</a:t>
+            </a:r>
+          </a:p>
+          <a:p>
+            <a:pPr marL="457200" marR="0" lvl="0" indent="-457200" algn="l" defTabSz="914400" rtl="0" eaLnBrk="1" fontAlgn="auto" latinLnBrk="0" hangingPunct="1">
+              <a:lnSpc>
+                <a:spcPct val="100000"/>
+              </a:lnSpc>
+              <a:spcBef>
+                <a:spcPts val="0"/>
+              </a:spcBef>
+              <a:spcAft>
+                <a:spcPts val="0"/>
+              </a:spcAft>
+              <a:buClrTx/>
+              <a:buSzTx/>
+              <a:buFont typeface="Arial" panose="020B0604020202020204" pitchFamily="34" charset="0"/>
+              <a:buChar char="•"/>
+              <a:tabLst/>
+              <a:defRPr/>
+            </a:pPr>
+            <a:r>
+              <a:rPr kumimoji="0" lang="en-US" sz="2000" b="0" i="0" u="none" strike="noStrike" kern="1200" cap="none" spc="0" normalizeH="0" baseline="0" noProof="0" dirty="0">
+                <a:ln>
+                  <a:noFill/>
+                </a:ln>
+                <a:solidFill>
+                  <a:prstClr val="white"/>
+                </a:solidFill>
+                <a:effectLst/>
+                <a:uLnTx/>
+                <a:uFillTx/>
+                <a:latin typeface="Helvetica Neue" panose="02000503000000020004" pitchFamily="2" charset="0"/>
+                <a:ea typeface="Helvetica Neue" panose="02000503000000020004" pitchFamily="2" charset="0"/>
+                <a:cs typeface="Helvetica Neue" panose="02000503000000020004" pitchFamily="2" charset="0"/>
+              </a:rPr>
+              <a:t>The neighborhood of spacetime Noether cores are attempting to equalize apparent energy.</a:t>
+            </a:r>
+          </a:p>
+          <a:p>
+            <a:pPr marL="914400" marR="0" lvl="1" indent="-457200" algn="l" defTabSz="914400" rtl="0" eaLnBrk="1" fontAlgn="auto" latinLnBrk="0" hangingPunct="1">
+              <a:lnSpc>
+                <a:spcPct val="100000"/>
+              </a:lnSpc>
+              <a:spcBef>
+                <a:spcPts val="0"/>
+              </a:spcBef>
+              <a:spcAft>
+                <a:spcPts val="0"/>
+              </a:spcAft>
+              <a:buClrTx/>
+              <a:buSzTx/>
+              <a:buFont typeface="Arial" panose="020B0604020202020204" pitchFamily="34" charset="0"/>
+              <a:buChar char="•"/>
+              <a:tabLst/>
+              <a:defRPr/>
+            </a:pPr>
+            <a:r>
+              <a:rPr kumimoji="0" lang="en-US" sz="2000" b="0" i="0" u="none" strike="noStrike" kern="1200" cap="none" spc="0" normalizeH="0" baseline="0" noProof="0" dirty="0">
+                <a:ln>
+                  <a:noFill/>
+                </a:ln>
+                <a:solidFill>
+                  <a:prstClr val="white"/>
+                </a:solidFill>
+                <a:effectLst/>
+                <a:uLnTx/>
+                <a:uFillTx/>
+                <a:latin typeface="Helvetica Neue" panose="02000503000000020004" pitchFamily="2" charset="0"/>
+                <a:ea typeface="Helvetica Neue" panose="02000503000000020004" pitchFamily="2" charset="0"/>
+                <a:cs typeface="Helvetica Neue" panose="02000503000000020004" pitchFamily="2" charset="0"/>
+              </a:rPr>
+              <a:t>They are all trading in quanta of energy in pi/2 state increments</a:t>
+            </a:r>
+          </a:p>
+          <a:p>
+            <a:pPr marL="914400" marR="0" lvl="1" indent="-457200" algn="l" defTabSz="914400" rtl="0" eaLnBrk="1" fontAlgn="auto" latinLnBrk="0" hangingPunct="1">
+              <a:lnSpc>
+                <a:spcPct val="100000"/>
+              </a:lnSpc>
+              <a:spcBef>
+                <a:spcPts val="0"/>
+              </a:spcBef>
+              <a:spcAft>
+                <a:spcPts val="0"/>
+              </a:spcAft>
+              <a:buClrTx/>
+              <a:buSzTx/>
+              <a:buFont typeface="Arial" panose="020B0604020202020204" pitchFamily="34" charset="0"/>
+              <a:buChar char="•"/>
+              <a:tabLst/>
+              <a:defRPr/>
+            </a:pPr>
+            <a:r>
+              <a:rPr kumimoji="0" lang="en-US" sz="2000" b="0" i="0" u="none" strike="noStrike" kern="1200" cap="none" spc="0" normalizeH="0" baseline="0" noProof="0" dirty="0">
+                <a:ln>
+                  <a:noFill/>
+                </a:ln>
+                <a:solidFill>
+                  <a:prstClr val="white"/>
+                </a:solidFill>
+                <a:effectLst/>
+                <a:uLnTx/>
+                <a:uFillTx/>
+                <a:latin typeface="Helvetica Neue" panose="02000503000000020004" pitchFamily="2" charset="0"/>
+                <a:ea typeface="Helvetica Neue" panose="02000503000000020004" pitchFamily="2" charset="0"/>
+                <a:cs typeface="Helvetica Neue" panose="02000503000000020004" pitchFamily="2" charset="0"/>
+              </a:rPr>
+              <a:t>They operate like a slipping transmission, forward or backward. </a:t>
+            </a:r>
+          </a:p>
+          <a:p>
+            <a:pPr marL="914400" marR="0" lvl="1" indent="-457200" algn="l" defTabSz="914400" rtl="0" eaLnBrk="1" fontAlgn="auto" latinLnBrk="0" hangingPunct="1">
+              <a:lnSpc>
+                <a:spcPct val="100000"/>
+              </a:lnSpc>
+              <a:spcBef>
+                <a:spcPts val="0"/>
+              </a:spcBef>
+              <a:spcAft>
+                <a:spcPts val="0"/>
+              </a:spcAft>
+              <a:buClrTx/>
+              <a:buSzTx/>
+              <a:buFont typeface="Arial" panose="020B0604020202020204" pitchFamily="34" charset="0"/>
+              <a:buChar char="•"/>
+              <a:tabLst/>
+              <a:defRPr/>
+            </a:pPr>
+            <a:r>
+              <a:rPr kumimoji="0" lang="en-US" sz="2000" b="0" i="0" u="none" strike="noStrike" kern="1200" cap="none" spc="0" normalizeH="0" baseline="0" noProof="0" dirty="0">
+                <a:ln>
+                  <a:noFill/>
+                </a:ln>
+                <a:solidFill>
+                  <a:prstClr val="white"/>
+                </a:solidFill>
+                <a:effectLst/>
+                <a:uLnTx/>
+                <a:uFillTx/>
+                <a:latin typeface="Helvetica Neue" panose="02000503000000020004" pitchFamily="2" charset="0"/>
+                <a:ea typeface="Helvetica Neue" panose="02000503000000020004" pitchFamily="2" charset="0"/>
+                <a:cs typeface="Helvetica Neue" panose="02000503000000020004" pitchFamily="2" charset="0"/>
+              </a:rPr>
+              <a:t>In a local neighborhood, assemblies quickly reach equilibrium.</a:t>
+            </a:r>
+          </a:p>
+          <a:p>
+            <a:pPr marL="457200" marR="0" lvl="0" indent="-457200" algn="l" defTabSz="914400" rtl="0" eaLnBrk="1" fontAlgn="auto" latinLnBrk="0" hangingPunct="1">
+              <a:lnSpc>
+                <a:spcPct val="100000"/>
+              </a:lnSpc>
+              <a:spcBef>
+                <a:spcPts val="0"/>
+              </a:spcBef>
+              <a:spcAft>
+                <a:spcPts val="0"/>
+              </a:spcAft>
+              <a:buClrTx/>
+              <a:buSzTx/>
+              <a:buFont typeface="Arial" panose="020B0604020202020204" pitchFamily="34" charset="0"/>
+              <a:buChar char="•"/>
+              <a:tabLst/>
+              <a:defRPr/>
+            </a:pPr>
+            <a:r>
+              <a:rPr kumimoji="0" lang="en-US" sz="2000" b="0" i="0" u="none" strike="noStrike" kern="1200" cap="none" spc="0" normalizeH="0" baseline="0" noProof="0" dirty="0">
+                <a:ln>
+                  <a:noFill/>
+                </a:ln>
+                <a:solidFill>
+                  <a:prstClr val="white"/>
+                </a:solidFill>
+                <a:effectLst/>
+                <a:uLnTx/>
+                <a:uFillTx/>
+                <a:latin typeface="Helvetica Neue" panose="02000503000000020004" pitchFamily="2" charset="0"/>
+                <a:ea typeface="Helvetica Neue" panose="02000503000000020004" pitchFamily="2" charset="0"/>
+                <a:cs typeface="Helvetica Neue" panose="02000503000000020004" pitchFamily="2" charset="0"/>
+              </a:rPr>
+              <a:t>At the fundamental level, below these assemblies, it is a continuous system.</a:t>
+            </a:r>
+          </a:p>
+          <a:p>
+            <a:pPr marL="457200" marR="0" lvl="0" indent="-457200" algn="l" defTabSz="914400" rtl="0" eaLnBrk="1" fontAlgn="auto" latinLnBrk="0" hangingPunct="1">
+              <a:lnSpc>
+                <a:spcPct val="100000"/>
+              </a:lnSpc>
+              <a:spcBef>
+                <a:spcPts val="0"/>
+              </a:spcBef>
+              <a:spcAft>
+                <a:spcPts val="0"/>
+              </a:spcAft>
+              <a:buClrTx/>
+              <a:buSzTx/>
+              <a:buFont typeface="Arial" panose="020B0604020202020204" pitchFamily="34" charset="0"/>
+              <a:buChar char="•"/>
+              <a:tabLst/>
+              <a:defRPr/>
+            </a:pPr>
+            <a:r>
+              <a:rPr kumimoji="0" lang="en-US" sz="2000" b="0" i="0" u="none" strike="noStrike" kern="1200" cap="none" spc="0" normalizeH="0" baseline="0" noProof="0" dirty="0">
+                <a:ln>
+                  <a:noFill/>
+                </a:ln>
+                <a:solidFill>
+                  <a:prstClr val="white"/>
+                </a:solidFill>
+                <a:effectLst/>
+                <a:uLnTx/>
+                <a:uFillTx/>
+                <a:latin typeface="Helvetica Neue" panose="02000503000000020004" pitchFamily="2" charset="0"/>
+                <a:ea typeface="Helvetica Neue" panose="02000503000000020004" pitchFamily="2" charset="0"/>
+                <a:cs typeface="Helvetica Neue" panose="02000503000000020004" pitchFamily="2" charset="0"/>
+              </a:rPr>
+              <a:t>Where do the mathematical implications of skipping a beat apply?</a:t>
+            </a:r>
+          </a:p>
+          <a:p>
+            <a:pPr marL="457200" marR="0" lvl="0" indent="-457200" algn="l" defTabSz="914400" rtl="0" eaLnBrk="1" fontAlgn="auto" latinLnBrk="0" hangingPunct="1">
+              <a:lnSpc>
+                <a:spcPct val="100000"/>
+              </a:lnSpc>
+              <a:spcBef>
+                <a:spcPts val="0"/>
+              </a:spcBef>
+              <a:spcAft>
+                <a:spcPts val="0"/>
+              </a:spcAft>
+              <a:buClrTx/>
+              <a:buSzTx/>
+              <a:buFont typeface="Arial" panose="020B0604020202020204" pitchFamily="34" charset="0"/>
+              <a:buChar char="•"/>
+              <a:tabLst/>
+              <a:defRPr/>
+            </a:pPr>
+            <a:r>
+              <a:rPr kumimoji="0" lang="en-US" sz="2000" b="0" i="0" u="none" strike="noStrike" kern="1200" cap="none" spc="0" normalizeH="0" baseline="0" noProof="0" dirty="0">
+                <a:ln>
+                  <a:noFill/>
+                </a:ln>
+                <a:solidFill>
+                  <a:prstClr val="white"/>
+                </a:solidFill>
+                <a:effectLst/>
+                <a:uLnTx/>
+                <a:uFillTx/>
+                <a:latin typeface="Helvetica Neue" panose="02000503000000020004" pitchFamily="2" charset="0"/>
+                <a:ea typeface="Helvetica Neue" panose="02000503000000020004" pitchFamily="2" charset="0"/>
+                <a:cs typeface="Helvetica Neue" panose="02000503000000020004" pitchFamily="2" charset="0"/>
+              </a:rPr>
+              <a:t>The skipping a beat is the well exercised conditions at the end of each state.</a:t>
+            </a:r>
+          </a:p>
+          <a:p>
+            <a:pPr marL="457200" marR="0" lvl="0" indent="-457200" algn="l" defTabSz="914400" rtl="0" eaLnBrk="1" fontAlgn="auto" latinLnBrk="0" hangingPunct="1">
+              <a:lnSpc>
+                <a:spcPct val="100000"/>
+              </a:lnSpc>
+              <a:spcBef>
+                <a:spcPts val="0"/>
+              </a:spcBef>
+              <a:spcAft>
+                <a:spcPts val="0"/>
+              </a:spcAft>
+              <a:buClrTx/>
+              <a:buSzTx/>
+              <a:buFont typeface="Arial" panose="020B0604020202020204" pitchFamily="34" charset="0"/>
+              <a:buChar char="•"/>
+              <a:tabLst/>
+              <a:defRPr/>
+            </a:pPr>
+            <a:r>
+              <a:rPr kumimoji="0" lang="en-US" sz="2000" b="0" i="0" u="none" strike="noStrike" kern="1200" cap="none" spc="0" normalizeH="0" baseline="0" noProof="0" dirty="0">
+                <a:ln>
+                  <a:noFill/>
+                </a:ln>
+                <a:solidFill>
+                  <a:prstClr val="white"/>
+                </a:solidFill>
+                <a:effectLst/>
+                <a:uLnTx/>
+                <a:uFillTx/>
+                <a:latin typeface="Helvetica Neue" panose="02000503000000020004" pitchFamily="2" charset="0"/>
+                <a:ea typeface="Helvetica Neue" panose="02000503000000020004" pitchFamily="2" charset="0"/>
+                <a:cs typeface="Helvetica Neue" panose="02000503000000020004" pitchFamily="2" charset="0"/>
+              </a:rPr>
+              <a:t>Arriving potential spheres influence the quantum choices.</a:t>
+            </a:r>
+          </a:p>
+          <a:p>
+            <a:pPr marL="457200" marR="0" lvl="0" indent="-457200" algn="l" defTabSz="914400" rtl="0" eaLnBrk="1" fontAlgn="auto" latinLnBrk="0" hangingPunct="1">
+              <a:lnSpc>
+                <a:spcPct val="100000"/>
+              </a:lnSpc>
+              <a:spcBef>
+                <a:spcPts val="0"/>
+              </a:spcBef>
+              <a:spcAft>
+                <a:spcPts val="0"/>
+              </a:spcAft>
+              <a:buClrTx/>
+              <a:buSzTx/>
+              <a:buFont typeface="Arial" panose="020B0604020202020204" pitchFamily="34" charset="0"/>
+              <a:buChar char="•"/>
+              <a:tabLst/>
+              <a:defRPr/>
+            </a:pPr>
+            <a:r>
+              <a:rPr kumimoji="0" lang="en-US" sz="2000" b="0" i="0" u="none" strike="noStrike" kern="1200" cap="none" spc="0" normalizeH="0" baseline="0" noProof="0" dirty="0">
+                <a:ln>
+                  <a:noFill/>
+                </a:ln>
+                <a:solidFill>
+                  <a:prstClr val="white"/>
+                </a:solidFill>
+                <a:effectLst/>
+                <a:uLnTx/>
+                <a:uFillTx/>
+                <a:latin typeface="Helvetica Neue" panose="02000503000000020004" pitchFamily="2" charset="0"/>
+                <a:ea typeface="Helvetica Neue" panose="02000503000000020004" pitchFamily="2" charset="0"/>
+                <a:cs typeface="Helvetica Neue" panose="02000503000000020004" pitchFamily="2" charset="0"/>
+              </a:rPr>
+              <a:t>In a lightly perturbed locality, the assemblies quickly arrive at equilibrium. </a:t>
+            </a:r>
+          </a:p>
+          <a:p>
+            <a:pPr marL="457200" marR="0" lvl="0" indent="-457200" algn="l" defTabSz="914400" rtl="0" eaLnBrk="1" fontAlgn="auto" latinLnBrk="0" hangingPunct="1">
+              <a:lnSpc>
+                <a:spcPct val="100000"/>
+              </a:lnSpc>
+              <a:spcBef>
+                <a:spcPts val="0"/>
+              </a:spcBef>
+              <a:spcAft>
+                <a:spcPts val="0"/>
+              </a:spcAft>
+              <a:buClrTx/>
+              <a:buSzTx/>
+              <a:buFont typeface="Arial" panose="020B0604020202020204" pitchFamily="34" charset="0"/>
+              <a:buChar char="•"/>
+              <a:tabLst/>
+              <a:defRPr/>
+            </a:pPr>
+            <a:r>
+              <a:rPr kumimoji="0" lang="en-US" sz="2000" b="0" i="0" u="none" strike="noStrike" kern="1200" cap="none" spc="0" normalizeH="0" baseline="0" noProof="0" dirty="0">
+                <a:ln>
+                  <a:noFill/>
+                </a:ln>
+                <a:solidFill>
+                  <a:prstClr val="white"/>
+                </a:solidFill>
+                <a:effectLst/>
+                <a:uLnTx/>
+                <a:uFillTx/>
+                <a:latin typeface="Helvetica Neue" panose="02000503000000020004" pitchFamily="2" charset="0"/>
+                <a:ea typeface="Helvetica Neue" panose="02000503000000020004" pitchFamily="2" charset="0"/>
+                <a:cs typeface="Helvetica Neue" panose="02000503000000020004" pitchFamily="2" charset="0"/>
+              </a:rPr>
+              <a:t>IDEA: the denser the point potentials, the more energy they capture.</a:t>
+            </a:r>
+          </a:p>
+          <a:p>
+            <a:pPr marL="457200" marR="0" lvl="0" indent="-457200" algn="l" defTabSz="914400" rtl="0" eaLnBrk="1" fontAlgn="auto" latinLnBrk="0" hangingPunct="1">
+              <a:lnSpc>
+                <a:spcPct val="100000"/>
+              </a:lnSpc>
+              <a:spcBef>
+                <a:spcPts val="0"/>
+              </a:spcBef>
+              <a:spcAft>
+                <a:spcPts val="0"/>
+              </a:spcAft>
+              <a:buClrTx/>
+              <a:buSzTx/>
+              <a:buFont typeface="Arial" panose="020B0604020202020204" pitchFamily="34" charset="0"/>
+              <a:buChar char="•"/>
+              <a:tabLst/>
+              <a:defRPr/>
+            </a:pPr>
+            <a:r>
+              <a:rPr kumimoji="0" lang="en-US" sz="2000" b="0" i="0" u="none" strike="noStrike" kern="1200" cap="none" spc="0" normalizeH="0" baseline="0" noProof="0" dirty="0">
+                <a:ln>
+                  <a:noFill/>
+                </a:ln>
+                <a:solidFill>
+                  <a:prstClr val="white"/>
+                </a:solidFill>
+                <a:effectLst/>
+                <a:uLnTx/>
+                <a:uFillTx/>
+                <a:latin typeface="Helvetica Neue" panose="02000503000000020004" pitchFamily="2" charset="0"/>
+                <a:ea typeface="Helvetica Neue" panose="02000503000000020004" pitchFamily="2" charset="0"/>
+                <a:cs typeface="Helvetica Neue" panose="02000503000000020004" pitchFamily="2" charset="0"/>
+              </a:rPr>
+              <a:t>An isolated point potential, distant from others, has little influence</a:t>
+            </a:r>
+          </a:p>
+          <a:p>
+            <a:pPr marL="457200" marR="0" lvl="0" indent="-457200" algn="l" defTabSz="914400" rtl="0" eaLnBrk="1" fontAlgn="auto" latinLnBrk="0" hangingPunct="1">
+              <a:lnSpc>
+                <a:spcPct val="100000"/>
+              </a:lnSpc>
+              <a:spcBef>
+                <a:spcPts val="0"/>
+              </a:spcBef>
+              <a:spcAft>
+                <a:spcPts val="0"/>
+              </a:spcAft>
+              <a:buClrTx/>
+              <a:buSzTx/>
+              <a:buFont typeface="Arial" panose="020B0604020202020204" pitchFamily="34" charset="0"/>
+              <a:buChar char="•"/>
+              <a:tabLst/>
+              <a:defRPr/>
+            </a:pPr>
+            <a:r>
+              <a:rPr kumimoji="0" lang="en-US" sz="2000" b="0" i="0" u="none" strike="noStrike" kern="1200" cap="none" spc="0" normalizeH="0" baseline="0" noProof="0" dirty="0">
+                <a:ln>
+                  <a:noFill/>
+                </a:ln>
+                <a:solidFill>
+                  <a:prstClr val="white"/>
+                </a:solidFill>
+                <a:effectLst/>
+                <a:uLnTx/>
+                <a:uFillTx/>
+                <a:latin typeface="Helvetica Neue" panose="02000503000000020004" pitchFamily="2" charset="0"/>
+                <a:ea typeface="Helvetica Neue" panose="02000503000000020004" pitchFamily="2" charset="0"/>
+                <a:cs typeface="Helvetica Neue" panose="02000503000000020004" pitchFamily="2" charset="0"/>
+              </a:rPr>
+              <a:t>A point potential in the local neighborhood causes significant action</a:t>
+            </a:r>
+          </a:p>
+          <a:p>
+            <a:pPr marL="457200" marR="0" lvl="0" indent="-457200" algn="l" defTabSz="914400" rtl="0" eaLnBrk="1" fontAlgn="auto" latinLnBrk="0" hangingPunct="1">
+              <a:lnSpc>
+                <a:spcPct val="100000"/>
+              </a:lnSpc>
+              <a:spcBef>
+                <a:spcPts val="0"/>
+              </a:spcBef>
+              <a:spcAft>
+                <a:spcPts val="0"/>
+              </a:spcAft>
+              <a:buClrTx/>
+              <a:buSzTx/>
+              <a:buFont typeface="Arial" panose="020B0604020202020204" pitchFamily="34" charset="0"/>
+              <a:buChar char="•"/>
+              <a:tabLst/>
+              <a:defRPr/>
+            </a:pPr>
+            <a:endParaRPr kumimoji="0" lang="en-US" sz="2000" b="0" i="0" u="none" strike="noStrike" kern="1200" cap="none" spc="0" normalizeH="0" baseline="0" noProof="0" dirty="0">
+              <a:ln>
+                <a:noFill/>
+              </a:ln>
+              <a:solidFill>
+                <a:prstClr val="white"/>
+              </a:solidFill>
+              <a:effectLst/>
+              <a:uLnTx/>
+              <a:uFillTx/>
+              <a:latin typeface="Helvetica Neue" panose="02000503000000020004" pitchFamily="2" charset="0"/>
+              <a:ea typeface="Helvetica Neue" panose="02000503000000020004" pitchFamily="2" charset="0"/>
+              <a:cs typeface="Helvetica Neue" panose="02000503000000020004" pitchFamily="2" charset="0"/>
+            </a:endParaRPr>
+          </a:p>
+          <a:p>
+            <a:pPr marL="457200" marR="0" lvl="0" indent="-457200" algn="l" defTabSz="914400" rtl="0" eaLnBrk="1" fontAlgn="auto" latinLnBrk="0" hangingPunct="1">
+              <a:lnSpc>
+                <a:spcPct val="100000"/>
+              </a:lnSpc>
+              <a:spcBef>
+                <a:spcPts val="0"/>
+              </a:spcBef>
+              <a:spcAft>
+                <a:spcPts val="0"/>
+              </a:spcAft>
+              <a:buClrTx/>
+              <a:buSzTx/>
+              <a:buFont typeface="Arial" panose="020B0604020202020204" pitchFamily="34" charset="0"/>
+              <a:buChar char="•"/>
+              <a:tabLst/>
+              <a:defRPr/>
+            </a:pPr>
+            <a:endParaRPr kumimoji="0" lang="en-US" sz="2000" b="0" i="0" u="none" strike="noStrike" kern="1200" cap="none" spc="0" normalizeH="0" baseline="0" noProof="0" dirty="0">
+              <a:ln>
+                <a:noFill/>
+              </a:ln>
+              <a:solidFill>
+                <a:prstClr val="white"/>
+              </a:solidFill>
+              <a:effectLst/>
+              <a:uLnTx/>
+              <a:uFillTx/>
+              <a:latin typeface="Helvetica Neue" panose="02000503000000020004" pitchFamily="2" charset="0"/>
+              <a:ea typeface="Helvetica Neue" panose="02000503000000020004" pitchFamily="2" charset="0"/>
+              <a:cs typeface="Helvetica Neue" panose="02000503000000020004" pitchFamily="2" charset="0"/>
+            </a:endParaRPr>
+          </a:p>
+          <a:p>
+            <a:pPr marL="457200" marR="0" lvl="0" indent="-457200" algn="l" defTabSz="914400" rtl="0" eaLnBrk="1" fontAlgn="auto" latinLnBrk="0" hangingPunct="1">
+              <a:lnSpc>
+                <a:spcPct val="100000"/>
+              </a:lnSpc>
+              <a:spcBef>
+                <a:spcPts val="0"/>
+              </a:spcBef>
+              <a:spcAft>
+                <a:spcPts val="0"/>
+              </a:spcAft>
+              <a:buClrTx/>
+              <a:buSzTx/>
+              <a:buFont typeface="Arial" panose="020B0604020202020204" pitchFamily="34" charset="0"/>
+              <a:buChar char="•"/>
+              <a:tabLst/>
+              <a:defRPr/>
+            </a:pPr>
+            <a:endParaRPr kumimoji="0" lang="en-US" sz="2000" b="0" i="0" u="none" strike="noStrike" kern="1200" cap="none" spc="0" normalizeH="0" baseline="0" noProof="0" dirty="0">
+              <a:ln>
+                <a:noFill/>
+              </a:ln>
+              <a:solidFill>
+                <a:prstClr val="white"/>
+              </a:solidFill>
+              <a:effectLst/>
+              <a:uLnTx/>
+              <a:uFillTx/>
+              <a:latin typeface="Helvetica Neue" panose="02000503000000020004" pitchFamily="2" charset="0"/>
+              <a:ea typeface="Helvetica Neue" panose="02000503000000020004" pitchFamily="2" charset="0"/>
+              <a:cs typeface="Helvetica Neue" panose="02000503000000020004" pitchFamily="2" charset="0"/>
+            </a:endParaRPr>
+          </a:p>
+        </p:txBody>
+      </p:sp>
+    </p:spTree>
+    <p:extLst>
+      <p:ext uri="{BB962C8B-B14F-4D97-AF65-F5344CB8AC3E}">
+        <p14:creationId xmlns:p14="http://schemas.microsoft.com/office/powerpoint/2010/main" val="2436473042"/>
+      </p:ext>
+    </p:extLst>
+  </p:cSld>
+  <p:clrMapOvr>
+    <a:masterClrMapping/>
+  </p:clrMapOvr>
+</p:sld>
+</file>
+
+<file path=ppt/slides/slide8.xml><?xml version="1.0" encoding="utf-8"?>
+<p:sld xmlns:a="http://schemas.openxmlformats.org/drawingml/2006/main" xmlns:r="http://schemas.openxmlformats.org/officeDocument/2006/relationships" xmlns:p="http://schemas.openxmlformats.org/presentationml/2006/main">
+  <p:cSld>
+    <p:bg>
+      <p:bgPr>
+        <a:solidFill>
+          <a:srgbClr val="7030A0"/>
+        </a:solidFill>
+        <a:effectLst/>
+      </p:bgPr>
+    </p:bg>
+    <p:spTree>
+      <p:nvGrpSpPr>
+        <p:cNvPr id="1" name="">
+          <a:extLst>
+            <a:ext uri="{FF2B5EF4-FFF2-40B4-BE49-F238E27FC236}">
+              <a16:creationId xmlns:a16="http://schemas.microsoft.com/office/drawing/2014/main" id="{F1C52D0E-7D5D-C1E8-B3FC-06030AF548D6}"/>
+            </a:ext>
+          </a:extLst>
+        </p:cNvPr>
+        <p:cNvGrpSpPr/>
+        <p:nvPr/>
+      </p:nvGrpSpPr>
+      <p:grpSpPr>
+        <a:xfrm>
+          <a:off x="0" y="0"/>
+          <a:ext cx="0" cy="0"/>
+          <a:chOff x="0" y="0"/>
+          <a:chExt cx="0" cy="0"/>
+        </a:xfrm>
+      </p:grpSpPr>
+      <p:sp>
+        <p:nvSpPr>
+          <p:cNvPr id="5" name="Footer Placeholder 3">
+            <a:extLst>
+              <a:ext uri="{FF2B5EF4-FFF2-40B4-BE49-F238E27FC236}">
+                <a16:creationId xmlns:a16="http://schemas.microsoft.com/office/drawing/2014/main" id="{ACA2C156-0E3D-FFC8-797A-AEA6E32F32A3}"/>
+              </a:ext>
+            </a:extLst>
+          </p:cNvPr>
+          <p:cNvSpPr txBox="1">
+            <a:spLocks/>
+          </p:cNvSpPr>
+          <p:nvPr/>
+        </p:nvSpPr>
+        <p:spPr>
+          <a:xfrm>
+            <a:off x="10924248" y="6388602"/>
+            <a:ext cx="1142262" cy="365125"/>
+          </a:xfrm>
+          <a:prstGeom prst="rect">
+            <a:avLst/>
+          </a:prstGeom>
+        </p:spPr>
+        <p:txBody>
+          <a:bodyPr vert="horz" lIns="91440" tIns="45720" rIns="91440" bIns="45720" rtlCol="0" anchor="ctr"/>
+          <a:lstStyle>
+            <a:defPPr>
+              <a:defRPr lang="en-US"/>
+            </a:defPPr>
+            <a:lvl1pPr marL="0" algn="ctr" defTabSz="914400" rtl="0" eaLnBrk="1" latinLnBrk="0" hangingPunct="1">
+              <a:defRPr sz="1200" kern="1200">
+                <a:solidFill>
+                  <a:schemeClr val="tx1">
+                    <a:tint val="75000"/>
+                  </a:schemeClr>
+                </a:solidFill>
+                <a:latin typeface="+mn-lt"/>
+                <a:ea typeface="+mn-ea"/>
+                <a:cs typeface="+mn-cs"/>
+              </a:defRPr>
+            </a:lvl1pPr>
+            <a:lvl2pPr marL="457200" algn="l" defTabSz="914400" rtl="0" eaLnBrk="1" latinLnBrk="0" hangingPunct="1">
+              <a:defRPr sz="1800" kern="1200">
+                <a:solidFill>
+                  <a:schemeClr val="tx1"/>
+                </a:solidFill>
+                <a:latin typeface="+mn-lt"/>
+                <a:ea typeface="+mn-ea"/>
+                <a:cs typeface="+mn-cs"/>
+              </a:defRPr>
+            </a:lvl2pPr>
+            <a:lvl3pPr marL="914400" algn="l" defTabSz="914400" rtl="0" eaLnBrk="1" latinLnBrk="0" hangingPunct="1">
+              <a:defRPr sz="1800" kern="1200">
+                <a:solidFill>
+                  <a:schemeClr val="tx1"/>
+                </a:solidFill>
+                <a:latin typeface="+mn-lt"/>
+                <a:ea typeface="+mn-ea"/>
+                <a:cs typeface="+mn-cs"/>
+              </a:defRPr>
+            </a:lvl3pPr>
+            <a:lvl4pPr marL="1371600" algn="l" defTabSz="914400" rtl="0" eaLnBrk="1" latinLnBrk="0" hangingPunct="1">
+              <a:defRPr sz="1800" kern="1200">
+                <a:solidFill>
+                  <a:schemeClr val="tx1"/>
+                </a:solidFill>
+                <a:latin typeface="+mn-lt"/>
+                <a:ea typeface="+mn-ea"/>
+                <a:cs typeface="+mn-cs"/>
+              </a:defRPr>
+            </a:lvl4pPr>
+            <a:lvl5pPr marL="1828800" algn="l" defTabSz="914400" rtl="0" eaLnBrk="1" latinLnBrk="0" hangingPunct="1">
+              <a:defRPr sz="1800" kern="1200">
+                <a:solidFill>
+                  <a:schemeClr val="tx1"/>
+                </a:solidFill>
+                <a:latin typeface="+mn-lt"/>
+                <a:ea typeface="+mn-ea"/>
+                <a:cs typeface="+mn-cs"/>
+              </a:defRPr>
+            </a:lvl5pPr>
+            <a:lvl6pPr marL="2286000" algn="l" defTabSz="914400" rtl="0" eaLnBrk="1" latinLnBrk="0" hangingPunct="1">
+              <a:defRPr sz="1800" kern="1200">
+                <a:solidFill>
+                  <a:schemeClr val="tx1"/>
+                </a:solidFill>
+                <a:latin typeface="+mn-lt"/>
+                <a:ea typeface="+mn-ea"/>
+                <a:cs typeface="+mn-cs"/>
+              </a:defRPr>
+            </a:lvl6pPr>
+            <a:lvl7pPr marL="2743200" algn="l" defTabSz="914400" rtl="0" eaLnBrk="1" latinLnBrk="0" hangingPunct="1">
+              <a:defRPr sz="1800" kern="1200">
+                <a:solidFill>
+                  <a:schemeClr val="tx1"/>
+                </a:solidFill>
+                <a:latin typeface="+mn-lt"/>
+                <a:ea typeface="+mn-ea"/>
+                <a:cs typeface="+mn-cs"/>
+              </a:defRPr>
+            </a:lvl7pPr>
+            <a:lvl8pPr marL="3200400" algn="l" defTabSz="914400" rtl="0" eaLnBrk="1" latinLnBrk="0" hangingPunct="1">
+              <a:defRPr sz="1800" kern="1200">
+                <a:solidFill>
+                  <a:schemeClr val="tx1"/>
+                </a:solidFill>
+                <a:latin typeface="+mn-lt"/>
+                <a:ea typeface="+mn-ea"/>
+                <a:cs typeface="+mn-cs"/>
+              </a:defRPr>
+            </a:lvl8pPr>
+            <a:lvl9pPr marL="3657600" algn="l" defTabSz="914400" rtl="0" eaLnBrk="1" latinLnBrk="0" hangingPunct="1">
+              <a:defRPr sz="1800" kern="1200">
+                <a:solidFill>
+                  <a:schemeClr val="tx1"/>
+                </a:solidFill>
+                <a:latin typeface="+mn-lt"/>
+                <a:ea typeface="+mn-ea"/>
+                <a:cs typeface="+mn-cs"/>
+              </a:defRPr>
+            </a:lvl9pPr>
+          </a:lstStyle>
+          <a:p>
+            <a:pPr marL="0" marR="0" lvl="0" indent="0" algn="ctr" defTabSz="914400" rtl="0" eaLnBrk="1" fontAlgn="auto" latinLnBrk="0" hangingPunct="1">
+              <a:lnSpc>
+                <a:spcPct val="100000"/>
+              </a:lnSpc>
+              <a:spcBef>
+                <a:spcPts val="0"/>
+              </a:spcBef>
+              <a:spcAft>
+                <a:spcPts val="0"/>
+              </a:spcAft>
+              <a:buClrTx/>
+              <a:buSzTx/>
+              <a:buFontTx/>
+              <a:buNone/>
+              <a:tabLst/>
+              <a:defRPr/>
+            </a:pPr>
+            <a:r>
+              <a:rPr kumimoji="0" lang="en-US" sz="1200" b="0" i="0" u="none" strike="noStrike" kern="1200" cap="none" spc="0" normalizeH="0" baseline="0" noProof="0" dirty="0">
+                <a:ln>
+                  <a:noFill/>
+                </a:ln>
+                <a:solidFill>
+                  <a:prstClr val="black">
+                    <a:tint val="75000"/>
+                  </a:prstClr>
+                </a:solidFill>
+                <a:effectLst/>
+                <a:uLnTx/>
+                <a:uFillTx/>
+                <a:latin typeface="Helvetica Neue" panose="02000503000000020004" pitchFamily="2" charset="0"/>
+                <a:ea typeface="Helvetica Neue" panose="02000503000000020004" pitchFamily="2" charset="0"/>
+                <a:cs typeface="Helvetica Neue" panose="02000503000000020004" pitchFamily="2" charset="0"/>
+              </a:rPr>
+              <a:t>J Mark Morris</a:t>
+            </a:r>
+          </a:p>
+        </p:txBody>
+      </p:sp>
+      <p:sp>
+        <p:nvSpPr>
+          <p:cNvPr id="19" name="Rectangle 18">
+            <a:extLst>
+              <a:ext uri="{FF2B5EF4-FFF2-40B4-BE49-F238E27FC236}">
+                <a16:creationId xmlns:a16="http://schemas.microsoft.com/office/drawing/2014/main" id="{487F020D-D17B-D7C7-0950-4C1355A7F023}"/>
+              </a:ext>
+            </a:extLst>
+          </p:cNvPr>
+          <p:cNvSpPr/>
+          <p:nvPr/>
+        </p:nvSpPr>
+        <p:spPr>
+          <a:xfrm>
+            <a:off x="1878554" y="281107"/>
+            <a:ext cx="8141844" cy="646331"/>
+          </a:xfrm>
+          <a:prstGeom prst="rect">
+            <a:avLst/>
+          </a:prstGeom>
+          <a:noFill/>
+        </p:spPr>
+        <p:txBody>
+          <a:bodyPr wrap="none">
+            <a:spAutoFit/>
+          </a:bodyPr>
+          <a:lstStyle/>
+          <a:p>
+            <a:pPr marL="0" marR="0" lvl="0" indent="0" algn="ctr" defTabSz="914400" rtl="0" eaLnBrk="1" fontAlgn="auto" latinLnBrk="0" hangingPunct="1">
+              <a:lnSpc>
+                <a:spcPct val="100000"/>
+              </a:lnSpc>
+              <a:spcBef>
+                <a:spcPts val="0"/>
+              </a:spcBef>
+              <a:spcAft>
+                <a:spcPts val="0"/>
+              </a:spcAft>
+              <a:buClrTx/>
+              <a:buSzTx/>
+              <a:buFontTx/>
+              <a:buNone/>
+              <a:tabLst/>
+              <a:defRPr/>
+            </a:pPr>
+            <a:r>
+              <a:rPr kumimoji="0" lang="en-US" sz="3600" b="1" i="0" u="none" strike="noStrike" kern="1200" cap="none" spc="0" normalizeH="0" baseline="0" noProof="0" dirty="0">
+                <a:ln>
+                  <a:noFill/>
+                </a:ln>
+                <a:solidFill>
+                  <a:prstClr val="white"/>
+                </a:solidFill>
+                <a:effectLst/>
+                <a:uLnTx/>
+                <a:uFillTx/>
+                <a:latin typeface="Helvetica Neue" panose="02000503000000020004" pitchFamily="2" charset="0"/>
+                <a:ea typeface="Helvetica Neue" panose="02000503000000020004" pitchFamily="2" charset="0"/>
+                <a:cs typeface="Helvetica Neue" panose="02000503000000020004" pitchFamily="2" charset="0"/>
+              </a:rPr>
+              <a:t>Analysis of Energy in an Ideal Binary</a:t>
+            </a:r>
+          </a:p>
+        </p:txBody>
+      </p:sp>
+      <p:sp>
+        <p:nvSpPr>
+          <p:cNvPr id="2" name="TextBox 1">
+            <a:extLst>
+              <a:ext uri="{FF2B5EF4-FFF2-40B4-BE49-F238E27FC236}">
+                <a16:creationId xmlns:a16="http://schemas.microsoft.com/office/drawing/2014/main" id="{17E5F500-9630-DE5B-4156-454D4ACDDF86}"/>
+              </a:ext>
+            </a:extLst>
+          </p:cNvPr>
+          <p:cNvSpPr txBox="1"/>
+          <p:nvPr/>
+        </p:nvSpPr>
+        <p:spPr>
+          <a:xfrm>
+            <a:off x="317359" y="1331402"/>
+            <a:ext cx="11874641" cy="5016758"/>
+          </a:xfrm>
+          <a:prstGeom prst="rect">
+            <a:avLst/>
+          </a:prstGeom>
+          <a:noFill/>
+        </p:spPr>
+        <p:txBody>
+          <a:bodyPr wrap="square" rtlCol="0">
+            <a:spAutoFit/>
+          </a:bodyPr>
+          <a:lstStyle/>
+          <a:p>
+            <a:pPr marL="457200" marR="0" lvl="0" indent="-457200" algn="l" defTabSz="914400" rtl="0" eaLnBrk="1" fontAlgn="auto" latinLnBrk="0" hangingPunct="1">
+              <a:lnSpc>
+                <a:spcPct val="100000"/>
+              </a:lnSpc>
+              <a:spcBef>
+                <a:spcPts val="0"/>
+              </a:spcBef>
+              <a:spcAft>
+                <a:spcPts val="0"/>
+              </a:spcAft>
+              <a:buClrTx/>
+              <a:buSzTx/>
+              <a:buFont typeface="Arial" panose="020B0604020202020204" pitchFamily="34" charset="0"/>
+              <a:buChar char="•"/>
+              <a:tabLst/>
+              <a:defRPr/>
+            </a:pPr>
+            <a:r>
+              <a:rPr kumimoji="0" lang="en-US" sz="2000" b="0" i="0" u="none" strike="noStrike" kern="1200" cap="none" spc="0" normalizeH="0" baseline="0" noProof="0" dirty="0">
+                <a:ln>
+                  <a:noFill/>
+                </a:ln>
+                <a:solidFill>
+                  <a:prstClr val="white"/>
+                </a:solidFill>
+                <a:effectLst/>
+                <a:uLnTx/>
+                <a:uFillTx/>
+                <a:latin typeface="Helvetica Neue" panose="02000503000000020004" pitchFamily="2" charset="0"/>
+                <a:ea typeface="Helvetica Neue" panose="02000503000000020004" pitchFamily="2" charset="0"/>
+                <a:cs typeface="Helvetica Neue" panose="02000503000000020004" pitchFamily="2" charset="0"/>
+              </a:rPr>
+              <a:t>The natural unperturbed ideal spiral is the self powered spiral with two regions.</a:t>
+            </a:r>
+          </a:p>
+          <a:p>
+            <a:pPr marL="914400" lvl="1" indent="-457200">
+              <a:buFont typeface="Arial" panose="020B0604020202020204" pitchFamily="34" charset="0"/>
+              <a:buChar char="•"/>
+              <a:defRPr/>
+            </a:pPr>
+            <a:r>
+              <a:rPr kumimoji="0" lang="en-US" sz="2000" b="0" i="0" u="none" strike="noStrike" kern="1200" cap="none" spc="0" normalizeH="0" baseline="0" noProof="0" dirty="0">
+                <a:ln>
+                  <a:noFill/>
+                </a:ln>
+                <a:solidFill>
+                  <a:prstClr val="white"/>
+                </a:solidFill>
+                <a:effectLst/>
+                <a:uLnTx/>
+                <a:uFillTx/>
+                <a:latin typeface="Helvetica Neue" panose="02000503000000020004" pitchFamily="2" charset="0"/>
+                <a:ea typeface="Helvetica Neue" panose="02000503000000020004" pitchFamily="2" charset="0"/>
+                <a:cs typeface="Helvetica Neue" panose="02000503000000020004" pitchFamily="2" charset="0"/>
+              </a:rPr>
+              <a:t>CFT Region : rate per spiral cycle = h (partner action)</a:t>
+            </a:r>
+          </a:p>
+          <a:p>
+            <a:pPr marL="914400" lvl="1" indent="-457200">
+              <a:buFont typeface="Arial" panose="020B0604020202020204" pitchFamily="34" charset="0"/>
+              <a:buChar char="•"/>
+              <a:defRPr/>
+            </a:pPr>
+            <a:r>
+              <a:rPr lang="en-US" sz="2000" dirty="0">
+                <a:solidFill>
+                  <a:prstClr val="white"/>
+                </a:solidFill>
+                <a:latin typeface="Helvetica Neue" panose="02000503000000020004" pitchFamily="2" charset="0"/>
+                <a:ea typeface="Helvetica Neue" panose="02000503000000020004" pitchFamily="2" charset="0"/>
+                <a:cs typeface="Helvetica Neue" panose="02000503000000020004" pitchFamily="2" charset="0"/>
+              </a:rPr>
+              <a:t>AdS Region : rate per spiral cycle = h (partner action) + g (self action)</a:t>
+            </a:r>
+          </a:p>
+          <a:p>
+            <a:pPr marL="914400" lvl="1" indent="-457200">
+              <a:buFont typeface="Arial" panose="020B0604020202020204" pitchFamily="34" charset="0"/>
+              <a:buChar char="•"/>
+              <a:defRPr/>
+            </a:pPr>
+            <a:r>
+              <a:rPr kumimoji="0" lang="en-US" sz="2000" b="0" i="0" u="none" strike="noStrike" kern="1200" cap="none" spc="0" normalizeH="0" baseline="0" noProof="0" dirty="0">
+                <a:ln>
+                  <a:noFill/>
+                </a:ln>
+                <a:solidFill>
+                  <a:prstClr val="white"/>
+                </a:solidFill>
+                <a:effectLst/>
+                <a:uLnTx/>
+                <a:uFillTx/>
+                <a:latin typeface="Helvetica Neue" panose="02000503000000020004" pitchFamily="2" charset="0"/>
+                <a:ea typeface="Helvetica Neue" panose="02000503000000020004" pitchFamily="2" charset="0"/>
+                <a:cs typeface="Helvetica Neue" panose="02000503000000020004" pitchFamily="2" charset="0"/>
+              </a:rPr>
+              <a:t>radius, frequency, velocity all have first and second degree derivatives</a:t>
+            </a:r>
+          </a:p>
+          <a:p>
+            <a:pPr marL="914400" lvl="1" indent="-457200">
+              <a:buFont typeface="Arial" panose="020B0604020202020204" pitchFamily="34" charset="0"/>
+              <a:buChar char="•"/>
+              <a:defRPr/>
+            </a:pPr>
+            <a:r>
+              <a:rPr lang="en-US" sz="2000" dirty="0">
+                <a:solidFill>
+                  <a:prstClr val="white"/>
+                </a:solidFill>
+                <a:latin typeface="Helvetica Neue" panose="02000503000000020004" pitchFamily="2" charset="0"/>
+                <a:ea typeface="Helvetica Neue" panose="02000503000000020004" pitchFamily="2" charset="0"/>
+                <a:cs typeface="Helvetica Neue" panose="02000503000000020004" pitchFamily="2" charset="0"/>
+              </a:rPr>
+              <a:t>this defines a natural emergent timeline – our rate of time vs the natural rate.</a:t>
+            </a:r>
+            <a:endParaRPr kumimoji="0" lang="en-US" sz="2000" b="0" i="0" u="none" strike="noStrike" kern="1200" cap="none" spc="0" normalizeH="0" baseline="0" noProof="0" dirty="0">
+              <a:ln>
+                <a:noFill/>
+              </a:ln>
+              <a:solidFill>
+                <a:prstClr val="white"/>
+              </a:solidFill>
+              <a:effectLst/>
+              <a:uLnTx/>
+              <a:uFillTx/>
+              <a:latin typeface="Helvetica Neue" panose="02000503000000020004" pitchFamily="2" charset="0"/>
+              <a:ea typeface="Helvetica Neue" panose="02000503000000020004" pitchFamily="2" charset="0"/>
+              <a:cs typeface="Helvetica Neue" panose="02000503000000020004" pitchFamily="2" charset="0"/>
+            </a:endParaRPr>
+          </a:p>
+          <a:p>
+            <a:pPr marL="457200" marR="0" lvl="0" indent="-457200" algn="l" defTabSz="914400" rtl="0" eaLnBrk="1" fontAlgn="auto" latinLnBrk="0" hangingPunct="1">
+              <a:lnSpc>
+                <a:spcPct val="100000"/>
+              </a:lnSpc>
+              <a:spcBef>
+                <a:spcPts val="0"/>
+              </a:spcBef>
+              <a:spcAft>
+                <a:spcPts val="0"/>
+              </a:spcAft>
+              <a:buClrTx/>
+              <a:buSzTx/>
+              <a:buFont typeface="Arial" panose="020B0604020202020204" pitchFamily="34" charset="0"/>
+              <a:buChar char="•"/>
+              <a:tabLst/>
+              <a:defRPr/>
+            </a:pPr>
+            <a:r>
+              <a:rPr lang="en-US" sz="2000" dirty="0">
+                <a:solidFill>
+                  <a:prstClr val="white"/>
+                </a:solidFill>
+                <a:latin typeface="Helvetica Neue" panose="02000503000000020004" pitchFamily="2" charset="0"/>
+                <a:ea typeface="Helvetica Neue" panose="02000503000000020004" pitchFamily="2" charset="0"/>
+                <a:cs typeface="Helvetica Neue" panose="02000503000000020004" pitchFamily="2" charset="0"/>
+              </a:rPr>
+              <a:t>For ideal c</a:t>
+            </a:r>
+            <a:r>
+              <a:rPr kumimoji="0" lang="en-US" sz="2000" b="0" i="0" u="none" strike="noStrike" kern="1200" cap="none" spc="0" normalizeH="0" baseline="0" noProof="0" dirty="0">
+                <a:ln>
+                  <a:noFill/>
+                </a:ln>
+                <a:solidFill>
+                  <a:prstClr val="white"/>
+                </a:solidFill>
+                <a:effectLst/>
+                <a:uLnTx/>
+                <a:uFillTx/>
+                <a:latin typeface="Helvetica Neue" panose="02000503000000020004" pitchFamily="2" charset="0"/>
+                <a:ea typeface="Helvetica Neue" panose="02000503000000020004" pitchFamily="2" charset="0"/>
+                <a:cs typeface="Helvetica Neue" panose="02000503000000020004" pitchFamily="2" charset="0"/>
+              </a:rPr>
+              <a:t>onstant rate gains of energy in the form of angular momentum, </a:t>
+            </a:r>
+          </a:p>
+          <a:p>
+            <a:pPr marL="914400" lvl="1" indent="-457200">
+              <a:buFont typeface="Arial" panose="020B0604020202020204" pitchFamily="34" charset="0"/>
+              <a:buChar char="•"/>
+              <a:defRPr/>
+            </a:pPr>
+            <a:r>
+              <a:rPr kumimoji="0" lang="en-US" sz="2000" b="0" i="0" u="none" strike="noStrike" kern="1200" cap="none" spc="0" normalizeH="0" baseline="0" noProof="0" dirty="0">
+                <a:ln>
+                  <a:noFill/>
+                </a:ln>
+                <a:solidFill>
+                  <a:prstClr val="white"/>
+                </a:solidFill>
+                <a:effectLst/>
+                <a:uLnTx/>
+                <a:uFillTx/>
+                <a:latin typeface="Helvetica Neue" panose="02000503000000020004" pitchFamily="2" charset="0"/>
+                <a:ea typeface="Helvetica Neue" panose="02000503000000020004" pitchFamily="2" charset="0"/>
+                <a:cs typeface="Helvetica Neue" panose="02000503000000020004" pitchFamily="2" charset="0"/>
+              </a:rPr>
+              <a:t>radius will get smaller more quickly,</a:t>
+            </a:r>
+          </a:p>
+          <a:p>
+            <a:pPr marL="914400" lvl="1" indent="-457200">
+              <a:buFont typeface="Arial" panose="020B0604020202020204" pitchFamily="34" charset="0"/>
+              <a:buChar char="•"/>
+              <a:defRPr/>
+            </a:pPr>
+            <a:r>
+              <a:rPr lang="en-US" sz="2000" dirty="0">
+                <a:solidFill>
+                  <a:prstClr val="white"/>
+                </a:solidFill>
+                <a:latin typeface="Helvetica Neue" panose="02000503000000020004" pitchFamily="2" charset="0"/>
+                <a:ea typeface="Helvetica Neue" panose="02000503000000020004" pitchFamily="2" charset="0"/>
+                <a:cs typeface="Helvetica Neue" panose="02000503000000020004" pitchFamily="2" charset="0"/>
+              </a:rPr>
+              <a:t>frequency and orbital velocity will get faster more quickly</a:t>
+            </a:r>
+          </a:p>
+          <a:p>
+            <a:pPr marL="457200" marR="0" lvl="0" indent="-457200" algn="l" defTabSz="914400" rtl="0" eaLnBrk="1" fontAlgn="auto" latinLnBrk="0" hangingPunct="1">
+              <a:lnSpc>
+                <a:spcPct val="100000"/>
+              </a:lnSpc>
+              <a:spcBef>
+                <a:spcPts val="0"/>
+              </a:spcBef>
+              <a:spcAft>
+                <a:spcPts val="0"/>
+              </a:spcAft>
+              <a:buClrTx/>
+              <a:buSzTx/>
+              <a:buFont typeface="Arial" panose="020B0604020202020204" pitchFamily="34" charset="0"/>
+              <a:buChar char="•"/>
+              <a:tabLst/>
+              <a:defRPr/>
+            </a:pPr>
+            <a:r>
+              <a:rPr lang="en-US" sz="2000" dirty="0">
+                <a:solidFill>
+                  <a:prstClr val="white"/>
+                </a:solidFill>
+                <a:latin typeface="Helvetica Neue" panose="02000503000000020004" pitchFamily="2" charset="0"/>
+                <a:ea typeface="Helvetica Neue" panose="02000503000000020004" pitchFamily="2" charset="0"/>
+                <a:cs typeface="Helvetica Neue" panose="02000503000000020004" pitchFamily="2" charset="0"/>
+              </a:rPr>
+              <a:t>For ideal c</a:t>
+            </a:r>
+            <a:r>
+              <a:rPr kumimoji="0" lang="en-US" sz="2000" b="0" i="0" u="none" strike="noStrike" kern="1200" cap="none" spc="0" normalizeH="0" baseline="0" noProof="0" dirty="0">
+                <a:ln>
+                  <a:noFill/>
+                </a:ln>
+                <a:solidFill>
+                  <a:prstClr val="white"/>
+                </a:solidFill>
+                <a:effectLst/>
+                <a:uLnTx/>
+                <a:uFillTx/>
+                <a:latin typeface="Helvetica Neue" panose="02000503000000020004" pitchFamily="2" charset="0"/>
+                <a:ea typeface="Helvetica Neue" panose="02000503000000020004" pitchFamily="2" charset="0"/>
+                <a:cs typeface="Helvetica Neue" panose="02000503000000020004" pitchFamily="2" charset="0"/>
+              </a:rPr>
+              <a:t>onstant rate losses of energy in the form of angular momentum, </a:t>
+            </a:r>
+          </a:p>
+          <a:p>
+            <a:pPr marL="914400" lvl="1" indent="-457200">
+              <a:buFont typeface="Arial" panose="020B0604020202020204" pitchFamily="34" charset="0"/>
+              <a:buChar char="•"/>
+              <a:defRPr/>
+            </a:pPr>
+            <a:r>
+              <a:rPr kumimoji="0" lang="en-US" sz="2000" b="0" i="0" u="none" strike="noStrike" kern="1200" cap="none" spc="0" normalizeH="0" baseline="0" noProof="0" dirty="0">
+                <a:ln>
+                  <a:noFill/>
+                </a:ln>
+                <a:solidFill>
+                  <a:prstClr val="white"/>
+                </a:solidFill>
+                <a:effectLst/>
+                <a:uLnTx/>
+                <a:uFillTx/>
+                <a:latin typeface="Helvetica Neue" panose="02000503000000020004" pitchFamily="2" charset="0"/>
+                <a:ea typeface="Helvetica Neue" panose="02000503000000020004" pitchFamily="2" charset="0"/>
+                <a:cs typeface="Helvetica Neue" panose="02000503000000020004" pitchFamily="2" charset="0"/>
+              </a:rPr>
+              <a:t>radius will get larger more quickly,</a:t>
+            </a:r>
+          </a:p>
+          <a:p>
+            <a:pPr marL="914400" lvl="1" indent="-457200">
+              <a:buFont typeface="Arial" panose="020B0604020202020204" pitchFamily="34" charset="0"/>
+              <a:buChar char="•"/>
+              <a:defRPr/>
+            </a:pPr>
+            <a:r>
+              <a:rPr lang="en-US" sz="2000" dirty="0">
+                <a:solidFill>
+                  <a:prstClr val="white"/>
+                </a:solidFill>
+                <a:latin typeface="Helvetica Neue" panose="02000503000000020004" pitchFamily="2" charset="0"/>
+                <a:ea typeface="Helvetica Neue" panose="02000503000000020004" pitchFamily="2" charset="0"/>
+                <a:cs typeface="Helvetica Neue" panose="02000503000000020004" pitchFamily="2" charset="0"/>
+              </a:rPr>
+              <a:t>frequency and orbital velocity will get slower more quickly</a:t>
+            </a:r>
+            <a:endParaRPr kumimoji="0" lang="en-US" sz="2000" b="0" i="0" u="none" strike="noStrike" kern="1200" cap="none" spc="0" normalizeH="0" baseline="0" noProof="0" dirty="0">
+              <a:ln>
+                <a:noFill/>
+              </a:ln>
+              <a:solidFill>
+                <a:prstClr val="white"/>
+              </a:solidFill>
+              <a:effectLst/>
+              <a:uLnTx/>
+              <a:uFillTx/>
+              <a:latin typeface="Helvetica Neue" panose="02000503000000020004" pitchFamily="2" charset="0"/>
+              <a:ea typeface="Helvetica Neue" panose="02000503000000020004" pitchFamily="2" charset="0"/>
+              <a:cs typeface="Helvetica Neue" panose="02000503000000020004" pitchFamily="2" charset="0"/>
+            </a:endParaRPr>
+          </a:p>
+          <a:p>
+            <a:pPr marL="457200" indent="-457200">
+              <a:buFont typeface="Arial" panose="020B0604020202020204" pitchFamily="34" charset="0"/>
+              <a:buChar char="•"/>
+              <a:defRPr/>
+            </a:pPr>
+            <a:endParaRPr kumimoji="0" lang="en-US" sz="2000" b="0" i="0" u="none" strike="noStrike" kern="1200" cap="none" spc="0" normalizeH="0" baseline="0" noProof="0" dirty="0">
+              <a:ln>
+                <a:noFill/>
+              </a:ln>
+              <a:solidFill>
+                <a:prstClr val="white"/>
+              </a:solidFill>
+              <a:effectLst/>
+              <a:uLnTx/>
+              <a:uFillTx/>
+              <a:latin typeface="Helvetica Neue" panose="02000503000000020004" pitchFamily="2" charset="0"/>
+              <a:ea typeface="Helvetica Neue" panose="02000503000000020004" pitchFamily="2" charset="0"/>
+              <a:cs typeface="Helvetica Neue" panose="02000503000000020004" pitchFamily="2" charset="0"/>
+            </a:endParaRPr>
+          </a:p>
+          <a:p>
+            <a:pPr marL="914400" lvl="1" indent="-457200">
+              <a:buFont typeface="Arial" panose="020B0604020202020204" pitchFamily="34" charset="0"/>
+              <a:buChar char="•"/>
+              <a:defRPr/>
+            </a:pPr>
+            <a:endParaRPr kumimoji="0" lang="en-US" sz="2000" b="0" i="0" u="none" strike="noStrike" kern="1200" cap="none" spc="0" normalizeH="0" baseline="0" noProof="0" dirty="0">
+              <a:ln>
+                <a:noFill/>
+              </a:ln>
+              <a:solidFill>
+                <a:prstClr val="white"/>
+              </a:solidFill>
+              <a:effectLst/>
+              <a:uLnTx/>
+              <a:uFillTx/>
+              <a:latin typeface="Helvetica Neue" panose="02000503000000020004" pitchFamily="2" charset="0"/>
+              <a:ea typeface="Helvetica Neue" panose="02000503000000020004" pitchFamily="2" charset="0"/>
+              <a:cs typeface="Helvetica Neue" panose="02000503000000020004" pitchFamily="2" charset="0"/>
+            </a:endParaRPr>
+          </a:p>
+          <a:p>
+            <a:pPr marL="457200" marR="0" lvl="0" indent="-457200" algn="l" defTabSz="914400" rtl="0" eaLnBrk="1" fontAlgn="auto" latinLnBrk="0" hangingPunct="1">
+              <a:lnSpc>
+                <a:spcPct val="100000"/>
+              </a:lnSpc>
+              <a:spcBef>
+                <a:spcPts val="0"/>
+              </a:spcBef>
+              <a:spcAft>
+                <a:spcPts val="0"/>
+              </a:spcAft>
+              <a:buClrTx/>
+              <a:buSzTx/>
+              <a:buFont typeface="Arial" panose="020B0604020202020204" pitchFamily="34" charset="0"/>
+              <a:buChar char="•"/>
+              <a:tabLst/>
+              <a:defRPr/>
+            </a:pPr>
+            <a:endParaRPr kumimoji="0" lang="en-US" sz="2000" b="0" i="0" u="none" strike="noStrike" kern="1200" cap="none" spc="0" normalizeH="0" baseline="0" noProof="0" dirty="0">
+              <a:ln>
+                <a:noFill/>
+              </a:ln>
+              <a:solidFill>
+                <a:prstClr val="white"/>
+              </a:solidFill>
+              <a:effectLst/>
+              <a:uLnTx/>
+              <a:uFillTx/>
+              <a:latin typeface="Helvetica Neue" panose="02000503000000020004" pitchFamily="2" charset="0"/>
+              <a:ea typeface="Helvetica Neue" panose="02000503000000020004" pitchFamily="2" charset="0"/>
+              <a:cs typeface="Helvetica Neue" panose="02000503000000020004" pitchFamily="2" charset="0"/>
+            </a:endParaRPr>
+          </a:p>
+          <a:p>
+            <a:pPr marL="457200" marR="0" lvl="0" indent="-457200" algn="l" defTabSz="914400" rtl="0" eaLnBrk="1" fontAlgn="auto" latinLnBrk="0" hangingPunct="1">
+              <a:lnSpc>
+                <a:spcPct val="100000"/>
+              </a:lnSpc>
+              <a:spcBef>
+                <a:spcPts val="0"/>
+              </a:spcBef>
+              <a:spcAft>
+                <a:spcPts val="0"/>
+              </a:spcAft>
+              <a:buClrTx/>
+              <a:buSzTx/>
+              <a:buFont typeface="Arial" panose="020B0604020202020204" pitchFamily="34" charset="0"/>
+              <a:buChar char="•"/>
+              <a:tabLst/>
+              <a:defRPr/>
+            </a:pPr>
+            <a:endParaRPr kumimoji="0" lang="en-US" sz="2000" b="0" i="0" u="none" strike="noStrike" kern="1200" cap="none" spc="0" normalizeH="0" baseline="0" noProof="0" dirty="0">
+              <a:ln>
+                <a:noFill/>
+              </a:ln>
+              <a:solidFill>
+                <a:prstClr val="white"/>
+              </a:solidFill>
+              <a:effectLst/>
+              <a:uLnTx/>
+              <a:uFillTx/>
+              <a:latin typeface="Helvetica Neue" panose="02000503000000020004" pitchFamily="2" charset="0"/>
+              <a:ea typeface="Helvetica Neue" panose="02000503000000020004" pitchFamily="2" charset="0"/>
+              <a:cs typeface="Helvetica Neue" panose="02000503000000020004" pitchFamily="2" charset="0"/>
+            </a:endParaRPr>
+          </a:p>
+          <a:p>
+            <a:pPr marL="457200" marR="0" lvl="0" indent="-457200" algn="l" defTabSz="914400" rtl="0" eaLnBrk="1" fontAlgn="auto" latinLnBrk="0" hangingPunct="1">
+              <a:lnSpc>
+                <a:spcPct val="100000"/>
+              </a:lnSpc>
+              <a:spcBef>
+                <a:spcPts val="0"/>
+              </a:spcBef>
+              <a:spcAft>
+                <a:spcPts val="0"/>
+              </a:spcAft>
+              <a:buClrTx/>
+              <a:buSzTx/>
+              <a:buFont typeface="Arial" panose="020B0604020202020204" pitchFamily="34" charset="0"/>
+              <a:buChar char="•"/>
+              <a:tabLst/>
+              <a:defRPr/>
+            </a:pPr>
+            <a:endParaRPr kumimoji="0" lang="en-US" sz="2000" b="0" i="0" u="none" strike="noStrike" kern="1200" cap="none" spc="0" normalizeH="0" baseline="0" noProof="0" dirty="0">
+              <a:ln>
+                <a:noFill/>
+              </a:ln>
+              <a:solidFill>
+                <a:prstClr val="white"/>
+              </a:solidFill>
+              <a:effectLst/>
+              <a:uLnTx/>
+              <a:uFillTx/>
+              <a:latin typeface="Helvetica Neue" panose="02000503000000020004" pitchFamily="2" charset="0"/>
+              <a:ea typeface="Helvetica Neue" panose="02000503000000020004" pitchFamily="2" charset="0"/>
+              <a:cs typeface="Helvetica Neue" panose="02000503000000020004" pitchFamily="2" charset="0"/>
+            </a:endParaRPr>
+          </a:p>
+        </p:txBody>
+      </p:sp>
+      <p:sp>
+        <p:nvSpPr>
+          <p:cNvPr id="4" name="TextBox 3">
+            <a:extLst>
+              <a:ext uri="{FF2B5EF4-FFF2-40B4-BE49-F238E27FC236}">
+                <a16:creationId xmlns:a16="http://schemas.microsoft.com/office/drawing/2014/main" id="{7A2175A5-74A8-2670-C353-E09D4CB21198}"/>
+              </a:ext>
+            </a:extLst>
+          </p:cNvPr>
+          <p:cNvSpPr txBox="1"/>
+          <p:nvPr/>
+        </p:nvSpPr>
+        <p:spPr>
+          <a:xfrm>
+            <a:off x="-14368639" y="-5417"/>
+            <a:ext cx="14368639" cy="4401205"/>
+          </a:xfrm>
+          <a:prstGeom prst="rect">
+            <a:avLst/>
+          </a:prstGeom>
+          <a:noFill/>
+        </p:spPr>
+        <p:txBody>
+          <a:bodyPr wrap="square">
+            <a:spAutoFit/>
+          </a:bodyPr>
+          <a:lstStyle/>
+          <a:p>
+            <a:pPr marL="457200" marR="0" lvl="0" indent="-457200" algn="l" defTabSz="914400" rtl="0" eaLnBrk="1" fontAlgn="auto" latinLnBrk="0" hangingPunct="1">
+              <a:lnSpc>
+                <a:spcPct val="100000"/>
+              </a:lnSpc>
+              <a:spcBef>
+                <a:spcPts val="0"/>
+              </a:spcBef>
+              <a:spcAft>
+                <a:spcPts val="0"/>
+              </a:spcAft>
+              <a:buClrTx/>
+              <a:buSzTx/>
+              <a:buFont typeface="Arial" panose="020B0604020202020204" pitchFamily="34" charset="0"/>
+              <a:buChar char="•"/>
+              <a:tabLst/>
+              <a:defRPr/>
+            </a:pPr>
+            <a:r>
+              <a:rPr lang="en-US" sz="2000" dirty="0">
+                <a:solidFill>
+                  <a:srgbClr val="FFC000"/>
+                </a:solidFill>
+                <a:latin typeface="Helvetica Neue" panose="02000503000000020004" pitchFamily="2" charset="0"/>
+                <a:ea typeface="Helvetica Neue" panose="02000503000000020004" pitchFamily="2" charset="0"/>
+                <a:cs typeface="Helvetica Neue" panose="02000503000000020004" pitchFamily="2" charset="0"/>
+              </a:rPr>
+              <a:t>Known physics may correctly assess that the binary would spiral to what they thought was oblivion for various reasons.</a:t>
+            </a:r>
+          </a:p>
+          <a:p>
+            <a:pPr marL="457200" marR="0" lvl="0" indent="-457200" algn="l" defTabSz="914400" rtl="0" eaLnBrk="1" fontAlgn="auto" latinLnBrk="0" hangingPunct="1">
+              <a:lnSpc>
+                <a:spcPct val="100000"/>
+              </a:lnSpc>
+              <a:spcBef>
+                <a:spcPts val="0"/>
+              </a:spcBef>
+              <a:spcAft>
+                <a:spcPts val="0"/>
+              </a:spcAft>
+              <a:buClrTx/>
+              <a:buSzTx/>
+              <a:buFont typeface="Arial" panose="020B0604020202020204" pitchFamily="34" charset="0"/>
+              <a:buChar char="•"/>
+              <a:tabLst/>
+              <a:defRPr/>
+            </a:pPr>
+            <a:r>
+              <a:rPr lang="en-US" sz="2000" dirty="0">
+                <a:solidFill>
+                  <a:srgbClr val="FFC000"/>
+                </a:solidFill>
+                <a:latin typeface="Helvetica Neue" panose="02000503000000020004" pitchFamily="2" charset="0"/>
+                <a:ea typeface="Helvetica Neue" panose="02000503000000020004" pitchFamily="2" charset="0"/>
+                <a:cs typeface="Helvetica Neue" panose="02000503000000020004" pitchFamily="2" charset="0"/>
+              </a:rPr>
+              <a:t>But they didn’t understand that was merely the symmetry breaking point between the CFT and AdS regions</a:t>
+            </a:r>
+          </a:p>
+          <a:p>
+            <a:pPr marL="457200" indent="-457200">
+              <a:buFont typeface="Arial" panose="020B0604020202020204" pitchFamily="34" charset="0"/>
+              <a:buChar char="•"/>
+              <a:defRPr/>
+            </a:pPr>
+            <a:r>
+              <a:rPr kumimoji="0" lang="en-US" sz="2000" b="0" i="0" u="none" strike="noStrike" kern="1200" cap="none" spc="0" normalizeH="0" baseline="0" noProof="0" dirty="0">
+                <a:ln>
+                  <a:noFill/>
+                </a:ln>
+                <a:solidFill>
+                  <a:srgbClr val="FFC000"/>
+                </a:solidFill>
+                <a:effectLst/>
+                <a:uLnTx/>
+                <a:uFillTx/>
+                <a:latin typeface="Helvetica Neue" panose="02000503000000020004" pitchFamily="2" charset="0"/>
+                <a:ea typeface="Helvetica Neue" panose="02000503000000020004" pitchFamily="2" charset="0"/>
+                <a:cs typeface="Helvetica Neue" panose="02000503000000020004" pitchFamily="2" charset="0"/>
+              </a:rPr>
+              <a:t>We can leverage this into a more abstract and yet correct energy analysis.</a:t>
+            </a:r>
+          </a:p>
+          <a:p>
+            <a:pPr marL="914400" lvl="1" indent="-457200">
+              <a:buFont typeface="Arial" panose="020B0604020202020204" pitchFamily="34" charset="0"/>
+              <a:buChar char="•"/>
+              <a:defRPr/>
+            </a:pPr>
+            <a:r>
+              <a:rPr lang="en-US" sz="2000" dirty="0">
+                <a:solidFill>
+                  <a:srgbClr val="FFC000"/>
+                </a:solidFill>
+                <a:latin typeface="Helvetica Neue" panose="02000503000000020004" pitchFamily="2" charset="0"/>
+                <a:ea typeface="Helvetica Neue" panose="02000503000000020004" pitchFamily="2" charset="0"/>
+                <a:cs typeface="Helvetica Neue" panose="02000503000000020004" pitchFamily="2" charset="0"/>
+              </a:rPr>
+              <a:t>i.e., add an h, frequency increases from 0 to 1, what did we learn?</a:t>
+            </a:r>
+          </a:p>
+          <a:p>
+            <a:pPr marL="914400" lvl="1" indent="-457200">
+              <a:buFont typeface="Arial" panose="020B0604020202020204" pitchFamily="34" charset="0"/>
+              <a:buChar char="•"/>
+              <a:defRPr/>
+            </a:pPr>
+            <a:r>
+              <a:rPr kumimoji="0" lang="en-US" sz="2000" b="0" i="0" u="none" strike="noStrike" kern="1200" cap="none" spc="0" normalizeH="0" baseline="0" noProof="0" dirty="0">
+                <a:ln>
+                  <a:noFill/>
+                </a:ln>
+                <a:solidFill>
+                  <a:srgbClr val="FFC000"/>
+                </a:solidFill>
+                <a:effectLst/>
+                <a:uLnTx/>
+                <a:uFillTx/>
+                <a:latin typeface="Helvetica Neue" panose="02000503000000020004" pitchFamily="2" charset="0"/>
+                <a:ea typeface="Helvetica Neue" panose="02000503000000020004" pitchFamily="2" charset="0"/>
+                <a:cs typeface="Helvetica Neue" panose="02000503000000020004" pitchFamily="2" charset="0"/>
+              </a:rPr>
+              <a:t>these are points on the natural spiral so we know they are valid. </a:t>
+            </a:r>
+          </a:p>
+          <a:p>
+            <a:pPr marL="914400" lvl="1" indent="-457200">
+              <a:buFont typeface="Arial" panose="020B0604020202020204" pitchFamily="34" charset="0"/>
+              <a:buChar char="•"/>
+              <a:defRPr/>
+            </a:pPr>
+            <a:r>
+              <a:rPr lang="en-US" sz="2000" dirty="0">
+                <a:solidFill>
+                  <a:srgbClr val="FFC000"/>
+                </a:solidFill>
+                <a:latin typeface="Helvetica Neue" panose="02000503000000020004" pitchFamily="2" charset="0"/>
+                <a:ea typeface="Helvetica Neue" panose="02000503000000020004" pitchFamily="2" charset="0"/>
+                <a:cs typeface="Helvetica Neue" panose="02000503000000020004" pitchFamily="2" charset="0"/>
+              </a:rPr>
+              <a:t>we must be cautious to remember that stability is the natural spiral behaviour</a:t>
+            </a:r>
+          </a:p>
+          <a:p>
+            <a:pPr marL="457200" indent="-457200">
+              <a:buFont typeface="Arial" panose="020B0604020202020204" pitchFamily="34" charset="0"/>
+              <a:buChar char="•"/>
+              <a:defRPr/>
+            </a:pPr>
+            <a:r>
+              <a:rPr kumimoji="0" lang="en-US" sz="2000" b="0" i="0" u="none" strike="noStrike" kern="1200" cap="none" spc="0" normalizeH="0" baseline="0" noProof="0" dirty="0">
+                <a:ln>
+                  <a:noFill/>
+                </a:ln>
+                <a:solidFill>
+                  <a:srgbClr val="FFC000"/>
+                </a:solidFill>
+                <a:effectLst/>
+                <a:uLnTx/>
+                <a:uFillTx/>
+                <a:latin typeface="Helvetica Neue" panose="02000503000000020004" pitchFamily="2" charset="0"/>
+                <a:ea typeface="Helvetica Neue" panose="02000503000000020004" pitchFamily="2" charset="0"/>
+                <a:cs typeface="Helvetica Neue" panose="02000503000000020004" pitchFamily="2" charset="0"/>
+              </a:rPr>
+              <a:t>I think what is possibly confusing is that there are natural rates of change, in fact two of them</a:t>
+            </a:r>
+          </a:p>
+          <a:p>
+            <a:pPr marL="457200" indent="-457200">
+              <a:buFont typeface="Arial" panose="020B0604020202020204" pitchFamily="34" charset="0"/>
+              <a:buChar char="•"/>
+              <a:defRPr/>
+            </a:pPr>
+            <a:endParaRPr lang="en-US" sz="2000" dirty="0">
+              <a:solidFill>
+                <a:srgbClr val="FFC000"/>
+              </a:solidFill>
+              <a:latin typeface="Helvetica Neue" panose="02000503000000020004" pitchFamily="2" charset="0"/>
+              <a:ea typeface="Helvetica Neue" panose="02000503000000020004" pitchFamily="2" charset="0"/>
+              <a:cs typeface="Helvetica Neue" panose="02000503000000020004" pitchFamily="2" charset="0"/>
+            </a:endParaRPr>
+          </a:p>
+          <a:p>
+            <a:pPr marL="457200" indent="-457200">
+              <a:buFont typeface="Arial" panose="020B0604020202020204" pitchFamily="34" charset="0"/>
+              <a:buChar char="•"/>
+              <a:defRPr/>
+            </a:pPr>
+            <a:r>
+              <a:rPr kumimoji="0" lang="en-US" sz="2000" b="0" i="0" u="none" strike="noStrike" kern="1200" cap="none" spc="0" normalizeH="0" baseline="0" noProof="0" dirty="0">
+                <a:ln>
+                  <a:noFill/>
+                </a:ln>
+                <a:solidFill>
+                  <a:srgbClr val="FFC000"/>
+                </a:solidFill>
+                <a:effectLst/>
+                <a:uLnTx/>
+                <a:uFillTx/>
+                <a:latin typeface="Helvetica Neue" panose="02000503000000020004" pitchFamily="2" charset="0"/>
+                <a:ea typeface="Helvetica Neue" panose="02000503000000020004" pitchFamily="2" charset="0"/>
+                <a:cs typeface="Helvetica Neue" panose="02000503000000020004" pitchFamily="2" charset="0"/>
+              </a:rPr>
+              <a:t>so when we apply more energy that is changing the rate at which things were changing, thus an acceleration or deceleration.</a:t>
+            </a:r>
+          </a:p>
+          <a:p>
+            <a:pPr marL="457200" indent="-457200">
+              <a:buFont typeface="Arial" panose="020B0604020202020204" pitchFamily="34" charset="0"/>
+              <a:buChar char="•"/>
+              <a:defRPr/>
+            </a:pPr>
+            <a:r>
+              <a:rPr lang="en-US" sz="2000" dirty="0">
+                <a:solidFill>
+                  <a:srgbClr val="FFC000"/>
+                </a:solidFill>
+                <a:latin typeface="Helvetica Neue" panose="02000503000000020004" pitchFamily="2" charset="0"/>
+                <a:ea typeface="Helvetica Neue" panose="02000503000000020004" pitchFamily="2" charset="0"/>
+                <a:cs typeface="Helvetica Neue" panose="02000503000000020004" pitchFamily="2" charset="0"/>
+              </a:rPr>
+              <a:t>once the energy transfer stops, then those changes are locked in and we continue the natural progression from there.  </a:t>
+            </a:r>
+          </a:p>
+          <a:p>
+            <a:pPr>
+              <a:defRPr/>
+            </a:pPr>
+            <a:endParaRPr lang="en-US" sz="2000" dirty="0">
+              <a:solidFill>
+                <a:srgbClr val="FFC000"/>
+              </a:solidFill>
+              <a:latin typeface="Helvetica Neue" panose="02000503000000020004" pitchFamily="2" charset="0"/>
+              <a:ea typeface="Helvetica Neue" panose="02000503000000020004" pitchFamily="2" charset="0"/>
+              <a:cs typeface="Helvetica Neue" panose="02000503000000020004" pitchFamily="2" charset="0"/>
+            </a:endParaRPr>
+          </a:p>
+          <a:p>
+            <a:pPr marL="457200" indent="-457200">
+              <a:buFont typeface="Arial" panose="020B0604020202020204" pitchFamily="34" charset="0"/>
+              <a:buChar char="•"/>
+              <a:defRPr/>
+            </a:pPr>
+            <a:r>
+              <a:rPr kumimoji="0" lang="en-US" sz="2000" b="0" i="0" u="none" strike="noStrike" kern="1200" cap="none" spc="0" normalizeH="0" baseline="0" noProof="0" dirty="0">
+                <a:ln>
+                  <a:noFill/>
+                </a:ln>
+                <a:solidFill>
+                  <a:srgbClr val="FFC000"/>
+                </a:solidFill>
+                <a:effectLst/>
+                <a:uLnTx/>
+                <a:uFillTx/>
+                <a:latin typeface="Helvetica Neue" panose="02000503000000020004" pitchFamily="2" charset="0"/>
+                <a:ea typeface="Helvetica Neue" panose="02000503000000020004" pitchFamily="2" charset="0"/>
+                <a:cs typeface="Helvetica Neue" panose="02000503000000020004" pitchFamily="2" charset="0"/>
+              </a:rPr>
+              <a:t>Vector potential q/(vr) intersecting a point potential with an eightball. What happens.</a:t>
+            </a:r>
+          </a:p>
+          <a:p>
+            <a:pPr marL="914400" lvl="1" indent="-457200">
+              <a:buFont typeface="Arial" panose="020B0604020202020204" pitchFamily="34" charset="0"/>
+              <a:buChar char="•"/>
+              <a:defRPr/>
+            </a:pPr>
+            <a:endParaRPr kumimoji="0" lang="en-US" sz="2000" b="0" i="0" u="none" strike="noStrike" kern="1200" cap="none" spc="0" normalizeH="0" baseline="0" noProof="0" dirty="0">
+              <a:ln>
+                <a:noFill/>
+              </a:ln>
+              <a:solidFill>
+                <a:srgbClr val="FFC000"/>
+              </a:solidFill>
+              <a:effectLst/>
+              <a:uLnTx/>
+              <a:uFillTx/>
+              <a:latin typeface="Helvetica Neue" panose="02000503000000020004" pitchFamily="2" charset="0"/>
+              <a:ea typeface="Helvetica Neue" panose="02000503000000020004" pitchFamily="2" charset="0"/>
+              <a:cs typeface="Helvetica Neue" panose="02000503000000020004" pitchFamily="2" charset="0"/>
+            </a:endParaRPr>
+          </a:p>
+        </p:txBody>
+      </p:sp>
+    </p:spTree>
+    <p:extLst>
+      <p:ext uri="{BB962C8B-B14F-4D97-AF65-F5344CB8AC3E}">
+        <p14:creationId xmlns:p14="http://schemas.microsoft.com/office/powerpoint/2010/main" val="2018786501"/>
       </p:ext>
     </p:extLst>
   </p:cSld>
@@ -17634,334 +14568,6 @@
 </file>
 
 <file path=ppt/theme/theme2.xml><?xml version="1.0" encoding="utf-8"?>
-<a:theme xmlns:a="http://schemas.openxmlformats.org/drawingml/2006/main" name="2_Office Theme">
-  <a:themeElements>
-    <a:clrScheme name="Office">
-      <a:dk1>
-        <a:sysClr val="windowText" lastClr="000000"/>
-      </a:dk1>
-      <a:lt1>
-        <a:sysClr val="window" lastClr="FFFFFF"/>
-      </a:lt1>
-      <a:dk2>
-        <a:srgbClr val="44546A"/>
-      </a:dk2>
-      <a:lt2>
-        <a:srgbClr val="E7E6E6"/>
-      </a:lt2>
-      <a:accent1>
-        <a:srgbClr val="4472C4"/>
-      </a:accent1>
-      <a:accent2>
-        <a:srgbClr val="ED7D31"/>
-      </a:accent2>
-      <a:accent3>
-        <a:srgbClr val="A5A5A5"/>
-      </a:accent3>
-      <a:accent4>
-        <a:srgbClr val="FFC000"/>
-      </a:accent4>
-      <a:accent5>
-        <a:srgbClr val="5B9BD5"/>
-      </a:accent5>
-      <a:accent6>
-        <a:srgbClr val="70AD47"/>
-      </a:accent6>
-      <a:hlink>
-        <a:srgbClr val="0563C1"/>
-      </a:hlink>
-      <a:folHlink>
-        <a:srgbClr val="954F72"/>
-      </a:folHlink>
-    </a:clrScheme>
-    <a:fontScheme name="Office">
-      <a:majorFont>
-        <a:latin typeface="Calibri Light" panose="020F0302020204030204"/>
-        <a:ea typeface=""/>
-        <a:cs typeface=""/>
-        <a:font script="Jpan" typeface="游ゴシック Light"/>
-        <a:font script="Hang" typeface="맑은 고딕"/>
-        <a:font script="Hans" typeface="等线 Light"/>
-        <a:font script="Hant" typeface="新細明體"/>
-        <a:font script="Arab" typeface="Times New Roman"/>
-        <a:font script="Hebr" typeface="Times New Roman"/>
-        <a:font script="Thai" typeface="Angsana New"/>
-        <a:font script="Ethi" typeface="Nyala"/>
-        <a:font script="Beng" typeface="Vrinda"/>
-        <a:font script="Gujr" typeface="Shruti"/>
-        <a:font script="Khmr" typeface="MoolBoran"/>
-        <a:font script="Knda" typeface="Tunga"/>
-        <a:font script="Guru" typeface="Raavi"/>
-        <a:font script="Cans" typeface="Euphemia"/>
-        <a:font script="Cher" typeface="Plantagenet Cherokee"/>
-        <a:font script="Yiii" typeface="Microsoft Yi Baiti"/>
-        <a:font script="Tibt" typeface="Microsoft Himalaya"/>
-        <a:font script="Thaa" typeface="MV Boli"/>
-        <a:font script="Deva" typeface="Mangal"/>
-        <a:font script="Telu" typeface="Gautami"/>
-        <a:font script="Taml" typeface="Latha"/>
-        <a:font script="Syrc" typeface="Estrangelo Edessa"/>
-        <a:font script="Orya" typeface="Kalinga"/>
-        <a:font script="Mlym" typeface="Kartika"/>
-        <a:font script="Laoo" typeface="DokChampa"/>
-        <a:font script="Sinh" typeface="Iskoola Pota"/>
-        <a:font script="Mong" typeface="Mongolian Baiti"/>
-        <a:font script="Viet" typeface="Times New Roman"/>
-        <a:font script="Uigh" typeface="Microsoft Uighur"/>
-        <a:font script="Geor" typeface="Sylfaen"/>
-        <a:font script="Armn" typeface="Arial"/>
-        <a:font script="Bugi" typeface="Leelawadee UI"/>
-        <a:font script="Bopo" typeface="Microsoft JhengHei"/>
-        <a:font script="Java" typeface="Javanese Text"/>
-        <a:font script="Lisu" typeface="Segoe UI"/>
-        <a:font script="Mymr" typeface="Myanmar Text"/>
-        <a:font script="Nkoo" typeface="Ebrima"/>
-        <a:font script="Olck" typeface="Nirmala UI"/>
-        <a:font script="Osma" typeface="Ebrima"/>
-        <a:font script="Phag" typeface="Phagspa"/>
-        <a:font script="Syrn" typeface="Estrangelo Edessa"/>
-        <a:font script="Syrj" typeface="Estrangelo Edessa"/>
-        <a:font script="Syre" typeface="Estrangelo Edessa"/>
-        <a:font script="Sora" typeface="Nirmala UI"/>
-        <a:font script="Tale" typeface="Microsoft Tai Le"/>
-        <a:font script="Talu" typeface="Microsoft New Tai Lue"/>
-        <a:font script="Tfng" typeface="Ebrima"/>
-      </a:majorFont>
-      <a:minorFont>
-        <a:latin typeface="Calibri" panose="020F0502020204030204"/>
-        <a:ea typeface=""/>
-        <a:cs typeface=""/>
-        <a:font script="Jpan" typeface="游ゴシック"/>
-        <a:font script="Hang" typeface="맑은 고딕"/>
-        <a:font script="Hans" typeface="等线"/>
-        <a:font script="Hant" typeface="新細明體"/>
-        <a:font script="Arab" typeface="Arial"/>
-        <a:font script="Hebr" typeface="Arial"/>
-        <a:font script="Thai" typeface="Cordia New"/>
-        <a:font script="Ethi" typeface="Nyala"/>
-        <a:font script="Beng" typeface="Vrinda"/>
-        <a:font script="Gujr" typeface="Shruti"/>
-        <a:font script="Khmr" typeface="DaunPenh"/>
-        <a:font script="Knda" typeface="Tunga"/>
-        <a:font script="Guru" typeface="Raavi"/>
-        <a:font script="Cans" typeface="Euphemia"/>
-        <a:font script="Cher" typeface="Plantagenet Cherokee"/>
-        <a:font script="Yiii" typeface="Microsoft Yi Baiti"/>
-        <a:font script="Tibt" typeface="Microsoft Himalaya"/>
-        <a:font script="Thaa" typeface="MV Boli"/>
-        <a:font script="Deva" typeface="Mangal"/>
-        <a:font script="Telu" typeface="Gautami"/>
-        <a:font script="Taml" typeface="Latha"/>
-        <a:font script="Syrc" typeface="Estrangelo Edessa"/>
-        <a:font script="Orya" typeface="Kalinga"/>
-        <a:font script="Mlym" typeface="Kartika"/>
-        <a:font script="Laoo" typeface="DokChampa"/>
-        <a:font script="Sinh" typeface="Iskoola Pota"/>
-        <a:font script="Mong" typeface="Mongolian Baiti"/>
-        <a:font script="Viet" typeface="Arial"/>
-        <a:font script="Uigh" typeface="Microsoft Uighur"/>
-        <a:font script="Geor" typeface="Sylfaen"/>
-        <a:font script="Armn" typeface="Arial"/>
-        <a:font script="Bugi" typeface="Leelawadee UI"/>
-        <a:font script="Bopo" typeface="Microsoft JhengHei"/>
-        <a:font script="Java" typeface="Javanese Text"/>
-        <a:font script="Lisu" typeface="Segoe UI"/>
-        <a:font script="Mymr" typeface="Myanmar Text"/>
-        <a:font script="Nkoo" typeface="Ebrima"/>
-        <a:font script="Olck" typeface="Nirmala UI"/>
-        <a:font script="Osma" typeface="Ebrima"/>
-        <a:font script="Phag" typeface="Phagspa"/>
-        <a:font script="Syrn" typeface="Estrangelo Edessa"/>
-        <a:font script="Syrj" typeface="Estrangelo Edessa"/>
-        <a:font script="Syre" typeface="Estrangelo Edessa"/>
-        <a:font script="Sora" typeface="Nirmala UI"/>
-        <a:font script="Tale" typeface="Microsoft Tai Le"/>
-        <a:font script="Talu" typeface="Microsoft New Tai Lue"/>
-        <a:font script="Tfng" typeface="Ebrima"/>
-      </a:minorFont>
-    </a:fontScheme>
-    <a:fmtScheme name="Office">
-      <a:fillStyleLst>
-        <a:solidFill>
-          <a:schemeClr val="phClr"/>
-        </a:solidFill>
-        <a:gradFill rotWithShape="1">
-          <a:gsLst>
-            <a:gs pos="0">
-              <a:schemeClr val="phClr">
-                <a:lumMod val="110000"/>
-                <a:satMod val="105000"/>
-                <a:tint val="67000"/>
-              </a:schemeClr>
-            </a:gs>
-            <a:gs pos="50000">
-              <a:schemeClr val="phClr">
-                <a:lumMod val="105000"/>
-                <a:satMod val="103000"/>
-                <a:tint val="73000"/>
-              </a:schemeClr>
-            </a:gs>
-            <a:gs pos="100000">
-              <a:schemeClr val="phClr">
-                <a:lumMod val="105000"/>
-                <a:satMod val="109000"/>
-                <a:tint val="81000"/>
-              </a:schemeClr>
-            </a:gs>
-          </a:gsLst>
-          <a:lin ang="5400000" scaled="0"/>
-        </a:gradFill>
-        <a:gradFill rotWithShape="1">
-          <a:gsLst>
-            <a:gs pos="0">
-              <a:schemeClr val="phClr">
-                <a:satMod val="103000"/>
-                <a:lumMod val="102000"/>
-                <a:tint val="94000"/>
-              </a:schemeClr>
-            </a:gs>
-            <a:gs pos="50000">
-              <a:schemeClr val="phClr">
-                <a:satMod val="110000"/>
-                <a:lumMod val="100000"/>
-                <a:shade val="100000"/>
-              </a:schemeClr>
-            </a:gs>
-            <a:gs pos="100000">
-              <a:schemeClr val="phClr">
-                <a:lumMod val="99000"/>
-                <a:satMod val="120000"/>
-                <a:shade val="78000"/>
-              </a:schemeClr>
-            </a:gs>
-          </a:gsLst>
-          <a:lin ang="5400000" scaled="0"/>
-        </a:gradFill>
-      </a:fillStyleLst>
-      <a:lnStyleLst>
-        <a:ln w="6350" cap="flat" cmpd="sng" algn="ctr">
-          <a:solidFill>
-            <a:schemeClr val="phClr"/>
-          </a:solidFill>
-          <a:prstDash val="solid"/>
-          <a:miter lim="800000"/>
-        </a:ln>
-        <a:ln w="12700" cap="flat" cmpd="sng" algn="ctr">
-          <a:solidFill>
-            <a:schemeClr val="phClr"/>
-          </a:solidFill>
-          <a:prstDash val="solid"/>
-          <a:miter lim="800000"/>
-        </a:ln>
-        <a:ln w="19050" cap="flat" cmpd="sng" algn="ctr">
-          <a:solidFill>
-            <a:schemeClr val="phClr"/>
-          </a:solidFill>
-          <a:prstDash val="solid"/>
-          <a:miter lim="800000"/>
-        </a:ln>
-      </a:lnStyleLst>
-      <a:effectStyleLst>
-        <a:effectStyle>
-          <a:effectLst/>
-        </a:effectStyle>
-        <a:effectStyle>
-          <a:effectLst/>
-        </a:effectStyle>
-        <a:effectStyle>
-          <a:effectLst>
-            <a:outerShdw blurRad="57150" dist="19050" dir="5400000" algn="ctr" rotWithShape="0">
-              <a:srgbClr val="000000">
-                <a:alpha val="63000"/>
-              </a:srgbClr>
-            </a:outerShdw>
-          </a:effectLst>
-        </a:effectStyle>
-      </a:effectStyleLst>
-      <a:bgFillStyleLst>
-        <a:solidFill>
-          <a:schemeClr val="phClr"/>
-        </a:solidFill>
-        <a:solidFill>
-          <a:schemeClr val="phClr">
-            <a:tint val="95000"/>
-            <a:satMod val="170000"/>
-          </a:schemeClr>
-        </a:solidFill>
-        <a:gradFill rotWithShape="1">
-          <a:gsLst>
-            <a:gs pos="0">
-              <a:schemeClr val="phClr">
-                <a:tint val="93000"/>
-                <a:satMod val="150000"/>
-                <a:shade val="98000"/>
-                <a:lumMod val="102000"/>
-              </a:schemeClr>
-            </a:gs>
-            <a:gs pos="50000">
-              <a:schemeClr val="phClr">
-                <a:tint val="98000"/>
-                <a:satMod val="130000"/>
-                <a:shade val="90000"/>
-                <a:lumMod val="103000"/>
-              </a:schemeClr>
-            </a:gs>
-            <a:gs pos="100000">
-              <a:schemeClr val="phClr">
-                <a:shade val="63000"/>
-                <a:satMod val="120000"/>
-              </a:schemeClr>
-            </a:gs>
-          </a:gsLst>
-          <a:lin ang="5400000" scaled="0"/>
-        </a:gradFill>
-      </a:bgFillStyleLst>
-    </a:fmtScheme>
-  </a:themeElements>
-  <a:objectDefaults>
-    <a:spDef>
-      <a:spPr/>
-      <a:bodyPr wrap="none">
-        <a:spAutoFit/>
-      </a:bodyPr>
-      <a:lstStyle>
-        <a:defPPr algn="l">
-          <a:defRPr sz="2400" dirty="0" smtClean="0">
-            <a:latin typeface="Helvetica Neue" panose="02000503000000020004" pitchFamily="2" charset="0"/>
-            <a:ea typeface="Helvetica Neue" panose="02000503000000020004" pitchFamily="2" charset="0"/>
-            <a:cs typeface="Helvetica Neue" panose="02000503000000020004" pitchFamily="2" charset="0"/>
-          </a:defRPr>
-        </a:defPPr>
-      </a:lstStyle>
-    </a:spDef>
-    <a:txDef>
-      <a:spPr>
-        <a:noFill/>
-      </a:spPr>
-      <a:bodyPr wrap="none" rtlCol="0">
-        <a:spAutoFit/>
-      </a:bodyPr>
-      <a:lstStyle>
-        <a:defPPr algn="l">
-          <a:defRPr dirty="0" smtClean="0">
-            <a:latin typeface="Helvetica Neue" panose="02000503000000020004" pitchFamily="2" charset="0"/>
-            <a:ea typeface="Helvetica Neue" panose="02000503000000020004" pitchFamily="2" charset="0"/>
-            <a:cs typeface="Helvetica Neue" panose="02000503000000020004" pitchFamily="2" charset="0"/>
-          </a:defRPr>
-        </a:defPPr>
-      </a:lstStyle>
-    </a:txDef>
-  </a:objectDefaults>
-  <a:extraClrSchemeLst/>
-  <a:extLst>
-    <a:ext uri="{05A4C25C-085E-4340-85A3-A5531E510DB2}">
-      <thm15:themeFamily xmlns:thm15="http://schemas.microsoft.com/office/thememl/2012/main" name="Office Theme" id="{62F939B6-93AF-4DB8-9C6B-D6C7DFDC589F}" vid="{4A3C46E8-61CC-4603-A589-7422A47A8E4A}"/>
-    </a:ext>
-  </a:extLst>
-</a:theme>
-</file>
-
-<file path=ppt/theme/theme3.xml><?xml version="1.0" encoding="utf-8"?>
 <a:theme xmlns:a="http://schemas.openxmlformats.org/drawingml/2006/main" name="Office Theme">
   <a:themeElements>
     <a:clrScheme name="Office">

--- a/reference/archie/presentations/NPQG Fundamentals - Energy.pptx
+++ b/reference/archie/presentations/NPQG Fundamentals - Energy.pptx
@@ -3824,7 +3824,7 @@
 </file>
 
 <file path=ppt/slides/slide1.xml><?xml version="1.0" encoding="utf-8"?>
-<p:sld xmlns:a="http://schemas.openxmlformats.org/drawingml/2006/main" xmlns:r="http://schemas.openxmlformats.org/officeDocument/2006/relationships" xmlns:p="http://schemas.openxmlformats.org/presentationml/2006/main">
+<p:sld xmlns:a="http://schemas.openxmlformats.org/drawingml/2006/main" xmlns:a16="http://schemas.microsoft.com/office/drawing/2014/main" xmlns:ns2="http://schemas.openxmlformats.org/markup-compatibility/2006" xmlns:ns4="http://schemas.microsoft.com/office/drawing/2010/main" xmlns:ns5="http://schemas.openxmlformats.org/officeDocument/2006/math" xmlns:ns7="http://schemas.microsoft.com/office/powerpoint/2010/main" xmlns:p="http://schemas.openxmlformats.org/presentationml/2006/main" xmlns:r="http://schemas.openxmlformats.org/officeDocument/2006/relationships">
   <p:cSld>
     <p:bg>
       <p:bgPr>
@@ -3848,14 +3848,14 @@
           <a:chExt cx="0" cy="0"/>
         </a:xfrm>
       </p:grpSpPr>
-      <mc:AlternateContent xmlns:mc="http://schemas.openxmlformats.org/markup-compatibility/2006" xmlns:a14="http://schemas.microsoft.com/office/drawing/2010/main">
-        <mc:Choice Requires="a14">
+      <ns2:AlternateContent>
+        <ns2:Choice Requires="a14">
           <p:sp>
             <p:nvSpPr>
               <p:cNvPr id="2" name="TextBox 1">
                 <a:extLst>
                   <a:ext uri="{FF2B5EF4-FFF2-40B4-BE49-F238E27FC236}">
-                    <a16:creationId xmlns:a16="http://schemas.microsoft.com/office/drawing/2014/main" id="{09ACD5B1-F579-BE46-A136-9763C9D36C66}"/>
+                    <a16:creationId id="{09ACD5B1-F579-BE46-A136-9763C9D36C66}"/>
                   </a:ext>
                 </a:extLst>
               </p:cNvPr>
@@ -3895,11 +3895,11 @@
                   <a:tabLst/>
                   <a:defRPr/>
                 </a:pPr>
-                <a14:m>
-                  <m:oMath xmlns:m="http://schemas.openxmlformats.org/officeDocument/2006/math">
-                    <m:sSub>
-                      <m:sSubPr>
-                        <m:ctrlPr>
+                <ns4:m>
+                  <ns5:oMath>
+                    <ns5:sSub>
+                      <ns5:sSubPr>
+                        <ns5:ctrlPr>
                           <a:rPr kumimoji="0" lang="en-US" sz="1800" b="0" i="1" u="none" strike="noStrike" kern="1200" cap="none" spc="0" normalizeH="0" baseline="0" noProof="0" smtClean="0">
                             <a:ln>
                               <a:noFill/>
@@ -3914,10 +3914,10 @@
                             <a:ea typeface="Cambria Math" panose="02040503050406030204" pitchFamily="18" charset="0"/>
                             <a:cs typeface="+mn-cs"/>
                           </a:rPr>
-                        </m:ctrlPr>
-                      </m:sSubPr>
-                      <m:e>
-                        <m:r>
+                        </ns5:ctrlPr>
+                      </ns5:sSubPr>
+                      <ns5:e>
+                        <ns5:r>
                           <a:rPr kumimoji="0" lang="en-US" sz="1800" b="0" i="1" u="none" strike="noStrike" kern="1200" cap="none" spc="0" normalizeH="0" baseline="0" noProof="0" smtClean="0">
                             <a:ln>
                               <a:noFill/>
@@ -3932,11 +3932,11 @@
                             <a:ea typeface="Cambria Math" panose="02040503050406030204" pitchFamily="18" charset="0"/>
                             <a:cs typeface="+mn-cs"/>
                           </a:rPr>
-                          <m:t>𝐸𝑛𝑒𝑟𝑔𝑦</m:t>
-                        </m:r>
-                      </m:e>
-                      <m:sub>
-                        <m:r>
+                          <ns5:t>𝐸𝑛𝑒𝑟𝑔𝑦</ns5:t>
+                        </ns5:r>
+                      </ns5:e>
+                      <ns5:sub>
+                        <ns5:r>
                           <a:rPr kumimoji="0" lang="en-US" sz="1800" b="0" i="1" u="none" strike="noStrike" kern="1200" cap="none" spc="0" normalizeH="0" baseline="0" noProof="0" smtClean="0">
                             <a:ln>
                               <a:noFill/>
@@ -3951,12 +3951,12 @@
                             <a:ea typeface="Cambria Math" panose="02040503050406030204" pitchFamily="18" charset="0"/>
                             <a:cs typeface="+mn-cs"/>
                           </a:rPr>
-                          <m:t>𝑇𝑂𝑇𝐴𝐿</m:t>
-                        </m:r>
-                      </m:sub>
-                    </m:sSub>
-                  </m:oMath>
-                </a14:m>
+                          <ns5:t>𝑇𝑂𝑇𝐴𝐿</ns5:t>
+                        </ns5:r>
+                      </ns5:sub>
+                    </ns5:sSub>
+                  </ns5:oMath>
+                </ns4:m>
                 <a:r>
                   <a:rPr kumimoji="0" lang="en-US" sz="1800" b="0" i="0" u="none" strike="noStrike" kern="1200" cap="none" spc="0" normalizeH="0" baseline="0" noProof="0" dirty="0">
                     <a:ln>
@@ -3974,11 +3974,11 @@
                   </a:rPr>
                   <a:t> = </a:t>
                 </a:r>
-                <a14:m>
-                  <m:oMath xmlns:m="http://schemas.openxmlformats.org/officeDocument/2006/math">
-                    <m:sSub>
-                      <m:sSubPr>
-                        <m:ctrlPr>
+                <ns4:m>
+                  <ns5:oMath>
+                    <ns5:sSub>
+                      <ns5:sSubPr>
+                        <ns5:ctrlPr>
                           <a:rPr kumimoji="0" lang="en-US" sz="1800" b="0" i="1" u="none" strike="noStrike" kern="1200" cap="none" spc="0" normalizeH="0" baseline="0" noProof="0">
                             <a:ln>
                               <a:noFill/>
@@ -3993,10 +3993,10 @@
                             <a:ea typeface="Cambria Math" panose="02040503050406030204" pitchFamily="18" charset="0"/>
                             <a:cs typeface="+mn-cs"/>
                           </a:rPr>
-                        </m:ctrlPr>
-                      </m:sSubPr>
-                      <m:e>
-                        <m:r>
+                        </ns5:ctrlPr>
+                      </ns5:sSubPr>
+                      <ns5:e>
+                        <ns5:r>
                           <a:rPr kumimoji="0" lang="en-US" sz="1800" b="0" i="1" u="none" strike="noStrike" kern="1200" cap="none" spc="0" normalizeH="0" baseline="0" noProof="0">
                             <a:ln>
                               <a:noFill/>
@@ -4011,11 +4011,11 @@
                             <a:ea typeface="Cambria Math" panose="02040503050406030204" pitchFamily="18" charset="0"/>
                             <a:cs typeface="+mn-cs"/>
                           </a:rPr>
-                          <m:t>𝐸𝑛𝑒𝑟𝑔𝑦</m:t>
-                        </m:r>
-                      </m:e>
-                      <m:sub>
-                        <m:r>
+                          <ns5:t>𝐸𝑛𝑒𝑟𝑔𝑦</ns5:t>
+                        </ns5:r>
+                      </ns5:e>
+                      <ns5:sub>
+                        <ns5:r>
                           <a:rPr kumimoji="0" lang="en-US" sz="1800" b="0" i="1" u="none" strike="noStrike" kern="1200" cap="none" spc="0" normalizeH="0" baseline="0" noProof="0">
                             <a:ln>
                               <a:noFill/>
@@ -4030,12 +4030,12 @@
                             <a:ea typeface="Cambria Math" panose="02040503050406030204" pitchFamily="18" charset="0"/>
                             <a:cs typeface="+mn-cs"/>
                           </a:rPr>
-                          <m:t>𝐴𝑃𝑃𝐴𝑅𝐸𝑁𝑇</m:t>
-                        </m:r>
-                      </m:sub>
-                    </m:sSub>
-                  </m:oMath>
-                </a14:m>
+                          <ns5:t>𝐴𝑃𝑃𝐴𝑅𝐸𝑁𝑇</ns5:t>
+                        </ns5:r>
+                      </ns5:sub>
+                    </ns5:sSub>
+                  </ns5:oMath>
+                </ns4:m>
                 <a:r>
                   <a:rPr kumimoji="0" lang="en-US" sz="1800" b="0" i="0" u="none" strike="noStrike" kern="1200" cap="none" spc="0" normalizeH="0" baseline="0" noProof="0" dirty="0">
                     <a:ln>
@@ -4053,11 +4053,11 @@
                   </a:rPr>
                   <a:t> + </a:t>
                 </a:r>
-                <a14:m>
-                  <m:oMath xmlns:m="http://schemas.openxmlformats.org/officeDocument/2006/math">
-                    <m:sSub>
-                      <m:sSubPr>
-                        <m:ctrlPr>
+                <ns4:m>
+                  <ns5:oMath>
+                    <ns5:sSub>
+                      <ns5:sSubPr>
+                        <ns5:ctrlPr>
                           <a:rPr kumimoji="0" lang="en-US" sz="1800" b="0" i="1" u="none" strike="noStrike" kern="1200" cap="none" spc="0" normalizeH="0" baseline="0" noProof="0">
                             <a:ln>
                               <a:noFill/>
@@ -4072,10 +4072,10 @@
                             <a:ea typeface="Cambria Math" panose="02040503050406030204" pitchFamily="18" charset="0"/>
                             <a:cs typeface="+mn-cs"/>
                           </a:rPr>
-                        </m:ctrlPr>
-                      </m:sSubPr>
-                      <m:e>
-                        <m:r>
+                        </ns5:ctrlPr>
+                      </ns5:sSubPr>
+                      <ns5:e>
+                        <ns5:r>
                           <a:rPr kumimoji="0" lang="en-US" sz="1800" b="0" i="1" u="none" strike="noStrike" kern="1200" cap="none" spc="0" normalizeH="0" baseline="0" noProof="0">
                             <a:ln>
                               <a:noFill/>
@@ -4090,11 +4090,11 @@
                             <a:ea typeface="Cambria Math" panose="02040503050406030204" pitchFamily="18" charset="0"/>
                             <a:cs typeface="+mn-cs"/>
                           </a:rPr>
-                          <m:t>𝐸𝑛𝑒𝑟𝑔𝑦</m:t>
-                        </m:r>
-                      </m:e>
-                      <m:sub>
-                        <m:r>
+                          <ns5:t>𝐸𝑛𝑒𝑟𝑔𝑦</ns5:t>
+                        </ns5:r>
+                      </ns5:e>
+                      <ns5:sub>
+                        <ns5:r>
                           <a:rPr kumimoji="0" lang="en-US" sz="1800" b="0" i="1" u="none" strike="noStrike" kern="1200" cap="none" spc="0" normalizeH="0" baseline="0" noProof="0" smtClean="0">
                             <a:ln>
                               <a:noFill/>
@@ -4109,12 +4109,12 @@
                             <a:ea typeface="Cambria Math" panose="02040503050406030204" pitchFamily="18" charset="0"/>
                             <a:cs typeface="+mn-cs"/>
                           </a:rPr>
-                          <m:t>𝑆𝐻𝐼𝐸𝐿𝐷𝐸𝐷𝑣𝑖𝑎𝑆𝑈𝑃𝐸𝑅𝑃𝑂𝑆𝐼𝑇𝐼𝑂𝑁</m:t>
-                        </m:r>
-                      </m:sub>
-                    </m:sSub>
-                  </m:oMath>
-                </a14:m>
+                          <ns5:t>𝑆𝐻𝐼𝐸𝐿𝐷𝐸𝐷𝑣𝑖𝑎𝑆𝑈𝑃𝐸𝑅𝑃𝑂𝑆𝐼𝑇𝐼𝑂𝑁</ns5:t>
+                        </ns5:r>
+                      </ns5:sub>
+                    </ns5:sSub>
+                  </ns5:oMath>
+                </ns4:m>
                 <a:r>
                   <a:rPr kumimoji="0" lang="en-US" sz="1800" b="0" i="0" u="none" strike="noStrike" kern="1200" cap="none" spc="0" normalizeH="0" baseline="0" noProof="0" dirty="0">
                     <a:ln>
@@ -4135,14 +4135,14 @@
               </a:p>
             </p:txBody>
           </p:sp>
-        </mc:Choice>
-        <mc:Fallback xmlns="">
+        </ns2:Choice>
+        <ns2:Fallback>
           <p:sp>
             <p:nvSpPr>
               <p:cNvPr id="2" name="TextBox 1">
                 <a:extLst>
                   <a:ext uri="{FF2B5EF4-FFF2-40B4-BE49-F238E27FC236}">
-                    <a16:creationId xmlns:a16="http://schemas.microsoft.com/office/drawing/2014/main" id="{09ACD5B1-F579-BE46-A136-9763C9D36C66}"/>
+                    <a16:creationId id="{09ACD5B1-F579-BE46-A136-9763C9D36C66}"/>
                   </a:ext>
                 </a:extLst>
               </p:cNvPr>
@@ -4179,16 +4179,16 @@
               </a:p>
             </p:txBody>
           </p:sp>
-        </mc:Fallback>
-      </mc:AlternateContent>
-      <mc:AlternateContent xmlns:mc="http://schemas.openxmlformats.org/markup-compatibility/2006" xmlns:a14="http://schemas.microsoft.com/office/drawing/2010/main">
-        <mc:Choice Requires="a14">
+        </ns2:Fallback>
+      </ns2:AlternateContent>
+      <ns2:AlternateContent>
+        <ns2:Choice Requires="a14">
           <p:sp>
             <p:nvSpPr>
               <p:cNvPr id="4" name="TextBox 3">
                 <a:extLst>
                   <a:ext uri="{FF2B5EF4-FFF2-40B4-BE49-F238E27FC236}">
-                    <a16:creationId xmlns:a16="http://schemas.microsoft.com/office/drawing/2014/main" id="{1F81FDB4-73FA-704E-B5D5-4BC4D73D775C}"/>
+                    <a16:creationId id="{1F81FDB4-73FA-704E-B5D5-4BC4D73D775C}"/>
                   </a:ext>
                 </a:extLst>
               </p:cNvPr>
@@ -4228,13 +4228,13 @@
                   <a:tabLst/>
                   <a:defRPr/>
                 </a:pPr>
-                <a14:m>
-                  <m:oMathPara xmlns:m="http://schemas.openxmlformats.org/officeDocument/2006/math">
-                    <m:oMathParaPr>
-                      <m:jc m:val="centerGroup"/>
-                    </m:oMathParaPr>
-                    <m:oMath xmlns:m="http://schemas.openxmlformats.org/officeDocument/2006/math">
-                      <m:r>
+                <ns4:m>
+                  <ns5:oMathPara>
+                    <ns5:oMathParaPr>
+                      <ns5:jc ns5:val="centerGroup"/>
+                    </ns5:oMathParaPr>
+                    <ns5:oMath>
+                      <ns5:r>
                         <a:rPr kumimoji="0" lang="en-US" sz="1800" b="0" i="1" u="none" strike="noStrike" kern="1200" cap="none" spc="0" normalizeH="0" baseline="0" noProof="0" smtClean="0">
                           <a:ln>
                             <a:noFill/>
@@ -4249,9 +4249,9 @@
                           <a:ea typeface="Cambria Math" panose="02040503050406030204" pitchFamily="18" charset="0"/>
                           <a:cs typeface="+mn-cs"/>
                         </a:rPr>
-                        <m:t>𝑁</m:t>
-                      </m:r>
-                      <m:r>
+                        <ns5:t>𝑁</ns5:t>
+                      </ns5:r>
+                      <ns5:r>
                         <a:rPr kumimoji="0" lang="en-US" sz="1800" b="0" i="1" u="none" strike="noStrike" kern="1200" cap="none" spc="0" normalizeH="0" baseline="0" noProof="0">
                           <a:ln>
                             <a:noFill/>
@@ -4266,9 +4266,9 @@
                           <a:ea typeface="Cambria Math" panose="02040503050406030204" pitchFamily="18" charset="0"/>
                           <a:cs typeface="+mn-cs"/>
                         </a:rPr>
-                        <m:t>𝑎𝑡𝑢𝑟𝑒</m:t>
-                      </m:r>
-                      <m:r>
+                        <ns5:t>𝑎𝑡𝑢𝑟𝑒</ns5:t>
+                      </ns5:r>
+                      <ns5:r>
                         <a:rPr kumimoji="0" lang="en-US" sz="1800" b="0" i="1" u="none" strike="noStrike" kern="1200" cap="none" spc="0" normalizeH="0" baseline="0" noProof="0">
                           <a:ln>
                             <a:noFill/>
@@ -4283,11 +4283,11 @@
                           <a:ea typeface="Cambria Math" panose="02040503050406030204" pitchFamily="18" charset="0"/>
                           <a:cs typeface="+mn-cs"/>
                         </a:rPr>
-                        <m:t> :</m:t>
-                      </m:r>
-                      <m:sSub>
-                        <m:sSubPr>
-                          <m:ctrlPr>
+                        <ns5:t> :</ns5:t>
+                      </ns5:r>
+                      <ns5:sSub>
+                        <ns5:sSubPr>
+                          <ns5:ctrlPr>
                             <a:rPr kumimoji="0" lang="en-US" sz="1800" b="0" i="1" u="none" strike="noStrike" kern="1200" cap="none" spc="0" normalizeH="0" baseline="0" noProof="0">
                               <a:ln>
                                 <a:noFill/>
@@ -4302,10 +4302,10 @@
                               <a:ea typeface="Cambria Math" panose="02040503050406030204" pitchFamily="18" charset="0"/>
                               <a:cs typeface="+mn-cs"/>
                             </a:rPr>
-                          </m:ctrlPr>
-                        </m:sSubPr>
-                        <m:e>
-                          <m:r>
+                          </ns5:ctrlPr>
+                        </ns5:sSubPr>
+                        <ns5:e>
+                          <ns5:r>
                             <a:rPr kumimoji="0" lang="en-US" sz="1800" b="0" i="1" u="none" strike="noStrike" kern="1200" cap="none" spc="0" normalizeH="0" baseline="0" noProof="0" smtClean="0">
                               <a:ln>
                                 <a:noFill/>
@@ -4320,9 +4320,9 @@
                               <a:ea typeface="Cambria Math" panose="02040503050406030204" pitchFamily="18" charset="0"/>
                               <a:cs typeface="+mn-cs"/>
                             </a:rPr>
-                            <m:t> </m:t>
-                          </m:r>
-                          <m:r>
+                            <ns5:t> </ns5:t>
+                          </ns5:r>
+                          <ns5:r>
                             <a:rPr kumimoji="0" lang="en-US" sz="1800" b="0" i="1" u="none" strike="noStrike" kern="1200" cap="none" spc="0" normalizeH="0" baseline="0" noProof="0">
                               <a:ln>
                                 <a:noFill/>
@@ -4337,11 +4337,11 @@
                               <a:ea typeface="Cambria Math" panose="02040503050406030204" pitchFamily="18" charset="0"/>
                               <a:cs typeface="+mn-cs"/>
                             </a:rPr>
-                            <m:t>𝐸𝑛𝑒𝑟𝑔𝑦</m:t>
-                          </m:r>
-                        </m:e>
-                        <m:sub>
-                          <m:r>
+                            <ns5:t>𝐸𝑛𝑒𝑟𝑔𝑦</ns5:t>
+                          </ns5:r>
+                        </ns5:e>
+                        <ns5:sub>
+                          <ns5:r>
                             <a:rPr kumimoji="0" lang="en-US" sz="1800" b="0" i="1" u="none" strike="noStrike" kern="1200" cap="none" spc="0" normalizeH="0" baseline="0" noProof="0">
                               <a:ln>
                                 <a:noFill/>
@@ -4356,11 +4356,11 @@
                               <a:ea typeface="Cambria Math" panose="02040503050406030204" pitchFamily="18" charset="0"/>
                               <a:cs typeface="+mn-cs"/>
                             </a:rPr>
-                            <m:t>𝐴𝑃𝑃𝐴𝑅𝐸𝑁𝑇</m:t>
-                          </m:r>
-                        </m:sub>
-                      </m:sSub>
-                      <m:r>
+                            <ns5:t>𝐴𝑃𝑃𝐴𝑅𝐸𝑁𝑇</ns5:t>
+                          </ns5:r>
+                        </ns5:sub>
+                      </ns5:sSub>
+                      <ns5:r>
                         <a:rPr kumimoji="0" lang="en-US" sz="1800" b="0" i="1" u="none" strike="noStrike" kern="1200" cap="none" spc="0" normalizeH="0" baseline="0" noProof="0" smtClean="0">
                           <a:ln>
                             <a:noFill/>
@@ -4375,9 +4375,9 @@
                           <a:ea typeface="Cambria Math" panose="02040503050406030204" pitchFamily="18" charset="0"/>
                           <a:cs typeface="+mn-cs"/>
                         </a:rPr>
-                        <m:t> </m:t>
-                      </m:r>
-                      <m:r>
+                        <ns5:t> </ns5:t>
+                      </ns5:r>
+                      <ns5:r>
                         <a:rPr kumimoji="0" lang="en-US" sz="1800" b="0" i="1" u="none" strike="noStrike" kern="1200" cap="none" spc="0" normalizeH="0" baseline="0" noProof="0">
                           <a:ln>
                             <a:noFill/>
@@ -4392,9 +4392,9 @@
                           <a:ea typeface="Cambria Math" panose="02040503050406030204" pitchFamily="18" charset="0"/>
                           <a:cs typeface="+mn-cs"/>
                         </a:rPr>
-                        <m:t>= </m:t>
-                      </m:r>
-                      <m:r>
+                        <ns5:t>= </ns5:t>
+                      </ns5:r>
+                      <ns5:r>
                         <a:rPr kumimoji="0" lang="en-US" sz="1800" b="0" i="1" u="none" strike="noStrike" kern="1200" cap="none" spc="0" normalizeH="0" baseline="0" noProof="0">
                           <a:ln>
                             <a:noFill/>
@@ -4409,12 +4409,12 @@
                           <a:ea typeface="Cambria Math" panose="02040503050406030204" pitchFamily="18" charset="0"/>
                           <a:cs typeface="+mn-cs"/>
                         </a:rPr>
-                        <m:t>𝑀𝑎𝑠𝑠</m:t>
-                      </m:r>
-                      <m:r>
-                        <m:rPr>
-                          <m:nor/>
-                        </m:rPr>
+                        <ns5:t>𝑀𝑎𝑠𝑠</ns5:t>
+                      </ns5:r>
+                      <ns5:r>
+                        <ns5:rPr>
+                          <ns5:nor/>
+                        </ns5:rPr>
                         <a:rPr kumimoji="0" lang="en-US" sz="1800" b="0" i="0" u="none" strike="noStrike" kern="1200" cap="none" spc="0" normalizeH="0" baseline="0" noProof="0" dirty="0">
                           <a:ln>
                             <a:noFill/>
@@ -4429,11 +4429,11 @@
                           <a:ea typeface="+mn-ea"/>
                           <a:cs typeface="+mn-cs"/>
                         </a:rPr>
-                        <m:t> ∗ </m:t>
-                      </m:r>
-                      <m:sSup>
-                        <m:sSupPr>
-                          <m:ctrlPr>
+                        <ns5:t> ∗ </ns5:t>
+                      </ns5:r>
+                      <ns5:sSup>
+                        <ns5:sSupPr>
+                          <ns5:ctrlPr>
                             <a:rPr kumimoji="0" lang="en-US" sz="1800" b="0" i="1" u="none" strike="noStrike" kern="1200" cap="none" spc="0" normalizeH="0" baseline="0" noProof="0">
                               <a:ln>
                                 <a:noFill/>
@@ -4448,10 +4448,10 @@
                               <a:ea typeface="+mn-ea"/>
                               <a:cs typeface="+mn-cs"/>
                             </a:rPr>
-                          </m:ctrlPr>
-                        </m:sSupPr>
-                        <m:e>
-                          <m:r>
+                          </ns5:ctrlPr>
+                        </ns5:sSupPr>
+                        <ns5:e>
+                          <ns5:r>
                             <a:rPr kumimoji="0" lang="en-US" sz="1800" b="0" i="1" u="none" strike="noStrike" kern="1200" cap="none" spc="0" normalizeH="0" baseline="0" noProof="0">
                               <a:ln>
                                 <a:noFill/>
@@ -4466,11 +4466,11 @@
                               <a:ea typeface="+mn-ea"/>
                               <a:cs typeface="+mn-cs"/>
                             </a:rPr>
-                            <m:t>𝑐</m:t>
-                          </m:r>
-                        </m:e>
-                        <m:sup>
-                          <m:r>
+                            <ns5:t>𝑐</ns5:t>
+                          </ns5:r>
+                        </ns5:e>
+                        <ns5:sup>
+                          <ns5:r>
                             <a:rPr kumimoji="0" lang="en-US" sz="1800" b="0" i="1" u="none" strike="noStrike" kern="1200" cap="none" spc="0" normalizeH="0" baseline="0" noProof="0">
                               <a:ln>
                                 <a:noFill/>
@@ -4485,14 +4485,14 @@
                               <a:ea typeface="+mn-ea"/>
                               <a:cs typeface="+mn-cs"/>
                             </a:rPr>
-                            <m:t>2</m:t>
-                          </m:r>
-                        </m:sup>
-                      </m:sSup>
-                      <m:r>
-                        <m:rPr>
-                          <m:nor/>
-                        </m:rPr>
+                            <ns5:t>2</ns5:t>
+                          </ns5:r>
+                        </ns5:sup>
+                      </ns5:sSup>
+                      <ns5:r>
+                        <ns5:rPr>
+                          <ns5:nor/>
+                        </ns5:rPr>
                         <a:rPr kumimoji="0" lang="en-US" sz="1800" b="0" i="0" u="none" strike="noStrike" kern="1200" cap="none" spc="0" normalizeH="0" baseline="0" noProof="0" dirty="0">
                           <a:ln>
                             <a:noFill/>
@@ -4507,11 +4507,11 @@
                           <a:ea typeface="+mn-ea"/>
                           <a:cs typeface="+mn-cs"/>
                         </a:rPr>
-                        <m:t> </m:t>
-                      </m:r>
-                    </m:oMath>
-                  </m:oMathPara>
-                </a14:m>
+                        <ns5:t> </ns5:t>
+                      </ns5:r>
+                    </ns5:oMath>
+                  </ns5:oMathPara>
+                </ns4:m>
                 <a:endParaRPr kumimoji="0" lang="en-US" sz="1800" b="0" i="0" u="none" strike="noStrike" kern="1200" cap="none" spc="0" normalizeH="0" baseline="0" noProof="0" dirty="0">
                   <a:ln>
                     <a:noFill/>
@@ -4529,14 +4529,14 @@
               </a:p>
             </p:txBody>
           </p:sp>
-        </mc:Choice>
-        <mc:Fallback xmlns="">
+        </ns2:Choice>
+        <ns2:Fallback>
           <p:sp>
             <p:nvSpPr>
               <p:cNvPr id="4" name="TextBox 3">
                 <a:extLst>
                   <a:ext uri="{FF2B5EF4-FFF2-40B4-BE49-F238E27FC236}">
-                    <a16:creationId xmlns:a16="http://schemas.microsoft.com/office/drawing/2014/main" id="{1F81FDB4-73FA-704E-B5D5-4BC4D73D775C}"/>
+                    <a16:creationId id="{1F81FDB4-73FA-704E-B5D5-4BC4D73D775C}"/>
                   </a:ext>
                 </a:extLst>
               </p:cNvPr>
@@ -4573,16 +4573,16 @@
               </a:p>
             </p:txBody>
           </p:sp>
-        </mc:Fallback>
-      </mc:AlternateContent>
-      <mc:AlternateContent xmlns:mc="http://schemas.openxmlformats.org/markup-compatibility/2006" xmlns:a14="http://schemas.microsoft.com/office/drawing/2010/main">
-        <mc:Choice Requires="a14">
+        </ns2:Fallback>
+      </ns2:AlternateContent>
+      <ns2:AlternateContent>
+        <ns2:Choice Requires="a14">
           <p:sp>
             <p:nvSpPr>
               <p:cNvPr id="11" name="TextBox 10">
                 <a:extLst>
                   <a:ext uri="{FF2B5EF4-FFF2-40B4-BE49-F238E27FC236}">
-                    <a16:creationId xmlns:a16="http://schemas.microsoft.com/office/drawing/2014/main" id="{4929D634-5CDA-EA4B-AB4E-C56D95412138}"/>
+                    <a16:creationId id="{4929D634-5CDA-EA4B-AB4E-C56D95412138}"/>
                   </a:ext>
                 </a:extLst>
               </p:cNvPr>
@@ -4622,9 +4622,9 @@
                   <a:tabLst/>
                   <a:defRPr/>
                 </a:pPr>
-                <a14:m>
-                  <m:oMath xmlns:m="http://schemas.openxmlformats.org/officeDocument/2006/math">
-                    <m:r>
+                <ns4:m>
+                  <ns5:oMath>
+                    <ns5:r>
                       <a:rPr kumimoji="0" lang="en-US" sz="1800" b="0" i="1" u="none" strike="noStrike" kern="1200" cap="none" spc="0" normalizeH="0" baseline="0" noProof="0" smtClean="0">
                         <a:ln>
                           <a:noFill/>
@@ -4639,9 +4639,9 @@
                         <a:ea typeface="Cambria Math" panose="02040503050406030204" pitchFamily="18" charset="0"/>
                         <a:cs typeface="+mn-cs"/>
                       </a:rPr>
-                      <m:t>𝐸𝑖𝑛𝑠𝑡𝑒𝑖𝑛</m:t>
-                    </m:r>
-                    <m:r>
+                      <ns5:t>𝐸𝑖𝑛𝑠𝑡𝑒𝑖𝑛</ns5:t>
+                    </ns5:r>
+                    <ns5:r>
                       <a:rPr kumimoji="0" lang="en-US" sz="1800" b="0" i="1" u="none" strike="noStrike" kern="1200" cap="none" spc="0" normalizeH="0" baseline="0" noProof="0" smtClean="0">
                         <a:ln>
                           <a:noFill/>
@@ -4656,9 +4656,9 @@
                         <a:ea typeface="Cambria Math" panose="02040503050406030204" pitchFamily="18" charset="0"/>
                         <a:cs typeface="+mn-cs"/>
                       </a:rPr>
-                      <m:t> : </m:t>
-                    </m:r>
-                    <m:r>
+                      <ns5:t> : </ns5:t>
+                    </ns5:r>
+                    <ns5:r>
                       <a:rPr kumimoji="0" lang="en-US" sz="1800" b="0" i="1" u="none" strike="noStrike" kern="1200" cap="none" spc="0" normalizeH="0" baseline="0" noProof="0" smtClean="0">
                         <a:ln>
                           <a:noFill/>
@@ -4673,9 +4673,9 @@
                         <a:ea typeface="Cambria Math" panose="02040503050406030204" pitchFamily="18" charset="0"/>
                         <a:cs typeface="+mn-cs"/>
                       </a:rPr>
-                      <m:t>𝐸𝑛𝑒𝑟𝑔𝑦</m:t>
-                    </m:r>
-                    <m:r>
+                      <ns5:t>𝐸𝑛𝑒𝑟𝑔𝑦</ns5:t>
+                    </ns5:r>
+                    <ns5:r>
                       <a:rPr kumimoji="0" lang="en-US" sz="1800" b="0" i="1" u="none" strike="noStrike" kern="1200" cap="none" spc="0" normalizeH="0" baseline="0" noProof="0" smtClean="0">
                         <a:ln>
                           <a:noFill/>
@@ -4690,9 +4690,9 @@
                         <a:ea typeface="Cambria Math" panose="02040503050406030204" pitchFamily="18" charset="0"/>
                         <a:cs typeface="+mn-cs"/>
                       </a:rPr>
-                      <m:t>= </m:t>
-                    </m:r>
-                    <m:r>
+                      <ns5:t>= </ns5:t>
+                    </ns5:r>
+                    <ns5:r>
                       <a:rPr kumimoji="0" lang="en-US" sz="1800" b="0" i="1" u="none" strike="noStrike" kern="1200" cap="none" spc="0" normalizeH="0" baseline="0" noProof="0">
                         <a:ln>
                           <a:noFill/>
@@ -4707,10 +4707,10 @@
                         <a:ea typeface="Cambria Math" panose="02040503050406030204" pitchFamily="18" charset="0"/>
                         <a:cs typeface="+mn-cs"/>
                       </a:rPr>
-                      <m:t>𝑀𝑎𝑠𝑠</m:t>
-                    </m:r>
-                  </m:oMath>
-                </a14:m>
+                      <ns5:t>𝑀𝑎𝑠𝑠</ns5:t>
+                    </ns5:r>
+                  </ns5:oMath>
+                </ns4:m>
                 <a:r>
                   <a:rPr kumimoji="0" lang="en-US" sz="1800" b="0" i="0" u="none" strike="noStrike" kern="1200" cap="none" spc="0" normalizeH="0" baseline="0" noProof="0" dirty="0">
                     <a:ln>
@@ -4728,11 +4728,11 @@
                   </a:rPr>
                   <a:t> * </a:t>
                 </a:r>
-                <a14:m>
-                  <m:oMath xmlns:m="http://schemas.openxmlformats.org/officeDocument/2006/math">
-                    <m:sSup>
-                      <m:sSupPr>
-                        <m:ctrlPr>
+                <ns4:m>
+                  <ns5:oMath>
+                    <ns5:sSup>
+                      <ns5:sSupPr>
+                        <ns5:ctrlPr>
                           <a:rPr kumimoji="0" lang="en-US" sz="1800" b="0" i="1" u="none" strike="noStrike" kern="1200" cap="none" spc="0" normalizeH="0" baseline="0" noProof="0" smtClean="0">
                             <a:ln>
                               <a:noFill/>
@@ -4747,10 +4747,10 @@
                             <a:ea typeface="+mn-ea"/>
                             <a:cs typeface="+mn-cs"/>
                           </a:rPr>
-                        </m:ctrlPr>
-                      </m:sSupPr>
-                      <m:e>
-                        <m:r>
+                        </ns5:ctrlPr>
+                      </ns5:sSupPr>
+                      <ns5:e>
+                        <ns5:r>
                           <a:rPr kumimoji="0" lang="en-US" sz="1800" b="0" i="1" u="none" strike="noStrike" kern="1200" cap="none" spc="0" normalizeH="0" baseline="0" noProof="0" smtClean="0">
                             <a:ln>
                               <a:noFill/>
@@ -4765,11 +4765,11 @@
                             <a:ea typeface="+mn-ea"/>
                             <a:cs typeface="+mn-cs"/>
                           </a:rPr>
-                          <m:t>𝑐</m:t>
-                        </m:r>
-                      </m:e>
-                      <m:sup>
-                        <m:r>
+                          <ns5:t>𝑐</ns5:t>
+                        </ns5:r>
+                      </ns5:e>
+                      <ns5:sup>
+                        <ns5:r>
                           <a:rPr kumimoji="0" lang="en-US" sz="1800" b="0" i="1" u="none" strike="noStrike" kern="1200" cap="none" spc="0" normalizeH="0" baseline="0" noProof="0" smtClean="0">
                             <a:ln>
                               <a:noFill/>
@@ -4784,12 +4784,12 @@
                             <a:ea typeface="+mn-ea"/>
                             <a:cs typeface="+mn-cs"/>
                           </a:rPr>
-                          <m:t>2</m:t>
-                        </m:r>
-                      </m:sup>
-                    </m:sSup>
-                  </m:oMath>
-                </a14:m>
+                          <ns5:t>2</ns5:t>
+                        </ns5:r>
+                      </ns5:sup>
+                    </ns5:sSup>
+                  </ns5:oMath>
+                </ns4:m>
                 <a:r>
                   <a:rPr kumimoji="0" lang="en-US" sz="1800" b="0" i="0" u="none" strike="noStrike" kern="1200" cap="none" spc="0" normalizeH="0" baseline="0" noProof="0" dirty="0">
                     <a:ln>
@@ -4810,14 +4810,14 @@
               </a:p>
             </p:txBody>
           </p:sp>
-        </mc:Choice>
-        <mc:Fallback xmlns="">
+        </ns2:Choice>
+        <ns2:Fallback>
           <p:sp>
             <p:nvSpPr>
               <p:cNvPr id="11" name="TextBox 10">
                 <a:extLst>
                   <a:ext uri="{FF2B5EF4-FFF2-40B4-BE49-F238E27FC236}">
-                    <a16:creationId xmlns:a16="http://schemas.microsoft.com/office/drawing/2014/main" id="{4929D634-5CDA-EA4B-AB4E-C56D95412138}"/>
+                    <a16:creationId id="{4929D634-5CDA-EA4B-AB4E-C56D95412138}"/>
                   </a:ext>
                 </a:extLst>
               </p:cNvPr>
@@ -4854,16 +4854,16 @@
               </a:p>
             </p:txBody>
           </p:sp>
-        </mc:Fallback>
-      </mc:AlternateContent>
-      <mc:AlternateContent xmlns:mc="http://schemas.openxmlformats.org/markup-compatibility/2006" xmlns:a14="http://schemas.microsoft.com/office/drawing/2010/main">
-        <mc:Choice Requires="a14">
+        </ns2:Fallback>
+      </ns2:AlternateContent>
+      <ns2:AlternateContent>
+        <ns2:Choice Requires="a14">
           <p:sp>
             <p:nvSpPr>
               <p:cNvPr id="14" name="TextBox 13">
                 <a:extLst>
                   <a:ext uri="{FF2B5EF4-FFF2-40B4-BE49-F238E27FC236}">
-                    <a16:creationId xmlns:a16="http://schemas.microsoft.com/office/drawing/2014/main" id="{E13AC0F3-5C34-2644-BA21-4D36596EADBA}"/>
+                    <a16:creationId id="{E13AC0F3-5C34-2644-BA21-4D36596EADBA}"/>
                   </a:ext>
                 </a:extLst>
               </p:cNvPr>
@@ -4905,13 +4905,13 @@
                   <a:tabLst/>
                   <a:defRPr/>
                 </a:pPr>
-                <a14:m>
-                  <m:oMathPara xmlns:m="http://schemas.openxmlformats.org/officeDocument/2006/math">
-                    <m:oMathParaPr>
-                      <m:jc m:val="centerGroup"/>
-                    </m:oMathParaPr>
-                    <m:oMath xmlns:m="http://schemas.openxmlformats.org/officeDocument/2006/math">
-                      <m:r>
+                <ns4:m>
+                  <ns5:oMathPara>
+                    <ns5:oMathParaPr>
+                      <ns5:jc ns5:val="centerGroup"/>
+                    </ns5:oMathParaPr>
+                    <ns5:oMath>
+                      <ns5:r>
                         <a:rPr kumimoji="0" lang="en-US" sz="1800" b="1" i="1" u="none" strike="noStrike" kern="1200" cap="none" spc="0" normalizeH="0" baseline="0" noProof="0" smtClean="0">
                           <a:ln>
                             <a:noFill/>
@@ -4926,9 +4926,9 @@
                           <a:ea typeface="Cambria Math" panose="02040503050406030204" pitchFamily="18" charset="0"/>
                           <a:cs typeface="+mn-cs"/>
                         </a:rPr>
-                        <m:t>𝑺𝒕𝒂𝒏𝒅𝒂𝒓𝒅</m:t>
-                      </m:r>
-                      <m:r>
+                        <ns5:t>𝑺𝒕𝒂𝒏𝒅𝒂𝒓𝒅</ns5:t>
+                      </ns5:r>
+                      <ns5:r>
                         <a:rPr kumimoji="0" lang="en-US" sz="1800" b="1" i="1" u="none" strike="noStrike" kern="1200" cap="none" spc="0" normalizeH="0" baseline="0" noProof="0" smtClean="0">
                           <a:ln>
                             <a:noFill/>
@@ -4943,9 +4943,9 @@
                           <a:ea typeface="Cambria Math" panose="02040503050406030204" pitchFamily="18" charset="0"/>
                           <a:cs typeface="+mn-cs"/>
                         </a:rPr>
-                        <m:t> </m:t>
-                      </m:r>
-                      <m:r>
+                        <ns5:t> </ns5:t>
+                      </ns5:r>
+                      <ns5:r>
                         <a:rPr kumimoji="0" lang="en-US" sz="1800" b="1" i="1" u="none" strike="noStrike" kern="1200" cap="none" spc="0" normalizeH="0" baseline="0" noProof="0" smtClean="0">
                           <a:ln>
                             <a:noFill/>
@@ -4960,9 +4960,9 @@
                           <a:ea typeface="Cambria Math" panose="02040503050406030204" pitchFamily="18" charset="0"/>
                           <a:cs typeface="+mn-cs"/>
                         </a:rPr>
-                        <m:t>𝒎𝒂𝒕𝒕𝒆𝒓</m:t>
-                      </m:r>
-                      <m:r>
+                        <ns5:t>𝒎𝒂𝒕𝒕𝒆𝒓</ns5:t>
+                      </ns5:r>
+                      <ns5:r>
                         <a:rPr kumimoji="0" lang="en-US" sz="1800" b="1" i="1" u="none" strike="noStrike" kern="1200" cap="none" spc="0" normalizeH="0" baseline="0" noProof="0" smtClean="0">
                           <a:ln>
                             <a:noFill/>
@@ -4977,9 +4977,9 @@
                           <a:ea typeface="Cambria Math" panose="02040503050406030204" pitchFamily="18" charset="0"/>
                           <a:cs typeface="+mn-cs"/>
                         </a:rPr>
-                        <m:t> </m:t>
-                      </m:r>
-                      <m:r>
+                        <ns5:t> </ns5:t>
+                      </ns5:r>
+                      <ns5:r>
                         <a:rPr kumimoji="0" lang="en-US" sz="1800" b="1" i="1" u="none" strike="noStrike" kern="1200" cap="none" spc="0" normalizeH="0" baseline="0" noProof="0" smtClean="0">
                           <a:ln>
                             <a:noFill/>
@@ -4994,9 +4994,9 @@
                           <a:ea typeface="Cambria Math" panose="02040503050406030204" pitchFamily="18" charset="0"/>
                           <a:cs typeface="+mn-cs"/>
                         </a:rPr>
-                        <m:t>𝒑𝒂𝒓𝒕𝒊𝒄𝒍𝒆</m:t>
-                      </m:r>
-                      <m:r>
+                        <ns5:t>𝒑𝒂𝒓𝒕𝒊𝒄𝒍𝒆</ns5:t>
+                      </ns5:r>
+                      <ns5:r>
                         <a:rPr kumimoji="0" lang="en-US" sz="1800" b="1" i="1" u="none" strike="noStrike" kern="1200" cap="none" spc="0" normalizeH="0" baseline="0" noProof="0" smtClean="0">
                           <a:ln>
                             <a:noFill/>
@@ -5011,9 +5011,9 @@
                           <a:ea typeface="Cambria Math" panose="02040503050406030204" pitchFamily="18" charset="0"/>
                           <a:cs typeface="+mn-cs"/>
                         </a:rPr>
-                        <m:t> </m:t>
-                      </m:r>
-                      <m:r>
+                        <ns5:t> </ns5:t>
+                      </ns5:r>
+                      <ns5:r>
                         <a:rPr kumimoji="0" lang="en-US" sz="1800" b="1" i="1" u="none" strike="noStrike" kern="1200" cap="none" spc="0" normalizeH="0" baseline="0" noProof="0" smtClean="0">
                           <a:ln>
                             <a:noFill/>
@@ -5028,9 +5028,9 @@
                           <a:ea typeface="Cambria Math" panose="02040503050406030204" pitchFamily="18" charset="0"/>
                           <a:cs typeface="+mn-cs"/>
                         </a:rPr>
-                        <m:t>𝒂𝒔𝒔𝒆𝒎𝒃𝒍𝒚</m:t>
-                      </m:r>
-                      <m:r>
+                        <ns5:t>𝒂𝒔𝒔𝒆𝒎𝒃𝒍𝒚</ns5:t>
+                      </ns5:r>
+                      <ns5:r>
                         <a:rPr kumimoji="0" lang="en-US" sz="1800" b="1" i="1" u="none" strike="noStrike" kern="1200" cap="none" spc="0" normalizeH="0" baseline="0" noProof="0" smtClean="0">
                           <a:ln>
                             <a:noFill/>
@@ -5045,9 +5045,9 @@
                           <a:ea typeface="Cambria Math" panose="02040503050406030204" pitchFamily="18" charset="0"/>
                           <a:cs typeface="+mn-cs"/>
                         </a:rPr>
-                        <m:t> </m:t>
-                      </m:r>
-                      <m:r>
+                        <ns5:t> </ns5:t>
+                      </ns5:r>
+                      <ns5:r>
                         <a:rPr kumimoji="0" lang="en-US" sz="1800" b="1" i="1" u="none" strike="noStrike" kern="1200" cap="none" spc="0" normalizeH="0" baseline="0" noProof="0" smtClean="0">
                           <a:ln>
                             <a:noFill/>
@@ -5062,9 +5062,9 @@
                           <a:ea typeface="Cambria Math" panose="02040503050406030204" pitchFamily="18" charset="0"/>
                           <a:cs typeface="+mn-cs"/>
                         </a:rPr>
-                        <m:t>𝒂𝒕</m:t>
-                      </m:r>
-                      <m:r>
+                        <ns5:t>𝒂𝒕</ns5:t>
+                      </ns5:r>
+                      <ns5:r>
                         <a:rPr kumimoji="0" lang="en-US" sz="1800" b="1" i="1" u="none" strike="noStrike" kern="1200" cap="none" spc="0" normalizeH="0" baseline="0" noProof="0" smtClean="0">
                           <a:ln>
                             <a:noFill/>
@@ -5079,9 +5079,9 @@
                           <a:ea typeface="Cambria Math" panose="02040503050406030204" pitchFamily="18" charset="0"/>
                           <a:cs typeface="+mn-cs"/>
                         </a:rPr>
-                        <m:t> </m:t>
-                      </m:r>
-                      <m:r>
+                        <ns5:t> </ns5:t>
+                      </ns5:r>
+                      <ns5:r>
                         <a:rPr kumimoji="0" lang="en-US" sz="1800" b="1" i="1" u="none" strike="noStrike" kern="1200" cap="none" spc="0" normalizeH="0" baseline="0" noProof="0" smtClean="0">
                           <a:ln>
                             <a:noFill/>
@@ -5096,9 +5096,9 @@
                           <a:ea typeface="Cambria Math" panose="02040503050406030204" pitchFamily="18" charset="0"/>
                           <a:cs typeface="+mn-cs"/>
                         </a:rPr>
-                        <m:t>𝒓𝒆𝒔𝒕</m:t>
-                      </m:r>
-                      <m:r>
+                        <ns5:t>𝒓𝒆𝒔𝒕</ns5:t>
+                      </ns5:r>
+                      <ns5:r>
                         <a:rPr kumimoji="0" lang="en-US" sz="1800" b="1" i="1" u="none" strike="noStrike" kern="1200" cap="none" spc="0" normalizeH="0" baseline="0" noProof="0" smtClean="0">
                           <a:ln>
                             <a:noFill/>
@@ -5113,9 +5113,9 @@
                           <a:ea typeface="Cambria Math" panose="02040503050406030204" pitchFamily="18" charset="0"/>
                           <a:cs typeface="+mn-cs"/>
                         </a:rPr>
-                        <m:t> </m:t>
-                      </m:r>
-                      <m:r>
+                        <ns5:t> </ns5:t>
+                      </ns5:r>
+                      <ns5:r>
                         <a:rPr kumimoji="0" lang="en-US" sz="1800" b="1" i="1" u="none" strike="noStrike" kern="1200" cap="none" spc="0" normalizeH="0" baseline="0" noProof="0" smtClean="0">
                           <a:ln>
                             <a:noFill/>
@@ -5130,9 +5130,9 @@
                           <a:ea typeface="Cambria Math" panose="02040503050406030204" pitchFamily="18" charset="0"/>
                           <a:cs typeface="+mn-cs"/>
                         </a:rPr>
-                        <m:t>𝒊𝒏</m:t>
-                      </m:r>
-                      <m:r>
+                        <ns5:t>𝒊𝒏</ns5:t>
+                      </ns5:r>
+                      <ns5:r>
                         <a:rPr kumimoji="0" lang="en-US" sz="1800" b="1" i="1" u="none" strike="noStrike" kern="1200" cap="none" spc="0" normalizeH="0" baseline="0" noProof="0" smtClean="0">
                           <a:ln>
                             <a:noFill/>
@@ -5147,9 +5147,9 @@
                           <a:ea typeface="Cambria Math" panose="02040503050406030204" pitchFamily="18" charset="0"/>
                           <a:cs typeface="+mn-cs"/>
                         </a:rPr>
-                        <m:t> </m:t>
-                      </m:r>
-                      <m:r>
+                        <ns5:t> </ns5:t>
+                      </ns5:r>
+                      <ns5:r>
                         <a:rPr kumimoji="0" lang="en-US" sz="1800" b="1" i="1" u="none" strike="noStrike" kern="1200" cap="none" spc="0" normalizeH="0" baseline="0" noProof="0" smtClean="0">
                           <a:ln>
                             <a:noFill/>
@@ -5164,9 +5164,9 @@
                           <a:ea typeface="Cambria Math" panose="02040503050406030204" pitchFamily="18" charset="0"/>
                           <a:cs typeface="+mn-cs"/>
                         </a:rPr>
-                        <m:t>𝒕𝒉𝒆</m:t>
-                      </m:r>
-                      <m:r>
+                        <ns5:t>𝒕𝒉𝒆</ns5:t>
+                      </ns5:r>
+                      <ns5:r>
                         <a:rPr kumimoji="0" lang="en-US" sz="1800" b="1" i="1" u="none" strike="noStrike" kern="1200" cap="none" spc="0" normalizeH="0" baseline="0" noProof="0" smtClean="0">
                           <a:ln>
                             <a:noFill/>
@@ -5181,9 +5181,9 @@
                           <a:ea typeface="Cambria Math" panose="02040503050406030204" pitchFamily="18" charset="0"/>
                           <a:cs typeface="+mn-cs"/>
                         </a:rPr>
-                        <m:t> </m:t>
-                      </m:r>
-                      <m:r>
+                        <ns5:t> </ns5:t>
+                      </ns5:r>
+                      <ns5:r>
                         <a:rPr kumimoji="0" lang="en-US" sz="1800" b="1" i="1" u="none" strike="noStrike" kern="1200" cap="none" spc="0" normalizeH="0" baseline="0" noProof="0" smtClean="0">
                           <a:ln>
                             <a:noFill/>
@@ -5198,11 +5198,11 @@
                           <a:ea typeface="Cambria Math" panose="02040503050406030204" pitchFamily="18" charset="0"/>
                           <a:cs typeface="+mn-cs"/>
                         </a:rPr>
-                        <m:t>𝒂𝒆𝒕𝒉𝒆𝒓</m:t>
-                      </m:r>
-                    </m:oMath>
-                  </m:oMathPara>
-                </a14:m>
+                        <ns5:t>𝒂𝒆𝒕𝒉𝒆𝒓</ns5:t>
+                      </ns5:r>
+                    </ns5:oMath>
+                  </ns5:oMathPara>
+                </ns4:m>
                 <a:endParaRPr kumimoji="0" lang="en-US" sz="1800" b="1" i="0" u="none" strike="noStrike" kern="1200" cap="none" spc="0" normalizeH="0" baseline="0" noProof="0" dirty="0">
                   <a:ln>
                     <a:noFill/>
@@ -5220,14 +5220,14 @@
               </a:p>
             </p:txBody>
           </p:sp>
-        </mc:Choice>
-        <mc:Fallback xmlns="">
+        </ns2:Choice>
+        <ns2:Fallback>
           <p:sp>
             <p:nvSpPr>
               <p:cNvPr id="14" name="TextBox 13">
                 <a:extLst>
                   <a:ext uri="{FF2B5EF4-FFF2-40B4-BE49-F238E27FC236}">
-                    <a16:creationId xmlns:a16="http://schemas.microsoft.com/office/drawing/2014/main" id="{E13AC0F3-5C34-2644-BA21-4D36596EADBA}"/>
+                    <a16:creationId id="{E13AC0F3-5C34-2644-BA21-4D36596EADBA}"/>
                   </a:ext>
                 </a:extLst>
               </p:cNvPr>
@@ -5264,16 +5264,16 @@
               </a:p>
             </p:txBody>
           </p:sp>
-        </mc:Fallback>
-      </mc:AlternateContent>
-      <mc:AlternateContent xmlns:mc="http://schemas.openxmlformats.org/markup-compatibility/2006" xmlns:a14="http://schemas.microsoft.com/office/drawing/2010/main">
-        <mc:Choice Requires="a14">
+        </ns2:Fallback>
+      </ns2:AlternateContent>
+      <ns2:AlternateContent>
+        <ns2:Choice Requires="a14">
           <p:sp>
             <p:nvSpPr>
               <p:cNvPr id="16" name="TextBox 15">
                 <a:extLst>
                   <a:ext uri="{FF2B5EF4-FFF2-40B4-BE49-F238E27FC236}">
-                    <a16:creationId xmlns:a16="http://schemas.microsoft.com/office/drawing/2014/main" id="{EE3E7794-1E88-FF47-B593-FD8ABD326D20}"/>
+                    <a16:creationId id="{EE3E7794-1E88-FF47-B593-FD8ABD326D20}"/>
                   </a:ext>
                 </a:extLst>
               </p:cNvPr>
@@ -5313,11 +5313,11 @@
                   <a:tabLst/>
                   <a:defRPr/>
                 </a:pPr>
-                <a14:m>
-                  <m:oMath xmlns:m="http://schemas.openxmlformats.org/officeDocument/2006/math">
-                    <m:sSub>
-                      <m:sSubPr>
-                        <m:ctrlPr>
+                <ns4:m>
+                  <ns5:oMath>
+                    <ns5:sSub>
+                      <ns5:sSubPr>
+                        <ns5:ctrlPr>
                           <a:rPr kumimoji="0" lang="en-US" sz="1800" b="0" i="1" u="none" strike="noStrike" kern="1200" cap="none" spc="0" normalizeH="0" baseline="0" noProof="0" smtClean="0">
                             <a:ln>
                               <a:noFill/>
@@ -5332,10 +5332,10 @@
                             <a:ea typeface="Cambria Math" panose="02040503050406030204" pitchFamily="18" charset="0"/>
                             <a:cs typeface="+mn-cs"/>
                           </a:rPr>
-                        </m:ctrlPr>
-                      </m:sSubPr>
-                      <m:e>
-                        <m:r>
+                        </ns5:ctrlPr>
+                      </ns5:sSubPr>
+                      <ns5:e>
+                        <ns5:r>
                           <a:rPr kumimoji="0" lang="en-US" sz="1800" b="0" i="1" u="none" strike="noStrike" kern="1200" cap="none" spc="0" normalizeH="0" baseline="0" noProof="0">
                             <a:ln>
                               <a:noFill/>
@@ -5350,11 +5350,11 @@
                             <a:ea typeface="Cambria Math" panose="02040503050406030204" pitchFamily="18" charset="0"/>
                             <a:cs typeface="+mn-cs"/>
                           </a:rPr>
-                          <m:t>𝐸𝑛𝑒𝑟𝑔𝑦</m:t>
-                        </m:r>
-                      </m:e>
-                      <m:sub>
-                        <m:r>
+                          <ns5:t>𝐸𝑛𝑒𝑟𝑔𝑦</ns5:t>
+                        </ns5:r>
+                      </ns5:e>
+                      <ns5:sub>
+                        <ns5:r>
                           <a:rPr kumimoji="0" lang="en-US" sz="1800" b="0" i="1" u="none" strike="noStrike" kern="1200" cap="none" spc="0" normalizeH="0" baseline="0" noProof="0">
                             <a:ln>
                               <a:noFill/>
@@ -5369,11 +5369,11 @@
                             <a:ea typeface="Cambria Math" panose="02040503050406030204" pitchFamily="18" charset="0"/>
                             <a:cs typeface="+mn-cs"/>
                           </a:rPr>
-                          <m:t>𝑇𝑂𝑇𝐴𝐿</m:t>
-                        </m:r>
-                      </m:sub>
-                    </m:sSub>
-                    <m:r>
+                          <ns5:t>𝑇𝑂𝑇𝐴𝐿</ns5:t>
+                        </ns5:r>
+                      </ns5:sub>
+                    </ns5:sSub>
+                    <ns5:r>
                       <a:rPr kumimoji="0" lang="en-US" sz="1800" b="0" i="1" u="none" strike="noStrike" kern="1200" cap="none" spc="0" normalizeH="0" baseline="0" noProof="0" smtClean="0">
                         <a:ln>
                           <a:noFill/>
@@ -5388,11 +5388,11 @@
                         <a:ea typeface="Cambria Math" panose="02040503050406030204" pitchFamily="18" charset="0"/>
                         <a:cs typeface="+mn-cs"/>
                       </a:rPr>
-                      <m:t> =</m:t>
-                    </m:r>
-                    <m:sSub>
-                      <m:sSubPr>
-                        <m:ctrlPr>
+                      <ns5:t> =</ns5:t>
+                    </ns5:r>
+                    <ns5:sSub>
+                      <ns5:sSubPr>
+                        <ns5:ctrlPr>
                           <a:rPr kumimoji="0" lang="en-US" sz="1800" b="0" i="1" u="none" strike="noStrike" kern="1200" cap="none" spc="0" normalizeH="0" baseline="0" noProof="0">
                             <a:ln>
                               <a:noFill/>
@@ -5407,10 +5407,10 @@
                             <a:ea typeface="Cambria Math" panose="02040503050406030204" pitchFamily="18" charset="0"/>
                             <a:cs typeface="+mn-cs"/>
                           </a:rPr>
-                        </m:ctrlPr>
-                      </m:sSubPr>
-                      <m:e>
-                        <m:r>
+                        </ns5:ctrlPr>
+                      </ns5:sSubPr>
+                      <ns5:e>
+                        <ns5:r>
                           <a:rPr kumimoji="0" lang="en-US" sz="1800" b="0" i="1" u="none" strike="noStrike" kern="1200" cap="none" spc="0" normalizeH="0" baseline="0" noProof="0">
                             <a:ln>
                               <a:noFill/>
@@ -5425,11 +5425,11 @@
                             <a:ea typeface="Cambria Math" panose="02040503050406030204" pitchFamily="18" charset="0"/>
                             <a:cs typeface="+mn-cs"/>
                           </a:rPr>
-                          <m:t>𝐸𝑛𝑒𝑟𝑔𝑦</m:t>
-                        </m:r>
-                      </m:e>
-                      <m:sub>
-                        <m:r>
+                          <ns5:t>𝐸𝑛𝑒𝑟𝑔𝑦</ns5:t>
+                        </ns5:r>
+                      </ns5:e>
+                      <ns5:sub>
+                        <ns5:r>
                           <a:rPr kumimoji="0" lang="en-US" sz="1800" b="0" i="1" u="none" strike="noStrike" kern="1200" cap="none" spc="0" normalizeH="0" baseline="0" noProof="0">
                             <a:ln>
                               <a:noFill/>
@@ -5444,12 +5444,12 @@
                             <a:ea typeface="Cambria Math" panose="02040503050406030204" pitchFamily="18" charset="0"/>
                             <a:cs typeface="+mn-cs"/>
                           </a:rPr>
-                          <m:t>𝐴𝑃𝑃𝐴𝑅𝐸𝑁𝑇</m:t>
-                        </m:r>
-                      </m:sub>
-                    </m:sSub>
-                  </m:oMath>
-                </a14:m>
+                          <ns5:t>𝐴𝑃𝑃𝐴𝑅𝐸𝑁𝑇</ns5:t>
+                        </ns5:r>
+                      </ns5:sub>
+                    </ns5:sSub>
+                  </ns5:oMath>
+                </ns4:m>
                 <a:r>
                   <a:rPr kumimoji="0" lang="en-US" sz="1800" b="0" i="0" u="none" strike="noStrike" kern="1200" cap="none" spc="0" normalizeH="0" baseline="0" noProof="0" dirty="0">
                     <a:ln>
@@ -5467,11 +5467,11 @@
                   </a:rPr>
                   <a:t> = </a:t>
                 </a:r>
-                <a14:m>
-                  <m:oMath xmlns:m="http://schemas.openxmlformats.org/officeDocument/2006/math">
-                    <m:sSup>
-                      <m:sSupPr>
-                        <m:ctrlPr>
+                <ns4:m>
+                  <ns5:oMath>
+                    <ns5:sSup>
+                      <ns5:sSupPr>
+                        <ns5:ctrlPr>
                           <a:rPr kumimoji="0" lang="en-US" sz="1800" b="0" i="1" u="none" strike="noStrike" kern="1200" cap="none" spc="0" normalizeH="0" baseline="0" noProof="0" smtClean="0">
                             <a:ln>
                               <a:noFill/>
@@ -5486,10 +5486,10 @@
                             <a:ea typeface="+mn-ea"/>
                             <a:cs typeface="+mn-cs"/>
                           </a:rPr>
-                        </m:ctrlPr>
-                      </m:sSupPr>
-                      <m:e>
-                        <m:r>
+                        </ns5:ctrlPr>
+                      </ns5:sSupPr>
+                      <ns5:e>
+                        <ns5:r>
                           <a:rPr kumimoji="0" lang="en-US" sz="1800" b="0" i="1" u="none" strike="noStrike" kern="1200" cap="none" spc="0" normalizeH="0" baseline="0" noProof="0" smtClean="0">
                             <a:ln>
                               <a:noFill/>
@@ -5504,9 +5504,9 @@
                             <a:ea typeface="+mn-ea"/>
                             <a:cs typeface="+mn-cs"/>
                           </a:rPr>
-                          <m:t>𝑞</m:t>
-                        </m:r>
-                        <m:r>
+                          <ns5:t>𝑞</ns5:t>
+                        </ns5:r>
+                        <ns5:r>
                           <a:rPr kumimoji="0" lang="en-US" sz="1800" b="0" i="1" u="none" strike="noStrike" kern="1200" cap="none" spc="0" normalizeH="0" baseline="0" noProof="0" smtClean="0">
                             <a:ln>
                               <a:noFill/>
@@ -5521,11 +5521,11 @@
                             <a:ea typeface="+mn-ea"/>
                             <a:cs typeface="+mn-cs"/>
                           </a:rPr>
-                          <m:t> ∗ @</m:t>
-                        </m:r>
-                      </m:e>
-                      <m:sup>
-                        <m:r>
+                          <ns5:t> ∗ @</ns5:t>
+                        </ns5:r>
+                      </ns5:e>
+                      <ns5:sup>
+                        <ns5:r>
                           <a:rPr kumimoji="0" lang="en-US" sz="1800" b="0" i="1" u="none" strike="noStrike" kern="1200" cap="none" spc="0" normalizeH="0" baseline="0" noProof="0" smtClean="0">
                             <a:ln>
                               <a:noFill/>
@@ -5540,12 +5540,12 @@
                             <a:ea typeface="+mn-ea"/>
                             <a:cs typeface="+mn-cs"/>
                           </a:rPr>
-                          <m:t>2</m:t>
-                        </m:r>
-                      </m:sup>
-                    </m:sSup>
-                  </m:oMath>
-                </a14:m>
+                          <ns5:t>2</ns5:t>
+                        </ns5:r>
+                      </ns5:sup>
+                    </ns5:sSup>
+                  </ns5:oMath>
+                </ns4:m>
                 <a:r>
                   <a:rPr kumimoji="0" lang="en-US" sz="1800" b="0" i="0" u="none" strike="noStrike" kern="1200" cap="none" spc="0" normalizeH="0" baseline="0" noProof="0" dirty="0">
                     <a:ln>
@@ -5566,14 +5566,14 @@
               </a:p>
             </p:txBody>
           </p:sp>
-        </mc:Choice>
-        <mc:Fallback xmlns="">
+        </ns2:Choice>
+        <ns2:Fallback>
           <p:sp>
             <p:nvSpPr>
               <p:cNvPr id="16" name="TextBox 15">
                 <a:extLst>
                   <a:ext uri="{FF2B5EF4-FFF2-40B4-BE49-F238E27FC236}">
-                    <a16:creationId xmlns:a16="http://schemas.microsoft.com/office/drawing/2014/main" id="{EE3E7794-1E88-FF47-B593-FD8ABD326D20}"/>
+                    <a16:creationId id="{EE3E7794-1E88-FF47-B593-FD8ABD326D20}"/>
                   </a:ext>
                 </a:extLst>
               </p:cNvPr>
@@ -5610,16 +5610,16 @@
               </a:p>
             </p:txBody>
           </p:sp>
-        </mc:Fallback>
-      </mc:AlternateContent>
-      <mc:AlternateContent xmlns:mc="http://schemas.openxmlformats.org/markup-compatibility/2006" xmlns:a14="http://schemas.microsoft.com/office/drawing/2010/main">
-        <mc:Choice Requires="a14">
+        </ns2:Fallback>
+      </ns2:AlternateContent>
+      <ns2:AlternateContent>
+        <ns2:Choice Requires="a14">
           <p:sp>
             <p:nvSpPr>
               <p:cNvPr id="18" name="TextBox 17">
                 <a:extLst>
                   <a:ext uri="{FF2B5EF4-FFF2-40B4-BE49-F238E27FC236}">
-                    <a16:creationId xmlns:a16="http://schemas.microsoft.com/office/drawing/2014/main" id="{E8F051DE-2A4B-0C4E-A0CC-04A871A02B3D}"/>
+                    <a16:creationId id="{E8F051DE-2A4B-0C4E-A0CC-04A871A02B3D}"/>
                   </a:ext>
                 </a:extLst>
               </p:cNvPr>
@@ -5659,9 +5659,9 @@
                   <a:tabLst/>
                   <a:defRPr/>
                 </a:pPr>
-                <a14:m>
-                  <m:oMath xmlns:m="http://schemas.openxmlformats.org/officeDocument/2006/math">
-                    <m:r>
+                <ns4:m>
+                  <ns5:oMath>
+                    <ns5:r>
                       <a:rPr kumimoji="0" lang="en-US" sz="1800" b="0" i="1" u="none" strike="noStrike" kern="1200" cap="none" spc="0" normalizeH="0" baseline="0" noProof="0" smtClean="0">
                         <a:ln>
                           <a:noFill/>
@@ -5676,9 +5676,9 @@
                         <a:ea typeface="Cambria Math" panose="02040503050406030204" pitchFamily="18" charset="0"/>
                         <a:cs typeface="+mn-cs"/>
                       </a:rPr>
-                      <m:t>𝐿𝑒𝑡</m:t>
-                    </m:r>
-                    <m:r>
+                      <ns5:t>𝐿𝑒𝑡</ns5:t>
+                    </ns5:r>
+                    <ns5:r>
                       <a:rPr kumimoji="0" lang="en-US" sz="1800" b="0" i="1" u="none" strike="noStrike" kern="1200" cap="none" spc="0" normalizeH="0" baseline="0" noProof="0">
                         <a:ln>
                           <a:noFill/>
@@ -5693,9 +5693,9 @@
                         <a:ea typeface="Cambria Math" panose="02040503050406030204" pitchFamily="18" charset="0"/>
                         <a:cs typeface="+mn-cs"/>
                       </a:rPr>
-                      <m:t> </m:t>
-                    </m:r>
-                    <m:r>
+                      <ns5:t> </ns5:t>
+                    </ns5:r>
+                    <ns5:r>
                       <a:rPr kumimoji="0" lang="en-US" sz="1800" b="0" i="1" u="none" strike="noStrike" kern="1200" cap="none" spc="0" normalizeH="0" baseline="0" noProof="0">
                         <a:ln>
                           <a:noFill/>
@@ -5710,9 +5710,9 @@
                         <a:ea typeface="Cambria Math" panose="02040503050406030204" pitchFamily="18" charset="0"/>
                         <a:cs typeface="+mn-cs"/>
                       </a:rPr>
-                      <m:t>𝑡h𝑒</m:t>
-                    </m:r>
-                    <m:r>
+                      <ns5:t>𝑡h𝑒</ns5:t>
+                    </ns5:r>
+                    <ns5:r>
                       <a:rPr kumimoji="0" lang="en-US" sz="1800" b="0" i="1" u="none" strike="noStrike" kern="1200" cap="none" spc="0" normalizeH="0" baseline="0" noProof="0">
                         <a:ln>
                           <a:noFill/>
@@ -5727,9 +5727,9 @@
                         <a:ea typeface="Cambria Math" panose="02040503050406030204" pitchFamily="18" charset="0"/>
                         <a:cs typeface="+mn-cs"/>
                       </a:rPr>
-                      <m:t> </m:t>
-                    </m:r>
-                    <m:r>
+                      <ns5:t> </ns5:t>
+                    </ns5:r>
+                    <ns5:r>
                       <a:rPr kumimoji="0" lang="en-US" sz="1800" b="0" i="1" u="none" strike="noStrike" kern="1200" cap="none" spc="0" normalizeH="0" baseline="0" noProof="0">
                         <a:ln>
                           <a:noFill/>
@@ -5744,9 +5744,9 @@
                         <a:ea typeface="Cambria Math" panose="02040503050406030204" pitchFamily="18" charset="0"/>
                         <a:cs typeface="+mn-cs"/>
                       </a:rPr>
-                      <m:t>𝑠𝑦𝑚𝑏𝑜𝑙</m:t>
-                    </m:r>
-                    <m:r>
+                      <ns5:t>𝑠𝑦𝑚𝑏𝑜𝑙</ns5:t>
+                    </ns5:r>
+                    <ns5:r>
                       <a:rPr kumimoji="0" lang="en-US" sz="1800" b="0" i="1" u="none" strike="noStrike" kern="1200" cap="none" spc="0" normalizeH="0" baseline="0" noProof="0">
                         <a:ln>
                           <a:noFill/>
@@ -5761,9 +5761,9 @@
                         <a:ea typeface="Cambria Math" panose="02040503050406030204" pitchFamily="18" charset="0"/>
                         <a:cs typeface="+mn-cs"/>
                       </a:rPr>
-                      <m:t> </m:t>
-                    </m:r>
-                    <m:r>
+                      <ns5:t> </ns5:t>
+                    </ns5:r>
+                    <ns5:r>
                       <a:rPr kumimoji="0" lang="en-US" sz="1800" b="1" i="1" u="none" strike="noStrike" kern="1200" cap="none" spc="0" normalizeH="0" baseline="0" noProof="0">
                         <a:ln>
                           <a:noFill/>
@@ -5778,9 +5778,9 @@
                         <a:ea typeface="Cambria Math" panose="02040503050406030204" pitchFamily="18" charset="0"/>
                         <a:cs typeface="+mn-cs"/>
                       </a:rPr>
-                      <m:t>@</m:t>
-                    </m:r>
-                    <m:r>
+                      <ns5:t>@</ns5:t>
+                    </ns5:r>
+                    <ns5:r>
                       <a:rPr kumimoji="0" lang="en-US" sz="1800" b="0" i="1" u="none" strike="noStrike" kern="1200" cap="none" spc="0" normalizeH="0" baseline="0" noProof="0">
                         <a:ln>
                           <a:noFill/>
@@ -5795,9 +5795,9 @@
                         <a:ea typeface="Cambria Math" panose="02040503050406030204" pitchFamily="18" charset="0"/>
                         <a:cs typeface="+mn-cs"/>
                       </a:rPr>
-                      <m:t> </m:t>
-                    </m:r>
-                    <m:r>
+                      <ns5:t> </ns5:t>
+                    </ns5:r>
+                    <ns5:r>
                       <a:rPr kumimoji="0" lang="en-US" sz="1800" b="0" i="1" u="none" strike="noStrike" kern="1200" cap="none" spc="0" normalizeH="0" baseline="0" noProof="0" smtClean="0">
                         <a:ln>
                           <a:noFill/>
@@ -5812,9 +5812,9 @@
                         <a:ea typeface="Cambria Math" panose="02040503050406030204" pitchFamily="18" charset="0"/>
                         <a:cs typeface="+mn-cs"/>
                       </a:rPr>
-                      <m:t>𝑐𝑜𝑟𝑟𝑒𝑠𝑝𝑜𝑛𝑑</m:t>
-                    </m:r>
-                    <m:r>
+                      <ns5:t>𝑐𝑜𝑟𝑟𝑒𝑠𝑝𝑜𝑛𝑑</ns5:t>
+                    </ns5:r>
+                    <ns5:r>
                       <a:rPr kumimoji="0" lang="en-US" sz="1800" b="0" i="1" u="none" strike="noStrike" kern="1200" cap="none" spc="0" normalizeH="0" baseline="0" noProof="0" smtClean="0">
                         <a:ln>
                           <a:noFill/>
@@ -5829,9 +5829,9 @@
                         <a:ea typeface="Cambria Math" panose="02040503050406030204" pitchFamily="18" charset="0"/>
                         <a:cs typeface="+mn-cs"/>
                       </a:rPr>
-                      <m:t> </m:t>
-                    </m:r>
-                    <m:r>
+                      <ns5:t> </ns5:t>
+                    </ns5:r>
+                    <ns5:r>
                       <a:rPr kumimoji="0" lang="en-US" sz="1800" b="0" i="1" u="none" strike="noStrike" kern="1200" cap="none" spc="0" normalizeH="0" baseline="0" noProof="0" smtClean="0">
                         <a:ln>
                           <a:noFill/>
@@ -5846,9 +5846,9 @@
                         <a:ea typeface="Cambria Math" panose="02040503050406030204" pitchFamily="18" charset="0"/>
                         <a:cs typeface="+mn-cs"/>
                       </a:rPr>
-                      <m:t>𝑡𝑜</m:t>
-                    </m:r>
-                    <m:r>
+                      <ns5:t>𝑡𝑜</ns5:t>
+                    </ns5:r>
+                    <ns5:r>
                       <a:rPr kumimoji="0" lang="en-US" sz="1800" b="0" i="1" u="none" strike="noStrike" kern="1200" cap="none" spc="0" normalizeH="0" baseline="0" noProof="0">
                         <a:ln>
                           <a:noFill/>
@@ -5863,9 +5863,9 @@
                         <a:ea typeface="Cambria Math" panose="02040503050406030204" pitchFamily="18" charset="0"/>
                         <a:cs typeface="+mn-cs"/>
                       </a:rPr>
-                      <m:t> </m:t>
-                    </m:r>
-                    <m:r>
+                      <ns5:t> </ns5:t>
+                    </ns5:r>
+                    <ns5:r>
                       <a:rPr kumimoji="0" lang="en-US" sz="1800" b="0" i="1" u="none" strike="noStrike" kern="1200" cap="none" spc="0" normalizeH="0" baseline="0" noProof="0">
                         <a:ln>
                           <a:noFill/>
@@ -5880,9 +5880,9 @@
                         <a:ea typeface="Cambria Math" panose="02040503050406030204" pitchFamily="18" charset="0"/>
                         <a:cs typeface="+mn-cs"/>
                       </a:rPr>
-                      <m:t>𝑡h𝑒</m:t>
-                    </m:r>
-                    <m:r>
+                      <ns5:t>𝑡h𝑒</ns5:t>
+                    </ns5:r>
+                    <ns5:r>
                       <a:rPr kumimoji="0" lang="en-US" sz="1800" b="0" i="1" u="none" strike="noStrike" kern="1200" cap="none" spc="0" normalizeH="0" baseline="0" noProof="0">
                         <a:ln>
                           <a:noFill/>
@@ -5897,9 +5897,9 @@
                         <a:ea typeface="Cambria Math" panose="02040503050406030204" pitchFamily="18" charset="0"/>
                         <a:cs typeface="+mn-cs"/>
                       </a:rPr>
-                      <m:t> </m:t>
-                    </m:r>
-                    <m:r>
+                      <ns5:t> </ns5:t>
+                    </ns5:r>
+                    <ns5:r>
                       <a:rPr kumimoji="0" lang="en-US" sz="1800" b="0" i="1" u="none" strike="noStrike" kern="1200" cap="none" spc="0" normalizeH="0" baseline="0" noProof="0">
                         <a:ln>
                           <a:noFill/>
@@ -5914,9 +5914,9 @@
                         <a:ea typeface="Cambria Math" panose="02040503050406030204" pitchFamily="18" charset="0"/>
                         <a:cs typeface="+mn-cs"/>
                       </a:rPr>
-                      <m:t>𝑢𝑛𝑖𝑣𝑒𝑟𝑠𝑎𝑙</m:t>
-                    </m:r>
-                    <m:r>
+                      <ns5:t>𝑢𝑛𝑖𝑣𝑒𝑟𝑠𝑎𝑙</ns5:t>
+                    </ns5:r>
+                    <ns5:r>
                       <a:rPr kumimoji="0" lang="en-US" sz="1800" b="0" i="1" u="none" strike="noStrike" kern="1200" cap="none" spc="0" normalizeH="0" baseline="0" noProof="0">
                         <a:ln>
                           <a:noFill/>
@@ -5931,9 +5931,9 @@
                         <a:ea typeface="Cambria Math" panose="02040503050406030204" pitchFamily="18" charset="0"/>
                         <a:cs typeface="+mn-cs"/>
                       </a:rPr>
-                      <m:t> </m:t>
-                    </m:r>
-                    <m:r>
+                      <ns5:t> </ns5:t>
+                    </ns5:r>
+                    <ns5:r>
                       <a:rPr kumimoji="0" lang="en-US" sz="1800" b="0" i="1" u="none" strike="noStrike" kern="1200" cap="none" spc="0" normalizeH="0" baseline="0" noProof="0">
                         <a:ln>
                           <a:noFill/>
@@ -5948,9 +5948,9 @@
                         <a:ea typeface="Cambria Math" panose="02040503050406030204" pitchFamily="18" charset="0"/>
                         <a:cs typeface="+mn-cs"/>
                       </a:rPr>
-                      <m:t>𝑐𝑜𝑛𝑠𝑡𝑎𝑛𝑡</m:t>
-                    </m:r>
-                    <m:r>
+                      <ns5:t>𝑐𝑜𝑛𝑠𝑡𝑎𝑛𝑡</ns5:t>
+                    </ns5:r>
+                    <ns5:r>
                       <a:rPr kumimoji="0" lang="en-US" sz="1800" b="0" i="1" u="none" strike="noStrike" kern="1200" cap="none" spc="0" normalizeH="0" baseline="0" noProof="0">
                         <a:ln>
                           <a:noFill/>
@@ -5965,9 +5965,9 @@
                         <a:ea typeface="Cambria Math" panose="02040503050406030204" pitchFamily="18" charset="0"/>
                         <a:cs typeface="+mn-cs"/>
                       </a:rPr>
-                      <m:t> </m:t>
-                    </m:r>
-                    <m:r>
+                      <ns5:t> </ns5:t>
+                    </ns5:r>
+                    <ns5:r>
                       <a:rPr kumimoji="0" lang="en-US" sz="1800" b="0" i="1" u="none" strike="noStrike" kern="1200" cap="none" spc="0" normalizeH="0" baseline="0" noProof="0">
                         <a:ln>
                           <a:noFill/>
@@ -5982,9 +5982,9 @@
                         <a:ea typeface="Cambria Math" panose="02040503050406030204" pitchFamily="18" charset="0"/>
                         <a:cs typeface="+mn-cs"/>
                       </a:rPr>
-                      <m:t>𝑠𝑝𝑒𝑒𝑑</m:t>
-                    </m:r>
-                    <m:r>
+                      <ns5:t>𝑠𝑝𝑒𝑒𝑑</ns5:t>
+                    </ns5:r>
+                    <ns5:r>
                       <a:rPr kumimoji="0" lang="en-US" sz="1800" b="0" i="1" u="none" strike="noStrike" kern="1200" cap="none" spc="0" normalizeH="0" baseline="0" noProof="0">
                         <a:ln>
                           <a:noFill/>
@@ -5999,9 +5999,9 @@
                         <a:ea typeface="Cambria Math" panose="02040503050406030204" pitchFamily="18" charset="0"/>
                         <a:cs typeface="+mn-cs"/>
                       </a:rPr>
-                      <m:t> </m:t>
-                    </m:r>
-                    <m:r>
+                      <ns5:t> </ns5:t>
+                    </ns5:r>
+                    <ns5:r>
                       <a:rPr kumimoji="0" lang="en-US" sz="1800" b="0" i="1" u="none" strike="noStrike" kern="1200" cap="none" spc="0" normalizeH="0" baseline="0" noProof="0">
                         <a:ln>
                           <a:noFill/>
@@ -6016,9 +6016,9 @@
                         <a:ea typeface="Cambria Math" panose="02040503050406030204" pitchFamily="18" charset="0"/>
                         <a:cs typeface="+mn-cs"/>
                       </a:rPr>
-                      <m:t>𝑜𝑓</m:t>
-                    </m:r>
-                    <m:r>
+                      <ns5:t>𝑜𝑓</ns5:t>
+                    </ns5:r>
+                    <ns5:r>
                       <a:rPr kumimoji="0" lang="en-US" sz="1800" b="0" i="1" u="none" strike="noStrike" kern="1200" cap="none" spc="0" normalizeH="0" baseline="0" noProof="0">
                         <a:ln>
                           <a:noFill/>
@@ -6033,9 +6033,9 @@
                         <a:ea typeface="Cambria Math" panose="02040503050406030204" pitchFamily="18" charset="0"/>
                         <a:cs typeface="+mn-cs"/>
                       </a:rPr>
-                      <m:t> </m:t>
-                    </m:r>
-                    <m:r>
+                      <ns5:t> </ns5:t>
+                    </ns5:r>
+                    <ns5:r>
                       <a:rPr kumimoji="0" lang="en-US" sz="1800" b="0" i="1" u="none" strike="noStrike" kern="1200" cap="none" spc="0" normalizeH="0" baseline="0" noProof="0" smtClean="0">
                         <a:ln>
                           <a:noFill/>
@@ -6050,9 +6050,9 @@
                         <a:ea typeface="Cambria Math" panose="02040503050406030204" pitchFamily="18" charset="0"/>
                         <a:cs typeface="+mn-cs"/>
                       </a:rPr>
-                      <m:t>𝑝𝑜𝑡𝑒𝑛𝑡𝑖𝑎𝑙</m:t>
-                    </m:r>
-                    <m:r>
+                      <ns5:t>𝑝𝑜𝑡𝑒𝑛𝑡𝑖𝑎𝑙</ns5:t>
+                    </ns5:r>
+                    <ns5:r>
                       <a:rPr kumimoji="0" lang="en-US" sz="1800" b="0" i="1" u="none" strike="noStrike" kern="1200" cap="none" spc="0" normalizeH="0" baseline="0" noProof="0" smtClean="0">
                         <a:ln>
                           <a:noFill/>
@@ -6067,9 +6067,9 @@
                         <a:ea typeface="Cambria Math" panose="02040503050406030204" pitchFamily="18" charset="0"/>
                         <a:cs typeface="+mn-cs"/>
                       </a:rPr>
-                      <m:t> </m:t>
-                    </m:r>
-                    <m:r>
+                      <ns5:t> </ns5:t>
+                    </ns5:r>
+                    <ns5:r>
                       <a:rPr kumimoji="0" lang="en-US" sz="1800" b="0" i="1" u="none" strike="noStrike" kern="1200" cap="none" spc="0" normalizeH="0" baseline="0" noProof="0" smtClean="0">
                         <a:ln>
                           <a:noFill/>
@@ -6084,10 +6084,10 @@
                         <a:ea typeface="Cambria Math" panose="02040503050406030204" pitchFamily="18" charset="0"/>
                         <a:cs typeface="+mn-cs"/>
                       </a:rPr>
-                      <m:t>𝑒𝑚𝑖𝑠𝑠𝑖𝑜𝑛𝑠</m:t>
-                    </m:r>
-                  </m:oMath>
-                </a14:m>
+                      <ns5:t>𝑒𝑚𝑖𝑠𝑠𝑖𝑜𝑛𝑠</ns5:t>
+                    </ns5:r>
+                  </ns5:oMath>
+                </ns4:m>
                 <a:r>
                   <a:rPr kumimoji="0" lang="en-US" sz="1800" b="0" i="0" u="none" strike="noStrike" kern="1200" cap="none" spc="0" normalizeH="0" baseline="0" noProof="0" dirty="0">
                     <a:ln>
@@ -6108,14 +6108,14 @@
               </a:p>
             </p:txBody>
           </p:sp>
-        </mc:Choice>
-        <mc:Fallback xmlns="">
+        </ns2:Choice>
+        <ns2:Fallback>
           <p:sp>
             <p:nvSpPr>
               <p:cNvPr id="18" name="TextBox 17">
                 <a:extLst>
                   <a:ext uri="{FF2B5EF4-FFF2-40B4-BE49-F238E27FC236}">
-                    <a16:creationId xmlns:a16="http://schemas.microsoft.com/office/drawing/2014/main" id="{E8F051DE-2A4B-0C4E-A0CC-04A871A02B3D}"/>
+                    <a16:creationId id="{E8F051DE-2A4B-0C4E-A0CC-04A871A02B3D}"/>
                   </a:ext>
                 </a:extLst>
               </p:cNvPr>
@@ -6152,16 +6152,16 @@
               </a:p>
             </p:txBody>
           </p:sp>
-        </mc:Fallback>
-      </mc:AlternateContent>
-      <mc:AlternateContent xmlns:mc="http://schemas.openxmlformats.org/markup-compatibility/2006" xmlns:a14="http://schemas.microsoft.com/office/drawing/2010/main">
-        <mc:Choice Requires="a14">
+        </ns2:Fallback>
+      </ns2:AlternateContent>
+      <ns2:AlternateContent>
+        <ns2:Choice Requires="a14">
           <p:sp>
             <p:nvSpPr>
               <p:cNvPr id="20" name="TextBox 19">
                 <a:extLst>
                   <a:ext uri="{FF2B5EF4-FFF2-40B4-BE49-F238E27FC236}">
-                    <a16:creationId xmlns:a16="http://schemas.microsoft.com/office/drawing/2014/main" id="{B3FFFA43-DC28-C04C-8FF8-72E533B0CF14}"/>
+                    <a16:creationId id="{B3FFFA43-DC28-C04C-8FF8-72E533B0CF14}"/>
                   </a:ext>
                 </a:extLst>
               </p:cNvPr>
@@ -6203,9 +6203,9 @@
                   <a:tabLst/>
                   <a:defRPr/>
                 </a:pPr>
-                <a14:m>
-                  <m:oMath xmlns:m="http://schemas.openxmlformats.org/officeDocument/2006/math">
-                    <m:r>
+                <ns4:m>
+                  <ns5:oMath>
+                    <ns5:r>
                       <a:rPr kumimoji="0" lang="en-US" sz="1800" b="1" i="1" u="none" strike="noStrike" kern="1200" cap="none" spc="0" normalizeH="0" baseline="0" noProof="0" smtClean="0">
                         <a:ln>
                           <a:noFill/>
@@ -6220,9 +6220,9 @@
                         <a:ea typeface="Cambria Math" panose="02040503050406030204" pitchFamily="18" charset="0"/>
                         <a:cs typeface="+mn-cs"/>
                       </a:rPr>
-                      <m:t>𝑷𝒐𝒊𝒏𝒕</m:t>
-                    </m:r>
-                    <m:r>
+                      <ns5:t>𝑷𝒐𝒊𝒏𝒕</ns5:t>
+                    </ns5:r>
+                    <ns5:r>
                       <a:rPr kumimoji="0" lang="en-US" sz="1800" b="1" i="1" u="none" strike="noStrike" kern="1200" cap="none" spc="0" normalizeH="0" baseline="0" noProof="0" smtClean="0">
                         <a:ln>
                           <a:noFill/>
@@ -6237,9 +6237,9 @@
                         <a:ea typeface="Cambria Math" panose="02040503050406030204" pitchFamily="18" charset="0"/>
                         <a:cs typeface="+mn-cs"/>
                       </a:rPr>
-                      <m:t> </m:t>
-                    </m:r>
-                    <m:r>
+                      <ns5:t> </ns5:t>
+                    </ns5:r>
+                    <ns5:r>
                       <a:rPr kumimoji="0" lang="en-US" sz="1800" b="1" i="1" u="none" strike="noStrike" kern="1200" cap="none" spc="0" normalizeH="0" baseline="0" noProof="0" smtClean="0">
                         <a:ln>
                           <a:noFill/>
@@ -6254,9 +6254,9 @@
                         <a:ea typeface="Cambria Math" panose="02040503050406030204" pitchFamily="18" charset="0"/>
                         <a:cs typeface="+mn-cs"/>
                       </a:rPr>
-                      <m:t>𝒑𝒐𝒕𝒆𝒏𝒕𝒊𝒂𝒍</m:t>
-                    </m:r>
-                    <m:r>
+                      <ns5:t>𝒑𝒐𝒕𝒆𝒏𝒕𝒊𝒂𝒍</ns5:t>
+                    </ns5:r>
+                    <ns5:r>
                       <a:rPr kumimoji="0" lang="en-US" sz="1800" b="1" i="1" u="none" strike="noStrike" kern="1200" cap="none" spc="0" normalizeH="0" baseline="0" noProof="0" smtClean="0">
                         <a:ln>
                           <a:noFill/>
@@ -6271,9 +6271,9 @@
                         <a:ea typeface="Cambria Math" panose="02040503050406030204" pitchFamily="18" charset="0"/>
                         <a:cs typeface="+mn-cs"/>
                       </a:rPr>
-                      <m:t> </m:t>
-                    </m:r>
-                    <m:r>
+                      <ns5:t> </ns5:t>
+                    </ns5:r>
+                    <ns5:r>
                       <a:rPr kumimoji="0" lang="en-US" sz="1800" b="1" i="1" u="none" strike="noStrike" kern="1200" cap="none" spc="0" normalizeH="0" baseline="0" noProof="0" smtClean="0">
                         <a:ln>
                           <a:noFill/>
@@ -6288,9 +6288,9 @@
                         <a:ea typeface="Cambria Math" panose="02040503050406030204" pitchFamily="18" charset="0"/>
                         <a:cs typeface="+mn-cs"/>
                       </a:rPr>
-                      <m:t>𝒊𝒔𝒐𝒍𝒂𝒕𝒆𝒅</m:t>
-                    </m:r>
-                    <m:r>
+                      <ns5:t>𝒊𝒔𝒐𝒍𝒂𝒕𝒆𝒅</ns5:t>
+                    </ns5:r>
+                    <ns5:r>
                       <a:rPr kumimoji="0" lang="en-US" sz="1800" b="1" i="1" u="none" strike="noStrike" kern="1200" cap="none" spc="0" normalizeH="0" baseline="0" noProof="0" smtClean="0">
                         <a:ln>
                           <a:noFill/>
@@ -6305,9 +6305,9 @@
                         <a:ea typeface="Cambria Math" panose="02040503050406030204" pitchFamily="18" charset="0"/>
                         <a:cs typeface="+mn-cs"/>
                       </a:rPr>
-                      <m:t> </m:t>
-                    </m:r>
-                    <m:r>
+                      <ns5:t> </ns5:t>
+                    </ns5:r>
+                    <ns5:r>
                       <a:rPr kumimoji="0" lang="en-US" sz="1800" b="1" i="1" u="none" strike="noStrike" kern="1200" cap="none" spc="0" normalizeH="0" baseline="0" noProof="0" smtClean="0">
                         <a:ln>
                           <a:noFill/>
@@ -6322,9 +6322,9 @@
                         <a:ea typeface="Cambria Math" panose="02040503050406030204" pitchFamily="18" charset="0"/>
                         <a:cs typeface="+mn-cs"/>
                       </a:rPr>
-                      <m:t>𝒊𝒏</m:t>
-                    </m:r>
-                    <m:r>
+                      <ns5:t>𝒊𝒏</ns5:t>
+                    </ns5:r>
+                    <ns5:r>
                       <a:rPr kumimoji="0" lang="en-US" sz="1800" b="1" i="1" u="none" strike="noStrike" kern="1200" cap="none" spc="0" normalizeH="0" baseline="0" noProof="0" smtClean="0">
                         <a:ln>
                           <a:noFill/>
@@ -6339,9 +6339,9 @@
                         <a:ea typeface="Cambria Math" panose="02040503050406030204" pitchFamily="18" charset="0"/>
                         <a:cs typeface="+mn-cs"/>
                       </a:rPr>
-                      <m:t> </m:t>
-                    </m:r>
-                    <m:r>
+                      <ns5:t> </ns5:t>
+                    </ns5:r>
+                    <ns5:r>
                       <a:rPr kumimoji="0" lang="en-US" sz="1800" b="1" i="1" u="none" strike="noStrike" kern="1200" cap="none" spc="0" normalizeH="0" baseline="0" noProof="0" smtClean="0">
                         <a:ln>
                           <a:noFill/>
@@ -6356,9 +6356,9 @@
                         <a:ea typeface="Cambria Math" panose="02040503050406030204" pitchFamily="18" charset="0"/>
                         <a:cs typeface="+mn-cs"/>
                       </a:rPr>
-                      <m:t>𝒂</m:t>
-                    </m:r>
-                    <m:r>
+                      <ns5:t>𝒂</ns5:t>
+                    </ns5:r>
+                    <ns5:r>
                       <a:rPr kumimoji="0" lang="en-US" sz="1800" b="1" i="1" u="none" strike="noStrike" kern="1200" cap="none" spc="0" normalizeH="0" baseline="0" noProof="0" smtClean="0">
                         <a:ln>
                           <a:noFill/>
@@ -6373,9 +6373,9 @@
                         <a:ea typeface="Cambria Math" panose="02040503050406030204" pitchFamily="18" charset="0"/>
                         <a:cs typeface="+mn-cs"/>
                       </a:rPr>
-                      <m:t> </m:t>
-                    </m:r>
-                    <m:r>
+                      <ns5:t> </ns5:t>
+                    </ns5:r>
+                    <ns5:r>
                       <a:rPr kumimoji="0" lang="en-US" sz="1800" b="1" i="1" u="none" strike="noStrike" kern="1200" cap="none" spc="0" normalizeH="0" baseline="0" noProof="0" smtClean="0">
                         <a:ln>
                           <a:noFill/>
@@ -6390,9 +6390,9 @@
                         <a:ea typeface="Cambria Math" panose="02040503050406030204" pitchFamily="18" charset="0"/>
                         <a:cs typeface="+mn-cs"/>
                       </a:rPr>
-                      <m:t>𝑬𝒖𝒄𝒍𝒊𝒅𝒆𝒂𝒏</m:t>
-                    </m:r>
-                    <m:r>
+                      <ns5:t>𝑬𝒖𝒄𝒍𝒊𝒅𝒆𝒂𝒏</ns5:t>
+                    </ns5:r>
+                    <ns5:r>
                       <a:rPr kumimoji="0" lang="en-US" sz="1800" b="1" i="1" u="none" strike="noStrike" kern="1200" cap="none" spc="0" normalizeH="0" baseline="0" noProof="0" smtClean="0">
                         <a:ln>
                           <a:noFill/>
@@ -6407,9 +6407,9 @@
                         <a:ea typeface="Cambria Math" panose="02040503050406030204" pitchFamily="18" charset="0"/>
                         <a:cs typeface="+mn-cs"/>
                       </a:rPr>
-                      <m:t> </m:t>
-                    </m:r>
-                    <m:r>
+                      <ns5:t> </ns5:t>
+                    </ns5:r>
+                    <ns5:r>
                       <a:rPr kumimoji="0" lang="en-US" sz="1800" b="1" i="1" u="none" strike="noStrike" kern="1200" cap="none" spc="0" normalizeH="0" baseline="0" noProof="0" smtClean="0">
                         <a:ln>
                           <a:noFill/>
@@ -6424,9 +6424,9 @@
                         <a:ea typeface="Cambria Math" panose="02040503050406030204" pitchFamily="18" charset="0"/>
                         <a:cs typeface="+mn-cs"/>
                       </a:rPr>
-                      <m:t>𝒗𝒐𝒊𝒅</m:t>
-                    </m:r>
-                    <m:r>
+                      <ns5:t>𝒗𝒐𝒊𝒅</ns5:t>
+                    </ns5:r>
+                    <ns5:r>
                       <a:rPr kumimoji="0" lang="en-US" sz="1800" b="1" i="1" u="none" strike="noStrike" kern="1200" cap="none" spc="0" normalizeH="0" baseline="0" noProof="0" smtClean="0">
                         <a:ln>
                           <a:noFill/>
@@ -6441,9 +6441,9 @@
                         <a:ea typeface="Cambria Math" panose="02040503050406030204" pitchFamily="18" charset="0"/>
                         <a:cs typeface="+mn-cs"/>
                       </a:rPr>
-                      <m:t> </m:t>
-                    </m:r>
-                    <m:r>
+                      <ns5:t> </ns5:t>
+                    </ns5:r>
+                    <ns5:r>
                       <a:rPr kumimoji="0" lang="en-US" sz="1800" b="1" i="1" u="none" strike="noStrike" kern="1200" cap="none" spc="0" normalizeH="0" baseline="0" noProof="0" smtClean="0">
                         <a:ln>
                           <a:noFill/>
@@ -6458,9 +6458,9 @@
                         <a:ea typeface="Cambria Math" panose="02040503050406030204" pitchFamily="18" charset="0"/>
                         <a:cs typeface="+mn-cs"/>
                       </a:rPr>
-                      <m:t>𝒐𝒇</m:t>
-                    </m:r>
-                    <m:r>
+                      <ns5:t>𝒐𝒇</ns5:t>
+                    </ns5:r>
+                    <ns5:r>
                       <a:rPr kumimoji="0" lang="en-US" sz="1800" b="1" i="1" u="none" strike="noStrike" kern="1200" cap="none" spc="0" normalizeH="0" baseline="0" noProof="0" smtClean="0">
                         <a:ln>
                           <a:noFill/>
@@ -6475,9 +6475,9 @@
                         <a:ea typeface="Cambria Math" panose="02040503050406030204" pitchFamily="18" charset="0"/>
                         <a:cs typeface="+mn-cs"/>
                       </a:rPr>
-                      <m:t> </m:t>
-                    </m:r>
-                    <m:r>
+                      <ns5:t> </ns5:t>
+                    </ns5:r>
+                    <ns5:r>
                       <a:rPr kumimoji="0" lang="en-US" sz="1800" b="1" i="1" u="none" strike="noStrike" kern="1200" cap="none" spc="0" normalizeH="0" baseline="0" noProof="0" smtClean="0">
                         <a:ln>
                           <a:noFill/>
@@ -6492,9 +6492,9 @@
                         <a:ea typeface="Cambria Math" panose="02040503050406030204" pitchFamily="18" charset="0"/>
                         <a:cs typeface="+mn-cs"/>
                       </a:rPr>
-                      <m:t>𝒔𝒑𝒂𝒄𝒆</m:t>
-                    </m:r>
-                    <m:r>
+                      <ns5:t>𝒔𝒑𝒂𝒄𝒆</ns5:t>
+                    </ns5:r>
+                    <ns5:r>
                       <a:rPr kumimoji="0" lang="en-US" sz="1800" b="1" i="1" u="none" strike="noStrike" kern="1200" cap="none" spc="0" normalizeH="0" baseline="0" noProof="0" smtClean="0">
                         <a:ln>
                           <a:noFill/>
@@ -6509,9 +6509,9 @@
                         <a:ea typeface="Cambria Math" panose="02040503050406030204" pitchFamily="18" charset="0"/>
                         <a:cs typeface="+mn-cs"/>
                       </a:rPr>
-                      <m:t> </m:t>
-                    </m:r>
-                    <m:r>
+                      <ns5:t> </ns5:t>
+                    </ns5:r>
+                    <ns5:r>
                       <a:rPr kumimoji="0" lang="en-US" sz="1800" b="1" i="1" u="none" strike="noStrike" kern="1200" cap="none" spc="0" normalizeH="0" baseline="0" noProof="0" smtClean="0">
                         <a:ln>
                           <a:noFill/>
@@ -6526,9 +6526,9 @@
                         <a:ea typeface="Cambria Math" panose="02040503050406030204" pitchFamily="18" charset="0"/>
                         <a:cs typeface="+mn-cs"/>
                       </a:rPr>
-                      <m:t>𝒂𝒏𝒅</m:t>
-                    </m:r>
-                    <m:r>
+                      <ns5:t>𝒂𝒏𝒅</ns5:t>
+                    </ns5:r>
+                    <ns5:r>
                       <a:rPr kumimoji="0" lang="en-US" sz="1800" b="1" i="1" u="none" strike="noStrike" kern="1200" cap="none" spc="0" normalizeH="0" baseline="0" noProof="0" smtClean="0">
                         <a:ln>
                           <a:noFill/>
@@ -6543,9 +6543,9 @@
                         <a:ea typeface="Cambria Math" panose="02040503050406030204" pitchFamily="18" charset="0"/>
                         <a:cs typeface="+mn-cs"/>
                       </a:rPr>
-                      <m:t> </m:t>
-                    </m:r>
-                    <m:r>
+                      <ns5:t> </ns5:t>
+                    </ns5:r>
+                    <ns5:r>
                       <a:rPr kumimoji="0" lang="en-US" sz="1800" b="1" i="1" u="none" strike="noStrike" kern="1200" cap="none" spc="0" normalizeH="0" baseline="0" noProof="0" smtClean="0">
                         <a:ln>
                           <a:noFill/>
@@ -6560,9 +6560,9 @@
                         <a:ea typeface="Cambria Math" panose="02040503050406030204" pitchFamily="18" charset="0"/>
                         <a:cs typeface="+mn-cs"/>
                       </a:rPr>
-                      <m:t>𝒕𝒊𝒎𝒆</m:t>
-                    </m:r>
-                    <m:r>
+                      <ns5:t>𝒕𝒊𝒎𝒆</ns5:t>
+                    </ns5:r>
+                    <ns5:r>
                       <a:rPr kumimoji="0" lang="en-US" sz="1800" b="1" i="1" u="none" strike="noStrike" kern="1200" cap="none" spc="0" normalizeH="0" baseline="0" noProof="0" smtClean="0">
                         <a:ln>
                           <a:noFill/>
@@ -6577,9 +6577,9 @@
                         <a:ea typeface="Cambria Math" panose="02040503050406030204" pitchFamily="18" charset="0"/>
                         <a:cs typeface="+mn-cs"/>
                       </a:rPr>
-                      <m:t> (</m:t>
-                    </m:r>
-                    <m:r>
+                      <ns5:t> (</ns5:t>
+                    </ns5:r>
+                    <ns5:r>
                       <a:rPr kumimoji="0" lang="en-US" sz="1800" b="1" i="1" u="none" strike="noStrike" kern="1200" cap="none" spc="0" normalizeH="0" baseline="0" noProof="0" smtClean="0">
                         <a:ln>
                           <a:noFill/>
@@ -6594,9 +6594,9 @@
                         <a:ea typeface="Cambria Math" panose="02040503050406030204" pitchFamily="18" charset="0"/>
                         <a:cs typeface="+mn-cs"/>
                       </a:rPr>
-                      <m:t>𝒗𝒆𝒍𝒐𝒄𝒊𝒕𝒚</m:t>
-                    </m:r>
-                    <m:r>
+                      <ns5:t>𝒗𝒆𝒍𝒐𝒄𝒊𝒕𝒚</ns5:t>
+                    </ns5:r>
+                    <ns5:r>
                       <a:rPr kumimoji="0" lang="en-US" sz="1800" b="1" i="1" u="none" strike="noStrike" kern="1200" cap="none" spc="0" normalizeH="0" baseline="0" noProof="0" smtClean="0">
                         <a:ln>
                           <a:noFill/>
@@ -6611,9 +6611,9 @@
                         <a:ea typeface="Cambria Math" panose="02040503050406030204" pitchFamily="18" charset="0"/>
                         <a:cs typeface="+mn-cs"/>
                       </a:rPr>
-                      <m:t> </m:t>
-                    </m:r>
-                    <m:r>
+                      <ns5:t> </ns5:t>
+                    </ns5:r>
+                    <ns5:r>
                       <a:rPr kumimoji="0" lang="en-US" sz="1800" b="1" i="1" u="none" strike="noStrike" kern="1200" cap="none" spc="0" normalizeH="0" baseline="0" noProof="0" smtClean="0">
                         <a:ln>
                           <a:noFill/>
@@ -6628,9 +6628,9 @@
                         <a:ea typeface="Cambria Math" panose="02040503050406030204" pitchFamily="18" charset="0"/>
                         <a:cs typeface="+mn-cs"/>
                       </a:rPr>
-                      <m:t>𝒏𝒐𝒕</m:t>
-                    </m:r>
-                    <m:r>
+                      <ns5:t>𝒏𝒐𝒕</ns5:t>
+                    </ns5:r>
+                    <ns5:r>
                       <a:rPr kumimoji="0" lang="en-US" sz="1800" b="1" i="1" u="none" strike="noStrike" kern="1200" cap="none" spc="0" normalizeH="0" baseline="0" noProof="0" smtClean="0">
                         <a:ln>
                           <a:noFill/>
@@ -6645,9 +6645,9 @@
                         <a:ea typeface="Cambria Math" panose="02040503050406030204" pitchFamily="18" charset="0"/>
                         <a:cs typeface="+mn-cs"/>
                       </a:rPr>
-                      <m:t> </m:t>
-                    </m:r>
-                    <m:r>
+                      <ns5:t> </ns5:t>
+                    </ns5:r>
+                    <ns5:r>
                       <a:rPr kumimoji="0" lang="en-US" sz="1800" b="1" i="1" u="none" strike="noStrike" kern="1200" cap="none" spc="0" normalizeH="0" baseline="0" noProof="0" smtClean="0">
                         <a:ln>
                           <a:noFill/>
@@ -6662,9 +6662,9 @@
                         <a:ea typeface="Cambria Math" panose="02040503050406030204" pitchFamily="18" charset="0"/>
                         <a:cs typeface="+mn-cs"/>
                       </a:rPr>
-                      <m:t>𝒅𝒆𝒇𝒊𝒏𝒆𝒅</m:t>
-                    </m:r>
-                    <m:r>
+                      <ns5:t>𝒅𝒆𝒇𝒊𝒏𝒆𝒅</ns5:t>
+                    </ns5:r>
+                    <ns5:r>
                       <a:rPr kumimoji="0" lang="en-US" sz="1800" b="1" i="1" u="none" strike="noStrike" kern="1200" cap="none" spc="0" normalizeH="0" baseline="0" noProof="0" smtClean="0">
                         <a:ln>
                           <a:noFill/>
@@ -6679,10 +6679,10 @@
                         <a:ea typeface="Cambria Math" panose="02040503050406030204" pitchFamily="18" charset="0"/>
                         <a:cs typeface="+mn-cs"/>
                       </a:rPr>
-                      <m:t>)</m:t>
-                    </m:r>
-                  </m:oMath>
-                </a14:m>
+                      <ns5:t>)</ns5:t>
+                    </ns5:r>
+                  </ns5:oMath>
+                </ns4:m>
                 <a:r>
                   <a:rPr kumimoji="0" lang="en-US" sz="1800" b="0" i="0" u="none" strike="noStrike" kern="1200" cap="none" spc="0" normalizeH="0" baseline="0" noProof="0" dirty="0">
                     <a:ln>
@@ -6703,14 +6703,14 @@
               </a:p>
             </p:txBody>
           </p:sp>
-        </mc:Choice>
-        <mc:Fallback xmlns="">
+        </ns2:Choice>
+        <ns2:Fallback>
           <p:sp>
             <p:nvSpPr>
               <p:cNvPr id="20" name="TextBox 19">
                 <a:extLst>
                   <a:ext uri="{FF2B5EF4-FFF2-40B4-BE49-F238E27FC236}">
-                    <a16:creationId xmlns:a16="http://schemas.microsoft.com/office/drawing/2014/main" id="{B3FFFA43-DC28-C04C-8FF8-72E533B0CF14}"/>
+                    <a16:creationId id="{B3FFFA43-DC28-C04C-8FF8-72E533B0CF14}"/>
                   </a:ext>
                 </a:extLst>
               </p:cNvPr>
@@ -6747,16 +6747,16 @@
               </a:p>
             </p:txBody>
           </p:sp>
-        </mc:Fallback>
-      </mc:AlternateContent>
-      <mc:AlternateContent xmlns:mc="http://schemas.openxmlformats.org/markup-compatibility/2006" xmlns:a14="http://schemas.microsoft.com/office/drawing/2010/main">
-        <mc:Choice Requires="a14">
+        </ns2:Fallback>
+      </ns2:AlternateContent>
+      <ns2:AlternateContent>
+        <ns2:Choice Requires="a14">
           <p:sp>
             <p:nvSpPr>
               <p:cNvPr id="22" name="TextBox 21">
                 <a:extLst>
                   <a:ext uri="{FF2B5EF4-FFF2-40B4-BE49-F238E27FC236}">
-                    <a16:creationId xmlns:a16="http://schemas.microsoft.com/office/drawing/2014/main" id="{2F270859-FECE-2645-A10D-F6319FAE5B09}"/>
+                    <a16:creationId id="{2F270859-FECE-2645-A10D-F6319FAE5B09}"/>
                   </a:ext>
                 </a:extLst>
               </p:cNvPr>
@@ -6796,13 +6796,13 @@
                   <a:tabLst/>
                   <a:defRPr/>
                 </a:pPr>
-                <a14:m>
-                  <m:oMathPara xmlns:m="http://schemas.openxmlformats.org/officeDocument/2006/math">
-                    <m:oMathParaPr>
-                      <m:jc m:val="centerGroup"/>
-                    </m:oMathParaPr>
-                    <m:oMath xmlns:m="http://schemas.openxmlformats.org/officeDocument/2006/math">
-                      <m:r>
+                <ns4:m>
+                  <ns5:oMathPara>
+                    <ns5:oMathParaPr>
+                      <ns5:jc ns5:val="centerGroup"/>
+                    </ns5:oMathParaPr>
+                    <ns5:oMath>
+                      <ns5:r>
                         <a:rPr kumimoji="0" lang="en-US" sz="1800" b="1" i="1" u="none" strike="noStrike" kern="1200" cap="none" spc="0" normalizeH="0" baseline="0" noProof="0" smtClean="0">
                           <a:ln>
                             <a:noFill/>
@@ -6817,11 +6817,11 @@
                           <a:ea typeface="Cambria Math" panose="02040503050406030204" pitchFamily="18" charset="0"/>
                           <a:cs typeface="+mn-cs"/>
                         </a:rPr>
-                        <m:t>𝑫𝒖𝒂𝒍𝒊𝒕𝒚</m:t>
-                      </m:r>
-                    </m:oMath>
-                  </m:oMathPara>
-                </a14:m>
+                        <ns5:t>𝑫𝒖𝒂𝒍𝒊𝒕𝒚</ns5:t>
+                      </ns5:r>
+                    </ns5:oMath>
+                  </ns5:oMathPara>
+                </ns4:m>
                 <a:endParaRPr kumimoji="0" lang="en-US" sz="1800" b="0" i="1" u="none" strike="noStrike" kern="1200" cap="none" spc="0" normalizeH="0" baseline="0" noProof="0" dirty="0">
                   <a:ln>
                     <a:noFill/>
@@ -6855,13 +6855,13 @@
                   <a:tabLst/>
                   <a:defRPr/>
                 </a:pPr>
-                <a14:m>
-                  <m:oMathPara xmlns:m="http://schemas.openxmlformats.org/officeDocument/2006/math">
-                    <m:oMathParaPr>
-                      <m:jc m:val="centerGroup"/>
-                    </m:oMathParaPr>
-                    <m:oMath xmlns:m="http://schemas.openxmlformats.org/officeDocument/2006/math">
-                      <m:r>
+                <ns4:m>
+                  <ns5:oMathPara>
+                    <ns5:oMathParaPr>
+                      <ns5:jc ns5:val="centerGroup"/>
+                    </ns5:oMathParaPr>
+                    <ns5:oMath>
+                      <ns5:r>
                         <a:rPr kumimoji="0" lang="en-US" sz="1800" b="0" i="1" u="none" strike="noStrike" kern="1200" cap="none" spc="0" normalizeH="0" baseline="0" noProof="0">
                           <a:ln>
                             <a:noFill/>
@@ -6876,9 +6876,9 @@
                           <a:ea typeface="Cambria Math" panose="02040503050406030204" pitchFamily="18" charset="0"/>
                           <a:cs typeface="+mn-cs"/>
                         </a:rPr>
-                        <m:t>𝑃𝑜𝑖𝑛𝑡</m:t>
-                      </m:r>
-                      <m:r>
+                        <ns5:t>𝑃𝑜𝑖𝑛𝑡</ns5:t>
+                      </ns5:r>
+                      <ns5:r>
                         <a:rPr kumimoji="0" lang="en-US" sz="1800" b="0" i="1" u="none" strike="noStrike" kern="1200" cap="none" spc="0" normalizeH="0" baseline="0" noProof="0">
                           <a:ln>
                             <a:noFill/>
@@ -6893,9 +6893,9 @@
                           <a:ea typeface="Cambria Math" panose="02040503050406030204" pitchFamily="18" charset="0"/>
                           <a:cs typeface="+mn-cs"/>
                         </a:rPr>
-                        <m:t> </m:t>
-                      </m:r>
-                      <m:r>
+                        <ns5:t> </ns5:t>
+                      </ns5:r>
+                      <ns5:r>
                         <a:rPr kumimoji="0" lang="en-US" sz="1800" b="0" i="1" u="none" strike="noStrike" kern="1200" cap="none" spc="0" normalizeH="0" baseline="0" noProof="0" smtClean="0">
                           <a:ln>
                             <a:noFill/>
@@ -6910,9 +6910,9 @@
                           <a:ea typeface="Cambria Math" panose="02040503050406030204" pitchFamily="18" charset="0"/>
                           <a:cs typeface="+mn-cs"/>
                         </a:rPr>
-                        <m:t>𝑝𝑜𝑡𝑒𝑛𝑡𝑖𝑎𝑙</m:t>
-                      </m:r>
-                      <m:r>
+                        <ns5:t>𝑝𝑜𝑡𝑒𝑛𝑡𝑖𝑎𝑙</ns5:t>
+                      </ns5:r>
+                      <ns5:r>
                         <a:rPr kumimoji="0" lang="en-US" sz="1800" b="0" i="1" u="none" strike="noStrike" kern="1200" cap="none" spc="0" normalizeH="0" baseline="0" noProof="0">
                           <a:ln>
                             <a:noFill/>
@@ -6927,9 +6927,9 @@
                           <a:ea typeface="Cambria Math" panose="02040503050406030204" pitchFamily="18" charset="0"/>
                           <a:cs typeface="+mn-cs"/>
                         </a:rPr>
-                        <m:t> </m:t>
-                      </m:r>
-                      <m:r>
+                        <ns5:t> </ns5:t>
+                      </ns5:r>
+                      <ns5:r>
                         <a:rPr kumimoji="0" lang="en-US" sz="1800" b="0" i="1" u="none" strike="noStrike" kern="1200" cap="none" spc="0" normalizeH="0" baseline="0" noProof="0">
                           <a:ln>
                             <a:noFill/>
@@ -6944,9 +6944,9 @@
                           <a:ea typeface="Cambria Math" panose="02040503050406030204" pitchFamily="18" charset="0"/>
                           <a:cs typeface="+mn-cs"/>
                         </a:rPr>
-                        <m:t>𝑓𝑖𝑒𝑙𝑑𝑠</m:t>
-                      </m:r>
-                      <m:r>
+                        <ns5:t>𝑓𝑖𝑒𝑙𝑑𝑠</ns5:t>
+                      </ns5:r>
+                      <ns5:r>
                         <a:rPr kumimoji="0" lang="en-US" sz="1800" b="0" i="1" u="none" strike="noStrike" kern="1200" cap="none" spc="0" normalizeH="0" baseline="0" noProof="0">
                           <a:ln>
                             <a:noFill/>
@@ -6961,9 +6961,9 @@
                           <a:ea typeface="Cambria Math" panose="02040503050406030204" pitchFamily="18" charset="0"/>
                           <a:cs typeface="+mn-cs"/>
                         </a:rPr>
-                        <m:t> </m:t>
-                      </m:r>
-                      <m:r>
+                        <ns5:t> </ns5:t>
+                      </ns5:r>
+                      <ns5:r>
                         <a:rPr kumimoji="0" lang="en-US" sz="1800" b="0" i="1" u="none" strike="noStrike" kern="1200" cap="none" spc="0" normalizeH="0" baseline="0" noProof="0">
                           <a:ln>
                             <a:noFill/>
@@ -6978,9 +6978,9 @@
                           <a:ea typeface="Cambria Math" panose="02040503050406030204" pitchFamily="18" charset="0"/>
                           <a:cs typeface="+mn-cs"/>
                         </a:rPr>
-                        <m:t>𝑡𝑟𝑎𝑣𝑒𝑙</m:t>
-                      </m:r>
-                      <m:r>
+                        <ns5:t>𝑡𝑟𝑎𝑣𝑒𝑙</ns5:t>
+                      </ns5:r>
+                      <ns5:r>
                         <a:rPr kumimoji="0" lang="en-US" sz="1800" b="0" i="1" u="none" strike="noStrike" kern="1200" cap="none" spc="0" normalizeH="0" baseline="0" noProof="0">
                           <a:ln>
                             <a:noFill/>
@@ -6995,9 +6995,9 @@
                           <a:ea typeface="Cambria Math" panose="02040503050406030204" pitchFamily="18" charset="0"/>
                           <a:cs typeface="+mn-cs"/>
                         </a:rPr>
-                        <m:t> </m:t>
-                      </m:r>
-                      <m:r>
+                        <ns5:t> </ns5:t>
+                      </ns5:r>
+                      <ns5:r>
                         <a:rPr kumimoji="0" lang="en-US" sz="1800" b="0" i="1" u="none" strike="noStrike" kern="1200" cap="none" spc="0" normalizeH="0" baseline="0" noProof="0" smtClean="0">
                           <a:ln>
                             <a:noFill/>
@@ -7012,9 +7012,9 @@
                           <a:ea typeface="Cambria Math" panose="02040503050406030204" pitchFamily="18" charset="0"/>
                           <a:cs typeface="+mn-cs"/>
                         </a:rPr>
-                        <m:t>𝑟𝑎𝑑𝑖𝑎𝑙𝑙𝑦</m:t>
-                      </m:r>
-                      <m:r>
+                        <ns5:t>𝑟𝑎𝑑𝑖𝑎𝑙𝑙𝑦</ns5:t>
+                      </ns5:r>
+                      <ns5:r>
                         <a:rPr kumimoji="0" lang="en-US" sz="1800" b="0" i="1" u="none" strike="noStrike" kern="1200" cap="none" spc="0" normalizeH="0" baseline="0" noProof="0" smtClean="0">
                           <a:ln>
                             <a:noFill/>
@@ -7029,9 +7029,9 @@
                           <a:ea typeface="Cambria Math" panose="02040503050406030204" pitchFamily="18" charset="0"/>
                           <a:cs typeface="+mn-cs"/>
                         </a:rPr>
-                        <m:t> </m:t>
-                      </m:r>
-                      <m:r>
+                        <ns5:t> </ns5:t>
+                      </ns5:r>
+                      <ns5:r>
                         <a:rPr kumimoji="0" lang="en-US" sz="1800" b="0" i="1" u="none" strike="noStrike" kern="1200" cap="none" spc="0" normalizeH="0" baseline="0" noProof="0" smtClean="0">
                           <a:ln>
                             <a:noFill/>
@@ -7046,9 +7046,9 @@
                           <a:ea typeface="Cambria Math" panose="02040503050406030204" pitchFamily="18" charset="0"/>
                           <a:cs typeface="+mn-cs"/>
                         </a:rPr>
-                        <m:t>𝑓𝑟𝑜𝑚</m:t>
-                      </m:r>
-                      <m:r>
+                        <ns5:t>𝑓𝑟𝑜𝑚</ns5:t>
+                      </ns5:r>
+                      <ns5:r>
                         <a:rPr kumimoji="0" lang="en-US" sz="1800" b="0" i="1" u="none" strike="noStrike" kern="1200" cap="none" spc="0" normalizeH="0" baseline="0" noProof="0" smtClean="0">
                           <a:ln>
                             <a:noFill/>
@@ -7063,9 +7063,9 @@
                           <a:ea typeface="Cambria Math" panose="02040503050406030204" pitchFamily="18" charset="0"/>
                           <a:cs typeface="+mn-cs"/>
                         </a:rPr>
-                        <m:t> </m:t>
-                      </m:r>
-                      <m:r>
+                        <ns5:t> </ns5:t>
+                      </ns5:r>
+                      <ns5:r>
                         <a:rPr kumimoji="0" lang="en-US" sz="1800" b="0" i="1" u="none" strike="noStrike" kern="1200" cap="none" spc="0" normalizeH="0" baseline="0" noProof="0" smtClean="0">
                           <a:ln>
                             <a:noFill/>
@@ -7080,9 +7080,9 @@
                           <a:ea typeface="Cambria Math" panose="02040503050406030204" pitchFamily="18" charset="0"/>
                           <a:cs typeface="+mn-cs"/>
                         </a:rPr>
-                        <m:t>𝑒𝑚𝑖𝑠𝑠𝑖𝑜𝑛</m:t>
-                      </m:r>
-                      <m:r>
+                        <ns5:t>𝑒𝑚𝑖𝑠𝑠𝑖𝑜𝑛</ns5:t>
+                      </ns5:r>
+                      <ns5:r>
                         <a:rPr kumimoji="0" lang="en-US" sz="1800" b="0" i="1" u="none" strike="noStrike" kern="1200" cap="none" spc="0" normalizeH="0" baseline="0" noProof="0" smtClean="0">
                           <a:ln>
                             <a:noFill/>
@@ -7097,9 +7097,9 @@
                           <a:ea typeface="Cambria Math" panose="02040503050406030204" pitchFamily="18" charset="0"/>
                           <a:cs typeface="+mn-cs"/>
                         </a:rPr>
-                        <m:t> </m:t>
-                      </m:r>
-                      <m:r>
+                        <ns5:t> </ns5:t>
+                      </ns5:r>
+                      <ns5:r>
                         <a:rPr kumimoji="0" lang="en-US" sz="1800" b="0" i="1" u="none" strike="noStrike" kern="1200" cap="none" spc="0" normalizeH="0" baseline="0" noProof="0">
                           <a:ln>
                             <a:noFill/>
@@ -7114,9 +7114,9 @@
                           <a:ea typeface="Cambria Math" panose="02040503050406030204" pitchFamily="18" charset="0"/>
                           <a:cs typeface="+mn-cs"/>
                         </a:rPr>
-                        <m:t>𝑎𝑡</m:t>
-                      </m:r>
-                      <m:r>
+                        <ns5:t>𝑎𝑡</ns5:t>
+                      </ns5:r>
+                      <ns5:r>
                         <a:rPr kumimoji="0" lang="en-US" sz="1800" b="0" i="1" u="none" strike="noStrike" kern="1200" cap="none" spc="0" normalizeH="0" baseline="0" noProof="0">
                           <a:ln>
                             <a:noFill/>
@@ -7131,9 +7131,9 @@
                           <a:ea typeface="Cambria Math" panose="02040503050406030204" pitchFamily="18" charset="0"/>
                           <a:cs typeface="+mn-cs"/>
                         </a:rPr>
-                        <m:t> </m:t>
-                      </m:r>
-                      <m:r>
+                        <ns5:t> </ns5:t>
+                      </ns5:r>
+                      <ns5:r>
                         <a:rPr kumimoji="0" lang="en-US" sz="1800" b="0" i="1" u="none" strike="noStrike" kern="1200" cap="none" spc="0" normalizeH="0" baseline="0" noProof="0" smtClean="0">
                           <a:ln>
                             <a:noFill/>
@@ -7148,9 +7148,9 @@
                           <a:ea typeface="Cambria Math" panose="02040503050406030204" pitchFamily="18" charset="0"/>
                           <a:cs typeface="+mn-cs"/>
                         </a:rPr>
-                        <m:t>𝑠𝑝𝑒𝑒𝑑</m:t>
-                      </m:r>
-                      <m:r>
+                        <ns5:t>𝑠𝑝𝑒𝑒𝑑</ns5:t>
+                      </ns5:r>
+                      <ns5:r>
                         <a:rPr kumimoji="0" lang="en-US" sz="1800" b="0" i="1" u="none" strike="noStrike" kern="1200" cap="none" spc="0" normalizeH="0" baseline="0" noProof="0" smtClean="0">
                           <a:ln>
                             <a:noFill/>
@@ -7165,9 +7165,9 @@
                           <a:ea typeface="Cambria Math" panose="02040503050406030204" pitchFamily="18" charset="0"/>
                           <a:cs typeface="+mn-cs"/>
                         </a:rPr>
-                        <m:t> </m:t>
-                      </m:r>
-                      <m:r>
+                        <ns5:t> </ns5:t>
+                      </ns5:r>
+                      <ns5:r>
                         <a:rPr kumimoji="0" lang="en-US" sz="1800" b="1" i="1" u="none" strike="noStrike" kern="1200" cap="none" spc="0" normalizeH="0" baseline="0" noProof="0">
                           <a:ln>
                             <a:noFill/>
@@ -7182,9 +7182,9 @@
                           <a:ea typeface="Cambria Math" panose="02040503050406030204" pitchFamily="18" charset="0"/>
                           <a:cs typeface="+mn-cs"/>
                         </a:rPr>
-                        <m:t>@</m:t>
-                      </m:r>
-                      <m:r>
+                        <ns5:t>@</ns5:t>
+                      </ns5:r>
+                      <ns5:r>
                         <a:rPr kumimoji="0" lang="en-US" sz="1800" b="0" i="1" u="none" strike="noStrike" kern="1200" cap="none" spc="0" normalizeH="0" baseline="0" noProof="0">
                           <a:ln>
                             <a:noFill/>
@@ -7199,11 +7199,11 @@
                           <a:ea typeface="Cambria Math" panose="02040503050406030204" pitchFamily="18" charset="0"/>
                           <a:cs typeface="+mn-cs"/>
                         </a:rPr>
-                        <m:t>.</m:t>
-                      </m:r>
-                    </m:oMath>
-                  </m:oMathPara>
-                </a14:m>
+                        <ns5:t>.</ns5:t>
+                      </ns5:r>
+                    </ns5:oMath>
+                  </ns5:oMathPara>
+                </ns4:m>
                 <a:endParaRPr kumimoji="0" lang="en-US" sz="1800" b="0" i="1" u="none" strike="noStrike" kern="1200" cap="none" spc="0" normalizeH="0" baseline="0" noProof="0" dirty="0">
                   <a:ln>
                     <a:noFill/>
@@ -7237,13 +7237,13 @@
                   <a:tabLst/>
                   <a:defRPr/>
                 </a:pPr>
-                <a14:m>
-                  <m:oMathPara xmlns:m="http://schemas.openxmlformats.org/officeDocument/2006/math">
-                    <m:oMathParaPr>
-                      <m:jc m:val="centerGroup"/>
-                    </m:oMathParaPr>
-                    <m:oMath xmlns:m="http://schemas.openxmlformats.org/officeDocument/2006/math">
-                      <m:r>
+                <ns4:m>
+                  <ns5:oMathPara>
+                    <ns5:oMathParaPr>
+                      <ns5:jc ns5:val="centerGroup"/>
+                    </ns5:oMathParaPr>
+                    <ns5:oMath>
+                      <ns5:r>
                         <a:rPr kumimoji="0" lang="en-US" sz="1800" b="0" i="1" u="none" strike="noStrike" kern="1200" cap="none" spc="0" normalizeH="0" baseline="0" noProof="0" smtClean="0">
                           <a:ln>
                             <a:noFill/>
@@ -7258,9 +7258,9 @@
                           <a:ea typeface="Cambria Math" panose="02040503050406030204" pitchFamily="18" charset="0"/>
                           <a:cs typeface="+mn-cs"/>
                         </a:rPr>
-                        <m:t>𝑃h𝑜𝑡𝑜𝑛</m:t>
-                      </m:r>
-                      <m:r>
+                        <ns5:t>𝑃h𝑜𝑡𝑜𝑛</ns5:t>
+                      </ns5:r>
+                      <ns5:r>
                         <a:rPr kumimoji="0" lang="en-US" sz="1800" b="0" i="1" u="none" strike="noStrike" kern="1200" cap="none" spc="0" normalizeH="0" baseline="0" noProof="0" smtClean="0">
                           <a:ln>
                             <a:noFill/>
@@ -7275,9 +7275,9 @@
                           <a:ea typeface="Cambria Math" panose="02040503050406030204" pitchFamily="18" charset="0"/>
                           <a:cs typeface="+mn-cs"/>
                         </a:rPr>
-                        <m:t> </m:t>
-                      </m:r>
-                      <m:r>
+                        <ns5:t> </ns5:t>
+                      </ns5:r>
+                      <ns5:r>
                         <a:rPr kumimoji="0" lang="en-US" sz="1800" b="0" i="1" u="none" strike="noStrike" kern="1200" cap="none" spc="0" normalizeH="0" baseline="0" noProof="0" smtClean="0">
                           <a:ln>
                             <a:noFill/>
@@ -7292,9 +7292,9 @@
                           <a:ea typeface="Cambria Math" panose="02040503050406030204" pitchFamily="18" charset="0"/>
                           <a:cs typeface="+mn-cs"/>
                         </a:rPr>
-                        <m:t>𝑠𝑡𝑟𝑢𝑐𝑡𝑢𝑟𝑒𝑠</m:t>
-                      </m:r>
-                      <m:r>
+                        <ns5:t>𝑠𝑡𝑟𝑢𝑐𝑡𝑢𝑟𝑒𝑠</ns5:t>
+                      </ns5:r>
+                      <ns5:r>
                         <a:rPr kumimoji="0" lang="en-US" sz="1800" b="0" i="1" u="none" strike="noStrike" kern="1200" cap="none" spc="0" normalizeH="0" baseline="0" noProof="0" smtClean="0">
                           <a:ln>
                             <a:noFill/>
@@ -7309,9 +7309,9 @@
                           <a:ea typeface="Cambria Math" panose="02040503050406030204" pitchFamily="18" charset="0"/>
                           <a:cs typeface="+mn-cs"/>
                         </a:rPr>
-                        <m:t> </m:t>
-                      </m:r>
-                      <m:r>
+                        <ns5:t> </ns5:t>
+                      </ns5:r>
+                      <ns5:r>
                         <a:rPr kumimoji="0" lang="en-US" sz="1800" b="0" i="1" u="none" strike="noStrike" kern="1200" cap="none" spc="0" normalizeH="0" baseline="0" noProof="0" smtClean="0">
                           <a:ln>
                             <a:noFill/>
@@ -7326,9 +7326,9 @@
                           <a:ea typeface="Cambria Math" panose="02040503050406030204" pitchFamily="18" charset="0"/>
                           <a:cs typeface="+mn-cs"/>
                         </a:rPr>
-                        <m:t>𝑡𝑟𝑎𝑣𝑒𝑙</m:t>
-                      </m:r>
-                      <m:r>
+                        <ns5:t>𝑡𝑟𝑎𝑣𝑒𝑙</ns5:t>
+                      </ns5:r>
+                      <ns5:r>
                         <a:rPr kumimoji="0" lang="en-US" sz="1800" b="0" i="1" u="none" strike="noStrike" kern="1200" cap="none" spc="0" normalizeH="0" baseline="0" noProof="0" smtClean="0">
                           <a:ln>
                             <a:noFill/>
@@ -7343,9 +7343,9 @@
                           <a:ea typeface="Cambria Math" panose="02040503050406030204" pitchFamily="18" charset="0"/>
                           <a:cs typeface="+mn-cs"/>
                         </a:rPr>
-                        <m:t> </m:t>
-                      </m:r>
-                      <m:r>
+                        <ns5:t> </ns5:t>
+                      </ns5:r>
+                      <ns5:r>
                         <a:rPr kumimoji="0" lang="en-US" sz="1800" b="0" i="1" u="none" strike="noStrike" kern="1200" cap="none" spc="0" normalizeH="0" baseline="0" noProof="0" smtClean="0">
                           <a:ln>
                             <a:noFill/>
@@ -7360,9 +7360,9 @@
                           <a:ea typeface="Cambria Math" panose="02040503050406030204" pitchFamily="18" charset="0"/>
                           <a:cs typeface="+mn-cs"/>
                         </a:rPr>
-                        <m:t>𝑎𝑡</m:t>
-                      </m:r>
-                      <m:r>
+                        <ns5:t>𝑎𝑡</ns5:t>
+                      </ns5:r>
+                      <ns5:r>
                         <a:rPr kumimoji="0" lang="en-US" sz="1800" b="0" i="1" u="none" strike="noStrike" kern="1200" cap="none" spc="0" normalizeH="0" baseline="0" noProof="0" smtClean="0">
                           <a:ln>
                             <a:noFill/>
@@ -7377,9 +7377,9 @@
                           <a:ea typeface="Cambria Math" panose="02040503050406030204" pitchFamily="18" charset="0"/>
                           <a:cs typeface="+mn-cs"/>
                         </a:rPr>
-                        <m:t> </m:t>
-                      </m:r>
-                      <m:r>
+                        <ns5:t> </ns5:t>
+                      </ns5:r>
+                      <ns5:r>
                         <a:rPr kumimoji="0" lang="en-US" sz="1800" b="0" i="1" u="none" strike="noStrike" kern="1200" cap="none" spc="0" normalizeH="0" baseline="0" noProof="0" smtClean="0">
                           <a:ln>
                             <a:noFill/>
@@ -7394,9 +7394,9 @@
                           <a:ea typeface="Cambria Math" panose="02040503050406030204" pitchFamily="18" charset="0"/>
                           <a:cs typeface="+mn-cs"/>
                         </a:rPr>
-                        <m:t>𝑐</m:t>
-                      </m:r>
-                      <m:r>
+                        <ns5:t>𝑐</ns5:t>
+                      </ns5:r>
+                      <ns5:r>
                         <a:rPr kumimoji="0" lang="en-US" sz="1800" b="0" i="1" u="none" strike="noStrike" kern="1200" cap="none" spc="0" normalizeH="0" baseline="0" noProof="0" smtClean="0">
                           <a:ln>
                             <a:noFill/>
@@ -7411,9 +7411,9 @@
                           <a:ea typeface="Cambria Math" panose="02040503050406030204" pitchFamily="18" charset="0"/>
                           <a:cs typeface="+mn-cs"/>
                         </a:rPr>
-                        <m:t>, </m:t>
-                      </m:r>
-                      <m:r>
+                        <ns5:t>, </ns5:t>
+                      </ns5:r>
+                      <ns5:r>
                         <a:rPr kumimoji="0" lang="en-US" sz="1800" b="0" i="1" u="none" strike="noStrike" kern="1200" cap="none" spc="0" normalizeH="0" baseline="0" noProof="0" smtClean="0">
                           <a:ln>
                             <a:noFill/>
@@ -7428,9 +7428,9 @@
                           <a:ea typeface="Cambria Math" panose="02040503050406030204" pitchFamily="18" charset="0"/>
                           <a:cs typeface="+mn-cs"/>
                         </a:rPr>
-                        <m:t>𝑡h𝑒</m:t>
-                      </m:r>
-                      <m:r>
+                        <ns5:t>𝑡h𝑒</ns5:t>
+                      </ns5:r>
+                      <ns5:r>
                         <a:rPr kumimoji="0" lang="en-US" sz="1800" b="0" i="1" u="none" strike="noStrike" kern="1200" cap="none" spc="0" normalizeH="0" baseline="0" noProof="0" smtClean="0">
                           <a:ln>
                             <a:noFill/>
@@ -7445,9 +7445,9 @@
                           <a:ea typeface="Cambria Math" panose="02040503050406030204" pitchFamily="18" charset="0"/>
                           <a:cs typeface="+mn-cs"/>
                         </a:rPr>
-                        <m:t> </m:t>
-                      </m:r>
-                      <m:r>
+                        <ns5:t> </ns5:t>
+                      </ns5:r>
+                      <ns5:r>
                         <a:rPr kumimoji="0" lang="en-US" sz="1800" b="1" i="1" u="none" strike="noStrike" kern="1200" cap="none" spc="0" normalizeH="0" baseline="0" noProof="0" smtClean="0">
                           <a:ln>
                             <a:noFill/>
@@ -7462,9 +7462,9 @@
                           <a:ea typeface="Cambria Math" panose="02040503050406030204" pitchFamily="18" charset="0"/>
                           <a:cs typeface="+mn-cs"/>
                         </a:rPr>
-                        <m:t>𝒍𝒐𝒄𝒂𝒍</m:t>
-                      </m:r>
-                      <m:r>
+                        <ns5:t>𝒍𝒐𝒄𝒂𝒍</ns5:t>
+                      </ns5:r>
+                      <ns5:r>
                         <a:rPr kumimoji="0" lang="en-US" sz="1800" b="0" i="1" u="none" strike="noStrike" kern="1200" cap="none" spc="0" normalizeH="0" baseline="0" noProof="0" smtClean="0">
                           <a:ln>
                             <a:noFill/>
@@ -7479,9 +7479,9 @@
                           <a:ea typeface="Cambria Math" panose="02040503050406030204" pitchFamily="18" charset="0"/>
                           <a:cs typeface="+mn-cs"/>
                         </a:rPr>
-                        <m:t> </m:t>
-                      </m:r>
-                      <m:r>
+                        <ns5:t> </ns5:t>
+                      </ns5:r>
+                      <ns5:r>
                         <a:rPr kumimoji="0" lang="en-US" sz="1800" b="0" i="1" u="none" strike="noStrike" kern="1200" cap="none" spc="0" normalizeH="0" baseline="0" noProof="0" smtClean="0">
                           <a:ln>
                             <a:noFill/>
@@ -7496,9 +7496,9 @@
                           <a:ea typeface="Cambria Math" panose="02040503050406030204" pitchFamily="18" charset="0"/>
                           <a:cs typeface="+mn-cs"/>
                         </a:rPr>
-                        <m:t>𝑠𝑝𝑒𝑒𝑑</m:t>
-                      </m:r>
-                      <m:r>
+                        <ns5:t>𝑠𝑝𝑒𝑒𝑑</ns5:t>
+                      </ns5:r>
+                      <ns5:r>
                         <a:rPr kumimoji="0" lang="en-US" sz="1800" b="0" i="1" u="none" strike="noStrike" kern="1200" cap="none" spc="0" normalizeH="0" baseline="0" noProof="0" smtClean="0">
                           <a:ln>
                             <a:noFill/>
@@ -7513,9 +7513,9 @@
                           <a:ea typeface="Cambria Math" panose="02040503050406030204" pitchFamily="18" charset="0"/>
                           <a:cs typeface="+mn-cs"/>
                         </a:rPr>
-                        <m:t> </m:t>
-                      </m:r>
-                      <m:r>
+                        <ns5:t> </ns5:t>
+                      </ns5:r>
+                      <ns5:r>
                         <a:rPr kumimoji="0" lang="en-US" sz="1800" b="0" i="1" u="none" strike="noStrike" kern="1200" cap="none" spc="0" normalizeH="0" baseline="0" noProof="0" smtClean="0">
                           <a:ln>
                             <a:noFill/>
@@ -7530,9 +7530,9 @@
                           <a:ea typeface="Cambria Math" panose="02040503050406030204" pitchFamily="18" charset="0"/>
                           <a:cs typeface="+mn-cs"/>
                         </a:rPr>
-                        <m:t>𝑜𝑓</m:t>
-                      </m:r>
-                      <m:r>
+                        <ns5:t>𝑜𝑓</ns5:t>
+                      </ns5:r>
+                      <ns5:r>
                         <a:rPr kumimoji="0" lang="en-US" sz="1800" b="0" i="1" u="none" strike="noStrike" kern="1200" cap="none" spc="0" normalizeH="0" baseline="0" noProof="0" smtClean="0">
                           <a:ln>
                             <a:noFill/>
@@ -7547,9 +7547,9 @@
                           <a:ea typeface="Cambria Math" panose="02040503050406030204" pitchFamily="18" charset="0"/>
                           <a:cs typeface="+mn-cs"/>
                         </a:rPr>
-                        <m:t> </m:t>
-                      </m:r>
-                      <m:r>
+                        <ns5:t> </ns5:t>
+                      </ns5:r>
+                      <ns5:r>
                         <a:rPr kumimoji="0" lang="en-US" sz="1800" b="0" i="1" u="none" strike="noStrike" kern="1200" cap="none" spc="0" normalizeH="0" baseline="0" noProof="0" smtClean="0">
                           <a:ln>
                             <a:noFill/>
@@ -7564,9 +7564,9 @@
                           <a:ea typeface="Cambria Math" panose="02040503050406030204" pitchFamily="18" charset="0"/>
                           <a:cs typeface="+mn-cs"/>
                         </a:rPr>
-                        <m:t>𝑙𝑖𝑔h𝑡</m:t>
-                      </m:r>
-                      <m:r>
+                        <ns5:t>𝑙𝑖𝑔h𝑡</ns5:t>
+                      </ns5:r>
+                      <ns5:r>
                         <a:rPr kumimoji="0" lang="en-US" sz="1800" b="0" i="1" u="none" strike="noStrike" kern="1200" cap="none" spc="0" normalizeH="0" baseline="0" noProof="0" smtClean="0">
                           <a:ln>
                             <a:noFill/>
@@ -7581,9 +7581,9 @@
                           <a:ea typeface="Cambria Math" panose="02040503050406030204" pitchFamily="18" charset="0"/>
                           <a:cs typeface="+mn-cs"/>
                         </a:rPr>
-                        <m:t> </m:t>
-                      </m:r>
-                      <m:r>
+                        <ns5:t> </ns5:t>
+                      </ns5:r>
+                      <ns5:r>
                         <a:rPr kumimoji="0" lang="en-US" sz="1800" b="0" i="1" u="none" strike="noStrike" kern="1200" cap="none" spc="0" normalizeH="0" baseline="0" noProof="0" smtClean="0">
                           <a:ln>
                             <a:noFill/>
@@ -7598,9 +7598,9 @@
                           <a:ea typeface="Cambria Math" panose="02040503050406030204" pitchFamily="18" charset="0"/>
                           <a:cs typeface="+mn-cs"/>
                         </a:rPr>
-                        <m:t>𝑡h𝑟𝑜𝑢𝑔h</m:t>
-                      </m:r>
-                      <m:r>
+                        <ns5:t>𝑡h𝑟𝑜𝑢𝑔h</ns5:t>
+                      </ns5:r>
+                      <ns5:r>
                         <a:rPr kumimoji="0" lang="en-US" sz="1800" b="0" i="1" u="none" strike="noStrike" kern="1200" cap="none" spc="0" normalizeH="0" baseline="0" noProof="0" smtClean="0">
                           <a:ln>
                             <a:noFill/>
@@ -7615,9 +7615,9 @@
                           <a:ea typeface="Cambria Math" panose="02040503050406030204" pitchFamily="18" charset="0"/>
                           <a:cs typeface="+mn-cs"/>
                         </a:rPr>
-                        <m:t> </m:t>
-                      </m:r>
-                      <m:r>
+                        <ns5:t> </ns5:t>
+                      </ns5:r>
+                      <ns5:r>
                         <a:rPr kumimoji="0" lang="en-US" sz="1800" b="0" i="1" u="none" strike="noStrike" kern="1200" cap="none" spc="0" normalizeH="0" baseline="0" noProof="0" smtClean="0">
                           <a:ln>
                             <a:noFill/>
@@ -7632,9 +7632,9 @@
                           <a:ea typeface="Cambria Math" panose="02040503050406030204" pitchFamily="18" charset="0"/>
                           <a:cs typeface="+mn-cs"/>
                         </a:rPr>
-                        <m:t>𝑡h𝑒</m:t>
-                      </m:r>
-                      <m:r>
+                        <ns5:t>𝑡h𝑒</ns5:t>
+                      </ns5:r>
+                      <ns5:r>
                         <a:rPr kumimoji="0" lang="en-US" sz="1800" b="0" i="1" u="none" strike="noStrike" kern="1200" cap="none" spc="0" normalizeH="0" baseline="0" noProof="0" smtClean="0">
                           <a:ln>
                             <a:noFill/>
@@ -7649,9 +7649,9 @@
                           <a:ea typeface="Cambria Math" panose="02040503050406030204" pitchFamily="18" charset="0"/>
                           <a:cs typeface="+mn-cs"/>
                         </a:rPr>
-                        <m:t> </m:t>
-                      </m:r>
-                      <m:r>
+                        <ns5:t> </ns5:t>
+                      </ns5:r>
+                      <ns5:r>
                         <a:rPr kumimoji="0" lang="en-US" sz="1800" b="0" i="1" u="none" strike="noStrike" kern="1200" cap="none" spc="0" normalizeH="0" baseline="0" noProof="0" smtClean="0">
                           <a:ln>
                             <a:noFill/>
@@ -7666,9 +7666,9 @@
                           <a:ea typeface="Cambria Math" panose="02040503050406030204" pitchFamily="18" charset="0"/>
                           <a:cs typeface="+mn-cs"/>
                         </a:rPr>
-                        <m:t>𝑎𝑒𝑡h𝑒𝑟</m:t>
-                      </m:r>
-                      <m:r>
+                        <ns5:t>𝑎𝑒𝑡h𝑒𝑟</ns5:t>
+                      </ns5:r>
+                      <ns5:r>
                         <a:rPr kumimoji="0" lang="en-US" sz="1800" b="0" i="1" u="none" strike="noStrike" kern="1200" cap="none" spc="0" normalizeH="0" baseline="0" noProof="0" smtClean="0">
                           <a:ln>
                             <a:noFill/>
@@ -7683,11 +7683,11 @@
                           <a:ea typeface="Cambria Math" panose="02040503050406030204" pitchFamily="18" charset="0"/>
                           <a:cs typeface="+mn-cs"/>
                         </a:rPr>
-                        <m:t>.</m:t>
-                      </m:r>
-                    </m:oMath>
-                  </m:oMathPara>
-                </a14:m>
+                        <ns5:t>.</ns5:t>
+                      </ns5:r>
+                    </ns5:oMath>
+                  </ns5:oMathPara>
+                </ns4:m>
                 <a:endParaRPr kumimoji="0" lang="en-US" sz="1800" b="0" i="1" u="none" strike="noStrike" kern="1200" cap="none" spc="0" normalizeH="0" baseline="0" noProof="0" dirty="0">
                   <a:ln>
                     <a:noFill/>
@@ -7721,13 +7721,13 @@
                   <a:tabLst/>
                   <a:defRPr/>
                 </a:pPr>
-                <a14:m>
-                  <m:oMathPara xmlns:m="http://schemas.openxmlformats.org/officeDocument/2006/math">
-                    <m:oMathParaPr>
-                      <m:jc m:val="centerGroup"/>
-                    </m:oMathParaPr>
-                    <m:oMath xmlns:m="http://schemas.openxmlformats.org/officeDocument/2006/math">
-                      <m:r>
+                <ns4:m>
+                  <ns5:oMathPara>
+                    <ns5:oMathParaPr>
+                      <ns5:jc ns5:val="centerGroup"/>
+                    </ns5:oMathParaPr>
+                    <ns5:oMath>
+                      <ns5:r>
                         <a:rPr kumimoji="0" lang="en-US" sz="1800" b="0" i="1" u="none" strike="noStrike" kern="1200" cap="none" spc="0" normalizeH="0" baseline="0" noProof="0" smtClean="0">
                           <a:ln>
                             <a:noFill/>
@@ -7742,9 +7742,9 @@
                           <a:ea typeface="Cambria Math" panose="02040503050406030204" pitchFamily="18" charset="0"/>
                           <a:cs typeface="+mn-cs"/>
                         </a:rPr>
-                        <m:t>𝐿𝑜𝑐𝑎𝑙</m:t>
-                      </m:r>
-                      <m:r>
+                        <ns5:t>𝐿𝑜𝑐𝑎𝑙</ns5:t>
+                      </ns5:r>
+                      <ns5:r>
                         <a:rPr kumimoji="0" lang="en-US" sz="1800" b="0" i="1" u="none" strike="noStrike" kern="1200" cap="none" spc="0" normalizeH="0" baseline="0" noProof="0" smtClean="0">
                           <a:ln>
                             <a:noFill/>
@@ -7759,9 +7759,9 @@
                           <a:ea typeface="Cambria Math" panose="02040503050406030204" pitchFamily="18" charset="0"/>
                           <a:cs typeface="+mn-cs"/>
                         </a:rPr>
-                        <m:t> </m:t>
-                      </m:r>
-                      <m:r>
+                        <ns5:t> </ns5:t>
+                      </ns5:r>
+                      <ns5:r>
                         <a:rPr kumimoji="0" lang="en-US" sz="1800" b="0" i="1" u="none" strike="noStrike" kern="1200" cap="none" spc="0" normalizeH="0" baseline="0" noProof="0" smtClean="0">
                           <a:ln>
                             <a:noFill/>
@@ -7776,9 +7776,9 @@
                           <a:ea typeface="Cambria Math" panose="02040503050406030204" pitchFamily="18" charset="0"/>
                           <a:cs typeface="+mn-cs"/>
                         </a:rPr>
-                        <m:t>𝑐</m:t>
-                      </m:r>
-                      <m:r>
+                        <ns5:t>𝑐</ns5:t>
+                      </ns5:r>
+                      <ns5:r>
                         <a:rPr kumimoji="0" lang="en-US" sz="1800" b="0" i="1" u="none" strike="noStrike" kern="1200" cap="none" spc="0" normalizeH="0" baseline="0" noProof="0" smtClean="0">
                           <a:ln>
                             <a:noFill/>
@@ -7793,9 +7793,9 @@
                           <a:ea typeface="Cambria Math" panose="02040503050406030204" pitchFamily="18" charset="0"/>
                           <a:cs typeface="+mn-cs"/>
                         </a:rPr>
-                        <m:t> </m:t>
-                      </m:r>
-                      <m:r>
+                        <ns5:t> </ns5:t>
+                      </ns5:r>
+                      <ns5:r>
                         <a:rPr kumimoji="0" lang="en-US" sz="1800" b="0" i="1" u="none" strike="noStrike" kern="1200" cap="none" spc="0" normalizeH="0" baseline="0" noProof="0" smtClean="0">
                           <a:ln>
                             <a:noFill/>
@@ -7810,9 +7810,9 @@
                           <a:ea typeface="Cambria Math" panose="02040503050406030204" pitchFamily="18" charset="0"/>
                           <a:cs typeface="+mn-cs"/>
                         </a:rPr>
-                        <m:t>𝑎𝑝𝑝𝑟𝑜𝑎𝑐h𝑒𝑠</m:t>
-                      </m:r>
-                      <m:r>
+                        <ns5:t>𝑎𝑝𝑝𝑟𝑜𝑎𝑐h𝑒𝑠</ns5:t>
+                      </ns5:r>
+                      <ns5:r>
                         <a:rPr kumimoji="0" lang="en-US" sz="1800" b="0" i="1" u="none" strike="noStrike" kern="1200" cap="none" spc="0" normalizeH="0" baseline="0" noProof="0" smtClean="0">
                           <a:ln>
                             <a:noFill/>
@@ -7827,9 +7827,9 @@
                           <a:ea typeface="Cambria Math" panose="02040503050406030204" pitchFamily="18" charset="0"/>
                           <a:cs typeface="+mn-cs"/>
                         </a:rPr>
-                        <m:t> </m:t>
-                      </m:r>
-                      <m:r>
+                        <ns5:t> </ns5:t>
+                      </ns5:r>
+                      <ns5:r>
                         <a:rPr kumimoji="0" lang="en-US" sz="1800" b="1" i="1" u="none" strike="noStrike" kern="1200" cap="none" spc="0" normalizeH="0" baseline="0" noProof="0" smtClean="0">
                           <a:ln>
                             <a:noFill/>
@@ -7844,9 +7844,9 @@
                           <a:ea typeface="Cambria Math" panose="02040503050406030204" pitchFamily="18" charset="0"/>
                           <a:cs typeface="+mn-cs"/>
                         </a:rPr>
-                        <m:t>@</m:t>
-                      </m:r>
-                      <m:r>
+                        <ns5:t>@</ns5:t>
+                      </ns5:r>
+                      <ns5:r>
                         <a:rPr kumimoji="0" lang="en-US" sz="1800" b="0" i="1" u="none" strike="noStrike" kern="1200" cap="none" spc="0" normalizeH="0" baseline="0" noProof="0" smtClean="0">
                           <a:ln>
                             <a:noFill/>
@@ -7861,9 +7861,9 @@
                           <a:ea typeface="Cambria Math" panose="02040503050406030204" pitchFamily="18" charset="0"/>
                           <a:cs typeface="+mn-cs"/>
                         </a:rPr>
-                        <m:t> </m:t>
-                      </m:r>
-                      <m:r>
+                        <ns5:t> </ns5:t>
+                      </ns5:r>
+                      <ns5:r>
                         <a:rPr kumimoji="0" lang="en-US" sz="1800" b="0" i="1" u="none" strike="noStrike" kern="1200" cap="none" spc="0" normalizeH="0" baseline="0" noProof="0" smtClean="0">
                           <a:ln>
                             <a:noFill/>
@@ -7878,11 +7878,11 @@
                           <a:ea typeface="Cambria Math" panose="02040503050406030204" pitchFamily="18" charset="0"/>
                           <a:cs typeface="+mn-cs"/>
                         </a:rPr>
-                        <m:t>𝑎𝑠</m:t>
-                      </m:r>
-                      <m:sSub>
-                        <m:sSubPr>
-                          <m:ctrlPr>
+                        <ns5:t>𝑎𝑠</ns5:t>
+                      </ns5:r>
+                      <ns5:sSub>
+                        <ns5:sSubPr>
+                          <ns5:ctrlPr>
                             <a:rPr kumimoji="0" lang="en-US" sz="1800" b="0" i="1" u="none" strike="noStrike" kern="1200" cap="none" spc="0" normalizeH="0" baseline="0" noProof="0">
                               <a:ln>
                                 <a:noFill/>
@@ -7897,10 +7897,10 @@
                               <a:ea typeface="Cambria Math" panose="02040503050406030204" pitchFamily="18" charset="0"/>
                               <a:cs typeface="+mn-cs"/>
                             </a:rPr>
-                          </m:ctrlPr>
-                        </m:sSubPr>
-                        <m:e>
-                          <m:r>
+                          </ns5:ctrlPr>
+                        </ns5:sSubPr>
+                        <ns5:e>
+                          <ns5:r>
                             <a:rPr kumimoji="0" lang="en-US" sz="1800" b="0" i="1" u="none" strike="noStrike" kern="1200" cap="none" spc="0" normalizeH="0" baseline="0" noProof="0" smtClean="0">
                               <a:ln>
                                 <a:noFill/>
@@ -7915,9 +7915,9 @@
                               <a:ea typeface="Cambria Math" panose="02040503050406030204" pitchFamily="18" charset="0"/>
                               <a:cs typeface="+mn-cs"/>
                             </a:rPr>
-                            <m:t> </m:t>
-                          </m:r>
-                          <m:r>
+                            <ns5:t> </ns5:t>
+                          </ns5:r>
+                          <ns5:r>
                             <a:rPr kumimoji="0" lang="en-US" sz="1800" b="0" i="1" u="none" strike="noStrike" kern="1200" cap="none" spc="0" normalizeH="0" baseline="0" noProof="0">
                               <a:ln>
                                 <a:noFill/>
@@ -7932,11 +7932,11 @@
                               <a:ea typeface="Cambria Math" panose="02040503050406030204" pitchFamily="18" charset="0"/>
                               <a:cs typeface="+mn-cs"/>
                             </a:rPr>
-                            <m:t>𝐸𝑛𝑒𝑟𝑔𝑦</m:t>
-                          </m:r>
-                        </m:e>
-                        <m:sub>
-                          <m:r>
+                            <ns5:t>𝐸𝑛𝑒𝑟𝑔𝑦</ns5:t>
+                          </ns5:r>
+                        </ns5:e>
+                        <ns5:sub>
+                          <ns5:r>
                             <a:rPr kumimoji="0" lang="en-US" sz="1800" b="0" i="1" u="none" strike="noStrike" kern="1200" cap="none" spc="0" normalizeH="0" baseline="0" noProof="0">
                               <a:ln>
                                 <a:noFill/>
@@ -7951,11 +7951,11 @@
                               <a:ea typeface="Cambria Math" panose="02040503050406030204" pitchFamily="18" charset="0"/>
                               <a:cs typeface="+mn-cs"/>
                             </a:rPr>
-                            <m:t>𝐴𝑃𝑃𝐴𝑅𝐸𝑁𝑇</m:t>
-                          </m:r>
-                        </m:sub>
-                      </m:sSub>
-                      <m:r>
+                            <ns5:t>𝐴𝑃𝑃𝐴𝑅𝐸𝑁𝑇</ns5:t>
+                          </ns5:r>
+                        </ns5:sub>
+                      </ns5:sSub>
+                      <ns5:r>
                         <a:rPr kumimoji="0" lang="en-US" sz="1800" b="0" i="1" u="none" strike="noStrike" kern="1200" cap="none" spc="0" normalizeH="0" baseline="0" noProof="0" smtClean="0">
                           <a:ln>
                             <a:noFill/>
@@ -7970,9 +7970,9 @@
                           <a:ea typeface="Cambria Math" panose="02040503050406030204" pitchFamily="18" charset="0"/>
                           <a:cs typeface="+mn-cs"/>
                         </a:rPr>
-                        <m:t> </m:t>
-                      </m:r>
-                      <m:r>
+                        <ns5:t> </ns5:t>
+                      </ns5:r>
+                      <ns5:r>
                         <a:rPr kumimoji="0" lang="en-US" sz="1800" b="0" i="1" u="none" strike="noStrike" kern="1200" cap="none" spc="0" normalizeH="0" baseline="0" noProof="0" smtClean="0">
                           <a:ln>
                             <a:noFill/>
@@ -7987,9 +7987,9 @@
                           <a:ea typeface="Cambria Math" panose="02040503050406030204" pitchFamily="18" charset="0"/>
                           <a:cs typeface="+mn-cs"/>
                         </a:rPr>
-                        <m:t>𝑜𝑓</m:t>
-                      </m:r>
-                      <m:r>
+                        <ns5:t>𝑜𝑓</ns5:t>
+                      </ns5:r>
+                      <ns5:r>
                         <a:rPr kumimoji="0" lang="en-US" sz="1800" b="0" i="1" u="none" strike="noStrike" kern="1200" cap="none" spc="0" normalizeH="0" baseline="0" noProof="0" smtClean="0">
                           <a:ln>
                             <a:noFill/>
@@ -8004,9 +8004,9 @@
                           <a:ea typeface="Cambria Math" panose="02040503050406030204" pitchFamily="18" charset="0"/>
                           <a:cs typeface="+mn-cs"/>
                         </a:rPr>
-                        <m:t> </m:t>
-                      </m:r>
-                      <m:r>
+                        <ns5:t> </ns5:t>
+                      </ns5:r>
+                      <ns5:r>
                         <a:rPr kumimoji="0" lang="en-US" sz="1800" b="0" i="1" u="none" strike="noStrike" kern="1200" cap="none" spc="0" normalizeH="0" baseline="0" noProof="0" smtClean="0">
                           <a:ln>
                             <a:noFill/>
@@ -8021,9 +8021,9 @@
                           <a:ea typeface="Cambria Math" panose="02040503050406030204" pitchFamily="18" charset="0"/>
                           <a:cs typeface="+mn-cs"/>
                         </a:rPr>
-                        <m:t>𝑡h𝑒</m:t>
-                      </m:r>
-                      <m:r>
+                        <ns5:t>𝑡h𝑒</ns5:t>
+                      </ns5:r>
+                      <ns5:r>
                         <a:rPr kumimoji="0" lang="en-US" sz="1800" b="0" i="1" u="none" strike="noStrike" kern="1200" cap="none" spc="0" normalizeH="0" baseline="0" noProof="0" smtClean="0">
                           <a:ln>
                             <a:noFill/>
@@ -8038,9 +8038,9 @@
                           <a:ea typeface="Cambria Math" panose="02040503050406030204" pitchFamily="18" charset="0"/>
                           <a:cs typeface="+mn-cs"/>
                         </a:rPr>
-                        <m:t> </m:t>
-                      </m:r>
-                      <m:r>
+                        <ns5:t> </ns5:t>
+                      </ns5:r>
+                      <ns5:r>
                         <a:rPr kumimoji="0" lang="en-US" sz="1800" b="0" i="1" u="none" strike="noStrike" kern="1200" cap="none" spc="0" normalizeH="0" baseline="0" noProof="0" smtClean="0">
                           <a:ln>
                             <a:noFill/>
@@ -8055,9 +8055,9 @@
                           <a:ea typeface="Cambria Math" panose="02040503050406030204" pitchFamily="18" charset="0"/>
                           <a:cs typeface="+mn-cs"/>
                         </a:rPr>
-                        <m:t>𝑎𝑒𝑡h𝑒𝑟</m:t>
-                      </m:r>
-                      <m:r>
+                        <ns5:t>𝑎𝑒𝑡h𝑒𝑟</ns5:t>
+                      </ns5:r>
+                      <ns5:r>
                         <a:rPr kumimoji="0" lang="en-US" sz="1800" b="0" i="1" u="none" strike="noStrike" kern="1200" cap="none" spc="0" normalizeH="0" baseline="0" noProof="0" smtClean="0">
                           <a:ln>
                             <a:noFill/>
@@ -8072,9 +8072,9 @@
                           <a:ea typeface="Cambria Math" panose="02040503050406030204" pitchFamily="18" charset="0"/>
                           <a:cs typeface="+mn-cs"/>
                         </a:rPr>
-                        <m:t> </m:t>
-                      </m:r>
-                      <m:r>
+                        <ns5:t> </ns5:t>
+                      </ns5:r>
+                      <ns5:r>
                         <a:rPr kumimoji="0" lang="en-US" sz="1800" b="0" i="1" u="none" strike="noStrike" kern="1200" cap="none" spc="0" normalizeH="0" baseline="0" noProof="0" smtClean="0">
                           <a:ln>
                             <a:noFill/>
@@ -8089,9 +8089,9 @@
                           <a:ea typeface="Cambria Math" panose="02040503050406030204" pitchFamily="18" charset="0"/>
                           <a:cs typeface="+mn-cs"/>
                         </a:rPr>
-                        <m:t>𝑎𝑝𝑝𝑟𝑜𝑎𝑐h𝑒𝑠</m:t>
-                      </m:r>
-                      <m:r>
+                        <ns5:t>𝑎𝑝𝑝𝑟𝑜𝑎𝑐h𝑒𝑠</ns5:t>
+                      </ns5:r>
+                      <ns5:r>
                         <a:rPr kumimoji="0" lang="en-US" sz="1800" b="0" i="1" u="none" strike="noStrike" kern="1200" cap="none" spc="0" normalizeH="0" baseline="0" noProof="0" smtClean="0">
                           <a:ln>
                             <a:noFill/>
@@ -8106,9 +8106,9 @@
                           <a:ea typeface="Cambria Math" panose="02040503050406030204" pitchFamily="18" charset="0"/>
                           <a:cs typeface="+mn-cs"/>
                         </a:rPr>
-                        <m:t> </m:t>
-                      </m:r>
-                      <m:r>
+                        <ns5:t> </ns5:t>
+                      </ns5:r>
+                      <ns5:r>
                         <a:rPr kumimoji="0" lang="en-US" sz="1800" b="0" i="1" u="none" strike="noStrike" kern="1200" cap="none" spc="0" normalizeH="0" baseline="0" noProof="0" smtClean="0">
                           <a:ln>
                             <a:noFill/>
@@ -8123,9 +8123,9 @@
                           <a:ea typeface="Cambria Math" panose="02040503050406030204" pitchFamily="18" charset="0"/>
                           <a:cs typeface="+mn-cs"/>
                         </a:rPr>
-                        <m:t>𝑧𝑒𝑟𝑜</m:t>
-                      </m:r>
-                      <m:r>
+                        <ns5:t>𝑧𝑒𝑟𝑜</ns5:t>
+                      </ns5:r>
+                      <ns5:r>
                         <a:rPr kumimoji="0" lang="en-US" sz="1800" b="0" i="1" u="none" strike="noStrike" kern="1200" cap="none" spc="0" normalizeH="0" baseline="0" noProof="0" smtClean="0">
                           <a:ln>
                             <a:noFill/>
@@ -8140,11 +8140,11 @@
                           <a:ea typeface="Cambria Math" panose="02040503050406030204" pitchFamily="18" charset="0"/>
                           <a:cs typeface="+mn-cs"/>
                         </a:rPr>
-                        <m:t>.</m:t>
-                      </m:r>
-                    </m:oMath>
-                  </m:oMathPara>
-                </a14:m>
+                        <ns5:t>.</ns5:t>
+                      </ns5:r>
+                    </ns5:oMath>
+                  </ns5:oMathPara>
+                </ns4:m>
                 <a:endParaRPr kumimoji="0" lang="en-US" sz="1800" b="0" i="1" u="none" strike="noStrike" kern="1200" cap="none" spc="0" normalizeH="0" baseline="0" noProof="0" dirty="0">
                   <a:ln>
                     <a:noFill/>
@@ -8178,13 +8178,13 @@
                   <a:tabLst/>
                   <a:defRPr/>
                 </a:pPr>
-                <a14:m>
-                  <m:oMathPara xmlns:m="http://schemas.openxmlformats.org/officeDocument/2006/math">
-                    <m:oMathParaPr>
-                      <m:jc m:val="centerGroup"/>
-                    </m:oMathParaPr>
-                    <m:oMath xmlns:m="http://schemas.openxmlformats.org/officeDocument/2006/math">
-                      <m:r>
+                <ns4:m>
+                  <ns5:oMathPara>
+                    <ns5:oMathParaPr>
+                      <ns5:jc ns5:val="centerGroup"/>
+                    </ns5:oMathParaPr>
+                    <ns5:oMath>
+                      <ns5:r>
                         <a:rPr kumimoji="0" lang="en-US" sz="1800" b="0" i="1" u="none" strike="noStrike" kern="1200" cap="none" spc="0" normalizeH="0" baseline="0" noProof="0" smtClean="0">
                           <a:ln>
                             <a:noFill/>
@@ -8199,11 +8199,11 @@
                           <a:ea typeface="Cambria Math" panose="02040503050406030204" pitchFamily="18" charset="0"/>
                           <a:cs typeface="+mn-cs"/>
                         </a:rPr>
-                        <m:t> </m:t>
-                      </m:r>
-                    </m:oMath>
-                  </m:oMathPara>
-                </a14:m>
+                        <ns5:t> </ns5:t>
+                      </ns5:r>
+                    </ns5:oMath>
+                  </ns5:oMathPara>
+                </ns4:m>
                 <a:endParaRPr kumimoji="0" lang="en-US" sz="1800" b="0" i="0" u="none" strike="noStrike" kern="1200" cap="none" spc="0" normalizeH="0" baseline="0" noProof="0" dirty="0">
                   <a:ln>
                     <a:noFill/>
@@ -8221,14 +8221,14 @@
               </a:p>
             </p:txBody>
           </p:sp>
-        </mc:Choice>
-        <mc:Fallback xmlns="">
+        </ns2:Choice>
+        <ns2:Fallback>
           <p:sp>
             <p:nvSpPr>
               <p:cNvPr id="22" name="TextBox 21">
                 <a:extLst>
                   <a:ext uri="{FF2B5EF4-FFF2-40B4-BE49-F238E27FC236}">
-                    <a16:creationId xmlns:a16="http://schemas.microsoft.com/office/drawing/2014/main" id="{2F270859-FECE-2645-A10D-F6319FAE5B09}"/>
+                    <a16:creationId id="{2F270859-FECE-2645-A10D-F6319FAE5B09}"/>
                   </a:ext>
                 </a:extLst>
               </p:cNvPr>
@@ -8265,14 +8265,14 @@
               </a:p>
             </p:txBody>
           </p:sp>
-        </mc:Fallback>
-      </mc:AlternateContent>
+        </ns2:Fallback>
+      </ns2:AlternateContent>
       <p:sp>
         <p:nvSpPr>
           <p:cNvPr id="12" name="Footer Placeholder 3">
             <a:extLst>
               <a:ext uri="{FF2B5EF4-FFF2-40B4-BE49-F238E27FC236}">
-                <a16:creationId xmlns:a16="http://schemas.microsoft.com/office/drawing/2014/main" id="{3FE47B7C-83DE-044A-9B6F-FADD034B7A1A}"/>
+                <a16:creationId id="{3FE47B7C-83DE-044A-9B6F-FADD034B7A1A}"/>
               </a:ext>
             </a:extLst>
           </p:cNvPr>
@@ -8429,10 +8429,166 @@
           </a:p>
         </p:txBody>
       </p:sp>
+      <p:sp>
+        <p:nvSpPr>
+          <p:cNvPr id="3" name="Footer Placeholder 3"/>
+          <p:cNvSpPr txBox="1">
+            <a:spLocks/>
+          </p:cNvSpPr>
+          <p:nvPr/>
+        </p:nvSpPr>
+        <p:spPr>
+          <a:xfrm>
+            <a:off x="10942204" y="6481737"/>
+            <a:ext cx="1217443" cy="365125"/>
+          </a:xfrm>
+          <a:prstGeom prst="rect">
+            <a:avLst/>
+          </a:prstGeom>
+        </p:spPr>
+        <p:txBody>
+          <a:bodyPr vert="horz" lIns="91440" tIns="45720" rIns="91440" bIns="45720" rtlCol="0" anchor="ctr"/>
+          <a:lstStyle>
+            <a:defPPr>
+              <a:defRPr lang="en-US"/>
+            </a:defPPr>
+            <a:lvl1pPr marL="0" algn="ctr" defTabSz="914400" rtl="0" eaLnBrk="1" latinLnBrk="0" hangingPunct="1">
+              <a:defRPr sz="1200" kern="1200">
+                <a:solidFill>
+                  <a:schemeClr val="tx1">
+                    <a:tint val="75000"/>
+                  </a:schemeClr>
+                </a:solidFill>
+                <a:latin typeface="+mn-lt"/>
+                <a:ea typeface="+mn-ea"/>
+                <a:cs typeface="+mn-cs"/>
+              </a:defRPr>
+            </a:lvl1pPr>
+            <a:lvl2pPr marL="457200" algn="l" defTabSz="914400" rtl="0" eaLnBrk="1" latinLnBrk="0" hangingPunct="1">
+              <a:defRPr sz="1800" kern="1200">
+                <a:solidFill>
+                  <a:schemeClr val="tx1"/>
+                </a:solidFill>
+                <a:latin typeface="+mn-lt"/>
+                <a:ea typeface="+mn-ea"/>
+                <a:cs typeface="+mn-cs"/>
+              </a:defRPr>
+            </a:lvl2pPr>
+            <a:lvl3pPr marL="914400" algn="l" defTabSz="914400" rtl="0" eaLnBrk="1" latinLnBrk="0" hangingPunct="1">
+              <a:defRPr sz="1800" kern="1200">
+                <a:solidFill>
+                  <a:schemeClr val="tx1"/>
+                </a:solidFill>
+                <a:latin typeface="+mn-lt"/>
+                <a:ea typeface="+mn-ea"/>
+                <a:cs typeface="+mn-cs"/>
+              </a:defRPr>
+            </a:lvl3pPr>
+            <a:lvl4pPr marL="1371600" algn="l" defTabSz="914400" rtl="0" eaLnBrk="1" latinLnBrk="0" hangingPunct="1">
+              <a:defRPr sz="1800" kern="1200">
+                <a:solidFill>
+                  <a:schemeClr val="tx1"/>
+                </a:solidFill>
+                <a:latin typeface="+mn-lt"/>
+                <a:ea typeface="+mn-ea"/>
+                <a:cs typeface="+mn-cs"/>
+              </a:defRPr>
+            </a:lvl4pPr>
+            <a:lvl5pPr marL="1828800" algn="l" defTabSz="914400" rtl="0" eaLnBrk="1" latinLnBrk="0" hangingPunct="1">
+              <a:defRPr sz="1800" kern="1200">
+                <a:solidFill>
+                  <a:schemeClr val="tx1"/>
+                </a:solidFill>
+                <a:latin typeface="+mn-lt"/>
+                <a:ea typeface="+mn-ea"/>
+                <a:cs typeface="+mn-cs"/>
+              </a:defRPr>
+            </a:lvl5pPr>
+            <a:lvl6pPr marL="2286000" algn="l" defTabSz="914400" rtl="0" eaLnBrk="1" latinLnBrk="0" hangingPunct="1">
+              <a:defRPr sz="1800" kern="1200">
+                <a:solidFill>
+                  <a:schemeClr val="tx1"/>
+                </a:solidFill>
+                <a:latin typeface="+mn-lt"/>
+                <a:ea typeface="+mn-ea"/>
+                <a:cs typeface="+mn-cs"/>
+              </a:defRPr>
+            </a:lvl6pPr>
+            <a:lvl7pPr marL="2743200" algn="l" defTabSz="914400" rtl="0" eaLnBrk="1" latinLnBrk="0" hangingPunct="1">
+              <a:defRPr sz="1800" kern="1200">
+                <a:solidFill>
+                  <a:schemeClr val="tx1"/>
+                </a:solidFill>
+                <a:latin typeface="+mn-lt"/>
+                <a:ea typeface="+mn-ea"/>
+                <a:cs typeface="+mn-cs"/>
+              </a:defRPr>
+            </a:lvl7pPr>
+            <a:lvl8pPr marL="3200400" algn="l" defTabSz="914400" rtl="0" eaLnBrk="1" latinLnBrk="0" hangingPunct="1">
+              <a:defRPr sz="1800" kern="1200">
+                <a:solidFill>
+                  <a:schemeClr val="tx1"/>
+                </a:solidFill>
+                <a:latin typeface="+mn-lt"/>
+                <a:ea typeface="+mn-ea"/>
+                <a:cs typeface="+mn-cs"/>
+              </a:defRPr>
+            </a:lvl8pPr>
+            <a:lvl9pPr marL="3657600" algn="l" defTabSz="914400" rtl="0" eaLnBrk="1" latinLnBrk="0" hangingPunct="1">
+              <a:defRPr sz="1800" kern="1200">
+                <a:solidFill>
+                  <a:schemeClr val="tx1"/>
+                </a:solidFill>
+                <a:latin typeface="+mn-lt"/>
+                <a:ea typeface="+mn-ea"/>
+                <a:cs typeface="+mn-cs"/>
+              </a:defRPr>
+            </a:lvl9pPr>
+          </a:lstStyle>
+          <a:p>
+            <a:pPr marL="0" marR="0" lvl="0" indent="0" algn="ctr" defTabSz="914400" rtl="0" eaLnBrk="1" fontAlgn="auto" latinLnBrk="0" hangingPunct="1">
+              <a:lnSpc>
+                <a:spcPct val="100000"/>
+              </a:lnSpc>
+              <a:spcBef>
+                <a:spcPts val="0"/>
+              </a:spcBef>
+              <a:spcAft>
+                <a:spcPts val="0"/>
+              </a:spcAft>
+              <a:buClrTx/>
+              <a:buSzTx/>
+              <a:buFontTx/>
+              <a:buNone/>
+              <a:tabLst/>
+              <a:defRPr/>
+            </a:pPr>
+            <a:r>
+              <a:rPr kumimoji="0" lang="en-US" sz="1200" b="0" i="0" u="none" strike="noStrike" kern="1200" cap="none" spc="0" normalizeH="0" baseline="0" noProof="0" dirty="0">
+                <a:ln>
+                  <a:noFill/>
+                </a:ln>
+                <a:solidFill>
+                  <a:prstClr val="black">
+                    <a:tint val="75000"/>
+                  </a:prstClr>
+                </a:solidFill>
+                <a:effectLst/>
+                <a:uLnTx/>
+                <a:uFillTx/>
+                <a:latin typeface="Helvetica Neue" panose="02000503000000020004" pitchFamily="2" charset="0"/>
+                <a:ea typeface="Helvetica Neue" panose="02000503000000020004" pitchFamily="2" charset="0"/>
+                <a:cs typeface="Helvetica Neue" panose="02000503000000020004" pitchFamily="2" charset="0"/>
+              </a:rPr>
+              <a:t>architrino.com</a:t>
+            </a:r>
+          </a:p>
+        </p:txBody>
+      </p:sp>
     </p:spTree>
     <p:extLst>
       <p:ext uri="{BB962C8B-B14F-4D97-AF65-F5344CB8AC3E}">
-        <p14:creationId xmlns:p14="http://schemas.microsoft.com/office/powerpoint/2010/main" val="3268287473"/>
+        <ns7:creationId val="3268287473"/>
       </p:ext>
     </p:extLst>
   </p:cSld>
@@ -8443,7 +8599,7 @@
 </file>
 
 <file path=ppt/slides/slide2.xml><?xml version="1.0" encoding="utf-8"?>
-<p:sld xmlns:a="http://schemas.openxmlformats.org/drawingml/2006/main" xmlns:r="http://schemas.openxmlformats.org/officeDocument/2006/relationships" xmlns:p="http://schemas.openxmlformats.org/presentationml/2006/main">
+<p:sld xmlns:a="http://schemas.openxmlformats.org/drawingml/2006/main" xmlns:a16="http://schemas.microsoft.com/office/drawing/2014/main" xmlns:ns4="http://schemas.microsoft.com/office/powerpoint/2010/main" xmlns:p="http://schemas.openxmlformats.org/presentationml/2006/main" xmlns:r="http://schemas.openxmlformats.org/officeDocument/2006/relationships">
   <p:cSld>
     <p:bg>
       <p:bgPr>
@@ -8458,7 +8614,7 @@
         <p:cNvPr id="1" name="">
           <a:extLst>
             <a:ext uri="{FF2B5EF4-FFF2-40B4-BE49-F238E27FC236}">
-              <a16:creationId xmlns:a16="http://schemas.microsoft.com/office/drawing/2014/main" id="{8FB6C664-DA1B-F62F-45ED-4FE37C051139}"/>
+              <a16:creationId id="{8FB6C664-DA1B-F62F-45ED-4FE37C051139}"/>
             </a:ext>
           </a:extLst>
         </p:cNvPr>
@@ -8478,7 +8634,7 @@
           <p:cNvPr id="5" name="Footer Placeholder 3">
             <a:extLst>
               <a:ext uri="{FF2B5EF4-FFF2-40B4-BE49-F238E27FC236}">
-                <a16:creationId xmlns:a16="http://schemas.microsoft.com/office/drawing/2014/main" id="{F209704C-664D-2F6D-EF83-DE4BC64E5FEE}"/>
+                <a16:creationId id="{F209704C-664D-2F6D-EF83-DE4BC64E5FEE}"/>
               </a:ext>
             </a:extLst>
           </p:cNvPr>
@@ -8640,7 +8796,7 @@
           <p:cNvPr id="2" name="TextBox 1">
             <a:extLst>
               <a:ext uri="{FF2B5EF4-FFF2-40B4-BE49-F238E27FC236}">
-                <a16:creationId xmlns:a16="http://schemas.microsoft.com/office/drawing/2014/main" id="{E4F2D21E-2DBB-57C9-E71C-4622E984F2C5}"/>
+                <a16:creationId id="{E4F2D21E-2DBB-57C9-E71C-4622E984F2C5}"/>
               </a:ext>
             </a:extLst>
           </p:cNvPr>
@@ -8807,7 +8963,7 @@
                 <a:ea typeface="Helvetica Neue" panose="02000503000000020004" pitchFamily="2" charset="0"/>
                 <a:cs typeface="Helvetica Neue" panose="02000503000000020004" pitchFamily="2" charset="0"/>
               </a:rPr>
-              <a:t>mm: We don’t have possible outcomes in neoclassical theory</a:t>
+              <a:t>mm: We don’t have possible outcomes in AAA theory</a:t>
             </a:r>
             <a:endParaRPr kumimoji="0" lang="en-US" b="0" i="0" u="none" strike="noStrike" kern="1200" cap="none" spc="0" normalizeH="0" baseline="0" noProof="0" dirty="0">
               <a:ln>
@@ -8864,7 +9020,7 @@
           <p:cNvPr id="8" name="TextBox 7">
             <a:extLst>
               <a:ext uri="{FF2B5EF4-FFF2-40B4-BE49-F238E27FC236}">
-                <a16:creationId xmlns:a16="http://schemas.microsoft.com/office/drawing/2014/main" id="{0DCD5B8F-8323-AED9-632D-6EAD4C78699F}"/>
+                <a16:creationId id="{0DCD5B8F-8323-AED9-632D-6EAD4C78699F}"/>
               </a:ext>
             </a:extLst>
           </p:cNvPr>
@@ -8923,7 +9079,7 @@
           <p:cNvPr id="3" name="Picture 2">
             <a:extLst>
               <a:ext uri="{FF2B5EF4-FFF2-40B4-BE49-F238E27FC236}">
-                <a16:creationId xmlns:a16="http://schemas.microsoft.com/office/drawing/2014/main" id="{8E4FE5CE-B828-3159-94EF-4EB2E134945D}"/>
+                <a16:creationId id="{8E4FE5CE-B828-3159-94EF-4EB2E134945D}"/>
               </a:ext>
             </a:extLst>
           </p:cNvPr>
@@ -8948,10 +9104,166 @@
           </a:prstGeom>
         </p:spPr>
       </p:pic>
+      <p:sp>
+        <p:nvSpPr>
+          <p:cNvPr id="9" name="Footer Placeholder 3"/>
+          <p:cNvSpPr txBox="1">
+            <a:spLocks/>
+          </p:cNvSpPr>
+          <p:nvPr/>
+        </p:nvSpPr>
+        <p:spPr>
+          <a:xfrm>
+            <a:off x="10942204" y="6481737"/>
+            <a:ext cx="1217443" cy="365125"/>
+          </a:xfrm>
+          <a:prstGeom prst="rect">
+            <a:avLst/>
+          </a:prstGeom>
+        </p:spPr>
+        <p:txBody>
+          <a:bodyPr vert="horz" lIns="91440" tIns="45720" rIns="91440" bIns="45720" rtlCol="0" anchor="ctr"/>
+          <a:lstStyle>
+            <a:defPPr>
+              <a:defRPr lang="en-US"/>
+            </a:defPPr>
+            <a:lvl1pPr marL="0" algn="ctr" defTabSz="914400" rtl="0" eaLnBrk="1" latinLnBrk="0" hangingPunct="1">
+              <a:defRPr sz="1200" kern="1200">
+                <a:solidFill>
+                  <a:schemeClr val="tx1">
+                    <a:tint val="75000"/>
+                  </a:schemeClr>
+                </a:solidFill>
+                <a:latin typeface="+mn-lt"/>
+                <a:ea typeface="+mn-ea"/>
+                <a:cs typeface="+mn-cs"/>
+              </a:defRPr>
+            </a:lvl1pPr>
+            <a:lvl2pPr marL="457200" algn="l" defTabSz="914400" rtl="0" eaLnBrk="1" latinLnBrk="0" hangingPunct="1">
+              <a:defRPr sz="1800" kern="1200">
+                <a:solidFill>
+                  <a:schemeClr val="tx1"/>
+                </a:solidFill>
+                <a:latin typeface="+mn-lt"/>
+                <a:ea typeface="+mn-ea"/>
+                <a:cs typeface="+mn-cs"/>
+              </a:defRPr>
+            </a:lvl2pPr>
+            <a:lvl3pPr marL="914400" algn="l" defTabSz="914400" rtl="0" eaLnBrk="1" latinLnBrk="0" hangingPunct="1">
+              <a:defRPr sz="1800" kern="1200">
+                <a:solidFill>
+                  <a:schemeClr val="tx1"/>
+                </a:solidFill>
+                <a:latin typeface="+mn-lt"/>
+                <a:ea typeface="+mn-ea"/>
+                <a:cs typeface="+mn-cs"/>
+              </a:defRPr>
+            </a:lvl3pPr>
+            <a:lvl4pPr marL="1371600" algn="l" defTabSz="914400" rtl="0" eaLnBrk="1" latinLnBrk="0" hangingPunct="1">
+              <a:defRPr sz="1800" kern="1200">
+                <a:solidFill>
+                  <a:schemeClr val="tx1"/>
+                </a:solidFill>
+                <a:latin typeface="+mn-lt"/>
+                <a:ea typeface="+mn-ea"/>
+                <a:cs typeface="+mn-cs"/>
+              </a:defRPr>
+            </a:lvl4pPr>
+            <a:lvl5pPr marL="1828800" algn="l" defTabSz="914400" rtl="0" eaLnBrk="1" latinLnBrk="0" hangingPunct="1">
+              <a:defRPr sz="1800" kern="1200">
+                <a:solidFill>
+                  <a:schemeClr val="tx1"/>
+                </a:solidFill>
+                <a:latin typeface="+mn-lt"/>
+                <a:ea typeface="+mn-ea"/>
+                <a:cs typeface="+mn-cs"/>
+              </a:defRPr>
+            </a:lvl5pPr>
+            <a:lvl6pPr marL="2286000" algn="l" defTabSz="914400" rtl="0" eaLnBrk="1" latinLnBrk="0" hangingPunct="1">
+              <a:defRPr sz="1800" kern="1200">
+                <a:solidFill>
+                  <a:schemeClr val="tx1"/>
+                </a:solidFill>
+                <a:latin typeface="+mn-lt"/>
+                <a:ea typeface="+mn-ea"/>
+                <a:cs typeface="+mn-cs"/>
+              </a:defRPr>
+            </a:lvl6pPr>
+            <a:lvl7pPr marL="2743200" algn="l" defTabSz="914400" rtl="0" eaLnBrk="1" latinLnBrk="0" hangingPunct="1">
+              <a:defRPr sz="1800" kern="1200">
+                <a:solidFill>
+                  <a:schemeClr val="tx1"/>
+                </a:solidFill>
+                <a:latin typeface="+mn-lt"/>
+                <a:ea typeface="+mn-ea"/>
+                <a:cs typeface="+mn-cs"/>
+              </a:defRPr>
+            </a:lvl7pPr>
+            <a:lvl8pPr marL="3200400" algn="l" defTabSz="914400" rtl="0" eaLnBrk="1" latinLnBrk="0" hangingPunct="1">
+              <a:defRPr sz="1800" kern="1200">
+                <a:solidFill>
+                  <a:schemeClr val="tx1"/>
+                </a:solidFill>
+                <a:latin typeface="+mn-lt"/>
+                <a:ea typeface="+mn-ea"/>
+                <a:cs typeface="+mn-cs"/>
+              </a:defRPr>
+            </a:lvl8pPr>
+            <a:lvl9pPr marL="3657600" algn="l" defTabSz="914400" rtl="0" eaLnBrk="1" latinLnBrk="0" hangingPunct="1">
+              <a:defRPr sz="1800" kern="1200">
+                <a:solidFill>
+                  <a:schemeClr val="tx1"/>
+                </a:solidFill>
+                <a:latin typeface="+mn-lt"/>
+                <a:ea typeface="+mn-ea"/>
+                <a:cs typeface="+mn-cs"/>
+              </a:defRPr>
+            </a:lvl9pPr>
+          </a:lstStyle>
+          <a:p>
+            <a:pPr marL="0" marR="0" lvl="0" indent="0" algn="ctr" defTabSz="914400" rtl="0" eaLnBrk="1" fontAlgn="auto" latinLnBrk="0" hangingPunct="1">
+              <a:lnSpc>
+                <a:spcPct val="100000"/>
+              </a:lnSpc>
+              <a:spcBef>
+                <a:spcPts val="0"/>
+              </a:spcBef>
+              <a:spcAft>
+                <a:spcPts val="0"/>
+              </a:spcAft>
+              <a:buClrTx/>
+              <a:buSzTx/>
+              <a:buFontTx/>
+              <a:buNone/>
+              <a:tabLst/>
+              <a:defRPr/>
+            </a:pPr>
+            <a:r>
+              <a:rPr kumimoji="0" lang="en-US" sz="1200" b="0" i="0" u="none" strike="noStrike" kern="1200" cap="none" spc="0" normalizeH="0" baseline="0" noProof="0" dirty="0">
+                <a:ln>
+                  <a:noFill/>
+                </a:ln>
+                <a:solidFill>
+                  <a:prstClr val="black">
+                    <a:tint val="75000"/>
+                  </a:prstClr>
+                </a:solidFill>
+                <a:effectLst/>
+                <a:uLnTx/>
+                <a:uFillTx/>
+                <a:latin typeface="Helvetica Neue" panose="02000503000000020004" pitchFamily="2" charset="0"/>
+                <a:ea typeface="Helvetica Neue" panose="02000503000000020004" pitchFamily="2" charset="0"/>
+                <a:cs typeface="Helvetica Neue" panose="02000503000000020004" pitchFamily="2" charset="0"/>
+              </a:rPr>
+              <a:t>architrino.com</a:t>
+            </a:r>
+          </a:p>
+        </p:txBody>
+      </p:sp>
     </p:spTree>
     <p:extLst>
       <p:ext uri="{BB962C8B-B14F-4D97-AF65-F5344CB8AC3E}">
-        <p14:creationId xmlns:p14="http://schemas.microsoft.com/office/powerpoint/2010/main" val="970005215"/>
+        <ns4:creationId val="970005215"/>
       </p:ext>
     </p:extLst>
   </p:cSld>
@@ -8962,7 +9274,7 @@
 </file>
 
 <file path=ppt/slides/slide3.xml><?xml version="1.0" encoding="utf-8"?>
-<p:sld xmlns:a="http://schemas.openxmlformats.org/drawingml/2006/main" xmlns:r="http://schemas.openxmlformats.org/officeDocument/2006/relationships" xmlns:p="http://schemas.openxmlformats.org/presentationml/2006/main">
+<p:sld xmlns:a="http://schemas.openxmlformats.org/drawingml/2006/main" xmlns:a16="http://schemas.microsoft.com/office/drawing/2014/main" xmlns:ns3="http://schemas.microsoft.com/office/powerpoint/2010/main" xmlns:p="http://schemas.openxmlformats.org/presentationml/2006/main">
   <p:cSld>
     <p:bg>
       <p:bgPr>
@@ -8991,7 +9303,7 @@
           <p:cNvPr id="5" name="Footer Placeholder 3">
             <a:extLst>
               <a:ext uri="{FF2B5EF4-FFF2-40B4-BE49-F238E27FC236}">
-                <a16:creationId xmlns:a16="http://schemas.microsoft.com/office/drawing/2014/main" id="{668F77D6-DFDA-5A46-8DF1-47F6A167C2B1}"/>
+                <a16:creationId id="{668F77D6-DFDA-5A46-8DF1-47F6A167C2B1}"/>
               </a:ext>
             </a:extLst>
           </p:cNvPr>
@@ -9153,7 +9465,7 @@
           <p:cNvPr id="2" name="TextBox 1">
             <a:extLst>
               <a:ext uri="{FF2B5EF4-FFF2-40B4-BE49-F238E27FC236}">
-                <a16:creationId xmlns:a16="http://schemas.microsoft.com/office/drawing/2014/main" id="{DDEA4115-15F8-921F-AB6F-6FB061DB5DDD}"/>
+                <a16:creationId id="{DDEA4115-15F8-921F-AB6F-6FB061DB5DDD}"/>
               </a:ext>
             </a:extLst>
           </p:cNvPr>
@@ -9208,7 +9520,7 @@
                 <a:ea typeface="Helvetica Neue" panose="02000503000000020004" pitchFamily="2" charset="0"/>
                 <a:cs typeface="Helvetica Neue" panose="02000503000000020004" pitchFamily="2" charset="0"/>
               </a:rPr>
-              <a:t>Imagine two point potentials isolated in T3S.</a:t>
+              <a:t>Imagine two architrinos isolated in T3S.</a:t>
             </a:r>
           </a:p>
           <a:p>
@@ -9244,7 +9556,7 @@
                 <a:ea typeface="Helvetica Neue" panose="02000503000000020004" pitchFamily="2" charset="0"/>
                 <a:cs typeface="Helvetica Neue" panose="02000503000000020004" pitchFamily="2" charset="0"/>
               </a:rPr>
-              <a:t>Draw a picture with opposite point potentials starting out at a very large real distance.</a:t>
+              <a:t>Draw a picture with opposite architrinos starting out at a very large real distance.</a:t>
             </a:r>
           </a:p>
           <a:p>
@@ -9738,7 +10050,7 @@
                 <a:ea typeface="Helvetica Neue" panose="02000503000000020004" pitchFamily="2" charset="0"/>
                 <a:cs typeface="Helvetica Neue" panose="02000503000000020004" pitchFamily="2" charset="0"/>
               </a:rPr>
-              <a:t>/2 for each point potential</a:t>
+              <a:t>/2 for each architrino</a:t>
             </a:r>
           </a:p>
           <a:p>
@@ -9990,7 +10302,7 @@
           <p:cNvPr id="8" name="TextBox 7">
             <a:extLst>
               <a:ext uri="{FF2B5EF4-FFF2-40B4-BE49-F238E27FC236}">
-                <a16:creationId xmlns:a16="http://schemas.microsoft.com/office/drawing/2014/main" id="{60D7070F-73F6-024C-A784-AA2DE3B8E022}"/>
+                <a16:creationId id="{60D7070F-73F6-024C-A784-AA2DE3B8E022}"/>
               </a:ext>
             </a:extLst>
           </p:cNvPr>
@@ -10050,10 +10362,166 @@
           </a:p>
         </p:txBody>
       </p:sp>
+      <p:sp>
+        <p:nvSpPr>
+          <p:cNvPr id="3" name="Footer Placeholder 3"/>
+          <p:cNvSpPr txBox="1">
+            <a:spLocks/>
+          </p:cNvSpPr>
+          <p:nvPr/>
+        </p:nvSpPr>
+        <p:spPr>
+          <a:xfrm>
+            <a:off x="10942204" y="6481737"/>
+            <a:ext cx="1217443" cy="365125"/>
+          </a:xfrm>
+          <a:prstGeom prst="rect">
+            <a:avLst/>
+          </a:prstGeom>
+        </p:spPr>
+        <p:txBody>
+          <a:bodyPr vert="horz" lIns="91440" tIns="45720" rIns="91440" bIns="45720" rtlCol="0" anchor="ctr"/>
+          <a:lstStyle>
+            <a:defPPr>
+              <a:defRPr lang="en-US"/>
+            </a:defPPr>
+            <a:lvl1pPr marL="0" algn="ctr" defTabSz="914400" rtl="0" eaLnBrk="1" latinLnBrk="0" hangingPunct="1">
+              <a:defRPr sz="1200" kern="1200">
+                <a:solidFill>
+                  <a:schemeClr val="tx1">
+                    <a:tint val="75000"/>
+                  </a:schemeClr>
+                </a:solidFill>
+                <a:latin typeface="+mn-lt"/>
+                <a:ea typeface="+mn-ea"/>
+                <a:cs typeface="+mn-cs"/>
+              </a:defRPr>
+            </a:lvl1pPr>
+            <a:lvl2pPr marL="457200" algn="l" defTabSz="914400" rtl="0" eaLnBrk="1" latinLnBrk="0" hangingPunct="1">
+              <a:defRPr sz="1800" kern="1200">
+                <a:solidFill>
+                  <a:schemeClr val="tx1"/>
+                </a:solidFill>
+                <a:latin typeface="+mn-lt"/>
+                <a:ea typeface="+mn-ea"/>
+                <a:cs typeface="+mn-cs"/>
+              </a:defRPr>
+            </a:lvl2pPr>
+            <a:lvl3pPr marL="914400" algn="l" defTabSz="914400" rtl="0" eaLnBrk="1" latinLnBrk="0" hangingPunct="1">
+              <a:defRPr sz="1800" kern="1200">
+                <a:solidFill>
+                  <a:schemeClr val="tx1"/>
+                </a:solidFill>
+                <a:latin typeface="+mn-lt"/>
+                <a:ea typeface="+mn-ea"/>
+                <a:cs typeface="+mn-cs"/>
+              </a:defRPr>
+            </a:lvl3pPr>
+            <a:lvl4pPr marL="1371600" algn="l" defTabSz="914400" rtl="0" eaLnBrk="1" latinLnBrk="0" hangingPunct="1">
+              <a:defRPr sz="1800" kern="1200">
+                <a:solidFill>
+                  <a:schemeClr val="tx1"/>
+                </a:solidFill>
+                <a:latin typeface="+mn-lt"/>
+                <a:ea typeface="+mn-ea"/>
+                <a:cs typeface="+mn-cs"/>
+              </a:defRPr>
+            </a:lvl4pPr>
+            <a:lvl5pPr marL="1828800" algn="l" defTabSz="914400" rtl="0" eaLnBrk="1" latinLnBrk="0" hangingPunct="1">
+              <a:defRPr sz="1800" kern="1200">
+                <a:solidFill>
+                  <a:schemeClr val="tx1"/>
+                </a:solidFill>
+                <a:latin typeface="+mn-lt"/>
+                <a:ea typeface="+mn-ea"/>
+                <a:cs typeface="+mn-cs"/>
+              </a:defRPr>
+            </a:lvl5pPr>
+            <a:lvl6pPr marL="2286000" algn="l" defTabSz="914400" rtl="0" eaLnBrk="1" latinLnBrk="0" hangingPunct="1">
+              <a:defRPr sz="1800" kern="1200">
+                <a:solidFill>
+                  <a:schemeClr val="tx1"/>
+                </a:solidFill>
+                <a:latin typeface="+mn-lt"/>
+                <a:ea typeface="+mn-ea"/>
+                <a:cs typeface="+mn-cs"/>
+              </a:defRPr>
+            </a:lvl6pPr>
+            <a:lvl7pPr marL="2743200" algn="l" defTabSz="914400" rtl="0" eaLnBrk="1" latinLnBrk="0" hangingPunct="1">
+              <a:defRPr sz="1800" kern="1200">
+                <a:solidFill>
+                  <a:schemeClr val="tx1"/>
+                </a:solidFill>
+                <a:latin typeface="+mn-lt"/>
+                <a:ea typeface="+mn-ea"/>
+                <a:cs typeface="+mn-cs"/>
+              </a:defRPr>
+            </a:lvl7pPr>
+            <a:lvl8pPr marL="3200400" algn="l" defTabSz="914400" rtl="0" eaLnBrk="1" latinLnBrk="0" hangingPunct="1">
+              <a:defRPr sz="1800" kern="1200">
+                <a:solidFill>
+                  <a:schemeClr val="tx1"/>
+                </a:solidFill>
+                <a:latin typeface="+mn-lt"/>
+                <a:ea typeface="+mn-ea"/>
+                <a:cs typeface="+mn-cs"/>
+              </a:defRPr>
+            </a:lvl8pPr>
+            <a:lvl9pPr marL="3657600" algn="l" defTabSz="914400" rtl="0" eaLnBrk="1" latinLnBrk="0" hangingPunct="1">
+              <a:defRPr sz="1800" kern="1200">
+                <a:solidFill>
+                  <a:schemeClr val="tx1"/>
+                </a:solidFill>
+                <a:latin typeface="+mn-lt"/>
+                <a:ea typeface="+mn-ea"/>
+                <a:cs typeface="+mn-cs"/>
+              </a:defRPr>
+            </a:lvl9pPr>
+          </a:lstStyle>
+          <a:p>
+            <a:pPr marL="0" marR="0" lvl="0" indent="0" algn="ctr" defTabSz="914400" rtl="0" eaLnBrk="1" fontAlgn="auto" latinLnBrk="0" hangingPunct="1">
+              <a:lnSpc>
+                <a:spcPct val="100000"/>
+              </a:lnSpc>
+              <a:spcBef>
+                <a:spcPts val="0"/>
+              </a:spcBef>
+              <a:spcAft>
+                <a:spcPts val="0"/>
+              </a:spcAft>
+              <a:buClrTx/>
+              <a:buSzTx/>
+              <a:buFontTx/>
+              <a:buNone/>
+              <a:tabLst/>
+              <a:defRPr/>
+            </a:pPr>
+            <a:r>
+              <a:rPr kumimoji="0" lang="en-US" sz="1200" b="0" i="0" u="none" strike="noStrike" kern="1200" cap="none" spc="0" normalizeH="0" baseline="0" noProof="0" dirty="0">
+                <a:ln>
+                  <a:noFill/>
+                </a:ln>
+                <a:solidFill>
+                  <a:prstClr val="black">
+                    <a:tint val="75000"/>
+                  </a:prstClr>
+                </a:solidFill>
+                <a:effectLst/>
+                <a:uLnTx/>
+                <a:uFillTx/>
+                <a:latin typeface="Helvetica Neue" panose="02000503000000020004" pitchFamily="2" charset="0"/>
+                <a:ea typeface="Helvetica Neue" panose="02000503000000020004" pitchFamily="2" charset="0"/>
+                <a:cs typeface="Helvetica Neue" panose="02000503000000020004" pitchFamily="2" charset="0"/>
+              </a:rPr>
+              <a:t>architrino.com</a:t>
+            </a:r>
+          </a:p>
+        </p:txBody>
+      </p:sp>
     </p:spTree>
     <p:extLst>
       <p:ext uri="{BB962C8B-B14F-4D97-AF65-F5344CB8AC3E}">
-        <p14:creationId xmlns:p14="http://schemas.microsoft.com/office/powerpoint/2010/main" val="1881800938"/>
+        <ns3:creationId val="1881800938"/>
       </p:ext>
     </p:extLst>
   </p:cSld>
@@ -10064,7 +10532,7 @@
 </file>
 
 <file path=ppt/slides/slide4.xml><?xml version="1.0" encoding="utf-8"?>
-<p:sld xmlns:a="http://schemas.openxmlformats.org/drawingml/2006/main" xmlns:r="http://schemas.openxmlformats.org/officeDocument/2006/relationships" xmlns:p="http://schemas.openxmlformats.org/presentationml/2006/main">
+<p:sld xmlns:a="http://schemas.openxmlformats.org/drawingml/2006/main" xmlns:a16="http://schemas.microsoft.com/office/drawing/2014/main" xmlns:ns3="http://schemas.microsoft.com/office/powerpoint/2010/main" xmlns:p="http://schemas.openxmlformats.org/presentationml/2006/main">
   <p:cSld>
     <p:bg>
       <p:bgPr>
@@ -10079,7 +10547,7 @@
         <p:cNvPr id="1" name="">
           <a:extLst>
             <a:ext uri="{FF2B5EF4-FFF2-40B4-BE49-F238E27FC236}">
-              <a16:creationId xmlns:a16="http://schemas.microsoft.com/office/drawing/2014/main" id="{AD5167F6-EC11-70C0-EB31-19160305ABB9}"/>
+              <a16:creationId id="{AD5167F6-EC11-70C0-EB31-19160305ABB9}"/>
             </a:ext>
           </a:extLst>
         </p:cNvPr>
@@ -10099,7 +10567,7 @@
           <p:cNvPr id="5" name="Footer Placeholder 3">
             <a:extLst>
               <a:ext uri="{FF2B5EF4-FFF2-40B4-BE49-F238E27FC236}">
-                <a16:creationId xmlns:a16="http://schemas.microsoft.com/office/drawing/2014/main" id="{934C1DBC-3221-5038-85EE-57DDBAD4C75D}"/>
+                <a16:creationId id="{934C1DBC-3221-5038-85EE-57DDBAD4C75D}"/>
               </a:ext>
             </a:extLst>
           </p:cNvPr>
@@ -10261,7 +10729,7 @@
           <p:cNvPr id="2" name="TextBox 1">
             <a:extLst>
               <a:ext uri="{FF2B5EF4-FFF2-40B4-BE49-F238E27FC236}">
-                <a16:creationId xmlns:a16="http://schemas.microsoft.com/office/drawing/2014/main" id="{4C4AED66-D2A5-8BF7-61E9-C9FFCC4C3607}"/>
+                <a16:creationId id="{4C4AED66-D2A5-8BF7-61E9-C9FFCC4C3607}"/>
               </a:ext>
             </a:extLst>
           </p:cNvPr>
@@ -10942,7 +11410,7 @@
           <p:cNvPr id="8" name="TextBox 7">
             <a:extLst>
               <a:ext uri="{FF2B5EF4-FFF2-40B4-BE49-F238E27FC236}">
-                <a16:creationId xmlns:a16="http://schemas.microsoft.com/office/drawing/2014/main" id="{8721DA69-5DF4-7083-7F7A-4105442F27DE}"/>
+                <a16:creationId id="{8721DA69-5DF4-7083-7F7A-4105442F27DE}"/>
               </a:ext>
             </a:extLst>
           </p:cNvPr>
@@ -11002,10 +11470,166 @@
           </a:p>
         </p:txBody>
       </p:sp>
+      <p:sp>
+        <p:nvSpPr>
+          <p:cNvPr id="3" name="Footer Placeholder 3"/>
+          <p:cNvSpPr txBox="1">
+            <a:spLocks/>
+          </p:cNvSpPr>
+          <p:nvPr/>
+        </p:nvSpPr>
+        <p:spPr>
+          <a:xfrm>
+            <a:off x="10942204" y="6481737"/>
+            <a:ext cx="1217443" cy="365125"/>
+          </a:xfrm>
+          <a:prstGeom prst="rect">
+            <a:avLst/>
+          </a:prstGeom>
+        </p:spPr>
+        <p:txBody>
+          <a:bodyPr vert="horz" lIns="91440" tIns="45720" rIns="91440" bIns="45720" rtlCol="0" anchor="ctr"/>
+          <a:lstStyle>
+            <a:defPPr>
+              <a:defRPr lang="en-US"/>
+            </a:defPPr>
+            <a:lvl1pPr marL="0" algn="ctr" defTabSz="914400" rtl="0" eaLnBrk="1" latinLnBrk="0" hangingPunct="1">
+              <a:defRPr sz="1200" kern="1200">
+                <a:solidFill>
+                  <a:schemeClr val="tx1">
+                    <a:tint val="75000"/>
+                  </a:schemeClr>
+                </a:solidFill>
+                <a:latin typeface="+mn-lt"/>
+                <a:ea typeface="+mn-ea"/>
+                <a:cs typeface="+mn-cs"/>
+              </a:defRPr>
+            </a:lvl1pPr>
+            <a:lvl2pPr marL="457200" algn="l" defTabSz="914400" rtl="0" eaLnBrk="1" latinLnBrk="0" hangingPunct="1">
+              <a:defRPr sz="1800" kern="1200">
+                <a:solidFill>
+                  <a:schemeClr val="tx1"/>
+                </a:solidFill>
+                <a:latin typeface="+mn-lt"/>
+                <a:ea typeface="+mn-ea"/>
+                <a:cs typeface="+mn-cs"/>
+              </a:defRPr>
+            </a:lvl2pPr>
+            <a:lvl3pPr marL="914400" algn="l" defTabSz="914400" rtl="0" eaLnBrk="1" latinLnBrk="0" hangingPunct="1">
+              <a:defRPr sz="1800" kern="1200">
+                <a:solidFill>
+                  <a:schemeClr val="tx1"/>
+                </a:solidFill>
+                <a:latin typeface="+mn-lt"/>
+                <a:ea typeface="+mn-ea"/>
+                <a:cs typeface="+mn-cs"/>
+              </a:defRPr>
+            </a:lvl3pPr>
+            <a:lvl4pPr marL="1371600" algn="l" defTabSz="914400" rtl="0" eaLnBrk="1" latinLnBrk="0" hangingPunct="1">
+              <a:defRPr sz="1800" kern="1200">
+                <a:solidFill>
+                  <a:schemeClr val="tx1"/>
+                </a:solidFill>
+                <a:latin typeface="+mn-lt"/>
+                <a:ea typeface="+mn-ea"/>
+                <a:cs typeface="+mn-cs"/>
+              </a:defRPr>
+            </a:lvl4pPr>
+            <a:lvl5pPr marL="1828800" algn="l" defTabSz="914400" rtl="0" eaLnBrk="1" latinLnBrk="0" hangingPunct="1">
+              <a:defRPr sz="1800" kern="1200">
+                <a:solidFill>
+                  <a:schemeClr val="tx1"/>
+                </a:solidFill>
+                <a:latin typeface="+mn-lt"/>
+                <a:ea typeface="+mn-ea"/>
+                <a:cs typeface="+mn-cs"/>
+              </a:defRPr>
+            </a:lvl5pPr>
+            <a:lvl6pPr marL="2286000" algn="l" defTabSz="914400" rtl="0" eaLnBrk="1" latinLnBrk="0" hangingPunct="1">
+              <a:defRPr sz="1800" kern="1200">
+                <a:solidFill>
+                  <a:schemeClr val="tx1"/>
+                </a:solidFill>
+                <a:latin typeface="+mn-lt"/>
+                <a:ea typeface="+mn-ea"/>
+                <a:cs typeface="+mn-cs"/>
+              </a:defRPr>
+            </a:lvl6pPr>
+            <a:lvl7pPr marL="2743200" algn="l" defTabSz="914400" rtl="0" eaLnBrk="1" latinLnBrk="0" hangingPunct="1">
+              <a:defRPr sz="1800" kern="1200">
+                <a:solidFill>
+                  <a:schemeClr val="tx1"/>
+                </a:solidFill>
+                <a:latin typeface="+mn-lt"/>
+                <a:ea typeface="+mn-ea"/>
+                <a:cs typeface="+mn-cs"/>
+              </a:defRPr>
+            </a:lvl7pPr>
+            <a:lvl8pPr marL="3200400" algn="l" defTabSz="914400" rtl="0" eaLnBrk="1" latinLnBrk="0" hangingPunct="1">
+              <a:defRPr sz="1800" kern="1200">
+                <a:solidFill>
+                  <a:schemeClr val="tx1"/>
+                </a:solidFill>
+                <a:latin typeface="+mn-lt"/>
+                <a:ea typeface="+mn-ea"/>
+                <a:cs typeface="+mn-cs"/>
+              </a:defRPr>
+            </a:lvl8pPr>
+            <a:lvl9pPr marL="3657600" algn="l" defTabSz="914400" rtl="0" eaLnBrk="1" latinLnBrk="0" hangingPunct="1">
+              <a:defRPr sz="1800" kern="1200">
+                <a:solidFill>
+                  <a:schemeClr val="tx1"/>
+                </a:solidFill>
+                <a:latin typeface="+mn-lt"/>
+                <a:ea typeface="+mn-ea"/>
+                <a:cs typeface="+mn-cs"/>
+              </a:defRPr>
+            </a:lvl9pPr>
+          </a:lstStyle>
+          <a:p>
+            <a:pPr marL="0" marR="0" lvl="0" indent="0" algn="ctr" defTabSz="914400" rtl="0" eaLnBrk="1" fontAlgn="auto" latinLnBrk="0" hangingPunct="1">
+              <a:lnSpc>
+                <a:spcPct val="100000"/>
+              </a:lnSpc>
+              <a:spcBef>
+                <a:spcPts val="0"/>
+              </a:spcBef>
+              <a:spcAft>
+                <a:spcPts val="0"/>
+              </a:spcAft>
+              <a:buClrTx/>
+              <a:buSzTx/>
+              <a:buFontTx/>
+              <a:buNone/>
+              <a:tabLst/>
+              <a:defRPr/>
+            </a:pPr>
+            <a:r>
+              <a:rPr kumimoji="0" lang="en-US" sz="1200" b="0" i="0" u="none" strike="noStrike" kern="1200" cap="none" spc="0" normalizeH="0" baseline="0" noProof="0" dirty="0">
+                <a:ln>
+                  <a:noFill/>
+                </a:ln>
+                <a:solidFill>
+                  <a:prstClr val="black">
+                    <a:tint val="75000"/>
+                  </a:prstClr>
+                </a:solidFill>
+                <a:effectLst/>
+                <a:uLnTx/>
+                <a:uFillTx/>
+                <a:latin typeface="Helvetica Neue" panose="02000503000000020004" pitchFamily="2" charset="0"/>
+                <a:ea typeface="Helvetica Neue" panose="02000503000000020004" pitchFamily="2" charset="0"/>
+                <a:cs typeface="Helvetica Neue" panose="02000503000000020004" pitchFamily="2" charset="0"/>
+              </a:rPr>
+              <a:t>architrino.com</a:t>
+            </a:r>
+          </a:p>
+        </p:txBody>
+      </p:sp>
     </p:spTree>
     <p:extLst>
       <p:ext uri="{BB962C8B-B14F-4D97-AF65-F5344CB8AC3E}">
-        <p14:creationId xmlns:p14="http://schemas.microsoft.com/office/powerpoint/2010/main" val="3966409932"/>
+        <ns3:creationId val="3966409932"/>
       </p:ext>
     </p:extLst>
   </p:cSld>
@@ -11016,7 +11640,7 @@
 </file>
 
 <file path=ppt/slides/slide5.xml><?xml version="1.0" encoding="utf-8"?>
-<p:sld xmlns:a="http://schemas.openxmlformats.org/drawingml/2006/main" xmlns:r="http://schemas.openxmlformats.org/officeDocument/2006/relationships" xmlns:p="http://schemas.openxmlformats.org/presentationml/2006/main">
+<p:sld xmlns:a="http://schemas.openxmlformats.org/drawingml/2006/main" xmlns:a16="http://schemas.microsoft.com/office/drawing/2014/main" xmlns:ns3="http://schemas.microsoft.com/office/powerpoint/2010/main" xmlns:p="http://schemas.openxmlformats.org/presentationml/2006/main">
   <p:cSld>
     <p:bg>
       <p:bgPr>
@@ -11031,7 +11655,7 @@
         <p:cNvPr id="1" name="">
           <a:extLst>
             <a:ext uri="{FF2B5EF4-FFF2-40B4-BE49-F238E27FC236}">
-              <a16:creationId xmlns:a16="http://schemas.microsoft.com/office/drawing/2014/main" id="{3C068AEF-8B80-5B82-CDB2-A02AC2DAA820}"/>
+              <a16:creationId id="{3C068AEF-8B80-5B82-CDB2-A02AC2DAA820}"/>
             </a:ext>
           </a:extLst>
         </p:cNvPr>
@@ -11051,7 +11675,7 @@
           <p:cNvPr id="5" name="Footer Placeholder 3">
             <a:extLst>
               <a:ext uri="{FF2B5EF4-FFF2-40B4-BE49-F238E27FC236}">
-                <a16:creationId xmlns:a16="http://schemas.microsoft.com/office/drawing/2014/main" id="{6B1242D3-B3B6-EB05-5D73-E8AC219BA0B7}"/>
+                <a16:creationId id="{6B1242D3-B3B6-EB05-5D73-E8AC219BA0B7}"/>
               </a:ext>
             </a:extLst>
           </p:cNvPr>
@@ -11213,7 +11837,7 @@
           <p:cNvPr id="2" name="TextBox 1">
             <a:extLst>
               <a:ext uri="{FF2B5EF4-FFF2-40B4-BE49-F238E27FC236}">
-                <a16:creationId xmlns:a16="http://schemas.microsoft.com/office/drawing/2014/main" id="{473FE1CD-1253-1CBE-5638-D22D59596C10}"/>
+                <a16:creationId id="{473FE1CD-1253-1CBE-5638-D22D59596C10}"/>
               </a:ext>
             </a:extLst>
           </p:cNvPr>
@@ -11518,7 +12142,7 @@
           <p:cNvPr id="8" name="TextBox 7">
             <a:extLst>
               <a:ext uri="{FF2B5EF4-FFF2-40B4-BE49-F238E27FC236}">
-                <a16:creationId xmlns:a16="http://schemas.microsoft.com/office/drawing/2014/main" id="{6EDF4C4C-923C-4D93-92C5-2AEF3203433C}"/>
+                <a16:creationId id="{6EDF4C4C-923C-4D93-92C5-2AEF3203433C}"/>
               </a:ext>
             </a:extLst>
           </p:cNvPr>
@@ -11578,10 +12202,166 @@
           </a:p>
         </p:txBody>
       </p:sp>
+      <p:sp>
+        <p:nvSpPr>
+          <p:cNvPr id="3" name="Footer Placeholder 3"/>
+          <p:cNvSpPr txBox="1">
+            <a:spLocks/>
+          </p:cNvSpPr>
+          <p:nvPr/>
+        </p:nvSpPr>
+        <p:spPr>
+          <a:xfrm>
+            <a:off x="10942204" y="6481737"/>
+            <a:ext cx="1217443" cy="365125"/>
+          </a:xfrm>
+          <a:prstGeom prst="rect">
+            <a:avLst/>
+          </a:prstGeom>
+        </p:spPr>
+        <p:txBody>
+          <a:bodyPr vert="horz" lIns="91440" tIns="45720" rIns="91440" bIns="45720" rtlCol="0" anchor="ctr"/>
+          <a:lstStyle>
+            <a:defPPr>
+              <a:defRPr lang="en-US"/>
+            </a:defPPr>
+            <a:lvl1pPr marL="0" algn="ctr" defTabSz="914400" rtl="0" eaLnBrk="1" latinLnBrk="0" hangingPunct="1">
+              <a:defRPr sz="1200" kern="1200">
+                <a:solidFill>
+                  <a:schemeClr val="tx1">
+                    <a:tint val="75000"/>
+                  </a:schemeClr>
+                </a:solidFill>
+                <a:latin typeface="+mn-lt"/>
+                <a:ea typeface="+mn-ea"/>
+                <a:cs typeface="+mn-cs"/>
+              </a:defRPr>
+            </a:lvl1pPr>
+            <a:lvl2pPr marL="457200" algn="l" defTabSz="914400" rtl="0" eaLnBrk="1" latinLnBrk="0" hangingPunct="1">
+              <a:defRPr sz="1800" kern="1200">
+                <a:solidFill>
+                  <a:schemeClr val="tx1"/>
+                </a:solidFill>
+                <a:latin typeface="+mn-lt"/>
+                <a:ea typeface="+mn-ea"/>
+                <a:cs typeface="+mn-cs"/>
+              </a:defRPr>
+            </a:lvl2pPr>
+            <a:lvl3pPr marL="914400" algn="l" defTabSz="914400" rtl="0" eaLnBrk="1" latinLnBrk="0" hangingPunct="1">
+              <a:defRPr sz="1800" kern="1200">
+                <a:solidFill>
+                  <a:schemeClr val="tx1"/>
+                </a:solidFill>
+                <a:latin typeface="+mn-lt"/>
+                <a:ea typeface="+mn-ea"/>
+                <a:cs typeface="+mn-cs"/>
+              </a:defRPr>
+            </a:lvl3pPr>
+            <a:lvl4pPr marL="1371600" algn="l" defTabSz="914400" rtl="0" eaLnBrk="1" latinLnBrk="0" hangingPunct="1">
+              <a:defRPr sz="1800" kern="1200">
+                <a:solidFill>
+                  <a:schemeClr val="tx1"/>
+                </a:solidFill>
+                <a:latin typeface="+mn-lt"/>
+                <a:ea typeface="+mn-ea"/>
+                <a:cs typeface="+mn-cs"/>
+              </a:defRPr>
+            </a:lvl4pPr>
+            <a:lvl5pPr marL="1828800" algn="l" defTabSz="914400" rtl="0" eaLnBrk="1" latinLnBrk="0" hangingPunct="1">
+              <a:defRPr sz="1800" kern="1200">
+                <a:solidFill>
+                  <a:schemeClr val="tx1"/>
+                </a:solidFill>
+                <a:latin typeface="+mn-lt"/>
+                <a:ea typeface="+mn-ea"/>
+                <a:cs typeface="+mn-cs"/>
+              </a:defRPr>
+            </a:lvl5pPr>
+            <a:lvl6pPr marL="2286000" algn="l" defTabSz="914400" rtl="0" eaLnBrk="1" latinLnBrk="0" hangingPunct="1">
+              <a:defRPr sz="1800" kern="1200">
+                <a:solidFill>
+                  <a:schemeClr val="tx1"/>
+                </a:solidFill>
+                <a:latin typeface="+mn-lt"/>
+                <a:ea typeface="+mn-ea"/>
+                <a:cs typeface="+mn-cs"/>
+              </a:defRPr>
+            </a:lvl6pPr>
+            <a:lvl7pPr marL="2743200" algn="l" defTabSz="914400" rtl="0" eaLnBrk="1" latinLnBrk="0" hangingPunct="1">
+              <a:defRPr sz="1800" kern="1200">
+                <a:solidFill>
+                  <a:schemeClr val="tx1"/>
+                </a:solidFill>
+                <a:latin typeface="+mn-lt"/>
+                <a:ea typeface="+mn-ea"/>
+                <a:cs typeface="+mn-cs"/>
+              </a:defRPr>
+            </a:lvl7pPr>
+            <a:lvl8pPr marL="3200400" algn="l" defTabSz="914400" rtl="0" eaLnBrk="1" latinLnBrk="0" hangingPunct="1">
+              <a:defRPr sz="1800" kern="1200">
+                <a:solidFill>
+                  <a:schemeClr val="tx1"/>
+                </a:solidFill>
+                <a:latin typeface="+mn-lt"/>
+                <a:ea typeface="+mn-ea"/>
+                <a:cs typeface="+mn-cs"/>
+              </a:defRPr>
+            </a:lvl8pPr>
+            <a:lvl9pPr marL="3657600" algn="l" defTabSz="914400" rtl="0" eaLnBrk="1" latinLnBrk="0" hangingPunct="1">
+              <a:defRPr sz="1800" kern="1200">
+                <a:solidFill>
+                  <a:schemeClr val="tx1"/>
+                </a:solidFill>
+                <a:latin typeface="+mn-lt"/>
+                <a:ea typeface="+mn-ea"/>
+                <a:cs typeface="+mn-cs"/>
+              </a:defRPr>
+            </a:lvl9pPr>
+          </a:lstStyle>
+          <a:p>
+            <a:pPr marL="0" marR="0" lvl="0" indent="0" algn="ctr" defTabSz="914400" rtl="0" eaLnBrk="1" fontAlgn="auto" latinLnBrk="0" hangingPunct="1">
+              <a:lnSpc>
+                <a:spcPct val="100000"/>
+              </a:lnSpc>
+              <a:spcBef>
+                <a:spcPts val="0"/>
+              </a:spcBef>
+              <a:spcAft>
+                <a:spcPts val="0"/>
+              </a:spcAft>
+              <a:buClrTx/>
+              <a:buSzTx/>
+              <a:buFontTx/>
+              <a:buNone/>
+              <a:tabLst/>
+              <a:defRPr/>
+            </a:pPr>
+            <a:r>
+              <a:rPr kumimoji="0" lang="en-US" sz="1200" b="0" i="0" u="none" strike="noStrike" kern="1200" cap="none" spc="0" normalizeH="0" baseline="0" noProof="0" dirty="0">
+                <a:ln>
+                  <a:noFill/>
+                </a:ln>
+                <a:solidFill>
+                  <a:prstClr val="black">
+                    <a:tint val="75000"/>
+                  </a:prstClr>
+                </a:solidFill>
+                <a:effectLst/>
+                <a:uLnTx/>
+                <a:uFillTx/>
+                <a:latin typeface="Helvetica Neue" panose="02000503000000020004" pitchFamily="2" charset="0"/>
+                <a:ea typeface="Helvetica Neue" panose="02000503000000020004" pitchFamily="2" charset="0"/>
+                <a:cs typeface="Helvetica Neue" panose="02000503000000020004" pitchFamily="2" charset="0"/>
+              </a:rPr>
+              <a:t>architrino.com</a:t>
+            </a:r>
+          </a:p>
+        </p:txBody>
+      </p:sp>
     </p:spTree>
     <p:extLst>
       <p:ext uri="{BB962C8B-B14F-4D97-AF65-F5344CB8AC3E}">
-        <p14:creationId xmlns:p14="http://schemas.microsoft.com/office/powerpoint/2010/main" val="4279716620"/>
+        <ns3:creationId val="4279716620"/>
       </p:ext>
     </p:extLst>
   </p:cSld>
@@ -11592,7 +12372,7 @@
 </file>
 
 <file path=ppt/slides/slide6.xml><?xml version="1.0" encoding="utf-8"?>
-<p:sld xmlns:a="http://schemas.openxmlformats.org/drawingml/2006/main" xmlns:r="http://schemas.openxmlformats.org/officeDocument/2006/relationships" xmlns:p="http://schemas.openxmlformats.org/presentationml/2006/main">
+<p:sld xmlns:a="http://schemas.openxmlformats.org/drawingml/2006/main" xmlns:a16="http://schemas.microsoft.com/office/drawing/2014/main" xmlns:ns3="http://schemas.microsoft.com/office/powerpoint/2010/main" xmlns:p="http://schemas.openxmlformats.org/presentationml/2006/main">
   <p:cSld>
     <p:bg>
       <p:bgPr>
@@ -11607,7 +12387,7 @@
         <p:cNvPr id="1" name="">
           <a:extLst>
             <a:ext uri="{FF2B5EF4-FFF2-40B4-BE49-F238E27FC236}">
-              <a16:creationId xmlns:a16="http://schemas.microsoft.com/office/drawing/2014/main" id="{0D17EF14-3CDB-27F9-F38C-05524B02F869}"/>
+              <a16:creationId id="{0D17EF14-3CDB-27F9-F38C-05524B02F869}"/>
             </a:ext>
           </a:extLst>
         </p:cNvPr>
@@ -11627,7 +12407,7 @@
           <p:cNvPr id="5" name="Footer Placeholder 3">
             <a:extLst>
               <a:ext uri="{FF2B5EF4-FFF2-40B4-BE49-F238E27FC236}">
-                <a16:creationId xmlns:a16="http://schemas.microsoft.com/office/drawing/2014/main" id="{1B750387-6F5D-0257-9DC3-653F28CC7E2B}"/>
+                <a16:creationId id="{1B750387-6F5D-0257-9DC3-653F28CC7E2B}"/>
               </a:ext>
             </a:extLst>
           </p:cNvPr>
@@ -11789,7 +12569,7 @@
           <p:cNvPr id="2" name="TextBox 1">
             <a:extLst>
               <a:ext uri="{FF2B5EF4-FFF2-40B4-BE49-F238E27FC236}">
-                <a16:creationId xmlns:a16="http://schemas.microsoft.com/office/drawing/2014/main" id="{EA0E8BC7-A30D-EEB1-9D23-9E700DF39AE4}"/>
+                <a16:creationId id="{EA0E8BC7-A30D-EEB1-9D23-9E700DF39AE4}"/>
               </a:ext>
             </a:extLst>
           </p:cNvPr>
@@ -11889,7 +12669,7 @@
                 <a:ea typeface="Helvetica Neue" panose="02000503000000020004" pitchFamily="2" charset="0"/>
                 <a:cs typeface="Helvetica Neue" panose="02000503000000020004" pitchFamily="2" charset="0"/>
               </a:rPr>
-              <a:t>A point potential kicks over v = @ and gets a boost from work done upon it by its own self action</a:t>
+              <a:t>A architrino kicks over v = @ and gets a boost from work done upon it by its own self action</a:t>
             </a:r>
           </a:p>
           <a:p>
@@ -11931,7 +12711,7 @@
                 <a:ea typeface="Helvetica Neue" panose="02000503000000020004" pitchFamily="2" charset="0"/>
                 <a:cs typeface="Helvetica Neue" panose="02000503000000020004" pitchFamily="2" charset="0"/>
               </a:rPr>
-              <a:t>The point potential binary </a:t>
+              <a:t>The architrino binary </a:t>
             </a:r>
             <a:r>
               <a:rPr lang="en-US" dirty="0">
@@ -11978,7 +12758,7 @@
                 <a:ea typeface="Helvetica Neue" panose="02000503000000020004" pitchFamily="2" charset="0"/>
                 <a:cs typeface="Helvetica Neue" panose="02000503000000020004" pitchFamily="2" charset="0"/>
               </a:rPr>
-              <a:t>Consider a binary and two arbitrary local opposite point potentials as a system. (two electrinos and two positrinos)</a:t>
+              <a:t>Consider a binary and two arbitrary local opposite architrinos as a system. (two electrinos and two positrinos)</a:t>
             </a:r>
           </a:p>
           <a:p>
@@ -12002,7 +12782,7 @@
                 <a:ea typeface="Helvetica Neue" panose="02000503000000020004" pitchFamily="2" charset="0"/>
                 <a:cs typeface="Helvetica Neue" panose="02000503000000020004" pitchFamily="2" charset="0"/>
               </a:rPr>
-              <a:t>each point potential has an 8-ball.</a:t>
+              <a:t>each architrino has an 8-ball.</a:t>
             </a:r>
           </a:p>
           <a:p>
@@ -12158,7 +12938,7 @@
                 <a:ea typeface="Helvetica Neue" panose="02000503000000020004" pitchFamily="2" charset="0"/>
                 <a:cs typeface="Helvetica Neue" panose="02000503000000020004" pitchFamily="2" charset="0"/>
               </a:rPr>
-              <a:t>KE changes relate to the point potential changes on a 1/r potential curve.</a:t>
+              <a:t>KE changes relate to the architrino changes on a 1/r potential curve.</a:t>
             </a:r>
           </a:p>
           <a:p>
@@ -12219,7 +12999,7 @@
           <p:cNvPr id="8" name="TextBox 7">
             <a:extLst>
               <a:ext uri="{FF2B5EF4-FFF2-40B4-BE49-F238E27FC236}">
-                <a16:creationId xmlns:a16="http://schemas.microsoft.com/office/drawing/2014/main" id="{9D9A0382-67FC-989B-49FA-CC7E4D35E08F}"/>
+                <a16:creationId id="{9D9A0382-67FC-989B-49FA-CC7E4D35E08F}"/>
               </a:ext>
             </a:extLst>
           </p:cNvPr>
@@ -12279,10 +13059,166 @@
           </a:p>
         </p:txBody>
       </p:sp>
+      <p:sp>
+        <p:nvSpPr>
+          <p:cNvPr id="3" name="Footer Placeholder 3"/>
+          <p:cNvSpPr txBox="1">
+            <a:spLocks/>
+          </p:cNvSpPr>
+          <p:nvPr/>
+        </p:nvSpPr>
+        <p:spPr>
+          <a:xfrm>
+            <a:off x="10942204" y="6481737"/>
+            <a:ext cx="1217443" cy="365125"/>
+          </a:xfrm>
+          <a:prstGeom prst="rect">
+            <a:avLst/>
+          </a:prstGeom>
+        </p:spPr>
+        <p:txBody>
+          <a:bodyPr vert="horz" lIns="91440" tIns="45720" rIns="91440" bIns="45720" rtlCol="0" anchor="ctr"/>
+          <a:lstStyle>
+            <a:defPPr>
+              <a:defRPr lang="en-US"/>
+            </a:defPPr>
+            <a:lvl1pPr marL="0" algn="ctr" defTabSz="914400" rtl="0" eaLnBrk="1" latinLnBrk="0" hangingPunct="1">
+              <a:defRPr sz="1200" kern="1200">
+                <a:solidFill>
+                  <a:schemeClr val="tx1">
+                    <a:tint val="75000"/>
+                  </a:schemeClr>
+                </a:solidFill>
+                <a:latin typeface="+mn-lt"/>
+                <a:ea typeface="+mn-ea"/>
+                <a:cs typeface="+mn-cs"/>
+              </a:defRPr>
+            </a:lvl1pPr>
+            <a:lvl2pPr marL="457200" algn="l" defTabSz="914400" rtl="0" eaLnBrk="1" latinLnBrk="0" hangingPunct="1">
+              <a:defRPr sz="1800" kern="1200">
+                <a:solidFill>
+                  <a:schemeClr val="tx1"/>
+                </a:solidFill>
+                <a:latin typeface="+mn-lt"/>
+                <a:ea typeface="+mn-ea"/>
+                <a:cs typeface="+mn-cs"/>
+              </a:defRPr>
+            </a:lvl2pPr>
+            <a:lvl3pPr marL="914400" algn="l" defTabSz="914400" rtl="0" eaLnBrk="1" latinLnBrk="0" hangingPunct="1">
+              <a:defRPr sz="1800" kern="1200">
+                <a:solidFill>
+                  <a:schemeClr val="tx1"/>
+                </a:solidFill>
+                <a:latin typeface="+mn-lt"/>
+                <a:ea typeface="+mn-ea"/>
+                <a:cs typeface="+mn-cs"/>
+              </a:defRPr>
+            </a:lvl3pPr>
+            <a:lvl4pPr marL="1371600" algn="l" defTabSz="914400" rtl="0" eaLnBrk="1" latinLnBrk="0" hangingPunct="1">
+              <a:defRPr sz="1800" kern="1200">
+                <a:solidFill>
+                  <a:schemeClr val="tx1"/>
+                </a:solidFill>
+                <a:latin typeface="+mn-lt"/>
+                <a:ea typeface="+mn-ea"/>
+                <a:cs typeface="+mn-cs"/>
+              </a:defRPr>
+            </a:lvl4pPr>
+            <a:lvl5pPr marL="1828800" algn="l" defTabSz="914400" rtl="0" eaLnBrk="1" latinLnBrk="0" hangingPunct="1">
+              <a:defRPr sz="1800" kern="1200">
+                <a:solidFill>
+                  <a:schemeClr val="tx1"/>
+                </a:solidFill>
+                <a:latin typeface="+mn-lt"/>
+                <a:ea typeface="+mn-ea"/>
+                <a:cs typeface="+mn-cs"/>
+              </a:defRPr>
+            </a:lvl5pPr>
+            <a:lvl6pPr marL="2286000" algn="l" defTabSz="914400" rtl="0" eaLnBrk="1" latinLnBrk="0" hangingPunct="1">
+              <a:defRPr sz="1800" kern="1200">
+                <a:solidFill>
+                  <a:schemeClr val="tx1"/>
+                </a:solidFill>
+                <a:latin typeface="+mn-lt"/>
+                <a:ea typeface="+mn-ea"/>
+                <a:cs typeface="+mn-cs"/>
+              </a:defRPr>
+            </a:lvl6pPr>
+            <a:lvl7pPr marL="2743200" algn="l" defTabSz="914400" rtl="0" eaLnBrk="1" latinLnBrk="0" hangingPunct="1">
+              <a:defRPr sz="1800" kern="1200">
+                <a:solidFill>
+                  <a:schemeClr val="tx1"/>
+                </a:solidFill>
+                <a:latin typeface="+mn-lt"/>
+                <a:ea typeface="+mn-ea"/>
+                <a:cs typeface="+mn-cs"/>
+              </a:defRPr>
+            </a:lvl7pPr>
+            <a:lvl8pPr marL="3200400" algn="l" defTabSz="914400" rtl="0" eaLnBrk="1" latinLnBrk="0" hangingPunct="1">
+              <a:defRPr sz="1800" kern="1200">
+                <a:solidFill>
+                  <a:schemeClr val="tx1"/>
+                </a:solidFill>
+                <a:latin typeface="+mn-lt"/>
+                <a:ea typeface="+mn-ea"/>
+                <a:cs typeface="+mn-cs"/>
+              </a:defRPr>
+            </a:lvl8pPr>
+            <a:lvl9pPr marL="3657600" algn="l" defTabSz="914400" rtl="0" eaLnBrk="1" latinLnBrk="0" hangingPunct="1">
+              <a:defRPr sz="1800" kern="1200">
+                <a:solidFill>
+                  <a:schemeClr val="tx1"/>
+                </a:solidFill>
+                <a:latin typeface="+mn-lt"/>
+                <a:ea typeface="+mn-ea"/>
+                <a:cs typeface="+mn-cs"/>
+              </a:defRPr>
+            </a:lvl9pPr>
+          </a:lstStyle>
+          <a:p>
+            <a:pPr marL="0" marR="0" lvl="0" indent="0" algn="ctr" defTabSz="914400" rtl="0" eaLnBrk="1" fontAlgn="auto" latinLnBrk="0" hangingPunct="1">
+              <a:lnSpc>
+                <a:spcPct val="100000"/>
+              </a:lnSpc>
+              <a:spcBef>
+                <a:spcPts val="0"/>
+              </a:spcBef>
+              <a:spcAft>
+                <a:spcPts val="0"/>
+              </a:spcAft>
+              <a:buClrTx/>
+              <a:buSzTx/>
+              <a:buFontTx/>
+              <a:buNone/>
+              <a:tabLst/>
+              <a:defRPr/>
+            </a:pPr>
+            <a:r>
+              <a:rPr kumimoji="0" lang="en-US" sz="1200" b="0" i="0" u="none" strike="noStrike" kern="1200" cap="none" spc="0" normalizeH="0" baseline="0" noProof="0" dirty="0">
+                <a:ln>
+                  <a:noFill/>
+                </a:ln>
+                <a:solidFill>
+                  <a:prstClr val="black">
+                    <a:tint val="75000"/>
+                  </a:prstClr>
+                </a:solidFill>
+                <a:effectLst/>
+                <a:uLnTx/>
+                <a:uFillTx/>
+                <a:latin typeface="Helvetica Neue" panose="02000503000000020004" pitchFamily="2" charset="0"/>
+                <a:ea typeface="Helvetica Neue" panose="02000503000000020004" pitchFamily="2" charset="0"/>
+                <a:cs typeface="Helvetica Neue" panose="02000503000000020004" pitchFamily="2" charset="0"/>
+              </a:rPr>
+              <a:t>architrino.com</a:t>
+            </a:r>
+          </a:p>
+        </p:txBody>
+      </p:sp>
     </p:spTree>
     <p:extLst>
       <p:ext uri="{BB962C8B-B14F-4D97-AF65-F5344CB8AC3E}">
-        <p14:creationId xmlns:p14="http://schemas.microsoft.com/office/powerpoint/2010/main" val="2872470597"/>
+        <ns3:creationId val="2872470597"/>
       </p:ext>
     </p:extLst>
   </p:cSld>
@@ -12293,7 +13229,7 @@
 </file>
 
 <file path=ppt/slides/slide7.xml><?xml version="1.0" encoding="utf-8"?>
-<p:sld xmlns:a="http://schemas.openxmlformats.org/drawingml/2006/main" xmlns:r="http://schemas.openxmlformats.org/officeDocument/2006/relationships" xmlns:p="http://schemas.openxmlformats.org/presentationml/2006/main">
+<p:sld xmlns:a="http://schemas.openxmlformats.org/drawingml/2006/main" xmlns:a16="http://schemas.microsoft.com/office/drawing/2014/main" xmlns:ns3="http://schemas.microsoft.com/office/powerpoint/2010/main" xmlns:p="http://schemas.openxmlformats.org/presentationml/2006/main">
   <p:cSld>
     <p:bg>
       <p:bgPr>
@@ -12308,7 +13244,7 @@
         <p:cNvPr id="1" name="">
           <a:extLst>
             <a:ext uri="{FF2B5EF4-FFF2-40B4-BE49-F238E27FC236}">
-              <a16:creationId xmlns:a16="http://schemas.microsoft.com/office/drawing/2014/main" id="{15AB8420-5829-AE65-35FD-B9B726396AE6}"/>
+              <a16:creationId id="{15AB8420-5829-AE65-35FD-B9B726396AE6}"/>
             </a:ext>
           </a:extLst>
         </p:cNvPr>
@@ -12328,7 +13264,7 @@
           <p:cNvPr id="5" name="Footer Placeholder 3">
             <a:extLst>
               <a:ext uri="{FF2B5EF4-FFF2-40B4-BE49-F238E27FC236}">
-                <a16:creationId xmlns:a16="http://schemas.microsoft.com/office/drawing/2014/main" id="{CCB07F1B-345A-682C-7786-B93DA7229F70}"/>
+                <a16:creationId id="{CCB07F1B-345A-682C-7786-B93DA7229F70}"/>
               </a:ext>
             </a:extLst>
           </p:cNvPr>
@@ -12490,7 +13426,7 @@
           <p:cNvPr id="19" name="Rectangle 18">
             <a:extLst>
               <a:ext uri="{FF2B5EF4-FFF2-40B4-BE49-F238E27FC236}">
-                <a16:creationId xmlns:a16="http://schemas.microsoft.com/office/drawing/2014/main" id="{9178114D-FA61-2425-6DA6-903E1E0EEAEF}"/>
+                <a16:creationId id="{9178114D-FA61-2425-6DA6-903E1E0EEAEF}"/>
               </a:ext>
             </a:extLst>
           </p:cNvPr>
@@ -12555,7 +13491,7 @@
           <p:cNvPr id="2" name="TextBox 1">
             <a:extLst>
               <a:ext uri="{FF2B5EF4-FFF2-40B4-BE49-F238E27FC236}">
-                <a16:creationId xmlns:a16="http://schemas.microsoft.com/office/drawing/2014/main" id="{2EEF71A6-14E1-8A45-1EEC-76EE6482016F}"/>
+                <a16:creationId id="{2EEF71A6-14E1-8A45-1EEC-76EE6482016F}"/>
               </a:ext>
             </a:extLst>
           </p:cNvPr>
@@ -12932,7 +13868,7 @@
                 <a:ea typeface="Helvetica Neue" panose="02000503000000020004" pitchFamily="2" charset="0"/>
                 <a:cs typeface="Helvetica Neue" panose="02000503000000020004" pitchFamily="2" charset="0"/>
               </a:rPr>
-              <a:t>Arriving potential spheres influence the quantum choices.</a:t>
+              <a:t>Arriving causal wakes influence the quantum choices.</a:t>
             </a:r>
           </a:p>
           <a:p>
@@ -13004,7 +13940,7 @@
                 <a:ea typeface="Helvetica Neue" panose="02000503000000020004" pitchFamily="2" charset="0"/>
                 <a:cs typeface="Helvetica Neue" panose="02000503000000020004" pitchFamily="2" charset="0"/>
               </a:rPr>
-              <a:t>IDEA: the denser the point potentials, the more energy they capture.</a:t>
+              <a:t>IDEA: the denser the architrinos, the more energy they capture.</a:t>
             </a:r>
           </a:p>
           <a:p>
@@ -13040,7 +13976,7 @@
                 <a:ea typeface="Helvetica Neue" panose="02000503000000020004" pitchFamily="2" charset="0"/>
                 <a:cs typeface="Helvetica Neue" panose="02000503000000020004" pitchFamily="2" charset="0"/>
               </a:rPr>
-              <a:t>An isolated point potential, distant from others, has little influence</a:t>
+              <a:t>An isolated architrino, distant from others, has little influence</a:t>
             </a:r>
           </a:p>
           <a:p>
@@ -13076,7 +14012,7 @@
                 <a:ea typeface="Helvetica Neue" panose="02000503000000020004" pitchFamily="2" charset="0"/>
                 <a:cs typeface="Helvetica Neue" panose="02000503000000020004" pitchFamily="2" charset="0"/>
               </a:rPr>
-              <a:t>A point potential in the local neighborhood causes significant action</a:t>
+              <a:t>A architrino in the local neighborhood causes significant action</a:t>
             </a:r>
           </a:p>
           <a:p>
@@ -13180,10 +14116,166 @@
           </a:p>
         </p:txBody>
       </p:sp>
+      <p:sp>
+        <p:nvSpPr>
+          <p:cNvPr id="3" name="Footer Placeholder 3"/>
+          <p:cNvSpPr txBox="1">
+            <a:spLocks/>
+          </p:cNvSpPr>
+          <p:nvPr/>
+        </p:nvSpPr>
+        <p:spPr>
+          <a:xfrm>
+            <a:off x="10942204" y="6481737"/>
+            <a:ext cx="1217443" cy="365125"/>
+          </a:xfrm>
+          <a:prstGeom prst="rect">
+            <a:avLst/>
+          </a:prstGeom>
+        </p:spPr>
+        <p:txBody>
+          <a:bodyPr vert="horz" lIns="91440" tIns="45720" rIns="91440" bIns="45720" rtlCol="0" anchor="ctr"/>
+          <a:lstStyle>
+            <a:defPPr>
+              <a:defRPr lang="en-US"/>
+            </a:defPPr>
+            <a:lvl1pPr marL="0" algn="ctr" defTabSz="914400" rtl="0" eaLnBrk="1" latinLnBrk="0" hangingPunct="1">
+              <a:defRPr sz="1200" kern="1200">
+                <a:solidFill>
+                  <a:schemeClr val="tx1">
+                    <a:tint val="75000"/>
+                  </a:schemeClr>
+                </a:solidFill>
+                <a:latin typeface="+mn-lt"/>
+                <a:ea typeface="+mn-ea"/>
+                <a:cs typeface="+mn-cs"/>
+              </a:defRPr>
+            </a:lvl1pPr>
+            <a:lvl2pPr marL="457200" algn="l" defTabSz="914400" rtl="0" eaLnBrk="1" latinLnBrk="0" hangingPunct="1">
+              <a:defRPr sz="1800" kern="1200">
+                <a:solidFill>
+                  <a:schemeClr val="tx1"/>
+                </a:solidFill>
+                <a:latin typeface="+mn-lt"/>
+                <a:ea typeface="+mn-ea"/>
+                <a:cs typeface="+mn-cs"/>
+              </a:defRPr>
+            </a:lvl2pPr>
+            <a:lvl3pPr marL="914400" algn="l" defTabSz="914400" rtl="0" eaLnBrk="1" latinLnBrk="0" hangingPunct="1">
+              <a:defRPr sz="1800" kern="1200">
+                <a:solidFill>
+                  <a:schemeClr val="tx1"/>
+                </a:solidFill>
+                <a:latin typeface="+mn-lt"/>
+                <a:ea typeface="+mn-ea"/>
+                <a:cs typeface="+mn-cs"/>
+              </a:defRPr>
+            </a:lvl3pPr>
+            <a:lvl4pPr marL="1371600" algn="l" defTabSz="914400" rtl="0" eaLnBrk="1" latinLnBrk="0" hangingPunct="1">
+              <a:defRPr sz="1800" kern="1200">
+                <a:solidFill>
+                  <a:schemeClr val="tx1"/>
+                </a:solidFill>
+                <a:latin typeface="+mn-lt"/>
+                <a:ea typeface="+mn-ea"/>
+                <a:cs typeface="+mn-cs"/>
+              </a:defRPr>
+            </a:lvl4pPr>
+            <a:lvl5pPr marL="1828800" algn="l" defTabSz="914400" rtl="0" eaLnBrk="1" latinLnBrk="0" hangingPunct="1">
+              <a:defRPr sz="1800" kern="1200">
+                <a:solidFill>
+                  <a:schemeClr val="tx1"/>
+                </a:solidFill>
+                <a:latin typeface="+mn-lt"/>
+                <a:ea typeface="+mn-ea"/>
+                <a:cs typeface="+mn-cs"/>
+              </a:defRPr>
+            </a:lvl5pPr>
+            <a:lvl6pPr marL="2286000" algn="l" defTabSz="914400" rtl="0" eaLnBrk="1" latinLnBrk="0" hangingPunct="1">
+              <a:defRPr sz="1800" kern="1200">
+                <a:solidFill>
+                  <a:schemeClr val="tx1"/>
+                </a:solidFill>
+                <a:latin typeface="+mn-lt"/>
+                <a:ea typeface="+mn-ea"/>
+                <a:cs typeface="+mn-cs"/>
+              </a:defRPr>
+            </a:lvl6pPr>
+            <a:lvl7pPr marL="2743200" algn="l" defTabSz="914400" rtl="0" eaLnBrk="1" latinLnBrk="0" hangingPunct="1">
+              <a:defRPr sz="1800" kern="1200">
+                <a:solidFill>
+                  <a:schemeClr val="tx1"/>
+                </a:solidFill>
+                <a:latin typeface="+mn-lt"/>
+                <a:ea typeface="+mn-ea"/>
+                <a:cs typeface="+mn-cs"/>
+              </a:defRPr>
+            </a:lvl7pPr>
+            <a:lvl8pPr marL="3200400" algn="l" defTabSz="914400" rtl="0" eaLnBrk="1" latinLnBrk="0" hangingPunct="1">
+              <a:defRPr sz="1800" kern="1200">
+                <a:solidFill>
+                  <a:schemeClr val="tx1"/>
+                </a:solidFill>
+                <a:latin typeface="+mn-lt"/>
+                <a:ea typeface="+mn-ea"/>
+                <a:cs typeface="+mn-cs"/>
+              </a:defRPr>
+            </a:lvl8pPr>
+            <a:lvl9pPr marL="3657600" algn="l" defTabSz="914400" rtl="0" eaLnBrk="1" latinLnBrk="0" hangingPunct="1">
+              <a:defRPr sz="1800" kern="1200">
+                <a:solidFill>
+                  <a:schemeClr val="tx1"/>
+                </a:solidFill>
+                <a:latin typeface="+mn-lt"/>
+                <a:ea typeface="+mn-ea"/>
+                <a:cs typeface="+mn-cs"/>
+              </a:defRPr>
+            </a:lvl9pPr>
+          </a:lstStyle>
+          <a:p>
+            <a:pPr marL="0" marR="0" lvl="0" indent="0" algn="ctr" defTabSz="914400" rtl="0" eaLnBrk="1" fontAlgn="auto" latinLnBrk="0" hangingPunct="1">
+              <a:lnSpc>
+                <a:spcPct val="100000"/>
+              </a:lnSpc>
+              <a:spcBef>
+                <a:spcPts val="0"/>
+              </a:spcBef>
+              <a:spcAft>
+                <a:spcPts val="0"/>
+              </a:spcAft>
+              <a:buClrTx/>
+              <a:buSzTx/>
+              <a:buFontTx/>
+              <a:buNone/>
+              <a:tabLst/>
+              <a:defRPr/>
+            </a:pPr>
+            <a:r>
+              <a:rPr kumimoji="0" lang="en-US" sz="1200" b="0" i="0" u="none" strike="noStrike" kern="1200" cap="none" spc="0" normalizeH="0" baseline="0" noProof="0" dirty="0">
+                <a:ln>
+                  <a:noFill/>
+                </a:ln>
+                <a:solidFill>
+                  <a:prstClr val="black">
+                    <a:tint val="75000"/>
+                  </a:prstClr>
+                </a:solidFill>
+                <a:effectLst/>
+                <a:uLnTx/>
+                <a:uFillTx/>
+                <a:latin typeface="Helvetica Neue" panose="02000503000000020004" pitchFamily="2" charset="0"/>
+                <a:ea typeface="Helvetica Neue" panose="02000503000000020004" pitchFamily="2" charset="0"/>
+                <a:cs typeface="Helvetica Neue" panose="02000503000000020004" pitchFamily="2" charset="0"/>
+              </a:rPr>
+              <a:t>architrino.com</a:t>
+            </a:r>
+          </a:p>
+        </p:txBody>
+      </p:sp>
     </p:spTree>
     <p:extLst>
       <p:ext uri="{BB962C8B-B14F-4D97-AF65-F5344CB8AC3E}">
-        <p14:creationId xmlns:p14="http://schemas.microsoft.com/office/powerpoint/2010/main" val="2436473042"/>
+        <ns3:creationId val="2436473042"/>
       </p:ext>
     </p:extLst>
   </p:cSld>
@@ -13194,7 +14286,7 @@
 </file>
 
 <file path=ppt/slides/slide8.xml><?xml version="1.0" encoding="utf-8"?>
-<p:sld xmlns:a="http://schemas.openxmlformats.org/drawingml/2006/main" xmlns:r="http://schemas.openxmlformats.org/officeDocument/2006/relationships" xmlns:p="http://schemas.openxmlformats.org/presentationml/2006/main">
+<p:sld xmlns:a="http://schemas.openxmlformats.org/drawingml/2006/main" xmlns:a16="http://schemas.microsoft.com/office/drawing/2014/main" xmlns:ns3="http://schemas.microsoft.com/office/powerpoint/2010/main" xmlns:p="http://schemas.openxmlformats.org/presentationml/2006/main">
   <p:cSld>
     <p:bg>
       <p:bgPr>
@@ -13209,7 +14301,7 @@
         <p:cNvPr id="1" name="">
           <a:extLst>
             <a:ext uri="{FF2B5EF4-FFF2-40B4-BE49-F238E27FC236}">
-              <a16:creationId xmlns:a16="http://schemas.microsoft.com/office/drawing/2014/main" id="{F1C52D0E-7D5D-C1E8-B3FC-06030AF548D6}"/>
+              <a16:creationId id="{F1C52D0E-7D5D-C1E8-B3FC-06030AF548D6}"/>
             </a:ext>
           </a:extLst>
         </p:cNvPr>
@@ -13229,7 +14321,7 @@
           <p:cNvPr id="5" name="Footer Placeholder 3">
             <a:extLst>
               <a:ext uri="{FF2B5EF4-FFF2-40B4-BE49-F238E27FC236}">
-                <a16:creationId xmlns:a16="http://schemas.microsoft.com/office/drawing/2014/main" id="{ACA2C156-0E3D-FFC8-797A-AEA6E32F32A3}"/>
+                <a16:creationId id="{ACA2C156-0E3D-FFC8-797A-AEA6E32F32A3}"/>
               </a:ext>
             </a:extLst>
           </p:cNvPr>
@@ -13391,7 +14483,7 @@
           <p:cNvPr id="19" name="Rectangle 18">
             <a:extLst>
               <a:ext uri="{FF2B5EF4-FFF2-40B4-BE49-F238E27FC236}">
-                <a16:creationId xmlns:a16="http://schemas.microsoft.com/office/drawing/2014/main" id="{487F020D-D17B-D7C7-0950-4C1355A7F023}"/>
+                <a16:creationId id="{487F020D-D17B-D7C7-0950-4C1355A7F023}"/>
               </a:ext>
             </a:extLst>
           </p:cNvPr>
@@ -13456,7 +14548,7 @@
           <p:cNvPr id="2" name="TextBox 1">
             <a:extLst>
               <a:ext uri="{FF2B5EF4-FFF2-40B4-BE49-F238E27FC236}">
-                <a16:creationId xmlns:a16="http://schemas.microsoft.com/office/drawing/2014/main" id="{17E5F500-9630-DE5B-4156-454D4ACDDF86}"/>
+                <a16:creationId id="{17E5F500-9630-DE5B-4156-454D4ACDDF86}"/>
               </a:ext>
             </a:extLst>
           </p:cNvPr>
@@ -13952,7 +15044,7 @@
           <p:cNvPr id="4" name="TextBox 3">
             <a:extLst>
               <a:ext uri="{FF2B5EF4-FFF2-40B4-BE49-F238E27FC236}">
-                <a16:creationId xmlns:a16="http://schemas.microsoft.com/office/drawing/2014/main" id="{7A2175A5-74A8-2670-C353-E09D4CB21198}"/>
+                <a16:creationId id="{7A2175A5-74A8-2670-C353-E09D4CB21198}"/>
               </a:ext>
             </a:extLst>
           </p:cNvPr>
@@ -14233,7 +15325,7 @@
                 <a:ea typeface="Helvetica Neue" panose="02000503000000020004" pitchFamily="2" charset="0"/>
                 <a:cs typeface="Helvetica Neue" panose="02000503000000020004" pitchFamily="2" charset="0"/>
               </a:rPr>
-              <a:t>Vector potential q/(vr) intersecting a point potential with an eightball. What happens.</a:t>
+              <a:t>Vector potential q/(vr) intersecting a architrino with an eightball. What happens.</a:t>
             </a:r>
           </a:p>
           <a:p>
@@ -14259,10 +15351,166 @@
           </a:p>
         </p:txBody>
       </p:sp>
+      <p:sp>
+        <p:nvSpPr>
+          <p:cNvPr id="3" name="Footer Placeholder 3"/>
+          <p:cNvSpPr txBox="1">
+            <a:spLocks/>
+          </p:cNvSpPr>
+          <p:nvPr/>
+        </p:nvSpPr>
+        <p:spPr>
+          <a:xfrm>
+            <a:off x="10942204" y="6481737"/>
+            <a:ext cx="1217443" cy="365125"/>
+          </a:xfrm>
+          <a:prstGeom prst="rect">
+            <a:avLst/>
+          </a:prstGeom>
+        </p:spPr>
+        <p:txBody>
+          <a:bodyPr vert="horz" lIns="91440" tIns="45720" rIns="91440" bIns="45720" rtlCol="0" anchor="ctr"/>
+          <a:lstStyle>
+            <a:defPPr>
+              <a:defRPr lang="en-US"/>
+            </a:defPPr>
+            <a:lvl1pPr marL="0" algn="ctr" defTabSz="914400" rtl="0" eaLnBrk="1" latinLnBrk="0" hangingPunct="1">
+              <a:defRPr sz="1200" kern="1200">
+                <a:solidFill>
+                  <a:schemeClr val="tx1">
+                    <a:tint val="75000"/>
+                  </a:schemeClr>
+                </a:solidFill>
+                <a:latin typeface="+mn-lt"/>
+                <a:ea typeface="+mn-ea"/>
+                <a:cs typeface="+mn-cs"/>
+              </a:defRPr>
+            </a:lvl1pPr>
+            <a:lvl2pPr marL="457200" algn="l" defTabSz="914400" rtl="0" eaLnBrk="1" latinLnBrk="0" hangingPunct="1">
+              <a:defRPr sz="1800" kern="1200">
+                <a:solidFill>
+                  <a:schemeClr val="tx1"/>
+                </a:solidFill>
+                <a:latin typeface="+mn-lt"/>
+                <a:ea typeface="+mn-ea"/>
+                <a:cs typeface="+mn-cs"/>
+              </a:defRPr>
+            </a:lvl2pPr>
+            <a:lvl3pPr marL="914400" algn="l" defTabSz="914400" rtl="0" eaLnBrk="1" latinLnBrk="0" hangingPunct="1">
+              <a:defRPr sz="1800" kern="1200">
+                <a:solidFill>
+                  <a:schemeClr val="tx1"/>
+                </a:solidFill>
+                <a:latin typeface="+mn-lt"/>
+                <a:ea typeface="+mn-ea"/>
+                <a:cs typeface="+mn-cs"/>
+              </a:defRPr>
+            </a:lvl3pPr>
+            <a:lvl4pPr marL="1371600" algn="l" defTabSz="914400" rtl="0" eaLnBrk="1" latinLnBrk="0" hangingPunct="1">
+              <a:defRPr sz="1800" kern="1200">
+                <a:solidFill>
+                  <a:schemeClr val="tx1"/>
+                </a:solidFill>
+                <a:latin typeface="+mn-lt"/>
+                <a:ea typeface="+mn-ea"/>
+                <a:cs typeface="+mn-cs"/>
+              </a:defRPr>
+            </a:lvl4pPr>
+            <a:lvl5pPr marL="1828800" algn="l" defTabSz="914400" rtl="0" eaLnBrk="1" latinLnBrk="0" hangingPunct="1">
+              <a:defRPr sz="1800" kern="1200">
+                <a:solidFill>
+                  <a:schemeClr val="tx1"/>
+                </a:solidFill>
+                <a:latin typeface="+mn-lt"/>
+                <a:ea typeface="+mn-ea"/>
+                <a:cs typeface="+mn-cs"/>
+              </a:defRPr>
+            </a:lvl5pPr>
+            <a:lvl6pPr marL="2286000" algn="l" defTabSz="914400" rtl="0" eaLnBrk="1" latinLnBrk="0" hangingPunct="1">
+              <a:defRPr sz="1800" kern="1200">
+                <a:solidFill>
+                  <a:schemeClr val="tx1"/>
+                </a:solidFill>
+                <a:latin typeface="+mn-lt"/>
+                <a:ea typeface="+mn-ea"/>
+                <a:cs typeface="+mn-cs"/>
+              </a:defRPr>
+            </a:lvl6pPr>
+            <a:lvl7pPr marL="2743200" algn="l" defTabSz="914400" rtl="0" eaLnBrk="1" latinLnBrk="0" hangingPunct="1">
+              <a:defRPr sz="1800" kern="1200">
+                <a:solidFill>
+                  <a:schemeClr val="tx1"/>
+                </a:solidFill>
+                <a:latin typeface="+mn-lt"/>
+                <a:ea typeface="+mn-ea"/>
+                <a:cs typeface="+mn-cs"/>
+              </a:defRPr>
+            </a:lvl7pPr>
+            <a:lvl8pPr marL="3200400" algn="l" defTabSz="914400" rtl="0" eaLnBrk="1" latinLnBrk="0" hangingPunct="1">
+              <a:defRPr sz="1800" kern="1200">
+                <a:solidFill>
+                  <a:schemeClr val="tx1"/>
+                </a:solidFill>
+                <a:latin typeface="+mn-lt"/>
+                <a:ea typeface="+mn-ea"/>
+                <a:cs typeface="+mn-cs"/>
+              </a:defRPr>
+            </a:lvl8pPr>
+            <a:lvl9pPr marL="3657600" algn="l" defTabSz="914400" rtl="0" eaLnBrk="1" latinLnBrk="0" hangingPunct="1">
+              <a:defRPr sz="1800" kern="1200">
+                <a:solidFill>
+                  <a:schemeClr val="tx1"/>
+                </a:solidFill>
+                <a:latin typeface="+mn-lt"/>
+                <a:ea typeface="+mn-ea"/>
+                <a:cs typeface="+mn-cs"/>
+              </a:defRPr>
+            </a:lvl9pPr>
+          </a:lstStyle>
+          <a:p>
+            <a:pPr marL="0" marR="0" lvl="0" indent="0" algn="ctr" defTabSz="914400" rtl="0" eaLnBrk="1" fontAlgn="auto" latinLnBrk="0" hangingPunct="1">
+              <a:lnSpc>
+                <a:spcPct val="100000"/>
+              </a:lnSpc>
+              <a:spcBef>
+                <a:spcPts val="0"/>
+              </a:spcBef>
+              <a:spcAft>
+                <a:spcPts val="0"/>
+              </a:spcAft>
+              <a:buClrTx/>
+              <a:buSzTx/>
+              <a:buFontTx/>
+              <a:buNone/>
+              <a:tabLst/>
+              <a:defRPr/>
+            </a:pPr>
+            <a:r>
+              <a:rPr kumimoji="0" lang="en-US" sz="1200" b="0" i="0" u="none" strike="noStrike" kern="1200" cap="none" spc="0" normalizeH="0" baseline="0" noProof="0" dirty="0">
+                <a:ln>
+                  <a:noFill/>
+                </a:ln>
+                <a:solidFill>
+                  <a:prstClr val="black">
+                    <a:tint val="75000"/>
+                  </a:prstClr>
+                </a:solidFill>
+                <a:effectLst/>
+                <a:uLnTx/>
+                <a:uFillTx/>
+                <a:latin typeface="Helvetica Neue" panose="02000503000000020004" pitchFamily="2" charset="0"/>
+                <a:ea typeface="Helvetica Neue" panose="02000503000000020004" pitchFamily="2" charset="0"/>
+                <a:cs typeface="Helvetica Neue" panose="02000503000000020004" pitchFamily="2" charset="0"/>
+              </a:rPr>
+              <a:t>architrino.com</a:t>
+            </a:r>
+          </a:p>
+        </p:txBody>
+      </p:sp>
     </p:spTree>
     <p:extLst>
       <p:ext uri="{BB962C8B-B14F-4D97-AF65-F5344CB8AC3E}">
-        <p14:creationId xmlns:p14="http://schemas.microsoft.com/office/powerpoint/2010/main" val="2018786501"/>
+        <ns3:creationId val="2018786501"/>
       </p:ext>
     </p:extLst>
   </p:cSld>

--- a/reference/archie/presentations/NPQG Fundamentals - Energy.pptx
+++ b/reference/archie/presentations/NPQG Fundamentals - Energy.pptx
@@ -3824,7 +3824,7 @@
 </file>
 
 <file path=ppt/slides/slide1.xml><?xml version="1.0" encoding="utf-8"?>
-<p:sld xmlns:a="http://schemas.openxmlformats.org/drawingml/2006/main" xmlns:a16="http://schemas.microsoft.com/office/drawing/2014/main" xmlns:ns2="http://schemas.openxmlformats.org/markup-compatibility/2006" xmlns:ns4="http://schemas.microsoft.com/office/drawing/2010/main" xmlns:ns5="http://schemas.openxmlformats.org/officeDocument/2006/math" xmlns:ns7="http://schemas.microsoft.com/office/powerpoint/2010/main" xmlns:p="http://schemas.openxmlformats.org/presentationml/2006/main" xmlns:r="http://schemas.openxmlformats.org/officeDocument/2006/relationships">
+<p:sld xmlns:a="http://schemas.openxmlformats.org/drawingml/2006/main" xmlns:a14="http://schemas.microsoft.com/office/drawing/2010/main" xmlns:a16="http://schemas.microsoft.com/office/drawing/2014/main" xmlns:m="http://schemas.openxmlformats.org/officeDocument/2006/math" xmlns:ns2="http://schemas.openxmlformats.org/markup-compatibility/2006" xmlns:ns6="http://schemas.microsoft.com/office/powerpoint/2010/main" xmlns:p="http://schemas.openxmlformats.org/presentationml/2006/main">
   <p:cSld>
     <p:bg>
       <p:bgPr>
@@ -3895,11 +3895,11 @@
                   <a:tabLst/>
                   <a:defRPr/>
                 </a:pPr>
-                <ns4:m>
-                  <ns5:oMath>
-                    <ns5:sSub>
-                      <ns5:sSubPr>
-                        <ns5:ctrlPr>
+                <a14:m>
+                  <m:oMath>
+                    <m:sSub>
+                      <m:sSubPr>
+                        <m:ctrlPr>
                           <a:rPr kumimoji="0" lang="en-US" sz="1800" b="0" i="1" u="none" strike="noStrike" kern="1200" cap="none" spc="0" normalizeH="0" baseline="0" noProof="0" smtClean="0">
                             <a:ln>
                               <a:noFill/>
@@ -3914,10 +3914,10 @@
                             <a:ea typeface="Cambria Math" panose="02040503050406030204" pitchFamily="18" charset="0"/>
                             <a:cs typeface="+mn-cs"/>
                           </a:rPr>
-                        </ns5:ctrlPr>
-                      </ns5:sSubPr>
-                      <ns5:e>
-                        <ns5:r>
+                        </m:ctrlPr>
+                      </m:sSubPr>
+                      <m:e>
+                        <m:r>
                           <a:rPr kumimoji="0" lang="en-US" sz="1800" b="0" i="1" u="none" strike="noStrike" kern="1200" cap="none" spc="0" normalizeH="0" baseline="0" noProof="0" smtClean="0">
                             <a:ln>
                               <a:noFill/>
@@ -3932,11 +3932,11 @@
                             <a:ea typeface="Cambria Math" panose="02040503050406030204" pitchFamily="18" charset="0"/>
                             <a:cs typeface="+mn-cs"/>
                           </a:rPr>
-                          <ns5:t>𝐸𝑛𝑒𝑟𝑔𝑦</ns5:t>
-                        </ns5:r>
-                      </ns5:e>
-                      <ns5:sub>
-                        <ns5:r>
+                          <m:t>𝐸𝑛𝑒𝑟𝑔𝑦</m:t>
+                        </m:r>
+                      </m:e>
+                      <m:sub>
+                        <m:r>
                           <a:rPr kumimoji="0" lang="en-US" sz="1800" b="0" i="1" u="none" strike="noStrike" kern="1200" cap="none" spc="0" normalizeH="0" baseline="0" noProof="0" smtClean="0">
                             <a:ln>
                               <a:noFill/>
@@ -3951,12 +3951,12 @@
                             <a:ea typeface="Cambria Math" panose="02040503050406030204" pitchFamily="18" charset="0"/>
                             <a:cs typeface="+mn-cs"/>
                           </a:rPr>
-                          <ns5:t>𝑇𝑂𝑇𝐴𝐿</ns5:t>
-                        </ns5:r>
-                      </ns5:sub>
-                    </ns5:sSub>
-                  </ns5:oMath>
-                </ns4:m>
+                          <m:t>𝑇𝑂𝑇𝐴𝐿</m:t>
+                        </m:r>
+                      </m:sub>
+                    </m:sSub>
+                  </m:oMath>
+                </a14:m>
                 <a:r>
                   <a:rPr kumimoji="0" lang="en-US" sz="1800" b="0" i="0" u="none" strike="noStrike" kern="1200" cap="none" spc="0" normalizeH="0" baseline="0" noProof="0" dirty="0">
                     <a:ln>
@@ -3974,11 +3974,11 @@
                   </a:rPr>
                   <a:t> = </a:t>
                 </a:r>
-                <ns4:m>
-                  <ns5:oMath>
-                    <ns5:sSub>
-                      <ns5:sSubPr>
-                        <ns5:ctrlPr>
+                <a14:m>
+                  <m:oMath>
+                    <m:sSub>
+                      <m:sSubPr>
+                        <m:ctrlPr>
                           <a:rPr kumimoji="0" lang="en-US" sz="1800" b="0" i="1" u="none" strike="noStrike" kern="1200" cap="none" spc="0" normalizeH="0" baseline="0" noProof="0">
                             <a:ln>
                               <a:noFill/>
@@ -3993,10 +3993,10 @@
                             <a:ea typeface="Cambria Math" panose="02040503050406030204" pitchFamily="18" charset="0"/>
                             <a:cs typeface="+mn-cs"/>
                           </a:rPr>
-                        </ns5:ctrlPr>
-                      </ns5:sSubPr>
-                      <ns5:e>
-                        <ns5:r>
+                        </m:ctrlPr>
+                      </m:sSubPr>
+                      <m:e>
+                        <m:r>
                           <a:rPr kumimoji="0" lang="en-US" sz="1800" b="0" i="1" u="none" strike="noStrike" kern="1200" cap="none" spc="0" normalizeH="0" baseline="0" noProof="0">
                             <a:ln>
                               <a:noFill/>
@@ -4011,11 +4011,11 @@
                             <a:ea typeface="Cambria Math" panose="02040503050406030204" pitchFamily="18" charset="0"/>
                             <a:cs typeface="+mn-cs"/>
                           </a:rPr>
-                          <ns5:t>𝐸𝑛𝑒𝑟𝑔𝑦</ns5:t>
-                        </ns5:r>
-                      </ns5:e>
-                      <ns5:sub>
-                        <ns5:r>
+                          <m:t>𝐸𝑛𝑒𝑟𝑔𝑦</m:t>
+                        </m:r>
+                      </m:e>
+                      <m:sub>
+                        <m:r>
                           <a:rPr kumimoji="0" lang="en-US" sz="1800" b="0" i="1" u="none" strike="noStrike" kern="1200" cap="none" spc="0" normalizeH="0" baseline="0" noProof="0">
                             <a:ln>
                               <a:noFill/>
@@ -4030,12 +4030,12 @@
                             <a:ea typeface="Cambria Math" panose="02040503050406030204" pitchFamily="18" charset="0"/>
                             <a:cs typeface="+mn-cs"/>
                           </a:rPr>
-                          <ns5:t>𝐴𝑃𝑃𝐴𝑅𝐸𝑁𝑇</ns5:t>
-                        </ns5:r>
-                      </ns5:sub>
-                    </ns5:sSub>
-                  </ns5:oMath>
-                </ns4:m>
+                          <m:t>𝐴𝑃𝑃𝐴𝑅𝐸𝑁𝑇</m:t>
+                        </m:r>
+                      </m:sub>
+                    </m:sSub>
+                  </m:oMath>
+                </a14:m>
                 <a:r>
                   <a:rPr kumimoji="0" lang="en-US" sz="1800" b="0" i="0" u="none" strike="noStrike" kern="1200" cap="none" spc="0" normalizeH="0" baseline="0" noProof="0" dirty="0">
                     <a:ln>
@@ -4053,11 +4053,11 @@
                   </a:rPr>
                   <a:t> + </a:t>
                 </a:r>
-                <ns4:m>
-                  <ns5:oMath>
-                    <ns5:sSub>
-                      <ns5:sSubPr>
-                        <ns5:ctrlPr>
+                <a14:m>
+                  <m:oMath>
+                    <m:sSub>
+                      <m:sSubPr>
+                        <m:ctrlPr>
                           <a:rPr kumimoji="0" lang="en-US" sz="1800" b="0" i="1" u="none" strike="noStrike" kern="1200" cap="none" spc="0" normalizeH="0" baseline="0" noProof="0">
                             <a:ln>
                               <a:noFill/>
@@ -4072,10 +4072,10 @@
                             <a:ea typeface="Cambria Math" panose="02040503050406030204" pitchFamily="18" charset="0"/>
                             <a:cs typeface="+mn-cs"/>
                           </a:rPr>
-                        </ns5:ctrlPr>
-                      </ns5:sSubPr>
-                      <ns5:e>
-                        <ns5:r>
+                        </m:ctrlPr>
+                      </m:sSubPr>
+                      <m:e>
+                        <m:r>
                           <a:rPr kumimoji="0" lang="en-US" sz="1800" b="0" i="1" u="none" strike="noStrike" kern="1200" cap="none" spc="0" normalizeH="0" baseline="0" noProof="0">
                             <a:ln>
                               <a:noFill/>
@@ -4090,11 +4090,11 @@
                             <a:ea typeface="Cambria Math" panose="02040503050406030204" pitchFamily="18" charset="0"/>
                             <a:cs typeface="+mn-cs"/>
                           </a:rPr>
-                          <ns5:t>𝐸𝑛𝑒𝑟𝑔𝑦</ns5:t>
-                        </ns5:r>
-                      </ns5:e>
-                      <ns5:sub>
-                        <ns5:r>
+                          <m:t>𝐸𝑛𝑒𝑟𝑔𝑦</m:t>
+                        </m:r>
+                      </m:e>
+                      <m:sub>
+                        <m:r>
                           <a:rPr kumimoji="0" lang="en-US" sz="1800" b="0" i="1" u="none" strike="noStrike" kern="1200" cap="none" spc="0" normalizeH="0" baseline="0" noProof="0" smtClean="0">
                             <a:ln>
                               <a:noFill/>
@@ -4109,12 +4109,12 @@
                             <a:ea typeface="Cambria Math" panose="02040503050406030204" pitchFamily="18" charset="0"/>
                             <a:cs typeface="+mn-cs"/>
                           </a:rPr>
-                          <ns5:t>𝑆𝐻𝐼𝐸𝐿𝐷𝐸𝐷𝑣𝑖𝑎𝑆𝑈𝑃𝐸𝑅𝑃𝑂𝑆𝐼𝑇𝐼𝑂𝑁</ns5:t>
-                        </ns5:r>
-                      </ns5:sub>
-                    </ns5:sSub>
-                  </ns5:oMath>
-                </ns4:m>
+                          <m:t>𝑆𝐻𝐼𝐸𝐿𝐷𝐸𝐷𝑣𝑖𝑎𝑆𝑈𝑃𝐸𝑅𝑃𝑂𝑆𝐼𝑇𝐼𝑂𝑁</m:t>
+                        </m:r>
+                      </m:sub>
+                    </m:sSub>
+                  </m:oMath>
+                </a14:m>
                 <a:r>
                   <a:rPr kumimoji="0" lang="en-US" sz="1800" b="0" i="0" u="none" strike="noStrike" kern="1200" cap="none" spc="0" normalizeH="0" baseline="0" noProof="0" dirty="0">
                     <a:ln>
@@ -4136,50 +4136,7 @@
             </p:txBody>
           </p:sp>
         </ns2:Choice>
-        <ns2:Fallback>
-          <p:sp>
-            <p:nvSpPr>
-              <p:cNvPr id="2" name="TextBox 1">
-                <a:extLst>
-                  <a:ext uri="{FF2B5EF4-FFF2-40B4-BE49-F238E27FC236}">
-                    <a16:creationId id="{09ACD5B1-F579-BE46-A136-9763C9D36C66}"/>
-                  </a:ext>
-                </a:extLst>
-              </p:cNvPr>
-              <p:cNvSpPr txBox="1">
-                <a:spLocks noRot="1" noChangeAspect="1" noMove="1" noResize="1" noEditPoints="1" noAdjustHandles="1" noChangeArrowheads="1" noChangeShapeType="1" noTextEdit="1"/>
-              </p:cNvSpPr>
-              <p:nvPr/>
-            </p:nvSpPr>
-            <p:spPr>
-              <a:xfrm>
-                <a:off x="2693154" y="2369064"/>
-                <a:ext cx="6963894" cy="369332"/>
-              </a:xfrm>
-              <a:prstGeom prst="rect">
-                <a:avLst/>
-              </a:prstGeom>
-              <a:blipFill>
-                <a:blip r:embed="rId3"/>
-                <a:stretch>
-                  <a:fillRect l="-182" t="-6667" b="-26667"/>
-                </a:stretch>
-              </a:blipFill>
-            </p:spPr>
-            <p:txBody>
-              <a:bodyPr/>
-              <a:lstStyle/>
-              <a:p>
-                <a:r>
-                  <a:rPr lang="en-US">
-                    <a:noFill/>
-                  </a:rPr>
-                  <a:t> </a:t>
-                </a:r>
-              </a:p>
-            </p:txBody>
-          </p:sp>
-        </ns2:Fallback>
+        <ns2:Fallback/>
       </ns2:AlternateContent>
       <ns2:AlternateContent>
         <ns2:Choice Requires="a14">
@@ -4228,13 +4185,13 @@
                   <a:tabLst/>
                   <a:defRPr/>
                 </a:pPr>
-                <ns4:m>
-                  <ns5:oMathPara>
-                    <ns5:oMathParaPr>
-                      <ns5:jc ns5:val="centerGroup"/>
-                    </ns5:oMathParaPr>
-                    <ns5:oMath>
-                      <ns5:r>
+                <a14:m>
+                  <m:oMathPara>
+                    <m:oMathParaPr>
+                      <m:jc m:val="centerGroup"/>
+                    </m:oMathParaPr>
+                    <m:oMath>
+                      <m:r>
                         <a:rPr kumimoji="0" lang="en-US" sz="1800" b="0" i="1" u="none" strike="noStrike" kern="1200" cap="none" spc="0" normalizeH="0" baseline="0" noProof="0" smtClean="0">
                           <a:ln>
                             <a:noFill/>
@@ -4249,9 +4206,9 @@
                           <a:ea typeface="Cambria Math" panose="02040503050406030204" pitchFamily="18" charset="0"/>
                           <a:cs typeface="+mn-cs"/>
                         </a:rPr>
-                        <ns5:t>𝑁</ns5:t>
-                      </ns5:r>
-                      <ns5:r>
+                        <m:t>𝑁</m:t>
+                      </m:r>
+                      <m:r>
                         <a:rPr kumimoji="0" lang="en-US" sz="1800" b="0" i="1" u="none" strike="noStrike" kern="1200" cap="none" spc="0" normalizeH="0" baseline="0" noProof="0">
                           <a:ln>
                             <a:noFill/>
@@ -4266,9 +4223,9 @@
                           <a:ea typeface="Cambria Math" panose="02040503050406030204" pitchFamily="18" charset="0"/>
                           <a:cs typeface="+mn-cs"/>
                         </a:rPr>
-                        <ns5:t>𝑎𝑡𝑢𝑟𝑒</ns5:t>
-                      </ns5:r>
-                      <ns5:r>
+                        <m:t>𝑎𝑡𝑢𝑟𝑒</m:t>
+                      </m:r>
+                      <m:r>
                         <a:rPr kumimoji="0" lang="en-US" sz="1800" b="0" i="1" u="none" strike="noStrike" kern="1200" cap="none" spc="0" normalizeH="0" baseline="0" noProof="0">
                           <a:ln>
                             <a:noFill/>
@@ -4283,11 +4240,11 @@
                           <a:ea typeface="Cambria Math" panose="02040503050406030204" pitchFamily="18" charset="0"/>
                           <a:cs typeface="+mn-cs"/>
                         </a:rPr>
-                        <ns5:t> :</ns5:t>
-                      </ns5:r>
-                      <ns5:sSub>
-                        <ns5:sSubPr>
-                          <ns5:ctrlPr>
+                        <m:t> :</m:t>
+                      </m:r>
+                      <m:sSub>
+                        <m:sSubPr>
+                          <m:ctrlPr>
                             <a:rPr kumimoji="0" lang="en-US" sz="1800" b="0" i="1" u="none" strike="noStrike" kern="1200" cap="none" spc="0" normalizeH="0" baseline="0" noProof="0">
                               <a:ln>
                                 <a:noFill/>
@@ -4302,10 +4259,10 @@
                               <a:ea typeface="Cambria Math" panose="02040503050406030204" pitchFamily="18" charset="0"/>
                               <a:cs typeface="+mn-cs"/>
                             </a:rPr>
-                          </ns5:ctrlPr>
-                        </ns5:sSubPr>
-                        <ns5:e>
-                          <ns5:r>
+                          </m:ctrlPr>
+                        </m:sSubPr>
+                        <m:e>
+                          <m:r>
                             <a:rPr kumimoji="0" lang="en-US" sz="1800" b="0" i="1" u="none" strike="noStrike" kern="1200" cap="none" spc="0" normalizeH="0" baseline="0" noProof="0" smtClean="0">
                               <a:ln>
                                 <a:noFill/>
@@ -4320,9 +4277,9 @@
                               <a:ea typeface="Cambria Math" panose="02040503050406030204" pitchFamily="18" charset="0"/>
                               <a:cs typeface="+mn-cs"/>
                             </a:rPr>
-                            <ns5:t> </ns5:t>
-                          </ns5:r>
-                          <ns5:r>
+                            <m:t> </m:t>
+                          </m:r>
+                          <m:r>
                             <a:rPr kumimoji="0" lang="en-US" sz="1800" b="0" i="1" u="none" strike="noStrike" kern="1200" cap="none" spc="0" normalizeH="0" baseline="0" noProof="0">
                               <a:ln>
                                 <a:noFill/>
@@ -4337,11 +4294,11 @@
                               <a:ea typeface="Cambria Math" panose="02040503050406030204" pitchFamily="18" charset="0"/>
                               <a:cs typeface="+mn-cs"/>
                             </a:rPr>
-                            <ns5:t>𝐸𝑛𝑒𝑟𝑔𝑦</ns5:t>
-                          </ns5:r>
-                        </ns5:e>
-                        <ns5:sub>
-                          <ns5:r>
+                            <m:t>𝐸𝑛𝑒𝑟𝑔𝑦</m:t>
+                          </m:r>
+                        </m:e>
+                        <m:sub>
+                          <m:r>
                             <a:rPr kumimoji="0" lang="en-US" sz="1800" b="0" i="1" u="none" strike="noStrike" kern="1200" cap="none" spc="0" normalizeH="0" baseline="0" noProof="0">
                               <a:ln>
                                 <a:noFill/>
@@ -4356,11 +4313,11 @@
                               <a:ea typeface="Cambria Math" panose="02040503050406030204" pitchFamily="18" charset="0"/>
                               <a:cs typeface="+mn-cs"/>
                             </a:rPr>
-                            <ns5:t>𝐴𝑃𝑃𝐴𝑅𝐸𝑁𝑇</ns5:t>
-                          </ns5:r>
-                        </ns5:sub>
-                      </ns5:sSub>
-                      <ns5:r>
+                            <m:t>𝐴𝑃𝑃𝐴𝑅𝐸𝑁𝑇</m:t>
+                          </m:r>
+                        </m:sub>
+                      </m:sSub>
+                      <m:r>
                         <a:rPr kumimoji="0" lang="en-US" sz="1800" b="0" i="1" u="none" strike="noStrike" kern="1200" cap="none" spc="0" normalizeH="0" baseline="0" noProof="0" smtClean="0">
                           <a:ln>
                             <a:noFill/>
@@ -4375,9 +4332,9 @@
                           <a:ea typeface="Cambria Math" panose="02040503050406030204" pitchFamily="18" charset="0"/>
                           <a:cs typeface="+mn-cs"/>
                         </a:rPr>
-                        <ns5:t> </ns5:t>
-                      </ns5:r>
-                      <ns5:r>
+                        <m:t> </m:t>
+                      </m:r>
+                      <m:r>
                         <a:rPr kumimoji="0" lang="en-US" sz="1800" b="0" i="1" u="none" strike="noStrike" kern="1200" cap="none" spc="0" normalizeH="0" baseline="0" noProof="0">
                           <a:ln>
                             <a:noFill/>
@@ -4392,9 +4349,9 @@
                           <a:ea typeface="Cambria Math" panose="02040503050406030204" pitchFamily="18" charset="0"/>
                           <a:cs typeface="+mn-cs"/>
                         </a:rPr>
-                        <ns5:t>= </ns5:t>
-                      </ns5:r>
-                      <ns5:r>
+                        <m:t>= </m:t>
+                      </m:r>
+                      <m:r>
                         <a:rPr kumimoji="0" lang="en-US" sz="1800" b="0" i="1" u="none" strike="noStrike" kern="1200" cap="none" spc="0" normalizeH="0" baseline="0" noProof="0">
                           <a:ln>
                             <a:noFill/>
@@ -4409,12 +4366,12 @@
                           <a:ea typeface="Cambria Math" panose="02040503050406030204" pitchFamily="18" charset="0"/>
                           <a:cs typeface="+mn-cs"/>
                         </a:rPr>
-                        <ns5:t>𝑀𝑎𝑠𝑠</ns5:t>
-                      </ns5:r>
-                      <ns5:r>
-                        <ns5:rPr>
-                          <ns5:nor/>
-                        </ns5:rPr>
+                        <m:t>𝑀𝑎𝑠𝑠</m:t>
+                      </m:r>
+                      <m:r>
+                        <m:rPr>
+                          <m:nor/>
+                        </m:rPr>
                         <a:rPr kumimoji="0" lang="en-US" sz="1800" b="0" i="0" u="none" strike="noStrike" kern="1200" cap="none" spc="0" normalizeH="0" baseline="0" noProof="0" dirty="0">
                           <a:ln>
                             <a:noFill/>
@@ -4429,11 +4386,11 @@
                           <a:ea typeface="+mn-ea"/>
                           <a:cs typeface="+mn-cs"/>
                         </a:rPr>
-                        <ns5:t> ∗ </ns5:t>
-                      </ns5:r>
-                      <ns5:sSup>
-                        <ns5:sSupPr>
-                          <ns5:ctrlPr>
+                        <m:t> ∗ </m:t>
+                      </m:r>
+                      <m:sSup>
+                        <m:sSupPr>
+                          <m:ctrlPr>
                             <a:rPr kumimoji="0" lang="en-US" sz="1800" b="0" i="1" u="none" strike="noStrike" kern="1200" cap="none" spc="0" normalizeH="0" baseline="0" noProof="0">
                               <a:ln>
                                 <a:noFill/>
@@ -4448,10 +4405,10 @@
                               <a:ea typeface="+mn-ea"/>
                               <a:cs typeface="+mn-cs"/>
                             </a:rPr>
-                          </ns5:ctrlPr>
-                        </ns5:sSupPr>
-                        <ns5:e>
-                          <ns5:r>
+                          </m:ctrlPr>
+                        </m:sSupPr>
+                        <m:e>
+                          <m:r>
                             <a:rPr kumimoji="0" lang="en-US" sz="1800" b="0" i="1" u="none" strike="noStrike" kern="1200" cap="none" spc="0" normalizeH="0" baseline="0" noProof="0">
                               <a:ln>
                                 <a:noFill/>
@@ -4466,11 +4423,11 @@
                               <a:ea typeface="+mn-ea"/>
                               <a:cs typeface="+mn-cs"/>
                             </a:rPr>
-                            <ns5:t>𝑐</ns5:t>
-                          </ns5:r>
-                        </ns5:e>
-                        <ns5:sup>
-                          <ns5:r>
+                            <m:t>𝑐</m:t>
+                          </m:r>
+                        </m:e>
+                        <m:sup>
+                          <m:r>
                             <a:rPr kumimoji="0" lang="en-US" sz="1800" b="0" i="1" u="none" strike="noStrike" kern="1200" cap="none" spc="0" normalizeH="0" baseline="0" noProof="0">
                               <a:ln>
                                 <a:noFill/>
@@ -4485,14 +4442,14 @@
                               <a:ea typeface="+mn-ea"/>
                               <a:cs typeface="+mn-cs"/>
                             </a:rPr>
-                            <ns5:t>2</ns5:t>
-                          </ns5:r>
-                        </ns5:sup>
-                      </ns5:sSup>
-                      <ns5:r>
-                        <ns5:rPr>
-                          <ns5:nor/>
-                        </ns5:rPr>
+                            <m:t>2</m:t>
+                          </m:r>
+                        </m:sup>
+                      </m:sSup>
+                      <m:r>
+                        <m:rPr>
+                          <m:nor/>
+                        </m:rPr>
                         <a:rPr kumimoji="0" lang="en-US" sz="1800" b="0" i="0" u="none" strike="noStrike" kern="1200" cap="none" spc="0" normalizeH="0" baseline="0" noProof="0" dirty="0">
                           <a:ln>
                             <a:noFill/>
@@ -4507,11 +4464,11 @@
                           <a:ea typeface="+mn-ea"/>
                           <a:cs typeface="+mn-cs"/>
                         </a:rPr>
-                        <ns5:t> </ns5:t>
-                      </ns5:r>
-                    </ns5:oMath>
-                  </ns5:oMathPara>
-                </ns4:m>
+                        <m:t> </m:t>
+                      </m:r>
+                    </m:oMath>
+                  </m:oMathPara>
+                </a14:m>
                 <a:endParaRPr kumimoji="0" lang="en-US" sz="1800" b="0" i="0" u="none" strike="noStrike" kern="1200" cap="none" spc="0" normalizeH="0" baseline="0" noProof="0" dirty="0">
                   <a:ln>
                     <a:noFill/>
@@ -4530,50 +4487,7 @@
             </p:txBody>
           </p:sp>
         </ns2:Choice>
-        <ns2:Fallback>
-          <p:sp>
-            <p:nvSpPr>
-              <p:cNvPr id="4" name="TextBox 3">
-                <a:extLst>
-                  <a:ext uri="{FF2B5EF4-FFF2-40B4-BE49-F238E27FC236}">
-                    <a16:creationId id="{1F81FDB4-73FA-704E-B5D5-4BC4D73D775C}"/>
-                  </a:ext>
-                </a:extLst>
-              </p:cNvPr>
-              <p:cNvSpPr txBox="1">
-                <a:spLocks noRot="1" noChangeAspect="1" noMove="1" noResize="1" noEditPoints="1" noAdjustHandles="1" noChangeArrowheads="1" noChangeShapeType="1" noTextEdit="1"/>
-              </p:cNvSpPr>
-              <p:nvPr/>
-            </p:nvSpPr>
-            <p:spPr>
-              <a:xfrm>
-                <a:off x="4058368" y="1651873"/>
-                <a:ext cx="4233467" cy="369332"/>
-              </a:xfrm>
-              <a:prstGeom prst="rect">
-                <a:avLst/>
-              </a:prstGeom>
-              <a:blipFill>
-                <a:blip r:embed="rId4"/>
-                <a:stretch>
-                  <a:fillRect t="-6667" b="-16667"/>
-                </a:stretch>
-              </a:blipFill>
-            </p:spPr>
-            <p:txBody>
-              <a:bodyPr/>
-              <a:lstStyle/>
-              <a:p>
-                <a:r>
-                  <a:rPr lang="en-US">
-                    <a:noFill/>
-                  </a:rPr>
-                  <a:t> </a:t>
-                </a:r>
-              </a:p>
-            </p:txBody>
-          </p:sp>
-        </ns2:Fallback>
+        <ns2:Fallback/>
       </ns2:AlternateContent>
       <ns2:AlternateContent>
         <ns2:Choice Requires="a14">
@@ -4622,9 +4536,9 @@
                   <a:tabLst/>
                   <a:defRPr/>
                 </a:pPr>
-                <ns4:m>
-                  <ns5:oMath>
-                    <ns5:r>
+                <a14:m>
+                  <m:oMath>
+                    <m:r>
                       <a:rPr kumimoji="0" lang="en-US" sz="1800" b="0" i="1" u="none" strike="noStrike" kern="1200" cap="none" spc="0" normalizeH="0" baseline="0" noProof="0" smtClean="0">
                         <a:ln>
                           <a:noFill/>
@@ -4639,9 +4553,9 @@
                         <a:ea typeface="Cambria Math" panose="02040503050406030204" pitchFamily="18" charset="0"/>
                         <a:cs typeface="+mn-cs"/>
                       </a:rPr>
-                      <ns5:t>𝐸𝑖𝑛𝑠𝑡𝑒𝑖𝑛</ns5:t>
-                    </ns5:r>
-                    <ns5:r>
+                      <m:t>𝐸𝑖𝑛𝑠𝑡𝑒𝑖𝑛</m:t>
+                    </m:r>
+                    <m:r>
                       <a:rPr kumimoji="0" lang="en-US" sz="1800" b="0" i="1" u="none" strike="noStrike" kern="1200" cap="none" spc="0" normalizeH="0" baseline="0" noProof="0" smtClean="0">
                         <a:ln>
                           <a:noFill/>
@@ -4656,9 +4570,9 @@
                         <a:ea typeface="Cambria Math" panose="02040503050406030204" pitchFamily="18" charset="0"/>
                         <a:cs typeface="+mn-cs"/>
                       </a:rPr>
-                      <ns5:t> : </ns5:t>
-                    </ns5:r>
-                    <ns5:r>
+                      <m:t> : </m:t>
+                    </m:r>
+                    <m:r>
                       <a:rPr kumimoji="0" lang="en-US" sz="1800" b="0" i="1" u="none" strike="noStrike" kern="1200" cap="none" spc="0" normalizeH="0" baseline="0" noProof="0" smtClean="0">
                         <a:ln>
                           <a:noFill/>
@@ -4673,9 +4587,9 @@
                         <a:ea typeface="Cambria Math" panose="02040503050406030204" pitchFamily="18" charset="0"/>
                         <a:cs typeface="+mn-cs"/>
                       </a:rPr>
-                      <ns5:t>𝐸𝑛𝑒𝑟𝑔𝑦</ns5:t>
-                    </ns5:r>
-                    <ns5:r>
+                      <m:t>𝐸𝑛𝑒𝑟𝑔𝑦</m:t>
+                    </m:r>
+                    <m:r>
                       <a:rPr kumimoji="0" lang="en-US" sz="1800" b="0" i="1" u="none" strike="noStrike" kern="1200" cap="none" spc="0" normalizeH="0" baseline="0" noProof="0" smtClean="0">
                         <a:ln>
                           <a:noFill/>
@@ -4690,9 +4604,9 @@
                         <a:ea typeface="Cambria Math" panose="02040503050406030204" pitchFamily="18" charset="0"/>
                         <a:cs typeface="+mn-cs"/>
                       </a:rPr>
-                      <ns5:t>= </ns5:t>
-                    </ns5:r>
-                    <ns5:r>
+                      <m:t>= </m:t>
+                    </m:r>
+                    <m:r>
                       <a:rPr kumimoji="0" lang="en-US" sz="1800" b="0" i="1" u="none" strike="noStrike" kern="1200" cap="none" spc="0" normalizeH="0" baseline="0" noProof="0">
                         <a:ln>
                           <a:noFill/>
@@ -4707,10 +4621,10 @@
                         <a:ea typeface="Cambria Math" panose="02040503050406030204" pitchFamily="18" charset="0"/>
                         <a:cs typeface="+mn-cs"/>
                       </a:rPr>
-                      <ns5:t>𝑀𝑎𝑠𝑠</ns5:t>
-                    </ns5:r>
-                  </ns5:oMath>
-                </ns4:m>
+                      <m:t>𝑀𝑎𝑠𝑠</m:t>
+                    </m:r>
+                  </m:oMath>
+                </a14:m>
                 <a:r>
                   <a:rPr kumimoji="0" lang="en-US" sz="1800" b="0" i="0" u="none" strike="noStrike" kern="1200" cap="none" spc="0" normalizeH="0" baseline="0" noProof="0" dirty="0">
                     <a:ln>
@@ -4728,11 +4642,11 @@
                   </a:rPr>
                   <a:t> * </a:t>
                 </a:r>
-                <ns4:m>
-                  <ns5:oMath>
-                    <ns5:sSup>
-                      <ns5:sSupPr>
-                        <ns5:ctrlPr>
+                <a14:m>
+                  <m:oMath>
+                    <m:sSup>
+                      <m:sSupPr>
+                        <m:ctrlPr>
                           <a:rPr kumimoji="0" lang="en-US" sz="1800" b="0" i="1" u="none" strike="noStrike" kern="1200" cap="none" spc="0" normalizeH="0" baseline="0" noProof="0" smtClean="0">
                             <a:ln>
                               <a:noFill/>
@@ -4747,10 +4661,10 @@
                             <a:ea typeface="+mn-ea"/>
                             <a:cs typeface="+mn-cs"/>
                           </a:rPr>
-                        </ns5:ctrlPr>
-                      </ns5:sSupPr>
-                      <ns5:e>
-                        <ns5:r>
+                        </m:ctrlPr>
+                      </m:sSupPr>
+                      <m:e>
+                        <m:r>
                           <a:rPr kumimoji="0" lang="en-US" sz="1800" b="0" i="1" u="none" strike="noStrike" kern="1200" cap="none" spc="0" normalizeH="0" baseline="0" noProof="0" smtClean="0">
                             <a:ln>
                               <a:noFill/>
@@ -4765,11 +4679,11 @@
                             <a:ea typeface="+mn-ea"/>
                             <a:cs typeface="+mn-cs"/>
                           </a:rPr>
-                          <ns5:t>𝑐</ns5:t>
-                        </ns5:r>
-                      </ns5:e>
-                      <ns5:sup>
-                        <ns5:r>
+                          <m:t>𝑐</m:t>
+                        </m:r>
+                      </m:e>
+                      <m:sup>
+                        <m:r>
                           <a:rPr kumimoji="0" lang="en-US" sz="1800" b="0" i="1" u="none" strike="noStrike" kern="1200" cap="none" spc="0" normalizeH="0" baseline="0" noProof="0" smtClean="0">
                             <a:ln>
                               <a:noFill/>
@@ -4784,12 +4698,12 @@
                             <a:ea typeface="+mn-ea"/>
                             <a:cs typeface="+mn-cs"/>
                           </a:rPr>
-                          <ns5:t>2</ns5:t>
-                        </ns5:r>
-                      </ns5:sup>
-                    </ns5:sSup>
-                  </ns5:oMath>
-                </ns4:m>
+                          <m:t>2</m:t>
+                        </m:r>
+                      </m:sup>
+                    </m:sSup>
+                  </m:oMath>
+                </a14:m>
                 <a:r>
                   <a:rPr kumimoji="0" lang="en-US" sz="1800" b="0" i="0" u="none" strike="noStrike" kern="1200" cap="none" spc="0" normalizeH="0" baseline="0" noProof="0" dirty="0">
                     <a:ln>
@@ -4811,50 +4725,7 @@
             </p:txBody>
           </p:sp>
         </ns2:Choice>
-        <ns2:Fallback>
-          <p:sp>
-            <p:nvSpPr>
-              <p:cNvPr id="11" name="TextBox 10">
-                <a:extLst>
-                  <a:ext uri="{FF2B5EF4-FFF2-40B4-BE49-F238E27FC236}">
-                    <a16:creationId id="{4929D634-5CDA-EA4B-AB4E-C56D95412138}"/>
-                  </a:ext>
-                </a:extLst>
-              </p:cNvPr>
-              <p:cNvSpPr txBox="1">
-                <a:spLocks noRot="1" noChangeAspect="1" noMove="1" noResize="1" noEditPoints="1" noAdjustHandles="1" noChangeArrowheads="1" noChangeShapeType="1" noTextEdit="1"/>
-              </p:cNvSpPr>
-              <p:nvPr/>
-            </p:nvSpPr>
-            <p:spPr>
-              <a:xfrm>
-                <a:off x="4435747" y="934682"/>
-                <a:ext cx="3478709" cy="369332"/>
-              </a:xfrm>
-              <a:prstGeom prst="rect">
-                <a:avLst/>
-              </a:prstGeom>
-              <a:blipFill>
-                <a:blip r:embed="rId5"/>
-                <a:stretch>
-                  <a:fillRect t="-6667" b="-26667"/>
-                </a:stretch>
-              </a:blipFill>
-            </p:spPr>
-            <p:txBody>
-              <a:bodyPr/>
-              <a:lstStyle/>
-              <a:p>
-                <a:r>
-                  <a:rPr lang="en-US">
-                    <a:noFill/>
-                  </a:rPr>
-                  <a:t> </a:t>
-                </a:r>
-              </a:p>
-            </p:txBody>
-          </p:sp>
-        </ns2:Fallback>
+        <ns2:Fallback/>
       </ns2:AlternateContent>
       <ns2:AlternateContent>
         <ns2:Choice Requires="a14">
@@ -4905,13 +4776,13 @@
                   <a:tabLst/>
                   <a:defRPr/>
                 </a:pPr>
-                <ns4:m>
-                  <ns5:oMathPara>
-                    <ns5:oMathParaPr>
-                      <ns5:jc ns5:val="centerGroup"/>
-                    </ns5:oMathParaPr>
-                    <ns5:oMath>
-                      <ns5:r>
+                <a14:m>
+                  <m:oMathPara>
+                    <m:oMathParaPr>
+                      <m:jc m:val="centerGroup"/>
+                    </m:oMathParaPr>
+                    <m:oMath>
+                      <m:r>
                         <a:rPr kumimoji="0" lang="en-US" sz="1800" b="1" i="1" u="none" strike="noStrike" kern="1200" cap="none" spc="0" normalizeH="0" baseline="0" noProof="0" smtClean="0">
                           <a:ln>
                             <a:noFill/>
@@ -4926,9 +4797,9 @@
                           <a:ea typeface="Cambria Math" panose="02040503050406030204" pitchFamily="18" charset="0"/>
                           <a:cs typeface="+mn-cs"/>
                         </a:rPr>
-                        <ns5:t>𝑺𝒕𝒂𝒏𝒅𝒂𝒓𝒅</ns5:t>
-                      </ns5:r>
-                      <ns5:r>
+                        <m:t>𝑺𝒕𝒂𝒏𝒅𝒂𝒓𝒅</m:t>
+                      </m:r>
+                      <m:r>
                         <a:rPr kumimoji="0" lang="en-US" sz="1800" b="1" i="1" u="none" strike="noStrike" kern="1200" cap="none" spc="0" normalizeH="0" baseline="0" noProof="0" smtClean="0">
                           <a:ln>
                             <a:noFill/>
@@ -4943,9 +4814,9 @@
                           <a:ea typeface="Cambria Math" panose="02040503050406030204" pitchFamily="18" charset="0"/>
                           <a:cs typeface="+mn-cs"/>
                         </a:rPr>
-                        <ns5:t> </ns5:t>
-                      </ns5:r>
-                      <ns5:r>
+                        <m:t> </m:t>
+                      </m:r>
+                      <m:r>
                         <a:rPr kumimoji="0" lang="en-US" sz="1800" b="1" i="1" u="none" strike="noStrike" kern="1200" cap="none" spc="0" normalizeH="0" baseline="0" noProof="0" smtClean="0">
                           <a:ln>
                             <a:noFill/>
@@ -4960,9 +4831,9 @@
                           <a:ea typeface="Cambria Math" panose="02040503050406030204" pitchFamily="18" charset="0"/>
                           <a:cs typeface="+mn-cs"/>
                         </a:rPr>
-                        <ns5:t>𝒎𝒂𝒕𝒕𝒆𝒓</ns5:t>
-                      </ns5:r>
-                      <ns5:r>
+                        <m:t>𝒎𝒂𝒕𝒕𝒆𝒓</m:t>
+                      </m:r>
+                      <m:r>
                         <a:rPr kumimoji="0" lang="en-US" sz="1800" b="1" i="1" u="none" strike="noStrike" kern="1200" cap="none" spc="0" normalizeH="0" baseline="0" noProof="0" smtClean="0">
                           <a:ln>
                             <a:noFill/>
@@ -4977,9 +4848,9 @@
                           <a:ea typeface="Cambria Math" panose="02040503050406030204" pitchFamily="18" charset="0"/>
                           <a:cs typeface="+mn-cs"/>
                         </a:rPr>
-                        <ns5:t> </ns5:t>
-                      </ns5:r>
-                      <ns5:r>
+                        <m:t> </m:t>
+                      </m:r>
+                      <m:r>
                         <a:rPr kumimoji="0" lang="en-US" sz="1800" b="1" i="1" u="none" strike="noStrike" kern="1200" cap="none" spc="0" normalizeH="0" baseline="0" noProof="0" smtClean="0">
                           <a:ln>
                             <a:noFill/>
@@ -4994,9 +4865,9 @@
                           <a:ea typeface="Cambria Math" panose="02040503050406030204" pitchFamily="18" charset="0"/>
                           <a:cs typeface="+mn-cs"/>
                         </a:rPr>
-                        <ns5:t>𝒑𝒂𝒓𝒕𝒊𝒄𝒍𝒆</ns5:t>
-                      </ns5:r>
-                      <ns5:r>
+                        <m:t>𝒑𝒂𝒓𝒕𝒊𝒄𝒍𝒆</m:t>
+                      </m:r>
+                      <m:r>
                         <a:rPr kumimoji="0" lang="en-US" sz="1800" b="1" i="1" u="none" strike="noStrike" kern="1200" cap="none" spc="0" normalizeH="0" baseline="0" noProof="0" smtClean="0">
                           <a:ln>
                             <a:noFill/>
@@ -5011,9 +4882,9 @@
                           <a:ea typeface="Cambria Math" panose="02040503050406030204" pitchFamily="18" charset="0"/>
                           <a:cs typeface="+mn-cs"/>
                         </a:rPr>
-                        <ns5:t> </ns5:t>
-                      </ns5:r>
-                      <ns5:r>
+                        <m:t> </m:t>
+                      </m:r>
+                      <m:r>
                         <a:rPr kumimoji="0" lang="en-US" sz="1800" b="1" i="1" u="none" strike="noStrike" kern="1200" cap="none" spc="0" normalizeH="0" baseline="0" noProof="0" smtClean="0">
                           <a:ln>
                             <a:noFill/>
@@ -5028,9 +4899,9 @@
                           <a:ea typeface="Cambria Math" panose="02040503050406030204" pitchFamily="18" charset="0"/>
                           <a:cs typeface="+mn-cs"/>
                         </a:rPr>
-                        <ns5:t>𝒂𝒔𝒔𝒆𝒎𝒃𝒍𝒚</ns5:t>
-                      </ns5:r>
-                      <ns5:r>
+                        <m:t>𝒂𝒔𝒔𝒆𝒎𝒃𝒍𝒚</m:t>
+                      </m:r>
+                      <m:r>
                         <a:rPr kumimoji="0" lang="en-US" sz="1800" b="1" i="1" u="none" strike="noStrike" kern="1200" cap="none" spc="0" normalizeH="0" baseline="0" noProof="0" smtClean="0">
                           <a:ln>
                             <a:noFill/>
@@ -5045,9 +4916,9 @@
                           <a:ea typeface="Cambria Math" panose="02040503050406030204" pitchFamily="18" charset="0"/>
                           <a:cs typeface="+mn-cs"/>
                         </a:rPr>
-                        <ns5:t> </ns5:t>
-                      </ns5:r>
-                      <ns5:r>
+                        <m:t> </m:t>
+                      </m:r>
+                      <m:r>
                         <a:rPr kumimoji="0" lang="en-US" sz="1800" b="1" i="1" u="none" strike="noStrike" kern="1200" cap="none" spc="0" normalizeH="0" baseline="0" noProof="0" smtClean="0">
                           <a:ln>
                             <a:noFill/>
@@ -5062,9 +4933,9 @@
                           <a:ea typeface="Cambria Math" panose="02040503050406030204" pitchFamily="18" charset="0"/>
                           <a:cs typeface="+mn-cs"/>
                         </a:rPr>
-                        <ns5:t>𝒂𝒕</ns5:t>
-                      </ns5:r>
-                      <ns5:r>
+                        <m:t>𝒂𝒕</m:t>
+                      </m:r>
+                      <m:r>
                         <a:rPr kumimoji="0" lang="en-US" sz="1800" b="1" i="1" u="none" strike="noStrike" kern="1200" cap="none" spc="0" normalizeH="0" baseline="0" noProof="0" smtClean="0">
                           <a:ln>
                             <a:noFill/>
@@ -5079,9 +4950,9 @@
                           <a:ea typeface="Cambria Math" panose="02040503050406030204" pitchFamily="18" charset="0"/>
                           <a:cs typeface="+mn-cs"/>
                         </a:rPr>
-                        <ns5:t> </ns5:t>
-                      </ns5:r>
-                      <ns5:r>
+                        <m:t> </m:t>
+                      </m:r>
+                      <m:r>
                         <a:rPr kumimoji="0" lang="en-US" sz="1800" b="1" i="1" u="none" strike="noStrike" kern="1200" cap="none" spc="0" normalizeH="0" baseline="0" noProof="0" smtClean="0">
                           <a:ln>
                             <a:noFill/>
@@ -5096,9 +4967,9 @@
                           <a:ea typeface="Cambria Math" panose="02040503050406030204" pitchFamily="18" charset="0"/>
                           <a:cs typeface="+mn-cs"/>
                         </a:rPr>
-                        <ns5:t>𝒓𝒆𝒔𝒕</ns5:t>
-                      </ns5:r>
-                      <ns5:r>
+                        <m:t>𝒓𝒆𝒔𝒕</m:t>
+                      </m:r>
+                      <m:r>
                         <a:rPr kumimoji="0" lang="en-US" sz="1800" b="1" i="1" u="none" strike="noStrike" kern="1200" cap="none" spc="0" normalizeH="0" baseline="0" noProof="0" smtClean="0">
                           <a:ln>
                             <a:noFill/>
@@ -5113,9 +4984,9 @@
                           <a:ea typeface="Cambria Math" panose="02040503050406030204" pitchFamily="18" charset="0"/>
                           <a:cs typeface="+mn-cs"/>
                         </a:rPr>
-                        <ns5:t> </ns5:t>
-                      </ns5:r>
-                      <ns5:r>
+                        <m:t> </m:t>
+                      </m:r>
+                      <m:r>
                         <a:rPr kumimoji="0" lang="en-US" sz="1800" b="1" i="1" u="none" strike="noStrike" kern="1200" cap="none" spc="0" normalizeH="0" baseline="0" noProof="0" smtClean="0">
                           <a:ln>
                             <a:noFill/>
@@ -5130,9 +5001,9 @@
                           <a:ea typeface="Cambria Math" panose="02040503050406030204" pitchFamily="18" charset="0"/>
                           <a:cs typeface="+mn-cs"/>
                         </a:rPr>
-                        <ns5:t>𝒊𝒏</ns5:t>
-                      </ns5:r>
-                      <ns5:r>
+                        <m:t>𝒊𝒏</m:t>
+                      </m:r>
+                      <m:r>
                         <a:rPr kumimoji="0" lang="en-US" sz="1800" b="1" i="1" u="none" strike="noStrike" kern="1200" cap="none" spc="0" normalizeH="0" baseline="0" noProof="0" smtClean="0">
                           <a:ln>
                             <a:noFill/>
@@ -5147,9 +5018,9 @@
                           <a:ea typeface="Cambria Math" panose="02040503050406030204" pitchFamily="18" charset="0"/>
                           <a:cs typeface="+mn-cs"/>
                         </a:rPr>
-                        <ns5:t> </ns5:t>
-                      </ns5:r>
-                      <ns5:r>
+                        <m:t> </m:t>
+                      </m:r>
+                      <m:r>
                         <a:rPr kumimoji="0" lang="en-US" sz="1800" b="1" i="1" u="none" strike="noStrike" kern="1200" cap="none" spc="0" normalizeH="0" baseline="0" noProof="0" smtClean="0">
                           <a:ln>
                             <a:noFill/>
@@ -5164,9 +5035,9 @@
                           <a:ea typeface="Cambria Math" panose="02040503050406030204" pitchFamily="18" charset="0"/>
                           <a:cs typeface="+mn-cs"/>
                         </a:rPr>
-                        <ns5:t>𝒕𝒉𝒆</ns5:t>
-                      </ns5:r>
-                      <ns5:r>
+                        <m:t>𝒕𝒉𝒆</m:t>
+                      </m:r>
+                      <m:r>
                         <a:rPr kumimoji="0" lang="en-US" sz="1800" b="1" i="1" u="none" strike="noStrike" kern="1200" cap="none" spc="0" normalizeH="0" baseline="0" noProof="0" smtClean="0">
                           <a:ln>
                             <a:noFill/>
@@ -5181,9 +5052,9 @@
                           <a:ea typeface="Cambria Math" panose="02040503050406030204" pitchFamily="18" charset="0"/>
                           <a:cs typeface="+mn-cs"/>
                         </a:rPr>
-                        <ns5:t> </ns5:t>
-                      </ns5:r>
-                      <ns5:r>
+                        <m:t> </m:t>
+                      </m:r>
+                      <m:r>
                         <a:rPr kumimoji="0" lang="en-US" sz="1800" b="1" i="1" u="none" strike="noStrike" kern="1200" cap="none" spc="0" normalizeH="0" baseline="0" noProof="0" smtClean="0">
                           <a:ln>
                             <a:noFill/>
@@ -5198,11 +5069,11 @@
                           <a:ea typeface="Cambria Math" panose="02040503050406030204" pitchFamily="18" charset="0"/>
                           <a:cs typeface="+mn-cs"/>
                         </a:rPr>
-                        <ns5:t>𝒂𝒆𝒕𝒉𝒆𝒓</ns5:t>
-                      </ns5:r>
-                    </ns5:oMath>
-                  </ns5:oMathPara>
-                </ns4:m>
+                        <m:t>𝒂𝒆𝒕𝒉𝒆𝒓</m:t>
+                      </m:r>
+                    </m:oMath>
+                  </m:oMathPara>
+                </a14:m>
                 <a:endParaRPr kumimoji="0" lang="en-US" sz="1800" b="1" i="0" u="none" strike="noStrike" kern="1200" cap="none" spc="0" normalizeH="0" baseline="0" noProof="0" dirty="0">
                   <a:ln>
                     <a:noFill/>
@@ -5221,50 +5092,7 @@
             </p:txBody>
           </p:sp>
         </ns2:Choice>
-        <ns2:Fallback>
-          <p:sp>
-            <p:nvSpPr>
-              <p:cNvPr id="14" name="TextBox 13">
-                <a:extLst>
-                  <a:ext uri="{FF2B5EF4-FFF2-40B4-BE49-F238E27FC236}">
-                    <a16:creationId id="{E13AC0F3-5C34-2644-BA21-4D36596EADBA}"/>
-                  </a:ext>
-                </a:extLst>
-              </p:cNvPr>
-              <p:cNvSpPr txBox="1">
-                <a:spLocks noRot="1" noChangeAspect="1" noMove="1" noResize="1" noEditPoints="1" noAdjustHandles="1" noChangeArrowheads="1" noChangeShapeType="1" noTextEdit="1"/>
-              </p:cNvSpPr>
-              <p:nvPr/>
-            </p:nvSpPr>
-            <p:spPr>
-              <a:xfrm>
-                <a:off x="2705240" y="245304"/>
-                <a:ext cx="6591869" cy="369332"/>
-              </a:xfrm>
-              <a:prstGeom prst="rect">
-                <a:avLst/>
-              </a:prstGeom>
-              <a:blipFill>
-                <a:blip r:embed="rId6"/>
-                <a:stretch>
-                  <a:fillRect b="-16667"/>
-                </a:stretch>
-              </a:blipFill>
-            </p:spPr>
-            <p:txBody>
-              <a:bodyPr/>
-              <a:lstStyle/>
-              <a:p>
-                <a:r>
-                  <a:rPr lang="en-US">
-                    <a:noFill/>
-                  </a:rPr>
-                  <a:t> </a:t>
-                </a:r>
-              </a:p>
-            </p:txBody>
-          </p:sp>
-        </ns2:Fallback>
+        <ns2:Fallback/>
       </ns2:AlternateContent>
       <ns2:AlternateContent>
         <ns2:Choice Requires="a14">
@@ -5313,11 +5141,11 @@
                   <a:tabLst/>
                   <a:defRPr/>
                 </a:pPr>
-                <ns4:m>
-                  <ns5:oMath>
-                    <ns5:sSub>
-                      <ns5:sSubPr>
-                        <ns5:ctrlPr>
+                <a14:m>
+                  <m:oMath>
+                    <m:sSub>
+                      <m:sSubPr>
+                        <m:ctrlPr>
                           <a:rPr kumimoji="0" lang="en-US" sz="1800" b="0" i="1" u="none" strike="noStrike" kern="1200" cap="none" spc="0" normalizeH="0" baseline="0" noProof="0" smtClean="0">
                             <a:ln>
                               <a:noFill/>
@@ -5332,10 +5160,10 @@
                             <a:ea typeface="Cambria Math" panose="02040503050406030204" pitchFamily="18" charset="0"/>
                             <a:cs typeface="+mn-cs"/>
                           </a:rPr>
-                        </ns5:ctrlPr>
-                      </ns5:sSubPr>
-                      <ns5:e>
-                        <ns5:r>
+                        </m:ctrlPr>
+                      </m:sSubPr>
+                      <m:e>
+                        <m:r>
                           <a:rPr kumimoji="0" lang="en-US" sz="1800" b="0" i="1" u="none" strike="noStrike" kern="1200" cap="none" spc="0" normalizeH="0" baseline="0" noProof="0">
                             <a:ln>
                               <a:noFill/>
@@ -5350,11 +5178,11 @@
                             <a:ea typeface="Cambria Math" panose="02040503050406030204" pitchFamily="18" charset="0"/>
                             <a:cs typeface="+mn-cs"/>
                           </a:rPr>
-                          <ns5:t>𝐸𝑛𝑒𝑟𝑔𝑦</ns5:t>
-                        </ns5:r>
-                      </ns5:e>
-                      <ns5:sub>
-                        <ns5:r>
+                          <m:t>𝐸𝑛𝑒𝑟𝑔𝑦</m:t>
+                        </m:r>
+                      </m:e>
+                      <m:sub>
+                        <m:r>
                           <a:rPr kumimoji="0" lang="en-US" sz="1800" b="0" i="1" u="none" strike="noStrike" kern="1200" cap="none" spc="0" normalizeH="0" baseline="0" noProof="0">
                             <a:ln>
                               <a:noFill/>
@@ -5369,11 +5197,11 @@
                             <a:ea typeface="Cambria Math" panose="02040503050406030204" pitchFamily="18" charset="0"/>
                             <a:cs typeface="+mn-cs"/>
                           </a:rPr>
-                          <ns5:t>𝑇𝑂𝑇𝐴𝐿</ns5:t>
-                        </ns5:r>
-                      </ns5:sub>
-                    </ns5:sSub>
-                    <ns5:r>
+                          <m:t>𝑇𝑂𝑇𝐴𝐿</m:t>
+                        </m:r>
+                      </m:sub>
+                    </m:sSub>
+                    <m:r>
                       <a:rPr kumimoji="0" lang="en-US" sz="1800" b="0" i="1" u="none" strike="noStrike" kern="1200" cap="none" spc="0" normalizeH="0" baseline="0" noProof="0" smtClean="0">
                         <a:ln>
                           <a:noFill/>
@@ -5388,11 +5216,11 @@
                         <a:ea typeface="Cambria Math" panose="02040503050406030204" pitchFamily="18" charset="0"/>
                         <a:cs typeface="+mn-cs"/>
                       </a:rPr>
-                      <ns5:t> =</ns5:t>
-                    </ns5:r>
-                    <ns5:sSub>
-                      <ns5:sSubPr>
-                        <ns5:ctrlPr>
+                      <m:t> =</m:t>
+                    </m:r>
+                    <m:sSub>
+                      <m:sSubPr>
+                        <m:ctrlPr>
                           <a:rPr kumimoji="0" lang="en-US" sz="1800" b="0" i="1" u="none" strike="noStrike" kern="1200" cap="none" spc="0" normalizeH="0" baseline="0" noProof="0">
                             <a:ln>
                               <a:noFill/>
@@ -5407,10 +5235,10 @@
                             <a:ea typeface="Cambria Math" panose="02040503050406030204" pitchFamily="18" charset="0"/>
                             <a:cs typeface="+mn-cs"/>
                           </a:rPr>
-                        </ns5:ctrlPr>
-                      </ns5:sSubPr>
-                      <ns5:e>
-                        <ns5:r>
+                        </m:ctrlPr>
+                      </m:sSubPr>
+                      <m:e>
+                        <m:r>
                           <a:rPr kumimoji="0" lang="en-US" sz="1800" b="0" i="1" u="none" strike="noStrike" kern="1200" cap="none" spc="0" normalizeH="0" baseline="0" noProof="0">
                             <a:ln>
                               <a:noFill/>
@@ -5425,11 +5253,11 @@
                             <a:ea typeface="Cambria Math" panose="02040503050406030204" pitchFamily="18" charset="0"/>
                             <a:cs typeface="+mn-cs"/>
                           </a:rPr>
-                          <ns5:t>𝐸𝑛𝑒𝑟𝑔𝑦</ns5:t>
-                        </ns5:r>
-                      </ns5:e>
-                      <ns5:sub>
-                        <ns5:r>
+                          <m:t>𝐸𝑛𝑒𝑟𝑔𝑦</m:t>
+                        </m:r>
+                      </m:e>
+                      <m:sub>
+                        <m:r>
                           <a:rPr kumimoji="0" lang="en-US" sz="1800" b="0" i="1" u="none" strike="noStrike" kern="1200" cap="none" spc="0" normalizeH="0" baseline="0" noProof="0">
                             <a:ln>
                               <a:noFill/>
@@ -5444,12 +5272,12 @@
                             <a:ea typeface="Cambria Math" panose="02040503050406030204" pitchFamily="18" charset="0"/>
                             <a:cs typeface="+mn-cs"/>
                           </a:rPr>
-                          <ns5:t>𝐴𝑃𝑃𝐴𝑅𝐸𝑁𝑇</ns5:t>
-                        </ns5:r>
-                      </ns5:sub>
-                    </ns5:sSub>
-                  </ns5:oMath>
-                </ns4:m>
+                          <m:t>𝐴𝑃𝑃𝐴𝑅𝐸𝑁𝑇</m:t>
+                        </m:r>
+                      </m:sub>
+                    </m:sSub>
+                  </m:oMath>
+                </a14:m>
                 <a:r>
                   <a:rPr kumimoji="0" lang="en-US" sz="1800" b="0" i="0" u="none" strike="noStrike" kern="1200" cap="none" spc="0" normalizeH="0" baseline="0" noProof="0" dirty="0">
                     <a:ln>
@@ -5467,11 +5295,11 @@
                   </a:rPr>
                   <a:t> = </a:t>
                 </a:r>
-                <ns4:m>
-                  <ns5:oMath>
-                    <ns5:sSup>
-                      <ns5:sSupPr>
-                        <ns5:ctrlPr>
+                <a14:m>
+                  <m:oMath>
+                    <m:sSup>
+                      <m:sSupPr>
+                        <m:ctrlPr>
                           <a:rPr kumimoji="0" lang="en-US" sz="1800" b="0" i="1" u="none" strike="noStrike" kern="1200" cap="none" spc="0" normalizeH="0" baseline="0" noProof="0" smtClean="0">
                             <a:ln>
                               <a:noFill/>
@@ -5486,10 +5314,10 @@
                             <a:ea typeface="+mn-ea"/>
                             <a:cs typeface="+mn-cs"/>
                           </a:rPr>
-                        </ns5:ctrlPr>
-                      </ns5:sSupPr>
-                      <ns5:e>
-                        <ns5:r>
+                        </m:ctrlPr>
+                      </m:sSupPr>
+                      <m:e>
+                        <m:r>
                           <a:rPr kumimoji="0" lang="en-US" sz="1800" b="0" i="1" u="none" strike="noStrike" kern="1200" cap="none" spc="0" normalizeH="0" baseline="0" noProof="0" smtClean="0">
                             <a:ln>
                               <a:noFill/>
@@ -5504,9 +5332,9 @@
                             <a:ea typeface="+mn-ea"/>
                             <a:cs typeface="+mn-cs"/>
                           </a:rPr>
-                          <ns5:t>𝑞</ns5:t>
-                        </ns5:r>
-                        <ns5:r>
+                          <m:t>𝑞</m:t>
+                        </m:r>
+                        <m:r>
                           <a:rPr kumimoji="0" lang="en-US" sz="1800" b="0" i="1" u="none" strike="noStrike" kern="1200" cap="none" spc="0" normalizeH="0" baseline="0" noProof="0" smtClean="0">
                             <a:ln>
                               <a:noFill/>
@@ -5521,11 +5349,11 @@
                             <a:ea typeface="+mn-ea"/>
                             <a:cs typeface="+mn-cs"/>
                           </a:rPr>
-                          <ns5:t> ∗ @</ns5:t>
-                        </ns5:r>
-                      </ns5:e>
-                      <ns5:sup>
-                        <ns5:r>
+                          <m:t> ∗ @</m:t>
+                        </m:r>
+                      </m:e>
+                      <m:sup>
+                        <m:r>
                           <a:rPr kumimoji="0" lang="en-US" sz="1800" b="0" i="1" u="none" strike="noStrike" kern="1200" cap="none" spc="0" normalizeH="0" baseline="0" noProof="0" smtClean="0">
                             <a:ln>
                               <a:noFill/>
@@ -5540,12 +5368,12 @@
                             <a:ea typeface="+mn-ea"/>
                             <a:cs typeface="+mn-cs"/>
                           </a:rPr>
-                          <ns5:t>2</ns5:t>
-                        </ns5:r>
-                      </ns5:sup>
-                    </ns5:sSup>
-                  </ns5:oMath>
-                </ns4:m>
+                          <m:t>2</m:t>
+                        </m:r>
+                      </m:sup>
+                    </m:sSup>
+                  </m:oMath>
+                </a14:m>
                 <a:r>
                   <a:rPr kumimoji="0" lang="en-US" sz="1800" b="0" i="0" u="none" strike="noStrike" kern="1200" cap="none" spc="0" normalizeH="0" baseline="0" noProof="0" dirty="0">
                     <a:ln>
@@ -5567,50 +5395,7 @@
             </p:txBody>
           </p:sp>
         </ns2:Choice>
-        <ns2:Fallback>
-          <p:sp>
-            <p:nvSpPr>
-              <p:cNvPr id="16" name="TextBox 15">
-                <a:extLst>
-                  <a:ext uri="{FF2B5EF4-FFF2-40B4-BE49-F238E27FC236}">
-                    <a16:creationId id="{EE3E7794-1E88-FF47-B593-FD8ABD326D20}"/>
-                  </a:ext>
-                </a:extLst>
-              </p:cNvPr>
-              <p:cNvSpPr txBox="1">
-                <a:spLocks noRot="1" noChangeAspect="1" noMove="1" noResize="1" noEditPoints="1" noAdjustHandles="1" noChangeArrowheads="1" noChangeShapeType="1" noTextEdit="1"/>
-              </p:cNvSpPr>
-              <p:nvPr/>
-            </p:nvSpPr>
-            <p:spPr>
-              <a:xfrm>
-                <a:off x="3902331" y="4520636"/>
-                <a:ext cx="4545540" cy="369332"/>
-              </a:xfrm>
-              <a:prstGeom prst="rect">
-                <a:avLst/>
-              </a:prstGeom>
-              <a:blipFill>
-                <a:blip r:embed="rId7"/>
-                <a:stretch>
-                  <a:fillRect l="-279" t="-10345" b="-27586"/>
-                </a:stretch>
-              </a:blipFill>
-            </p:spPr>
-            <p:txBody>
-              <a:bodyPr/>
-              <a:lstStyle/>
-              <a:p>
-                <a:r>
-                  <a:rPr lang="en-US">
-                    <a:noFill/>
-                  </a:rPr>
-                  <a:t> </a:t>
-                </a:r>
-              </a:p>
-            </p:txBody>
-          </p:sp>
-        </ns2:Fallback>
+        <ns2:Fallback/>
       </ns2:AlternateContent>
       <ns2:AlternateContent>
         <ns2:Choice Requires="a14">
@@ -5659,9 +5444,9 @@
                   <a:tabLst/>
                   <a:defRPr/>
                 </a:pPr>
-                <ns4:m>
-                  <ns5:oMath>
-                    <ns5:r>
+                <a14:m>
+                  <m:oMath>
+                    <m:r>
                       <a:rPr kumimoji="0" lang="en-US" sz="1800" b="0" i="1" u="none" strike="noStrike" kern="1200" cap="none" spc="0" normalizeH="0" baseline="0" noProof="0" smtClean="0">
                         <a:ln>
                           <a:noFill/>
@@ -5676,9 +5461,9 @@
                         <a:ea typeface="Cambria Math" panose="02040503050406030204" pitchFamily="18" charset="0"/>
                         <a:cs typeface="+mn-cs"/>
                       </a:rPr>
-                      <ns5:t>𝐿𝑒𝑡</ns5:t>
-                    </ns5:r>
-                    <ns5:r>
+                      <m:t>𝐿𝑒𝑡</m:t>
+                    </m:r>
+                    <m:r>
                       <a:rPr kumimoji="0" lang="en-US" sz="1800" b="0" i="1" u="none" strike="noStrike" kern="1200" cap="none" spc="0" normalizeH="0" baseline="0" noProof="0">
                         <a:ln>
                           <a:noFill/>
@@ -5693,9 +5478,9 @@
                         <a:ea typeface="Cambria Math" panose="02040503050406030204" pitchFamily="18" charset="0"/>
                         <a:cs typeface="+mn-cs"/>
                       </a:rPr>
-                      <ns5:t> </ns5:t>
-                    </ns5:r>
-                    <ns5:r>
+                      <m:t> </m:t>
+                    </m:r>
+                    <m:r>
                       <a:rPr kumimoji="0" lang="en-US" sz="1800" b="0" i="1" u="none" strike="noStrike" kern="1200" cap="none" spc="0" normalizeH="0" baseline="0" noProof="0">
                         <a:ln>
                           <a:noFill/>
@@ -5710,9 +5495,9 @@
                         <a:ea typeface="Cambria Math" panose="02040503050406030204" pitchFamily="18" charset="0"/>
                         <a:cs typeface="+mn-cs"/>
                       </a:rPr>
-                      <ns5:t>𝑡h𝑒</ns5:t>
-                    </ns5:r>
-                    <ns5:r>
+                      <m:t>𝑡h𝑒</m:t>
+                    </m:r>
+                    <m:r>
                       <a:rPr kumimoji="0" lang="en-US" sz="1800" b="0" i="1" u="none" strike="noStrike" kern="1200" cap="none" spc="0" normalizeH="0" baseline="0" noProof="0">
                         <a:ln>
                           <a:noFill/>
@@ -5727,9 +5512,9 @@
                         <a:ea typeface="Cambria Math" panose="02040503050406030204" pitchFamily="18" charset="0"/>
                         <a:cs typeface="+mn-cs"/>
                       </a:rPr>
-                      <ns5:t> </ns5:t>
-                    </ns5:r>
-                    <ns5:r>
+                      <m:t> </m:t>
+                    </m:r>
+                    <m:r>
                       <a:rPr kumimoji="0" lang="en-US" sz="1800" b="0" i="1" u="none" strike="noStrike" kern="1200" cap="none" spc="0" normalizeH="0" baseline="0" noProof="0">
                         <a:ln>
                           <a:noFill/>
@@ -5744,9 +5529,9 @@
                         <a:ea typeface="Cambria Math" panose="02040503050406030204" pitchFamily="18" charset="0"/>
                         <a:cs typeface="+mn-cs"/>
                       </a:rPr>
-                      <ns5:t>𝑠𝑦𝑚𝑏𝑜𝑙</ns5:t>
-                    </ns5:r>
-                    <ns5:r>
+                      <m:t>𝑠𝑦𝑚𝑏𝑜𝑙</m:t>
+                    </m:r>
+                    <m:r>
                       <a:rPr kumimoji="0" lang="en-US" sz="1800" b="0" i="1" u="none" strike="noStrike" kern="1200" cap="none" spc="0" normalizeH="0" baseline="0" noProof="0">
                         <a:ln>
                           <a:noFill/>
@@ -5761,9 +5546,9 @@
                         <a:ea typeface="Cambria Math" panose="02040503050406030204" pitchFamily="18" charset="0"/>
                         <a:cs typeface="+mn-cs"/>
                       </a:rPr>
-                      <ns5:t> </ns5:t>
-                    </ns5:r>
-                    <ns5:r>
+                      <m:t> </m:t>
+                    </m:r>
+                    <m:r>
                       <a:rPr kumimoji="0" lang="en-US" sz="1800" b="1" i="1" u="none" strike="noStrike" kern="1200" cap="none" spc="0" normalizeH="0" baseline="0" noProof="0">
                         <a:ln>
                           <a:noFill/>
@@ -5778,9 +5563,9 @@
                         <a:ea typeface="Cambria Math" panose="02040503050406030204" pitchFamily="18" charset="0"/>
                         <a:cs typeface="+mn-cs"/>
                       </a:rPr>
-                      <ns5:t>@</ns5:t>
-                    </ns5:r>
-                    <ns5:r>
+                      <m:t>@</m:t>
+                    </m:r>
+                    <m:r>
                       <a:rPr kumimoji="0" lang="en-US" sz="1800" b="0" i="1" u="none" strike="noStrike" kern="1200" cap="none" spc="0" normalizeH="0" baseline="0" noProof="0">
                         <a:ln>
                           <a:noFill/>
@@ -5795,9 +5580,9 @@
                         <a:ea typeface="Cambria Math" panose="02040503050406030204" pitchFamily="18" charset="0"/>
                         <a:cs typeface="+mn-cs"/>
                       </a:rPr>
-                      <ns5:t> </ns5:t>
-                    </ns5:r>
-                    <ns5:r>
+                      <m:t> </m:t>
+                    </m:r>
+                    <m:r>
                       <a:rPr kumimoji="0" lang="en-US" sz="1800" b="0" i="1" u="none" strike="noStrike" kern="1200" cap="none" spc="0" normalizeH="0" baseline="0" noProof="0" smtClean="0">
                         <a:ln>
                           <a:noFill/>
@@ -5812,9 +5597,9 @@
                         <a:ea typeface="Cambria Math" panose="02040503050406030204" pitchFamily="18" charset="0"/>
                         <a:cs typeface="+mn-cs"/>
                       </a:rPr>
-                      <ns5:t>𝑐𝑜𝑟𝑟𝑒𝑠𝑝𝑜𝑛𝑑</ns5:t>
-                    </ns5:r>
-                    <ns5:r>
+                      <m:t>𝑐𝑜𝑟𝑟𝑒𝑠𝑝𝑜𝑛𝑑</m:t>
+                    </m:r>
+                    <m:r>
                       <a:rPr kumimoji="0" lang="en-US" sz="1800" b="0" i="1" u="none" strike="noStrike" kern="1200" cap="none" spc="0" normalizeH="0" baseline="0" noProof="0" smtClean="0">
                         <a:ln>
                           <a:noFill/>
@@ -5829,9 +5614,9 @@
                         <a:ea typeface="Cambria Math" panose="02040503050406030204" pitchFamily="18" charset="0"/>
                         <a:cs typeface="+mn-cs"/>
                       </a:rPr>
-                      <ns5:t> </ns5:t>
-                    </ns5:r>
-                    <ns5:r>
+                      <m:t> </m:t>
+                    </m:r>
+                    <m:r>
                       <a:rPr kumimoji="0" lang="en-US" sz="1800" b="0" i="1" u="none" strike="noStrike" kern="1200" cap="none" spc="0" normalizeH="0" baseline="0" noProof="0" smtClean="0">
                         <a:ln>
                           <a:noFill/>
@@ -5846,9 +5631,9 @@
                         <a:ea typeface="Cambria Math" panose="02040503050406030204" pitchFamily="18" charset="0"/>
                         <a:cs typeface="+mn-cs"/>
                       </a:rPr>
-                      <ns5:t>𝑡𝑜</ns5:t>
-                    </ns5:r>
-                    <ns5:r>
+                      <m:t>𝑡𝑜</m:t>
+                    </m:r>
+                    <m:r>
                       <a:rPr kumimoji="0" lang="en-US" sz="1800" b="0" i="1" u="none" strike="noStrike" kern="1200" cap="none" spc="0" normalizeH="0" baseline="0" noProof="0">
                         <a:ln>
                           <a:noFill/>
@@ -5863,9 +5648,9 @@
                         <a:ea typeface="Cambria Math" panose="02040503050406030204" pitchFamily="18" charset="0"/>
                         <a:cs typeface="+mn-cs"/>
                       </a:rPr>
-                      <ns5:t> </ns5:t>
-                    </ns5:r>
-                    <ns5:r>
+                      <m:t> </m:t>
+                    </m:r>
+                    <m:r>
                       <a:rPr kumimoji="0" lang="en-US" sz="1800" b="0" i="1" u="none" strike="noStrike" kern="1200" cap="none" spc="0" normalizeH="0" baseline="0" noProof="0">
                         <a:ln>
                           <a:noFill/>
@@ -5880,9 +5665,9 @@
                         <a:ea typeface="Cambria Math" panose="02040503050406030204" pitchFamily="18" charset="0"/>
                         <a:cs typeface="+mn-cs"/>
                       </a:rPr>
-                      <ns5:t>𝑡h𝑒</ns5:t>
-                    </ns5:r>
-                    <ns5:r>
+                      <m:t>𝑡h𝑒</m:t>
+                    </m:r>
+                    <m:r>
                       <a:rPr kumimoji="0" lang="en-US" sz="1800" b="0" i="1" u="none" strike="noStrike" kern="1200" cap="none" spc="0" normalizeH="0" baseline="0" noProof="0">
                         <a:ln>
                           <a:noFill/>
@@ -5897,9 +5682,9 @@
                         <a:ea typeface="Cambria Math" panose="02040503050406030204" pitchFamily="18" charset="0"/>
                         <a:cs typeface="+mn-cs"/>
                       </a:rPr>
-                      <ns5:t> </ns5:t>
-                    </ns5:r>
-                    <ns5:r>
+                      <m:t> </m:t>
+                    </m:r>
+                    <m:r>
                       <a:rPr kumimoji="0" lang="en-US" sz="1800" b="0" i="1" u="none" strike="noStrike" kern="1200" cap="none" spc="0" normalizeH="0" baseline="0" noProof="0">
                         <a:ln>
                           <a:noFill/>
@@ -5914,9 +5699,9 @@
                         <a:ea typeface="Cambria Math" panose="02040503050406030204" pitchFamily="18" charset="0"/>
                         <a:cs typeface="+mn-cs"/>
                       </a:rPr>
-                      <ns5:t>𝑢𝑛𝑖𝑣𝑒𝑟𝑠𝑎𝑙</ns5:t>
-                    </ns5:r>
-                    <ns5:r>
+                      <m:t>𝑢𝑛𝑖𝑣𝑒𝑟𝑠𝑎𝑙</m:t>
+                    </m:r>
+                    <m:r>
                       <a:rPr kumimoji="0" lang="en-US" sz="1800" b="0" i="1" u="none" strike="noStrike" kern="1200" cap="none" spc="0" normalizeH="0" baseline="0" noProof="0">
                         <a:ln>
                           <a:noFill/>
@@ -5931,9 +5716,9 @@
                         <a:ea typeface="Cambria Math" panose="02040503050406030204" pitchFamily="18" charset="0"/>
                         <a:cs typeface="+mn-cs"/>
                       </a:rPr>
-                      <ns5:t> </ns5:t>
-                    </ns5:r>
-                    <ns5:r>
+                      <m:t> </m:t>
+                    </m:r>
+                    <m:r>
                       <a:rPr kumimoji="0" lang="en-US" sz="1800" b="0" i="1" u="none" strike="noStrike" kern="1200" cap="none" spc="0" normalizeH="0" baseline="0" noProof="0">
                         <a:ln>
                           <a:noFill/>
@@ -5948,9 +5733,9 @@
                         <a:ea typeface="Cambria Math" panose="02040503050406030204" pitchFamily="18" charset="0"/>
                         <a:cs typeface="+mn-cs"/>
                       </a:rPr>
-                      <ns5:t>𝑐𝑜𝑛𝑠𝑡𝑎𝑛𝑡</ns5:t>
-                    </ns5:r>
-                    <ns5:r>
+                      <m:t>𝑐𝑜𝑛𝑠𝑡𝑎𝑛𝑡</m:t>
+                    </m:r>
+                    <m:r>
                       <a:rPr kumimoji="0" lang="en-US" sz="1800" b="0" i="1" u="none" strike="noStrike" kern="1200" cap="none" spc="0" normalizeH="0" baseline="0" noProof="0">
                         <a:ln>
                           <a:noFill/>
@@ -5965,9 +5750,9 @@
                         <a:ea typeface="Cambria Math" panose="02040503050406030204" pitchFamily="18" charset="0"/>
                         <a:cs typeface="+mn-cs"/>
                       </a:rPr>
-                      <ns5:t> </ns5:t>
-                    </ns5:r>
-                    <ns5:r>
+                      <m:t> </m:t>
+                    </m:r>
+                    <m:r>
                       <a:rPr kumimoji="0" lang="en-US" sz="1800" b="0" i="1" u="none" strike="noStrike" kern="1200" cap="none" spc="0" normalizeH="0" baseline="0" noProof="0">
                         <a:ln>
                           <a:noFill/>
@@ -5982,9 +5767,9 @@
                         <a:ea typeface="Cambria Math" panose="02040503050406030204" pitchFamily="18" charset="0"/>
                         <a:cs typeface="+mn-cs"/>
                       </a:rPr>
-                      <ns5:t>𝑠𝑝𝑒𝑒𝑑</ns5:t>
-                    </ns5:r>
-                    <ns5:r>
+                      <m:t>𝑠𝑝𝑒𝑒𝑑</m:t>
+                    </m:r>
+                    <m:r>
                       <a:rPr kumimoji="0" lang="en-US" sz="1800" b="0" i="1" u="none" strike="noStrike" kern="1200" cap="none" spc="0" normalizeH="0" baseline="0" noProof="0">
                         <a:ln>
                           <a:noFill/>
@@ -5999,9 +5784,9 @@
                         <a:ea typeface="Cambria Math" panose="02040503050406030204" pitchFamily="18" charset="0"/>
                         <a:cs typeface="+mn-cs"/>
                       </a:rPr>
-                      <ns5:t> </ns5:t>
-                    </ns5:r>
-                    <ns5:r>
+                      <m:t> </m:t>
+                    </m:r>
+                    <m:r>
                       <a:rPr kumimoji="0" lang="en-US" sz="1800" b="0" i="1" u="none" strike="noStrike" kern="1200" cap="none" spc="0" normalizeH="0" baseline="0" noProof="0">
                         <a:ln>
                           <a:noFill/>
@@ -6016,9 +5801,9 @@
                         <a:ea typeface="Cambria Math" panose="02040503050406030204" pitchFamily="18" charset="0"/>
                         <a:cs typeface="+mn-cs"/>
                       </a:rPr>
-                      <ns5:t>𝑜𝑓</ns5:t>
-                    </ns5:r>
-                    <ns5:r>
+                      <m:t>𝑜𝑓</m:t>
+                    </m:r>
+                    <m:r>
                       <a:rPr kumimoji="0" lang="en-US" sz="1800" b="0" i="1" u="none" strike="noStrike" kern="1200" cap="none" spc="0" normalizeH="0" baseline="0" noProof="0">
                         <a:ln>
                           <a:noFill/>
@@ -6033,9 +5818,9 @@
                         <a:ea typeface="Cambria Math" panose="02040503050406030204" pitchFamily="18" charset="0"/>
                         <a:cs typeface="+mn-cs"/>
                       </a:rPr>
-                      <ns5:t> </ns5:t>
-                    </ns5:r>
-                    <ns5:r>
+                      <m:t> </m:t>
+                    </m:r>
+                    <m:r>
                       <a:rPr kumimoji="0" lang="en-US" sz="1800" b="0" i="1" u="none" strike="noStrike" kern="1200" cap="none" spc="0" normalizeH="0" baseline="0" noProof="0" smtClean="0">
                         <a:ln>
                           <a:noFill/>
@@ -6050,9 +5835,9 @@
                         <a:ea typeface="Cambria Math" panose="02040503050406030204" pitchFamily="18" charset="0"/>
                         <a:cs typeface="+mn-cs"/>
                       </a:rPr>
-                      <ns5:t>𝑝𝑜𝑡𝑒𝑛𝑡𝑖𝑎𝑙</ns5:t>
-                    </ns5:r>
-                    <ns5:r>
+                      <m:t>𝑝𝑜𝑡𝑒𝑛𝑡𝑖𝑎𝑙</m:t>
+                    </m:r>
+                    <m:r>
                       <a:rPr kumimoji="0" lang="en-US" sz="1800" b="0" i="1" u="none" strike="noStrike" kern="1200" cap="none" spc="0" normalizeH="0" baseline="0" noProof="0" smtClean="0">
                         <a:ln>
                           <a:noFill/>
@@ -6067,9 +5852,9 @@
                         <a:ea typeface="Cambria Math" panose="02040503050406030204" pitchFamily="18" charset="0"/>
                         <a:cs typeface="+mn-cs"/>
                       </a:rPr>
-                      <ns5:t> </ns5:t>
-                    </ns5:r>
-                    <ns5:r>
+                      <m:t> </m:t>
+                    </m:r>
+                    <m:r>
                       <a:rPr kumimoji="0" lang="en-US" sz="1800" b="0" i="1" u="none" strike="noStrike" kern="1200" cap="none" spc="0" normalizeH="0" baseline="0" noProof="0" smtClean="0">
                         <a:ln>
                           <a:noFill/>
@@ -6084,10 +5869,10 @@
                         <a:ea typeface="Cambria Math" panose="02040503050406030204" pitchFamily="18" charset="0"/>
                         <a:cs typeface="+mn-cs"/>
                       </a:rPr>
-                      <ns5:t>𝑒𝑚𝑖𝑠𝑠𝑖𝑜𝑛𝑠</ns5:t>
-                    </ns5:r>
-                  </ns5:oMath>
-                </ns4:m>
+                      <m:t>𝑒𝑚𝑖𝑠𝑠𝑖𝑜𝑛𝑠</m:t>
+                    </m:r>
+                  </m:oMath>
+                </a14:m>
                 <a:r>
                   <a:rPr kumimoji="0" lang="en-US" sz="1800" b="0" i="0" u="none" strike="noStrike" kern="1200" cap="none" spc="0" normalizeH="0" baseline="0" noProof="0" dirty="0">
                     <a:ln>
@@ -6109,50 +5894,7 @@
             </p:txBody>
           </p:sp>
         </ns2:Choice>
-        <ns2:Fallback>
-          <p:sp>
-            <p:nvSpPr>
-              <p:cNvPr id="18" name="TextBox 17">
-                <a:extLst>
-                  <a:ext uri="{FF2B5EF4-FFF2-40B4-BE49-F238E27FC236}">
-                    <a16:creationId id="{E8F051DE-2A4B-0C4E-A0CC-04A871A02B3D}"/>
-                  </a:ext>
-                </a:extLst>
-              </p:cNvPr>
-              <p:cNvSpPr txBox="1">
-                <a:spLocks noRot="1" noChangeAspect="1" noMove="1" noResize="1" noEditPoints="1" noAdjustHandles="1" noChangeArrowheads="1" noChangeShapeType="1" noTextEdit="1"/>
-              </p:cNvSpPr>
-              <p:nvPr/>
-            </p:nvSpPr>
-            <p:spPr>
-              <a:xfrm>
-                <a:off x="1485772" y="3803446"/>
-                <a:ext cx="9030806" cy="369332"/>
-              </a:xfrm>
-              <a:prstGeom prst="rect">
-                <a:avLst/>
-              </a:prstGeom>
-              <a:blipFill>
-                <a:blip r:embed="rId8"/>
-                <a:stretch>
-                  <a:fillRect t="-6667" b="-26667"/>
-                </a:stretch>
-              </a:blipFill>
-            </p:spPr>
-            <p:txBody>
-              <a:bodyPr/>
-              <a:lstStyle/>
-              <a:p>
-                <a:r>
-                  <a:rPr lang="en-US">
-                    <a:noFill/>
-                  </a:rPr>
-                  <a:t> </a:t>
-                </a:r>
-              </a:p>
-            </p:txBody>
-          </p:sp>
-        </ns2:Fallback>
+        <ns2:Fallback/>
       </ns2:AlternateContent>
       <ns2:AlternateContent>
         <ns2:Choice Requires="a14">
@@ -6203,9 +5945,9 @@
                   <a:tabLst/>
                   <a:defRPr/>
                 </a:pPr>
-                <ns4:m>
-                  <ns5:oMath>
-                    <ns5:r>
+                <a14:m>
+                  <m:oMath>
+                    <m:r>
                       <a:rPr kumimoji="0" lang="en-US" sz="1800" b="1" i="1" u="none" strike="noStrike" kern="1200" cap="none" spc="0" normalizeH="0" baseline="0" noProof="0" smtClean="0">
                         <a:ln>
                           <a:noFill/>
@@ -6220,9 +5962,9 @@
                         <a:ea typeface="Cambria Math" panose="02040503050406030204" pitchFamily="18" charset="0"/>
                         <a:cs typeface="+mn-cs"/>
                       </a:rPr>
-                      <ns5:t>𝑷𝒐𝒊𝒏𝒕</ns5:t>
-                    </ns5:r>
-                    <ns5:r>
+                      <m:t>𝑷𝒐𝒊𝒏𝒕</m:t>
+                    </m:r>
+                    <m:r>
                       <a:rPr kumimoji="0" lang="en-US" sz="1800" b="1" i="1" u="none" strike="noStrike" kern="1200" cap="none" spc="0" normalizeH="0" baseline="0" noProof="0" smtClean="0">
                         <a:ln>
                           <a:noFill/>
@@ -6237,9 +5979,9 @@
                         <a:ea typeface="Cambria Math" panose="02040503050406030204" pitchFamily="18" charset="0"/>
                         <a:cs typeface="+mn-cs"/>
                       </a:rPr>
-                      <ns5:t> </ns5:t>
-                    </ns5:r>
-                    <ns5:r>
+                      <m:t> </m:t>
+                    </m:r>
+                    <m:r>
                       <a:rPr kumimoji="0" lang="en-US" sz="1800" b="1" i="1" u="none" strike="noStrike" kern="1200" cap="none" spc="0" normalizeH="0" baseline="0" noProof="0" smtClean="0">
                         <a:ln>
                           <a:noFill/>
@@ -6254,9 +5996,9 @@
                         <a:ea typeface="Cambria Math" panose="02040503050406030204" pitchFamily="18" charset="0"/>
                         <a:cs typeface="+mn-cs"/>
                       </a:rPr>
-                      <ns5:t>𝒑𝒐𝒕𝒆𝒏𝒕𝒊𝒂𝒍</ns5:t>
-                    </ns5:r>
-                    <ns5:r>
+                      <m:t>𝒑𝒐𝒕𝒆𝒏𝒕𝒊𝒂𝒍</m:t>
+                    </m:r>
+                    <m:r>
                       <a:rPr kumimoji="0" lang="en-US" sz="1800" b="1" i="1" u="none" strike="noStrike" kern="1200" cap="none" spc="0" normalizeH="0" baseline="0" noProof="0" smtClean="0">
                         <a:ln>
                           <a:noFill/>
@@ -6271,9 +6013,9 @@
                         <a:ea typeface="Cambria Math" panose="02040503050406030204" pitchFamily="18" charset="0"/>
                         <a:cs typeface="+mn-cs"/>
                       </a:rPr>
-                      <ns5:t> </ns5:t>
-                    </ns5:r>
-                    <ns5:r>
+                      <m:t> </m:t>
+                    </m:r>
+                    <m:r>
                       <a:rPr kumimoji="0" lang="en-US" sz="1800" b="1" i="1" u="none" strike="noStrike" kern="1200" cap="none" spc="0" normalizeH="0" baseline="0" noProof="0" smtClean="0">
                         <a:ln>
                           <a:noFill/>
@@ -6288,9 +6030,9 @@
                         <a:ea typeface="Cambria Math" panose="02040503050406030204" pitchFamily="18" charset="0"/>
                         <a:cs typeface="+mn-cs"/>
                       </a:rPr>
-                      <ns5:t>𝒊𝒔𝒐𝒍𝒂𝒕𝒆𝒅</ns5:t>
-                    </ns5:r>
-                    <ns5:r>
+                      <m:t>𝒊𝒔𝒐𝒍𝒂𝒕𝒆𝒅</m:t>
+                    </m:r>
+                    <m:r>
                       <a:rPr kumimoji="0" lang="en-US" sz="1800" b="1" i="1" u="none" strike="noStrike" kern="1200" cap="none" spc="0" normalizeH="0" baseline="0" noProof="0" smtClean="0">
                         <a:ln>
                           <a:noFill/>
@@ -6305,9 +6047,9 @@
                         <a:ea typeface="Cambria Math" panose="02040503050406030204" pitchFamily="18" charset="0"/>
                         <a:cs typeface="+mn-cs"/>
                       </a:rPr>
-                      <ns5:t> </ns5:t>
-                    </ns5:r>
-                    <ns5:r>
+                      <m:t> </m:t>
+                    </m:r>
+                    <m:r>
                       <a:rPr kumimoji="0" lang="en-US" sz="1800" b="1" i="1" u="none" strike="noStrike" kern="1200" cap="none" spc="0" normalizeH="0" baseline="0" noProof="0" smtClean="0">
                         <a:ln>
                           <a:noFill/>
@@ -6322,9 +6064,9 @@
                         <a:ea typeface="Cambria Math" panose="02040503050406030204" pitchFamily="18" charset="0"/>
                         <a:cs typeface="+mn-cs"/>
                       </a:rPr>
-                      <ns5:t>𝒊𝒏</ns5:t>
-                    </ns5:r>
-                    <ns5:r>
+                      <m:t>𝒊𝒏</m:t>
+                    </m:r>
+                    <m:r>
                       <a:rPr kumimoji="0" lang="en-US" sz="1800" b="1" i="1" u="none" strike="noStrike" kern="1200" cap="none" spc="0" normalizeH="0" baseline="0" noProof="0" smtClean="0">
                         <a:ln>
                           <a:noFill/>
@@ -6339,9 +6081,9 @@
                         <a:ea typeface="Cambria Math" panose="02040503050406030204" pitchFamily="18" charset="0"/>
                         <a:cs typeface="+mn-cs"/>
                       </a:rPr>
-                      <ns5:t> </ns5:t>
-                    </ns5:r>
-                    <ns5:r>
+                      <m:t> </m:t>
+                    </m:r>
+                    <m:r>
                       <a:rPr kumimoji="0" lang="en-US" sz="1800" b="1" i="1" u="none" strike="noStrike" kern="1200" cap="none" spc="0" normalizeH="0" baseline="0" noProof="0" smtClean="0">
                         <a:ln>
                           <a:noFill/>
@@ -6356,9 +6098,9 @@
                         <a:ea typeface="Cambria Math" panose="02040503050406030204" pitchFamily="18" charset="0"/>
                         <a:cs typeface="+mn-cs"/>
                       </a:rPr>
-                      <ns5:t>𝒂</ns5:t>
-                    </ns5:r>
-                    <ns5:r>
+                      <m:t>𝒂</m:t>
+                    </m:r>
+                    <m:r>
                       <a:rPr kumimoji="0" lang="en-US" sz="1800" b="1" i="1" u="none" strike="noStrike" kern="1200" cap="none" spc="0" normalizeH="0" baseline="0" noProof="0" smtClean="0">
                         <a:ln>
                           <a:noFill/>
@@ -6373,9 +6115,9 @@
                         <a:ea typeface="Cambria Math" panose="02040503050406030204" pitchFamily="18" charset="0"/>
                         <a:cs typeface="+mn-cs"/>
                       </a:rPr>
-                      <ns5:t> </ns5:t>
-                    </ns5:r>
-                    <ns5:r>
+                      <m:t> </m:t>
+                    </m:r>
+                    <m:r>
                       <a:rPr kumimoji="0" lang="en-US" sz="1800" b="1" i="1" u="none" strike="noStrike" kern="1200" cap="none" spc="0" normalizeH="0" baseline="0" noProof="0" smtClean="0">
                         <a:ln>
                           <a:noFill/>
@@ -6390,9 +6132,9 @@
                         <a:ea typeface="Cambria Math" panose="02040503050406030204" pitchFamily="18" charset="0"/>
                         <a:cs typeface="+mn-cs"/>
                       </a:rPr>
-                      <ns5:t>𝑬𝒖𝒄𝒍𝒊𝒅𝒆𝒂𝒏</ns5:t>
-                    </ns5:r>
-                    <ns5:r>
+                      <m:t>𝑬𝒖𝒄𝒍𝒊𝒅𝒆𝒂𝒏</m:t>
+                    </m:r>
+                    <m:r>
                       <a:rPr kumimoji="0" lang="en-US" sz="1800" b="1" i="1" u="none" strike="noStrike" kern="1200" cap="none" spc="0" normalizeH="0" baseline="0" noProof="0" smtClean="0">
                         <a:ln>
                           <a:noFill/>
@@ -6407,9 +6149,9 @@
                         <a:ea typeface="Cambria Math" panose="02040503050406030204" pitchFamily="18" charset="0"/>
                         <a:cs typeface="+mn-cs"/>
                       </a:rPr>
-                      <ns5:t> </ns5:t>
-                    </ns5:r>
-                    <ns5:r>
+                      <m:t> </m:t>
+                    </m:r>
+                    <m:r>
                       <a:rPr kumimoji="0" lang="en-US" sz="1800" b="1" i="1" u="none" strike="noStrike" kern="1200" cap="none" spc="0" normalizeH="0" baseline="0" noProof="0" smtClean="0">
                         <a:ln>
                           <a:noFill/>
@@ -6424,9 +6166,9 @@
                         <a:ea typeface="Cambria Math" panose="02040503050406030204" pitchFamily="18" charset="0"/>
                         <a:cs typeface="+mn-cs"/>
                       </a:rPr>
-                      <ns5:t>𝒗𝒐𝒊𝒅</ns5:t>
-                    </ns5:r>
-                    <ns5:r>
+                      <m:t>𝒗𝒐𝒊𝒅</m:t>
+                    </m:r>
+                    <m:r>
                       <a:rPr kumimoji="0" lang="en-US" sz="1800" b="1" i="1" u="none" strike="noStrike" kern="1200" cap="none" spc="0" normalizeH="0" baseline="0" noProof="0" smtClean="0">
                         <a:ln>
                           <a:noFill/>
@@ -6441,9 +6183,9 @@
                         <a:ea typeface="Cambria Math" panose="02040503050406030204" pitchFamily="18" charset="0"/>
                         <a:cs typeface="+mn-cs"/>
                       </a:rPr>
-                      <ns5:t> </ns5:t>
-                    </ns5:r>
-                    <ns5:r>
+                      <m:t> </m:t>
+                    </m:r>
+                    <m:r>
                       <a:rPr kumimoji="0" lang="en-US" sz="1800" b="1" i="1" u="none" strike="noStrike" kern="1200" cap="none" spc="0" normalizeH="0" baseline="0" noProof="0" smtClean="0">
                         <a:ln>
                           <a:noFill/>
@@ -6458,9 +6200,9 @@
                         <a:ea typeface="Cambria Math" panose="02040503050406030204" pitchFamily="18" charset="0"/>
                         <a:cs typeface="+mn-cs"/>
                       </a:rPr>
-                      <ns5:t>𝒐𝒇</ns5:t>
-                    </ns5:r>
-                    <ns5:r>
+                      <m:t>𝒐𝒇</m:t>
+                    </m:r>
+                    <m:r>
                       <a:rPr kumimoji="0" lang="en-US" sz="1800" b="1" i="1" u="none" strike="noStrike" kern="1200" cap="none" spc="0" normalizeH="0" baseline="0" noProof="0" smtClean="0">
                         <a:ln>
                           <a:noFill/>
@@ -6475,9 +6217,9 @@
                         <a:ea typeface="Cambria Math" panose="02040503050406030204" pitchFamily="18" charset="0"/>
                         <a:cs typeface="+mn-cs"/>
                       </a:rPr>
-                      <ns5:t> </ns5:t>
-                    </ns5:r>
-                    <ns5:r>
+                      <m:t> </m:t>
+                    </m:r>
+                    <m:r>
                       <a:rPr kumimoji="0" lang="en-US" sz="1800" b="1" i="1" u="none" strike="noStrike" kern="1200" cap="none" spc="0" normalizeH="0" baseline="0" noProof="0" smtClean="0">
                         <a:ln>
                           <a:noFill/>
@@ -6492,9 +6234,9 @@
                         <a:ea typeface="Cambria Math" panose="02040503050406030204" pitchFamily="18" charset="0"/>
                         <a:cs typeface="+mn-cs"/>
                       </a:rPr>
-                      <ns5:t>𝒔𝒑𝒂𝒄𝒆</ns5:t>
-                    </ns5:r>
-                    <ns5:r>
+                      <m:t>𝒔𝒑𝒂𝒄𝒆</m:t>
+                    </m:r>
+                    <m:r>
                       <a:rPr kumimoji="0" lang="en-US" sz="1800" b="1" i="1" u="none" strike="noStrike" kern="1200" cap="none" spc="0" normalizeH="0" baseline="0" noProof="0" smtClean="0">
                         <a:ln>
                           <a:noFill/>
@@ -6509,9 +6251,9 @@
                         <a:ea typeface="Cambria Math" panose="02040503050406030204" pitchFamily="18" charset="0"/>
                         <a:cs typeface="+mn-cs"/>
                       </a:rPr>
-                      <ns5:t> </ns5:t>
-                    </ns5:r>
-                    <ns5:r>
+                      <m:t> </m:t>
+                    </m:r>
+                    <m:r>
                       <a:rPr kumimoji="0" lang="en-US" sz="1800" b="1" i="1" u="none" strike="noStrike" kern="1200" cap="none" spc="0" normalizeH="0" baseline="0" noProof="0" smtClean="0">
                         <a:ln>
                           <a:noFill/>
@@ -6526,9 +6268,9 @@
                         <a:ea typeface="Cambria Math" panose="02040503050406030204" pitchFamily="18" charset="0"/>
                         <a:cs typeface="+mn-cs"/>
                       </a:rPr>
-                      <ns5:t>𝒂𝒏𝒅</ns5:t>
-                    </ns5:r>
-                    <ns5:r>
+                      <m:t>𝒂𝒏𝒅</m:t>
+                    </m:r>
+                    <m:r>
                       <a:rPr kumimoji="0" lang="en-US" sz="1800" b="1" i="1" u="none" strike="noStrike" kern="1200" cap="none" spc="0" normalizeH="0" baseline="0" noProof="0" smtClean="0">
                         <a:ln>
                           <a:noFill/>
@@ -6543,9 +6285,9 @@
                         <a:ea typeface="Cambria Math" panose="02040503050406030204" pitchFamily="18" charset="0"/>
                         <a:cs typeface="+mn-cs"/>
                       </a:rPr>
-                      <ns5:t> </ns5:t>
-                    </ns5:r>
-                    <ns5:r>
+                      <m:t> </m:t>
+                    </m:r>
+                    <m:r>
                       <a:rPr kumimoji="0" lang="en-US" sz="1800" b="1" i="1" u="none" strike="noStrike" kern="1200" cap="none" spc="0" normalizeH="0" baseline="0" noProof="0" smtClean="0">
                         <a:ln>
                           <a:noFill/>
@@ -6560,9 +6302,9 @@
                         <a:ea typeface="Cambria Math" panose="02040503050406030204" pitchFamily="18" charset="0"/>
                         <a:cs typeface="+mn-cs"/>
                       </a:rPr>
-                      <ns5:t>𝒕𝒊𝒎𝒆</ns5:t>
-                    </ns5:r>
-                    <ns5:r>
+                      <m:t>𝒕𝒊𝒎𝒆</m:t>
+                    </m:r>
+                    <m:r>
                       <a:rPr kumimoji="0" lang="en-US" sz="1800" b="1" i="1" u="none" strike="noStrike" kern="1200" cap="none" spc="0" normalizeH="0" baseline="0" noProof="0" smtClean="0">
                         <a:ln>
                           <a:noFill/>
@@ -6577,9 +6319,9 @@
                         <a:ea typeface="Cambria Math" panose="02040503050406030204" pitchFamily="18" charset="0"/>
                         <a:cs typeface="+mn-cs"/>
                       </a:rPr>
-                      <ns5:t> (</ns5:t>
-                    </ns5:r>
-                    <ns5:r>
+                      <m:t> (</m:t>
+                    </m:r>
+                    <m:r>
                       <a:rPr kumimoji="0" lang="en-US" sz="1800" b="1" i="1" u="none" strike="noStrike" kern="1200" cap="none" spc="0" normalizeH="0" baseline="0" noProof="0" smtClean="0">
                         <a:ln>
                           <a:noFill/>
@@ -6594,9 +6336,9 @@
                         <a:ea typeface="Cambria Math" panose="02040503050406030204" pitchFamily="18" charset="0"/>
                         <a:cs typeface="+mn-cs"/>
                       </a:rPr>
-                      <ns5:t>𝒗𝒆𝒍𝒐𝒄𝒊𝒕𝒚</ns5:t>
-                    </ns5:r>
-                    <ns5:r>
+                      <m:t>𝒗𝒆𝒍𝒐𝒄𝒊𝒕𝒚</m:t>
+                    </m:r>
+                    <m:r>
                       <a:rPr kumimoji="0" lang="en-US" sz="1800" b="1" i="1" u="none" strike="noStrike" kern="1200" cap="none" spc="0" normalizeH="0" baseline="0" noProof="0" smtClean="0">
                         <a:ln>
                           <a:noFill/>
@@ -6611,9 +6353,9 @@
                         <a:ea typeface="Cambria Math" panose="02040503050406030204" pitchFamily="18" charset="0"/>
                         <a:cs typeface="+mn-cs"/>
                       </a:rPr>
-                      <ns5:t> </ns5:t>
-                    </ns5:r>
-                    <ns5:r>
+                      <m:t> </m:t>
+                    </m:r>
+                    <m:r>
                       <a:rPr kumimoji="0" lang="en-US" sz="1800" b="1" i="1" u="none" strike="noStrike" kern="1200" cap="none" spc="0" normalizeH="0" baseline="0" noProof="0" smtClean="0">
                         <a:ln>
                           <a:noFill/>
@@ -6628,9 +6370,9 @@
                         <a:ea typeface="Cambria Math" panose="02040503050406030204" pitchFamily="18" charset="0"/>
                         <a:cs typeface="+mn-cs"/>
                       </a:rPr>
-                      <ns5:t>𝒏𝒐𝒕</ns5:t>
-                    </ns5:r>
-                    <ns5:r>
+                      <m:t>𝒏𝒐𝒕</m:t>
+                    </m:r>
+                    <m:r>
                       <a:rPr kumimoji="0" lang="en-US" sz="1800" b="1" i="1" u="none" strike="noStrike" kern="1200" cap="none" spc="0" normalizeH="0" baseline="0" noProof="0" smtClean="0">
                         <a:ln>
                           <a:noFill/>
@@ -6645,9 +6387,9 @@
                         <a:ea typeface="Cambria Math" panose="02040503050406030204" pitchFamily="18" charset="0"/>
                         <a:cs typeface="+mn-cs"/>
                       </a:rPr>
-                      <ns5:t> </ns5:t>
-                    </ns5:r>
-                    <ns5:r>
+                      <m:t> </m:t>
+                    </m:r>
+                    <m:r>
                       <a:rPr kumimoji="0" lang="en-US" sz="1800" b="1" i="1" u="none" strike="noStrike" kern="1200" cap="none" spc="0" normalizeH="0" baseline="0" noProof="0" smtClean="0">
                         <a:ln>
                           <a:noFill/>
@@ -6662,9 +6404,9 @@
                         <a:ea typeface="Cambria Math" panose="02040503050406030204" pitchFamily="18" charset="0"/>
                         <a:cs typeface="+mn-cs"/>
                       </a:rPr>
-                      <ns5:t>𝒅𝒆𝒇𝒊𝒏𝒆𝒅</ns5:t>
-                    </ns5:r>
-                    <ns5:r>
+                      <m:t>𝒅𝒆𝒇𝒊𝒏𝒆𝒅</m:t>
+                    </m:r>
+                    <m:r>
                       <a:rPr kumimoji="0" lang="en-US" sz="1800" b="1" i="1" u="none" strike="noStrike" kern="1200" cap="none" spc="0" normalizeH="0" baseline="0" noProof="0" smtClean="0">
                         <a:ln>
                           <a:noFill/>
@@ -6679,10 +6421,10 @@
                         <a:ea typeface="Cambria Math" panose="02040503050406030204" pitchFamily="18" charset="0"/>
                         <a:cs typeface="+mn-cs"/>
                       </a:rPr>
-                      <ns5:t>)</ns5:t>
-                    </ns5:r>
-                  </ns5:oMath>
-                </ns4:m>
+                      <m:t>)</m:t>
+                    </m:r>
+                  </m:oMath>
+                </a14:m>
                 <a:r>
                   <a:rPr kumimoji="0" lang="en-US" sz="1800" b="0" i="0" u="none" strike="noStrike" kern="1200" cap="none" spc="0" normalizeH="0" baseline="0" noProof="0" dirty="0">
                     <a:ln>
@@ -6704,50 +6446,7 @@
             </p:txBody>
           </p:sp>
         </ns2:Choice>
-        <ns2:Fallback>
-          <p:sp>
-            <p:nvSpPr>
-              <p:cNvPr id="20" name="TextBox 19">
-                <a:extLst>
-                  <a:ext uri="{FF2B5EF4-FFF2-40B4-BE49-F238E27FC236}">
-                    <a16:creationId id="{B3FFFA43-DC28-C04C-8FF8-72E533B0CF14}"/>
-                  </a:ext>
-                </a:extLst>
-              </p:cNvPr>
-              <p:cNvSpPr txBox="1">
-                <a:spLocks noRot="1" noChangeAspect="1" noMove="1" noResize="1" noEditPoints="1" noAdjustHandles="1" noChangeArrowheads="1" noChangeShapeType="1" noTextEdit="1"/>
-              </p:cNvSpPr>
-              <p:nvPr/>
-            </p:nvSpPr>
-            <p:spPr>
-              <a:xfrm>
-                <a:off x="1179767" y="3086255"/>
-                <a:ext cx="9990668" cy="369332"/>
-              </a:xfrm>
-              <a:prstGeom prst="rect">
-                <a:avLst/>
-              </a:prstGeom>
-              <a:blipFill>
-                <a:blip r:embed="rId9"/>
-                <a:stretch>
-                  <a:fillRect b="-12903"/>
-                </a:stretch>
-              </a:blipFill>
-            </p:spPr>
-            <p:txBody>
-              <a:bodyPr/>
-              <a:lstStyle/>
-              <a:p>
-                <a:r>
-                  <a:rPr lang="en-US">
-                    <a:noFill/>
-                  </a:rPr>
-                  <a:t> </a:t>
-                </a:r>
-              </a:p>
-            </p:txBody>
-          </p:sp>
-        </ns2:Fallback>
+        <ns2:Fallback/>
       </ns2:AlternateContent>
       <ns2:AlternateContent>
         <ns2:Choice Requires="a14">
@@ -6796,13 +6495,13 @@
                   <a:tabLst/>
                   <a:defRPr/>
                 </a:pPr>
-                <ns4:m>
-                  <ns5:oMathPara>
-                    <ns5:oMathParaPr>
-                      <ns5:jc ns5:val="centerGroup"/>
-                    </ns5:oMathParaPr>
-                    <ns5:oMath>
-                      <ns5:r>
+                <a14:m>
+                  <m:oMathPara>
+                    <m:oMathParaPr>
+                      <m:jc m:val="centerGroup"/>
+                    </m:oMathParaPr>
+                    <m:oMath>
+                      <m:r>
                         <a:rPr kumimoji="0" lang="en-US" sz="1800" b="1" i="1" u="none" strike="noStrike" kern="1200" cap="none" spc="0" normalizeH="0" baseline="0" noProof="0" smtClean="0">
                           <a:ln>
                             <a:noFill/>
@@ -6817,11 +6516,11 @@
                           <a:ea typeface="Cambria Math" panose="02040503050406030204" pitchFamily="18" charset="0"/>
                           <a:cs typeface="+mn-cs"/>
                         </a:rPr>
-                        <ns5:t>𝑫𝒖𝒂𝒍𝒊𝒕𝒚</ns5:t>
-                      </ns5:r>
-                    </ns5:oMath>
-                  </ns5:oMathPara>
-                </ns4:m>
+                        <m:t>𝑫𝒖𝒂𝒍𝒊𝒕𝒚</m:t>
+                      </m:r>
+                    </m:oMath>
+                  </m:oMathPara>
+                </a14:m>
                 <a:endParaRPr kumimoji="0" lang="en-US" sz="1800" b="0" i="1" u="none" strike="noStrike" kern="1200" cap="none" spc="0" normalizeH="0" baseline="0" noProof="0" dirty="0">
                   <a:ln>
                     <a:noFill/>
@@ -6855,13 +6554,13 @@
                   <a:tabLst/>
                   <a:defRPr/>
                 </a:pPr>
-                <ns4:m>
-                  <ns5:oMathPara>
-                    <ns5:oMathParaPr>
-                      <ns5:jc ns5:val="centerGroup"/>
-                    </ns5:oMathParaPr>
-                    <ns5:oMath>
-                      <ns5:r>
+                <a14:m>
+                  <m:oMathPara>
+                    <m:oMathParaPr>
+                      <m:jc m:val="centerGroup"/>
+                    </m:oMathParaPr>
+                    <m:oMath>
+                      <m:r>
                         <a:rPr kumimoji="0" lang="en-US" sz="1800" b="0" i="1" u="none" strike="noStrike" kern="1200" cap="none" spc="0" normalizeH="0" baseline="0" noProof="0">
                           <a:ln>
                             <a:noFill/>
@@ -6876,9 +6575,9 @@
                           <a:ea typeface="Cambria Math" panose="02040503050406030204" pitchFamily="18" charset="0"/>
                           <a:cs typeface="+mn-cs"/>
                         </a:rPr>
-                        <ns5:t>𝑃𝑜𝑖𝑛𝑡</ns5:t>
-                      </ns5:r>
-                      <ns5:r>
+                        <m:t>𝑃𝑜𝑖𝑛𝑡</m:t>
+                      </m:r>
+                      <m:r>
                         <a:rPr kumimoji="0" lang="en-US" sz="1800" b="0" i="1" u="none" strike="noStrike" kern="1200" cap="none" spc="0" normalizeH="0" baseline="0" noProof="0">
                           <a:ln>
                             <a:noFill/>
@@ -6893,9 +6592,9 @@
                           <a:ea typeface="Cambria Math" panose="02040503050406030204" pitchFamily="18" charset="0"/>
                           <a:cs typeface="+mn-cs"/>
                         </a:rPr>
-                        <ns5:t> </ns5:t>
-                      </ns5:r>
-                      <ns5:r>
+                        <m:t> </m:t>
+                      </m:r>
+                      <m:r>
                         <a:rPr kumimoji="0" lang="en-US" sz="1800" b="0" i="1" u="none" strike="noStrike" kern="1200" cap="none" spc="0" normalizeH="0" baseline="0" noProof="0" smtClean="0">
                           <a:ln>
                             <a:noFill/>
@@ -6910,9 +6609,9 @@
                           <a:ea typeface="Cambria Math" panose="02040503050406030204" pitchFamily="18" charset="0"/>
                           <a:cs typeface="+mn-cs"/>
                         </a:rPr>
-                        <ns5:t>𝑝𝑜𝑡𝑒𝑛𝑡𝑖𝑎𝑙</ns5:t>
-                      </ns5:r>
-                      <ns5:r>
+                        <m:t>𝑝𝑜𝑡𝑒𝑛𝑡𝑖𝑎𝑙</m:t>
+                      </m:r>
+                      <m:r>
                         <a:rPr kumimoji="0" lang="en-US" sz="1800" b="0" i="1" u="none" strike="noStrike" kern="1200" cap="none" spc="0" normalizeH="0" baseline="0" noProof="0">
                           <a:ln>
                             <a:noFill/>
@@ -6927,9 +6626,9 @@
                           <a:ea typeface="Cambria Math" panose="02040503050406030204" pitchFamily="18" charset="0"/>
                           <a:cs typeface="+mn-cs"/>
                         </a:rPr>
-                        <ns5:t> </ns5:t>
-                      </ns5:r>
-                      <ns5:r>
+                        <m:t> </m:t>
+                      </m:r>
+                      <m:r>
                         <a:rPr kumimoji="0" lang="en-US" sz="1800" b="0" i="1" u="none" strike="noStrike" kern="1200" cap="none" spc="0" normalizeH="0" baseline="0" noProof="0">
                           <a:ln>
                             <a:noFill/>
@@ -6944,9 +6643,9 @@
                           <a:ea typeface="Cambria Math" panose="02040503050406030204" pitchFamily="18" charset="0"/>
                           <a:cs typeface="+mn-cs"/>
                         </a:rPr>
-                        <ns5:t>𝑓𝑖𝑒𝑙𝑑𝑠</ns5:t>
-                      </ns5:r>
-                      <ns5:r>
+                        <m:t>𝑓𝑖𝑒𝑙𝑑𝑠</m:t>
+                      </m:r>
+                      <m:r>
                         <a:rPr kumimoji="0" lang="en-US" sz="1800" b="0" i="1" u="none" strike="noStrike" kern="1200" cap="none" spc="0" normalizeH="0" baseline="0" noProof="0">
                           <a:ln>
                             <a:noFill/>
@@ -6961,9 +6660,9 @@
                           <a:ea typeface="Cambria Math" panose="02040503050406030204" pitchFamily="18" charset="0"/>
                           <a:cs typeface="+mn-cs"/>
                         </a:rPr>
-                        <ns5:t> </ns5:t>
-                      </ns5:r>
-                      <ns5:r>
+                        <m:t> </m:t>
+                      </m:r>
+                      <m:r>
                         <a:rPr kumimoji="0" lang="en-US" sz="1800" b="0" i="1" u="none" strike="noStrike" kern="1200" cap="none" spc="0" normalizeH="0" baseline="0" noProof="0">
                           <a:ln>
                             <a:noFill/>
@@ -6978,9 +6677,9 @@
                           <a:ea typeface="Cambria Math" panose="02040503050406030204" pitchFamily="18" charset="0"/>
                           <a:cs typeface="+mn-cs"/>
                         </a:rPr>
-                        <ns5:t>𝑡𝑟𝑎𝑣𝑒𝑙</ns5:t>
-                      </ns5:r>
-                      <ns5:r>
+                        <m:t>𝑡𝑟𝑎𝑣𝑒𝑙</m:t>
+                      </m:r>
+                      <m:r>
                         <a:rPr kumimoji="0" lang="en-US" sz="1800" b="0" i="1" u="none" strike="noStrike" kern="1200" cap="none" spc="0" normalizeH="0" baseline="0" noProof="0">
                           <a:ln>
                             <a:noFill/>
@@ -6995,9 +6694,9 @@
                           <a:ea typeface="Cambria Math" panose="02040503050406030204" pitchFamily="18" charset="0"/>
                           <a:cs typeface="+mn-cs"/>
                         </a:rPr>
-                        <ns5:t> </ns5:t>
-                      </ns5:r>
-                      <ns5:r>
+                        <m:t> </m:t>
+                      </m:r>
+                      <m:r>
                         <a:rPr kumimoji="0" lang="en-US" sz="1800" b="0" i="1" u="none" strike="noStrike" kern="1200" cap="none" spc="0" normalizeH="0" baseline="0" noProof="0" smtClean="0">
                           <a:ln>
                             <a:noFill/>
@@ -7012,9 +6711,9 @@
                           <a:ea typeface="Cambria Math" panose="02040503050406030204" pitchFamily="18" charset="0"/>
                           <a:cs typeface="+mn-cs"/>
                         </a:rPr>
-                        <ns5:t>𝑟𝑎𝑑𝑖𝑎𝑙𝑙𝑦</ns5:t>
-                      </ns5:r>
-                      <ns5:r>
+                        <m:t>𝑟𝑎𝑑𝑖𝑎𝑙𝑙𝑦</m:t>
+                      </m:r>
+                      <m:r>
                         <a:rPr kumimoji="0" lang="en-US" sz="1800" b="0" i="1" u="none" strike="noStrike" kern="1200" cap="none" spc="0" normalizeH="0" baseline="0" noProof="0" smtClean="0">
                           <a:ln>
                             <a:noFill/>
@@ -7029,9 +6728,9 @@
                           <a:ea typeface="Cambria Math" panose="02040503050406030204" pitchFamily="18" charset="0"/>
                           <a:cs typeface="+mn-cs"/>
                         </a:rPr>
-                        <ns5:t> </ns5:t>
-                      </ns5:r>
-                      <ns5:r>
+                        <m:t> </m:t>
+                      </m:r>
+                      <m:r>
                         <a:rPr kumimoji="0" lang="en-US" sz="1800" b="0" i="1" u="none" strike="noStrike" kern="1200" cap="none" spc="0" normalizeH="0" baseline="0" noProof="0" smtClean="0">
                           <a:ln>
                             <a:noFill/>
@@ -7046,9 +6745,9 @@
                           <a:ea typeface="Cambria Math" panose="02040503050406030204" pitchFamily="18" charset="0"/>
                           <a:cs typeface="+mn-cs"/>
                         </a:rPr>
-                        <ns5:t>𝑓𝑟𝑜𝑚</ns5:t>
-                      </ns5:r>
-                      <ns5:r>
+                        <m:t>𝑓𝑟𝑜𝑚</m:t>
+                      </m:r>
+                      <m:r>
                         <a:rPr kumimoji="0" lang="en-US" sz="1800" b="0" i="1" u="none" strike="noStrike" kern="1200" cap="none" spc="0" normalizeH="0" baseline="0" noProof="0" smtClean="0">
                           <a:ln>
                             <a:noFill/>
@@ -7063,9 +6762,9 @@
                           <a:ea typeface="Cambria Math" panose="02040503050406030204" pitchFamily="18" charset="0"/>
                           <a:cs typeface="+mn-cs"/>
                         </a:rPr>
-                        <ns5:t> </ns5:t>
-                      </ns5:r>
-                      <ns5:r>
+                        <m:t> </m:t>
+                      </m:r>
+                      <m:r>
                         <a:rPr kumimoji="0" lang="en-US" sz="1800" b="0" i="1" u="none" strike="noStrike" kern="1200" cap="none" spc="0" normalizeH="0" baseline="0" noProof="0" smtClean="0">
                           <a:ln>
                             <a:noFill/>
@@ -7080,9 +6779,9 @@
                           <a:ea typeface="Cambria Math" panose="02040503050406030204" pitchFamily="18" charset="0"/>
                           <a:cs typeface="+mn-cs"/>
                         </a:rPr>
-                        <ns5:t>𝑒𝑚𝑖𝑠𝑠𝑖𝑜𝑛</ns5:t>
-                      </ns5:r>
-                      <ns5:r>
+                        <m:t>𝑒𝑚𝑖𝑠𝑠𝑖𝑜𝑛</m:t>
+                      </m:r>
+                      <m:r>
                         <a:rPr kumimoji="0" lang="en-US" sz="1800" b="0" i="1" u="none" strike="noStrike" kern="1200" cap="none" spc="0" normalizeH="0" baseline="0" noProof="0" smtClean="0">
                           <a:ln>
                             <a:noFill/>
@@ -7097,9 +6796,9 @@
                           <a:ea typeface="Cambria Math" panose="02040503050406030204" pitchFamily="18" charset="0"/>
                           <a:cs typeface="+mn-cs"/>
                         </a:rPr>
-                        <ns5:t> </ns5:t>
-                      </ns5:r>
-                      <ns5:r>
+                        <m:t> </m:t>
+                      </m:r>
+                      <m:r>
                         <a:rPr kumimoji="0" lang="en-US" sz="1800" b="0" i="1" u="none" strike="noStrike" kern="1200" cap="none" spc="0" normalizeH="0" baseline="0" noProof="0">
                           <a:ln>
                             <a:noFill/>
@@ -7114,9 +6813,9 @@
                           <a:ea typeface="Cambria Math" panose="02040503050406030204" pitchFamily="18" charset="0"/>
                           <a:cs typeface="+mn-cs"/>
                         </a:rPr>
-                        <ns5:t>𝑎𝑡</ns5:t>
-                      </ns5:r>
-                      <ns5:r>
+                        <m:t>𝑎𝑡</m:t>
+                      </m:r>
+                      <m:r>
                         <a:rPr kumimoji="0" lang="en-US" sz="1800" b="0" i="1" u="none" strike="noStrike" kern="1200" cap="none" spc="0" normalizeH="0" baseline="0" noProof="0">
                           <a:ln>
                             <a:noFill/>
@@ -7131,9 +6830,9 @@
                           <a:ea typeface="Cambria Math" panose="02040503050406030204" pitchFamily="18" charset="0"/>
                           <a:cs typeface="+mn-cs"/>
                         </a:rPr>
-                        <ns5:t> </ns5:t>
-                      </ns5:r>
-                      <ns5:r>
+                        <m:t> </m:t>
+                      </m:r>
+                      <m:r>
                         <a:rPr kumimoji="0" lang="en-US" sz="1800" b="0" i="1" u="none" strike="noStrike" kern="1200" cap="none" spc="0" normalizeH="0" baseline="0" noProof="0" smtClean="0">
                           <a:ln>
                             <a:noFill/>
@@ -7148,9 +6847,9 @@
                           <a:ea typeface="Cambria Math" panose="02040503050406030204" pitchFamily="18" charset="0"/>
                           <a:cs typeface="+mn-cs"/>
                         </a:rPr>
-                        <ns5:t>𝑠𝑝𝑒𝑒𝑑</ns5:t>
-                      </ns5:r>
-                      <ns5:r>
+                        <m:t>𝑠𝑝𝑒𝑒𝑑</m:t>
+                      </m:r>
+                      <m:r>
                         <a:rPr kumimoji="0" lang="en-US" sz="1800" b="0" i="1" u="none" strike="noStrike" kern="1200" cap="none" spc="0" normalizeH="0" baseline="0" noProof="0" smtClean="0">
                           <a:ln>
                             <a:noFill/>
@@ -7165,9 +6864,9 @@
                           <a:ea typeface="Cambria Math" panose="02040503050406030204" pitchFamily="18" charset="0"/>
                           <a:cs typeface="+mn-cs"/>
                         </a:rPr>
-                        <ns5:t> </ns5:t>
-                      </ns5:r>
-                      <ns5:r>
+                        <m:t> </m:t>
+                      </m:r>
+                      <m:r>
                         <a:rPr kumimoji="0" lang="en-US" sz="1800" b="1" i="1" u="none" strike="noStrike" kern="1200" cap="none" spc="0" normalizeH="0" baseline="0" noProof="0">
                           <a:ln>
                             <a:noFill/>
@@ -7182,9 +6881,9 @@
                           <a:ea typeface="Cambria Math" panose="02040503050406030204" pitchFamily="18" charset="0"/>
                           <a:cs typeface="+mn-cs"/>
                         </a:rPr>
-                        <ns5:t>@</ns5:t>
-                      </ns5:r>
-                      <ns5:r>
+                        <m:t>@</m:t>
+                      </m:r>
+                      <m:r>
                         <a:rPr kumimoji="0" lang="en-US" sz="1800" b="0" i="1" u="none" strike="noStrike" kern="1200" cap="none" spc="0" normalizeH="0" baseline="0" noProof="0">
                           <a:ln>
                             <a:noFill/>
@@ -7199,11 +6898,11 @@
                           <a:ea typeface="Cambria Math" panose="02040503050406030204" pitchFamily="18" charset="0"/>
                           <a:cs typeface="+mn-cs"/>
                         </a:rPr>
-                        <ns5:t>.</ns5:t>
-                      </ns5:r>
-                    </ns5:oMath>
-                  </ns5:oMathPara>
-                </ns4:m>
+                        <m:t>.</m:t>
+                      </m:r>
+                    </m:oMath>
+                  </m:oMathPara>
+                </a14:m>
                 <a:endParaRPr kumimoji="0" lang="en-US" sz="1800" b="0" i="1" u="none" strike="noStrike" kern="1200" cap="none" spc="0" normalizeH="0" baseline="0" noProof="0" dirty="0">
                   <a:ln>
                     <a:noFill/>
@@ -7237,13 +6936,13 @@
                   <a:tabLst/>
                   <a:defRPr/>
                 </a:pPr>
-                <ns4:m>
-                  <ns5:oMathPara>
-                    <ns5:oMathParaPr>
-                      <ns5:jc ns5:val="centerGroup"/>
-                    </ns5:oMathParaPr>
-                    <ns5:oMath>
-                      <ns5:r>
+                <a14:m>
+                  <m:oMathPara>
+                    <m:oMathParaPr>
+                      <m:jc m:val="centerGroup"/>
+                    </m:oMathParaPr>
+                    <m:oMath>
+                      <m:r>
                         <a:rPr kumimoji="0" lang="en-US" sz="1800" b="0" i="1" u="none" strike="noStrike" kern="1200" cap="none" spc="0" normalizeH="0" baseline="0" noProof="0" smtClean="0">
                           <a:ln>
                             <a:noFill/>
@@ -7258,9 +6957,9 @@
                           <a:ea typeface="Cambria Math" panose="02040503050406030204" pitchFamily="18" charset="0"/>
                           <a:cs typeface="+mn-cs"/>
                         </a:rPr>
-                        <ns5:t>𝑃h𝑜𝑡𝑜𝑛</ns5:t>
-                      </ns5:r>
-                      <ns5:r>
+                        <m:t>𝑃h𝑜𝑡𝑜𝑛</m:t>
+                      </m:r>
+                      <m:r>
                         <a:rPr kumimoji="0" lang="en-US" sz="1800" b="0" i="1" u="none" strike="noStrike" kern="1200" cap="none" spc="0" normalizeH="0" baseline="0" noProof="0" smtClean="0">
                           <a:ln>
                             <a:noFill/>
@@ -7275,9 +6974,9 @@
                           <a:ea typeface="Cambria Math" panose="02040503050406030204" pitchFamily="18" charset="0"/>
                           <a:cs typeface="+mn-cs"/>
                         </a:rPr>
-                        <ns5:t> </ns5:t>
-                      </ns5:r>
-                      <ns5:r>
+                        <m:t> </m:t>
+                      </m:r>
+                      <m:r>
                         <a:rPr kumimoji="0" lang="en-US" sz="1800" b="0" i="1" u="none" strike="noStrike" kern="1200" cap="none" spc="0" normalizeH="0" baseline="0" noProof="0" smtClean="0">
                           <a:ln>
                             <a:noFill/>
@@ -7292,9 +6991,9 @@
                           <a:ea typeface="Cambria Math" panose="02040503050406030204" pitchFamily="18" charset="0"/>
                           <a:cs typeface="+mn-cs"/>
                         </a:rPr>
-                        <ns5:t>𝑠𝑡𝑟𝑢𝑐𝑡𝑢𝑟𝑒𝑠</ns5:t>
-                      </ns5:r>
-                      <ns5:r>
+                        <m:t>𝑠𝑡𝑟𝑢𝑐𝑡𝑢𝑟𝑒𝑠</m:t>
+                      </m:r>
+                      <m:r>
                         <a:rPr kumimoji="0" lang="en-US" sz="1800" b="0" i="1" u="none" strike="noStrike" kern="1200" cap="none" spc="0" normalizeH="0" baseline="0" noProof="0" smtClean="0">
                           <a:ln>
                             <a:noFill/>
@@ -7309,9 +7008,9 @@
                           <a:ea typeface="Cambria Math" panose="02040503050406030204" pitchFamily="18" charset="0"/>
                           <a:cs typeface="+mn-cs"/>
                         </a:rPr>
-                        <ns5:t> </ns5:t>
-                      </ns5:r>
-                      <ns5:r>
+                        <m:t> </m:t>
+                      </m:r>
+                      <m:r>
                         <a:rPr kumimoji="0" lang="en-US" sz="1800" b="0" i="1" u="none" strike="noStrike" kern="1200" cap="none" spc="0" normalizeH="0" baseline="0" noProof="0" smtClean="0">
                           <a:ln>
                             <a:noFill/>
@@ -7326,9 +7025,9 @@
                           <a:ea typeface="Cambria Math" panose="02040503050406030204" pitchFamily="18" charset="0"/>
                           <a:cs typeface="+mn-cs"/>
                         </a:rPr>
-                        <ns5:t>𝑡𝑟𝑎𝑣𝑒𝑙</ns5:t>
-                      </ns5:r>
-                      <ns5:r>
+                        <m:t>𝑡𝑟𝑎𝑣𝑒𝑙</m:t>
+                      </m:r>
+                      <m:r>
                         <a:rPr kumimoji="0" lang="en-US" sz="1800" b="0" i="1" u="none" strike="noStrike" kern="1200" cap="none" spc="0" normalizeH="0" baseline="0" noProof="0" smtClean="0">
                           <a:ln>
                             <a:noFill/>
@@ -7343,9 +7042,9 @@
                           <a:ea typeface="Cambria Math" panose="02040503050406030204" pitchFamily="18" charset="0"/>
                           <a:cs typeface="+mn-cs"/>
                         </a:rPr>
-                        <ns5:t> </ns5:t>
-                      </ns5:r>
-                      <ns5:r>
+                        <m:t> </m:t>
+                      </m:r>
+                      <m:r>
                         <a:rPr kumimoji="0" lang="en-US" sz="1800" b="0" i="1" u="none" strike="noStrike" kern="1200" cap="none" spc="0" normalizeH="0" baseline="0" noProof="0" smtClean="0">
                           <a:ln>
                             <a:noFill/>
@@ -7360,9 +7059,9 @@
                           <a:ea typeface="Cambria Math" panose="02040503050406030204" pitchFamily="18" charset="0"/>
                           <a:cs typeface="+mn-cs"/>
                         </a:rPr>
-                        <ns5:t>𝑎𝑡</ns5:t>
-                      </ns5:r>
-                      <ns5:r>
+                        <m:t>𝑎𝑡</m:t>
+                      </m:r>
+                      <m:r>
                         <a:rPr kumimoji="0" lang="en-US" sz="1800" b="0" i="1" u="none" strike="noStrike" kern="1200" cap="none" spc="0" normalizeH="0" baseline="0" noProof="0" smtClean="0">
                           <a:ln>
                             <a:noFill/>
@@ -7377,9 +7076,9 @@
                           <a:ea typeface="Cambria Math" panose="02040503050406030204" pitchFamily="18" charset="0"/>
                           <a:cs typeface="+mn-cs"/>
                         </a:rPr>
-                        <ns5:t> </ns5:t>
-                      </ns5:r>
-                      <ns5:r>
+                        <m:t> </m:t>
+                      </m:r>
+                      <m:r>
                         <a:rPr kumimoji="0" lang="en-US" sz="1800" b="0" i="1" u="none" strike="noStrike" kern="1200" cap="none" spc="0" normalizeH="0" baseline="0" noProof="0" smtClean="0">
                           <a:ln>
                             <a:noFill/>
@@ -7394,9 +7093,9 @@
                           <a:ea typeface="Cambria Math" panose="02040503050406030204" pitchFamily="18" charset="0"/>
                           <a:cs typeface="+mn-cs"/>
                         </a:rPr>
-                        <ns5:t>𝑐</ns5:t>
-                      </ns5:r>
-                      <ns5:r>
+                        <m:t>𝑐</m:t>
+                      </m:r>
+                      <m:r>
                         <a:rPr kumimoji="0" lang="en-US" sz="1800" b="0" i="1" u="none" strike="noStrike" kern="1200" cap="none" spc="0" normalizeH="0" baseline="0" noProof="0" smtClean="0">
                           <a:ln>
                             <a:noFill/>
@@ -7411,9 +7110,9 @@
                           <a:ea typeface="Cambria Math" panose="02040503050406030204" pitchFamily="18" charset="0"/>
                           <a:cs typeface="+mn-cs"/>
                         </a:rPr>
-                        <ns5:t>, </ns5:t>
-                      </ns5:r>
-                      <ns5:r>
+                        <m:t>, </m:t>
+                      </m:r>
+                      <m:r>
                         <a:rPr kumimoji="0" lang="en-US" sz="1800" b="0" i="1" u="none" strike="noStrike" kern="1200" cap="none" spc="0" normalizeH="0" baseline="0" noProof="0" smtClean="0">
                           <a:ln>
                             <a:noFill/>
@@ -7428,9 +7127,9 @@
                           <a:ea typeface="Cambria Math" panose="02040503050406030204" pitchFamily="18" charset="0"/>
                           <a:cs typeface="+mn-cs"/>
                         </a:rPr>
-                        <ns5:t>𝑡h𝑒</ns5:t>
-                      </ns5:r>
-                      <ns5:r>
+                        <m:t>𝑡h𝑒</m:t>
+                      </m:r>
+                      <m:r>
                         <a:rPr kumimoji="0" lang="en-US" sz="1800" b="0" i="1" u="none" strike="noStrike" kern="1200" cap="none" spc="0" normalizeH="0" baseline="0" noProof="0" smtClean="0">
                           <a:ln>
                             <a:noFill/>
@@ -7445,9 +7144,9 @@
                           <a:ea typeface="Cambria Math" panose="02040503050406030204" pitchFamily="18" charset="0"/>
                           <a:cs typeface="+mn-cs"/>
                         </a:rPr>
-                        <ns5:t> </ns5:t>
-                      </ns5:r>
-                      <ns5:r>
+                        <m:t> </m:t>
+                      </m:r>
+                      <m:r>
                         <a:rPr kumimoji="0" lang="en-US" sz="1800" b="1" i="1" u="none" strike="noStrike" kern="1200" cap="none" spc="0" normalizeH="0" baseline="0" noProof="0" smtClean="0">
                           <a:ln>
                             <a:noFill/>
@@ -7462,9 +7161,9 @@
                           <a:ea typeface="Cambria Math" panose="02040503050406030204" pitchFamily="18" charset="0"/>
                           <a:cs typeface="+mn-cs"/>
                         </a:rPr>
-                        <ns5:t>𝒍𝒐𝒄𝒂𝒍</ns5:t>
-                      </ns5:r>
-                      <ns5:r>
+                        <m:t>𝒍𝒐𝒄𝒂𝒍</m:t>
+                      </m:r>
+                      <m:r>
                         <a:rPr kumimoji="0" lang="en-US" sz="1800" b="0" i="1" u="none" strike="noStrike" kern="1200" cap="none" spc="0" normalizeH="0" baseline="0" noProof="0" smtClean="0">
                           <a:ln>
                             <a:noFill/>
@@ -7479,9 +7178,9 @@
                           <a:ea typeface="Cambria Math" panose="02040503050406030204" pitchFamily="18" charset="0"/>
                           <a:cs typeface="+mn-cs"/>
                         </a:rPr>
-                        <ns5:t> </ns5:t>
-                      </ns5:r>
-                      <ns5:r>
+                        <m:t> </m:t>
+                      </m:r>
+                      <m:r>
                         <a:rPr kumimoji="0" lang="en-US" sz="1800" b="0" i="1" u="none" strike="noStrike" kern="1200" cap="none" spc="0" normalizeH="0" baseline="0" noProof="0" smtClean="0">
                           <a:ln>
                             <a:noFill/>
@@ -7496,9 +7195,9 @@
                           <a:ea typeface="Cambria Math" panose="02040503050406030204" pitchFamily="18" charset="0"/>
                           <a:cs typeface="+mn-cs"/>
                         </a:rPr>
-                        <ns5:t>𝑠𝑝𝑒𝑒𝑑</ns5:t>
-                      </ns5:r>
-                      <ns5:r>
+                        <m:t>𝑠𝑝𝑒𝑒𝑑</m:t>
+                      </m:r>
+                      <m:r>
                         <a:rPr kumimoji="0" lang="en-US" sz="1800" b="0" i="1" u="none" strike="noStrike" kern="1200" cap="none" spc="0" normalizeH="0" baseline="0" noProof="0" smtClean="0">
                           <a:ln>
                             <a:noFill/>
@@ -7513,9 +7212,9 @@
                           <a:ea typeface="Cambria Math" panose="02040503050406030204" pitchFamily="18" charset="0"/>
                           <a:cs typeface="+mn-cs"/>
                         </a:rPr>
-                        <ns5:t> </ns5:t>
-                      </ns5:r>
-                      <ns5:r>
+                        <m:t> </m:t>
+                      </m:r>
+                      <m:r>
                         <a:rPr kumimoji="0" lang="en-US" sz="1800" b="0" i="1" u="none" strike="noStrike" kern="1200" cap="none" spc="0" normalizeH="0" baseline="0" noProof="0" smtClean="0">
                           <a:ln>
                             <a:noFill/>
@@ -7530,9 +7229,9 @@
                           <a:ea typeface="Cambria Math" panose="02040503050406030204" pitchFamily="18" charset="0"/>
                           <a:cs typeface="+mn-cs"/>
                         </a:rPr>
-                        <ns5:t>𝑜𝑓</ns5:t>
-                      </ns5:r>
-                      <ns5:r>
+                        <m:t>𝑜𝑓</m:t>
+                      </m:r>
+                      <m:r>
                         <a:rPr kumimoji="0" lang="en-US" sz="1800" b="0" i="1" u="none" strike="noStrike" kern="1200" cap="none" spc="0" normalizeH="0" baseline="0" noProof="0" smtClean="0">
                           <a:ln>
                             <a:noFill/>
@@ -7547,9 +7246,9 @@
                           <a:ea typeface="Cambria Math" panose="02040503050406030204" pitchFamily="18" charset="0"/>
                           <a:cs typeface="+mn-cs"/>
                         </a:rPr>
-                        <ns5:t> </ns5:t>
-                      </ns5:r>
-                      <ns5:r>
+                        <m:t> </m:t>
+                      </m:r>
+                      <m:r>
                         <a:rPr kumimoji="0" lang="en-US" sz="1800" b="0" i="1" u="none" strike="noStrike" kern="1200" cap="none" spc="0" normalizeH="0" baseline="0" noProof="0" smtClean="0">
                           <a:ln>
                             <a:noFill/>
@@ -7564,9 +7263,9 @@
                           <a:ea typeface="Cambria Math" panose="02040503050406030204" pitchFamily="18" charset="0"/>
                           <a:cs typeface="+mn-cs"/>
                         </a:rPr>
-                        <ns5:t>𝑙𝑖𝑔h𝑡</ns5:t>
-                      </ns5:r>
-                      <ns5:r>
+                        <m:t>𝑙𝑖𝑔h𝑡</m:t>
+                      </m:r>
+                      <m:r>
                         <a:rPr kumimoji="0" lang="en-US" sz="1800" b="0" i="1" u="none" strike="noStrike" kern="1200" cap="none" spc="0" normalizeH="0" baseline="0" noProof="0" smtClean="0">
                           <a:ln>
                             <a:noFill/>
@@ -7581,9 +7280,9 @@
                           <a:ea typeface="Cambria Math" panose="02040503050406030204" pitchFamily="18" charset="0"/>
                           <a:cs typeface="+mn-cs"/>
                         </a:rPr>
-                        <ns5:t> </ns5:t>
-                      </ns5:r>
-                      <ns5:r>
+                        <m:t> </m:t>
+                      </m:r>
+                      <m:r>
                         <a:rPr kumimoji="0" lang="en-US" sz="1800" b="0" i="1" u="none" strike="noStrike" kern="1200" cap="none" spc="0" normalizeH="0" baseline="0" noProof="0" smtClean="0">
                           <a:ln>
                             <a:noFill/>
@@ -7598,9 +7297,9 @@
                           <a:ea typeface="Cambria Math" panose="02040503050406030204" pitchFamily="18" charset="0"/>
                           <a:cs typeface="+mn-cs"/>
                         </a:rPr>
-                        <ns5:t>𝑡h𝑟𝑜𝑢𝑔h</ns5:t>
-                      </ns5:r>
-                      <ns5:r>
+                        <m:t>𝑡h𝑟𝑜𝑢𝑔h</m:t>
+                      </m:r>
+                      <m:r>
                         <a:rPr kumimoji="0" lang="en-US" sz="1800" b="0" i="1" u="none" strike="noStrike" kern="1200" cap="none" spc="0" normalizeH="0" baseline="0" noProof="0" smtClean="0">
                           <a:ln>
                             <a:noFill/>
@@ -7615,9 +7314,9 @@
                           <a:ea typeface="Cambria Math" panose="02040503050406030204" pitchFamily="18" charset="0"/>
                           <a:cs typeface="+mn-cs"/>
                         </a:rPr>
-                        <ns5:t> </ns5:t>
-                      </ns5:r>
-                      <ns5:r>
+                        <m:t> </m:t>
+                      </m:r>
+                      <m:r>
                         <a:rPr kumimoji="0" lang="en-US" sz="1800" b="0" i="1" u="none" strike="noStrike" kern="1200" cap="none" spc="0" normalizeH="0" baseline="0" noProof="0" smtClean="0">
                           <a:ln>
                             <a:noFill/>
@@ -7632,9 +7331,9 @@
                           <a:ea typeface="Cambria Math" panose="02040503050406030204" pitchFamily="18" charset="0"/>
                           <a:cs typeface="+mn-cs"/>
                         </a:rPr>
-                        <ns5:t>𝑡h𝑒</ns5:t>
-                      </ns5:r>
-                      <ns5:r>
+                        <m:t>𝑡h𝑒</m:t>
+                      </m:r>
+                      <m:r>
                         <a:rPr kumimoji="0" lang="en-US" sz="1800" b="0" i="1" u="none" strike="noStrike" kern="1200" cap="none" spc="0" normalizeH="0" baseline="0" noProof="0" smtClean="0">
                           <a:ln>
                             <a:noFill/>
@@ -7649,9 +7348,9 @@
                           <a:ea typeface="Cambria Math" panose="02040503050406030204" pitchFamily="18" charset="0"/>
                           <a:cs typeface="+mn-cs"/>
                         </a:rPr>
-                        <ns5:t> </ns5:t>
-                      </ns5:r>
-                      <ns5:r>
+                        <m:t> </m:t>
+                      </m:r>
+                      <m:r>
                         <a:rPr kumimoji="0" lang="en-US" sz="1800" b="0" i="1" u="none" strike="noStrike" kern="1200" cap="none" spc="0" normalizeH="0" baseline="0" noProof="0" smtClean="0">
                           <a:ln>
                             <a:noFill/>
@@ -7666,9 +7365,9 @@
                           <a:ea typeface="Cambria Math" panose="02040503050406030204" pitchFamily="18" charset="0"/>
                           <a:cs typeface="+mn-cs"/>
                         </a:rPr>
-                        <ns5:t>𝑎𝑒𝑡h𝑒𝑟</ns5:t>
-                      </ns5:r>
-                      <ns5:r>
+                        <m:t>𝑎𝑒𝑡h𝑒𝑟</m:t>
+                      </m:r>
+                      <m:r>
                         <a:rPr kumimoji="0" lang="en-US" sz="1800" b="0" i="1" u="none" strike="noStrike" kern="1200" cap="none" spc="0" normalizeH="0" baseline="0" noProof="0" smtClean="0">
                           <a:ln>
                             <a:noFill/>
@@ -7683,11 +7382,11 @@
                           <a:ea typeface="Cambria Math" panose="02040503050406030204" pitchFamily="18" charset="0"/>
                           <a:cs typeface="+mn-cs"/>
                         </a:rPr>
-                        <ns5:t>.</ns5:t>
-                      </ns5:r>
-                    </ns5:oMath>
-                  </ns5:oMathPara>
-                </ns4:m>
+                        <m:t>.</m:t>
+                      </m:r>
+                    </m:oMath>
+                  </m:oMathPara>
+                </a14:m>
                 <a:endParaRPr kumimoji="0" lang="en-US" sz="1800" b="0" i="1" u="none" strike="noStrike" kern="1200" cap="none" spc="0" normalizeH="0" baseline="0" noProof="0" dirty="0">
                   <a:ln>
                     <a:noFill/>
@@ -7721,13 +7420,13 @@
                   <a:tabLst/>
                   <a:defRPr/>
                 </a:pPr>
-                <ns4:m>
-                  <ns5:oMathPara>
-                    <ns5:oMathParaPr>
-                      <ns5:jc ns5:val="centerGroup"/>
-                    </ns5:oMathParaPr>
-                    <ns5:oMath>
-                      <ns5:r>
+                <a14:m>
+                  <m:oMathPara>
+                    <m:oMathParaPr>
+                      <m:jc m:val="centerGroup"/>
+                    </m:oMathParaPr>
+                    <m:oMath>
+                      <m:r>
                         <a:rPr kumimoji="0" lang="en-US" sz="1800" b="0" i="1" u="none" strike="noStrike" kern="1200" cap="none" spc="0" normalizeH="0" baseline="0" noProof="0" smtClean="0">
                           <a:ln>
                             <a:noFill/>
@@ -7742,9 +7441,9 @@
                           <a:ea typeface="Cambria Math" panose="02040503050406030204" pitchFamily="18" charset="0"/>
                           <a:cs typeface="+mn-cs"/>
                         </a:rPr>
-                        <ns5:t>𝐿𝑜𝑐𝑎𝑙</ns5:t>
-                      </ns5:r>
-                      <ns5:r>
+                        <m:t>𝐿𝑜𝑐𝑎𝑙</m:t>
+                      </m:r>
+                      <m:r>
                         <a:rPr kumimoji="0" lang="en-US" sz="1800" b="0" i="1" u="none" strike="noStrike" kern="1200" cap="none" spc="0" normalizeH="0" baseline="0" noProof="0" smtClean="0">
                           <a:ln>
                             <a:noFill/>
@@ -7759,9 +7458,9 @@
                           <a:ea typeface="Cambria Math" panose="02040503050406030204" pitchFamily="18" charset="0"/>
                           <a:cs typeface="+mn-cs"/>
                         </a:rPr>
-                        <ns5:t> </ns5:t>
-                      </ns5:r>
-                      <ns5:r>
+                        <m:t> </m:t>
+                      </m:r>
+                      <m:r>
                         <a:rPr kumimoji="0" lang="en-US" sz="1800" b="0" i="1" u="none" strike="noStrike" kern="1200" cap="none" spc="0" normalizeH="0" baseline="0" noProof="0" smtClean="0">
                           <a:ln>
                             <a:noFill/>
@@ -7776,9 +7475,9 @@
                           <a:ea typeface="Cambria Math" panose="02040503050406030204" pitchFamily="18" charset="0"/>
                           <a:cs typeface="+mn-cs"/>
                         </a:rPr>
-                        <ns5:t>𝑐</ns5:t>
-                      </ns5:r>
-                      <ns5:r>
+                        <m:t>𝑐</m:t>
+                      </m:r>
+                      <m:r>
                         <a:rPr kumimoji="0" lang="en-US" sz="1800" b="0" i="1" u="none" strike="noStrike" kern="1200" cap="none" spc="0" normalizeH="0" baseline="0" noProof="0" smtClean="0">
                           <a:ln>
                             <a:noFill/>
@@ -7793,9 +7492,9 @@
                           <a:ea typeface="Cambria Math" panose="02040503050406030204" pitchFamily="18" charset="0"/>
                           <a:cs typeface="+mn-cs"/>
                         </a:rPr>
-                        <ns5:t> </ns5:t>
-                      </ns5:r>
-                      <ns5:r>
+                        <m:t> </m:t>
+                      </m:r>
+                      <m:r>
                         <a:rPr kumimoji="0" lang="en-US" sz="1800" b="0" i="1" u="none" strike="noStrike" kern="1200" cap="none" spc="0" normalizeH="0" baseline="0" noProof="0" smtClean="0">
                           <a:ln>
                             <a:noFill/>
@@ -7810,9 +7509,9 @@
                           <a:ea typeface="Cambria Math" panose="02040503050406030204" pitchFamily="18" charset="0"/>
                           <a:cs typeface="+mn-cs"/>
                         </a:rPr>
-                        <ns5:t>𝑎𝑝𝑝𝑟𝑜𝑎𝑐h𝑒𝑠</ns5:t>
-                      </ns5:r>
-                      <ns5:r>
+                        <m:t>𝑎𝑝𝑝𝑟𝑜𝑎𝑐h𝑒𝑠</m:t>
+                      </m:r>
+                      <m:r>
                         <a:rPr kumimoji="0" lang="en-US" sz="1800" b="0" i="1" u="none" strike="noStrike" kern="1200" cap="none" spc="0" normalizeH="0" baseline="0" noProof="0" smtClean="0">
                           <a:ln>
                             <a:noFill/>
@@ -7827,9 +7526,9 @@
                           <a:ea typeface="Cambria Math" panose="02040503050406030204" pitchFamily="18" charset="0"/>
                           <a:cs typeface="+mn-cs"/>
                         </a:rPr>
-                        <ns5:t> </ns5:t>
-                      </ns5:r>
-                      <ns5:r>
+                        <m:t> </m:t>
+                      </m:r>
+                      <m:r>
                         <a:rPr kumimoji="0" lang="en-US" sz="1800" b="1" i="1" u="none" strike="noStrike" kern="1200" cap="none" spc="0" normalizeH="0" baseline="0" noProof="0" smtClean="0">
                           <a:ln>
                             <a:noFill/>
@@ -7844,9 +7543,9 @@
                           <a:ea typeface="Cambria Math" panose="02040503050406030204" pitchFamily="18" charset="0"/>
                           <a:cs typeface="+mn-cs"/>
                         </a:rPr>
-                        <ns5:t>@</ns5:t>
-                      </ns5:r>
-                      <ns5:r>
+                        <m:t>@</m:t>
+                      </m:r>
+                      <m:r>
                         <a:rPr kumimoji="0" lang="en-US" sz="1800" b="0" i="1" u="none" strike="noStrike" kern="1200" cap="none" spc="0" normalizeH="0" baseline="0" noProof="0" smtClean="0">
                           <a:ln>
                             <a:noFill/>
@@ -7861,9 +7560,9 @@
                           <a:ea typeface="Cambria Math" panose="02040503050406030204" pitchFamily="18" charset="0"/>
                           <a:cs typeface="+mn-cs"/>
                         </a:rPr>
-                        <ns5:t> </ns5:t>
-                      </ns5:r>
-                      <ns5:r>
+                        <m:t> </m:t>
+                      </m:r>
+                      <m:r>
                         <a:rPr kumimoji="0" lang="en-US" sz="1800" b="0" i="1" u="none" strike="noStrike" kern="1200" cap="none" spc="0" normalizeH="0" baseline="0" noProof="0" smtClean="0">
                           <a:ln>
                             <a:noFill/>
@@ -7878,11 +7577,11 @@
                           <a:ea typeface="Cambria Math" panose="02040503050406030204" pitchFamily="18" charset="0"/>
                           <a:cs typeface="+mn-cs"/>
                         </a:rPr>
-                        <ns5:t>𝑎𝑠</ns5:t>
-                      </ns5:r>
-                      <ns5:sSub>
-                        <ns5:sSubPr>
-                          <ns5:ctrlPr>
+                        <m:t>𝑎𝑠</m:t>
+                      </m:r>
+                      <m:sSub>
+                        <m:sSubPr>
+                          <m:ctrlPr>
                             <a:rPr kumimoji="0" lang="en-US" sz="1800" b="0" i="1" u="none" strike="noStrike" kern="1200" cap="none" spc="0" normalizeH="0" baseline="0" noProof="0">
                               <a:ln>
                                 <a:noFill/>
@@ -7897,10 +7596,10 @@
                               <a:ea typeface="Cambria Math" panose="02040503050406030204" pitchFamily="18" charset="0"/>
                               <a:cs typeface="+mn-cs"/>
                             </a:rPr>
-                          </ns5:ctrlPr>
-                        </ns5:sSubPr>
-                        <ns5:e>
-                          <ns5:r>
+                          </m:ctrlPr>
+                        </m:sSubPr>
+                        <m:e>
+                          <m:r>
                             <a:rPr kumimoji="0" lang="en-US" sz="1800" b="0" i="1" u="none" strike="noStrike" kern="1200" cap="none" spc="0" normalizeH="0" baseline="0" noProof="0" smtClean="0">
                               <a:ln>
                                 <a:noFill/>
@@ -7915,9 +7614,9 @@
                               <a:ea typeface="Cambria Math" panose="02040503050406030204" pitchFamily="18" charset="0"/>
                               <a:cs typeface="+mn-cs"/>
                             </a:rPr>
-                            <ns5:t> </ns5:t>
-                          </ns5:r>
-                          <ns5:r>
+                            <m:t> </m:t>
+                          </m:r>
+                          <m:r>
                             <a:rPr kumimoji="0" lang="en-US" sz="1800" b="0" i="1" u="none" strike="noStrike" kern="1200" cap="none" spc="0" normalizeH="0" baseline="0" noProof="0">
                               <a:ln>
                                 <a:noFill/>
@@ -7932,11 +7631,11 @@
                               <a:ea typeface="Cambria Math" panose="02040503050406030204" pitchFamily="18" charset="0"/>
                               <a:cs typeface="+mn-cs"/>
                             </a:rPr>
-                            <ns5:t>𝐸𝑛𝑒𝑟𝑔𝑦</ns5:t>
-                          </ns5:r>
-                        </ns5:e>
-                        <ns5:sub>
-                          <ns5:r>
+                            <m:t>𝐸𝑛𝑒𝑟𝑔𝑦</m:t>
+                          </m:r>
+                        </m:e>
+                        <m:sub>
+                          <m:r>
                             <a:rPr kumimoji="0" lang="en-US" sz="1800" b="0" i="1" u="none" strike="noStrike" kern="1200" cap="none" spc="0" normalizeH="0" baseline="0" noProof="0">
                               <a:ln>
                                 <a:noFill/>
@@ -7951,11 +7650,11 @@
                               <a:ea typeface="Cambria Math" panose="02040503050406030204" pitchFamily="18" charset="0"/>
                               <a:cs typeface="+mn-cs"/>
                             </a:rPr>
-                            <ns5:t>𝐴𝑃𝑃𝐴𝑅𝐸𝑁𝑇</ns5:t>
-                          </ns5:r>
-                        </ns5:sub>
-                      </ns5:sSub>
-                      <ns5:r>
+                            <m:t>𝐴𝑃𝑃𝐴𝑅𝐸𝑁𝑇</m:t>
+                          </m:r>
+                        </m:sub>
+                      </m:sSub>
+                      <m:r>
                         <a:rPr kumimoji="0" lang="en-US" sz="1800" b="0" i="1" u="none" strike="noStrike" kern="1200" cap="none" spc="0" normalizeH="0" baseline="0" noProof="0" smtClean="0">
                           <a:ln>
                             <a:noFill/>
@@ -7970,9 +7669,9 @@
                           <a:ea typeface="Cambria Math" panose="02040503050406030204" pitchFamily="18" charset="0"/>
                           <a:cs typeface="+mn-cs"/>
                         </a:rPr>
-                        <ns5:t> </ns5:t>
-                      </ns5:r>
-                      <ns5:r>
+                        <m:t> </m:t>
+                      </m:r>
+                      <m:r>
                         <a:rPr kumimoji="0" lang="en-US" sz="1800" b="0" i="1" u="none" strike="noStrike" kern="1200" cap="none" spc="0" normalizeH="0" baseline="0" noProof="0" smtClean="0">
                           <a:ln>
                             <a:noFill/>
@@ -7987,9 +7686,9 @@
                           <a:ea typeface="Cambria Math" panose="02040503050406030204" pitchFamily="18" charset="0"/>
                           <a:cs typeface="+mn-cs"/>
                         </a:rPr>
-                        <ns5:t>𝑜𝑓</ns5:t>
-                      </ns5:r>
-                      <ns5:r>
+                        <m:t>𝑜𝑓</m:t>
+                      </m:r>
+                      <m:r>
                         <a:rPr kumimoji="0" lang="en-US" sz="1800" b="0" i="1" u="none" strike="noStrike" kern="1200" cap="none" spc="0" normalizeH="0" baseline="0" noProof="0" smtClean="0">
                           <a:ln>
                             <a:noFill/>
@@ -8004,9 +7703,9 @@
                           <a:ea typeface="Cambria Math" panose="02040503050406030204" pitchFamily="18" charset="0"/>
                           <a:cs typeface="+mn-cs"/>
                         </a:rPr>
-                        <ns5:t> </ns5:t>
-                      </ns5:r>
-                      <ns5:r>
+                        <m:t> </m:t>
+                      </m:r>
+                      <m:r>
                         <a:rPr kumimoji="0" lang="en-US" sz="1800" b="0" i="1" u="none" strike="noStrike" kern="1200" cap="none" spc="0" normalizeH="0" baseline="0" noProof="0" smtClean="0">
                           <a:ln>
                             <a:noFill/>
@@ -8021,9 +7720,9 @@
                           <a:ea typeface="Cambria Math" panose="02040503050406030204" pitchFamily="18" charset="0"/>
                           <a:cs typeface="+mn-cs"/>
                         </a:rPr>
-                        <ns5:t>𝑡h𝑒</ns5:t>
-                      </ns5:r>
-                      <ns5:r>
+                        <m:t>𝑡h𝑒</m:t>
+                      </m:r>
+                      <m:r>
                         <a:rPr kumimoji="0" lang="en-US" sz="1800" b="0" i="1" u="none" strike="noStrike" kern="1200" cap="none" spc="0" normalizeH="0" baseline="0" noProof="0" smtClean="0">
                           <a:ln>
                             <a:noFill/>
@@ -8038,9 +7737,9 @@
                           <a:ea typeface="Cambria Math" panose="02040503050406030204" pitchFamily="18" charset="0"/>
                           <a:cs typeface="+mn-cs"/>
                         </a:rPr>
-                        <ns5:t> </ns5:t>
-                      </ns5:r>
-                      <ns5:r>
+                        <m:t> </m:t>
+                      </m:r>
+                      <m:r>
                         <a:rPr kumimoji="0" lang="en-US" sz="1800" b="0" i="1" u="none" strike="noStrike" kern="1200" cap="none" spc="0" normalizeH="0" baseline="0" noProof="0" smtClean="0">
                           <a:ln>
                             <a:noFill/>
@@ -8055,9 +7754,9 @@
                           <a:ea typeface="Cambria Math" panose="02040503050406030204" pitchFamily="18" charset="0"/>
                           <a:cs typeface="+mn-cs"/>
                         </a:rPr>
-                        <ns5:t>𝑎𝑒𝑡h𝑒𝑟</ns5:t>
-                      </ns5:r>
-                      <ns5:r>
+                        <m:t>𝑎𝑒𝑡h𝑒𝑟</m:t>
+                      </m:r>
+                      <m:r>
                         <a:rPr kumimoji="0" lang="en-US" sz="1800" b="0" i="1" u="none" strike="noStrike" kern="1200" cap="none" spc="0" normalizeH="0" baseline="0" noProof="0" smtClean="0">
                           <a:ln>
                             <a:noFill/>
@@ -8072,9 +7771,9 @@
                           <a:ea typeface="Cambria Math" panose="02040503050406030204" pitchFamily="18" charset="0"/>
                           <a:cs typeface="+mn-cs"/>
                         </a:rPr>
-                        <ns5:t> </ns5:t>
-                      </ns5:r>
-                      <ns5:r>
+                        <m:t> </m:t>
+                      </m:r>
+                      <m:r>
                         <a:rPr kumimoji="0" lang="en-US" sz="1800" b="0" i="1" u="none" strike="noStrike" kern="1200" cap="none" spc="0" normalizeH="0" baseline="0" noProof="0" smtClean="0">
                           <a:ln>
                             <a:noFill/>
@@ -8089,9 +7788,9 @@
                           <a:ea typeface="Cambria Math" panose="02040503050406030204" pitchFamily="18" charset="0"/>
                           <a:cs typeface="+mn-cs"/>
                         </a:rPr>
-                        <ns5:t>𝑎𝑝𝑝𝑟𝑜𝑎𝑐h𝑒𝑠</ns5:t>
-                      </ns5:r>
-                      <ns5:r>
+                        <m:t>𝑎𝑝𝑝𝑟𝑜𝑎𝑐h𝑒𝑠</m:t>
+                      </m:r>
+                      <m:r>
                         <a:rPr kumimoji="0" lang="en-US" sz="1800" b="0" i="1" u="none" strike="noStrike" kern="1200" cap="none" spc="0" normalizeH="0" baseline="0" noProof="0" smtClean="0">
                           <a:ln>
                             <a:noFill/>
@@ -8106,9 +7805,9 @@
                           <a:ea typeface="Cambria Math" panose="02040503050406030204" pitchFamily="18" charset="0"/>
                           <a:cs typeface="+mn-cs"/>
                         </a:rPr>
-                        <ns5:t> </ns5:t>
-                      </ns5:r>
-                      <ns5:r>
+                        <m:t> </m:t>
+                      </m:r>
+                      <m:r>
                         <a:rPr kumimoji="0" lang="en-US" sz="1800" b="0" i="1" u="none" strike="noStrike" kern="1200" cap="none" spc="0" normalizeH="0" baseline="0" noProof="0" smtClean="0">
                           <a:ln>
                             <a:noFill/>
@@ -8123,9 +7822,9 @@
                           <a:ea typeface="Cambria Math" panose="02040503050406030204" pitchFamily="18" charset="0"/>
                           <a:cs typeface="+mn-cs"/>
                         </a:rPr>
-                        <ns5:t>𝑧𝑒𝑟𝑜</ns5:t>
-                      </ns5:r>
-                      <ns5:r>
+                        <m:t>𝑧𝑒𝑟𝑜</m:t>
+                      </m:r>
+                      <m:r>
                         <a:rPr kumimoji="0" lang="en-US" sz="1800" b="0" i="1" u="none" strike="noStrike" kern="1200" cap="none" spc="0" normalizeH="0" baseline="0" noProof="0" smtClean="0">
                           <a:ln>
                             <a:noFill/>
@@ -8140,11 +7839,11 @@
                           <a:ea typeface="Cambria Math" panose="02040503050406030204" pitchFamily="18" charset="0"/>
                           <a:cs typeface="+mn-cs"/>
                         </a:rPr>
-                        <ns5:t>.</ns5:t>
-                      </ns5:r>
-                    </ns5:oMath>
-                  </ns5:oMathPara>
-                </ns4:m>
+                        <m:t>.</m:t>
+                      </m:r>
+                    </m:oMath>
+                  </m:oMathPara>
+                </a14:m>
                 <a:endParaRPr kumimoji="0" lang="en-US" sz="1800" b="0" i="1" u="none" strike="noStrike" kern="1200" cap="none" spc="0" normalizeH="0" baseline="0" noProof="0" dirty="0">
                   <a:ln>
                     <a:noFill/>
@@ -8178,13 +7877,13 @@
                   <a:tabLst/>
                   <a:defRPr/>
                 </a:pPr>
-                <ns4:m>
-                  <ns5:oMathPara>
-                    <ns5:oMathParaPr>
-                      <ns5:jc ns5:val="centerGroup"/>
-                    </ns5:oMathParaPr>
-                    <ns5:oMath>
-                      <ns5:r>
+                <a14:m>
+                  <m:oMathPara>
+                    <m:oMathParaPr>
+                      <m:jc m:val="centerGroup"/>
+                    </m:oMathParaPr>
+                    <m:oMath>
+                      <m:r>
                         <a:rPr kumimoji="0" lang="en-US" sz="1800" b="0" i="1" u="none" strike="noStrike" kern="1200" cap="none" spc="0" normalizeH="0" baseline="0" noProof="0" smtClean="0">
                           <a:ln>
                             <a:noFill/>
@@ -8199,11 +7898,11 @@
                           <a:ea typeface="Cambria Math" panose="02040503050406030204" pitchFamily="18" charset="0"/>
                           <a:cs typeface="+mn-cs"/>
                         </a:rPr>
-                        <ns5:t> </ns5:t>
-                      </ns5:r>
-                    </ns5:oMath>
-                  </ns5:oMathPara>
-                </ns4:m>
+                        <m:t> </m:t>
+                      </m:r>
+                    </m:oMath>
+                  </m:oMathPara>
+                </a14:m>
                 <a:endParaRPr kumimoji="0" lang="en-US" sz="1800" b="0" i="0" u="none" strike="noStrike" kern="1200" cap="none" spc="0" normalizeH="0" baseline="0" noProof="0" dirty="0">
                   <a:ln>
                     <a:noFill/>
@@ -8222,50 +7921,7 @@
             </p:txBody>
           </p:sp>
         </ns2:Choice>
-        <ns2:Fallback>
-          <p:sp>
-            <p:nvSpPr>
-              <p:cNvPr id="22" name="TextBox 21">
-                <a:extLst>
-                  <a:ext uri="{FF2B5EF4-FFF2-40B4-BE49-F238E27FC236}">
-                    <a16:creationId id="{2F270859-FECE-2645-A10D-F6319FAE5B09}"/>
-                  </a:ext>
-                </a:extLst>
-              </p:cNvPr>
-              <p:cNvSpPr txBox="1">
-                <a:spLocks noRot="1" noChangeAspect="1" noMove="1" noResize="1" noEditPoints="1" noAdjustHandles="1" noChangeArrowheads="1" noChangeShapeType="1" noTextEdit="1"/>
-              </p:cNvSpPr>
-              <p:nvPr/>
-            </p:nvSpPr>
-            <p:spPr>
-              <a:xfrm>
-                <a:off x="2088245" y="5135368"/>
-                <a:ext cx="8173712" cy="1477328"/>
-              </a:xfrm>
-              <a:prstGeom prst="rect">
-                <a:avLst/>
-              </a:prstGeom>
-              <a:blipFill>
-                <a:blip r:embed="rId10"/>
-                <a:stretch>
-                  <a:fillRect b="-3419"/>
-                </a:stretch>
-              </a:blipFill>
-            </p:spPr>
-            <p:txBody>
-              <a:bodyPr/>
-              <a:lstStyle/>
-              <a:p>
-                <a:r>
-                  <a:rPr lang="en-US">
-                    <a:noFill/>
-                  </a:rPr>
-                  <a:t> </a:t>
-                </a:r>
-              </a:p>
-            </p:txBody>
-          </p:sp>
-        </ns2:Fallback>
+        <ns2:Fallback/>
       </ns2:AlternateContent>
       <p:sp>
         <p:nvSpPr>
@@ -8585,10 +8241,338 @@
           </a:p>
         </p:txBody>
       </p:sp>
+      <p:sp>
+        <p:nvSpPr>
+          <p:cNvPr id="23" name="TextBox 22"/>
+          <p:cNvSpPr txBox="1"/>
+          <p:nvPr/>
+        </p:nvSpPr>
+        <p:spPr>
+          <a:xfrm>
+            <a:off x="2705240" y="245304"/>
+            <a:ext cx="6591869" cy="369332"/>
+          </a:xfrm>
+          <a:prstGeom prst="rect">
+            <a:avLst/>
+          </a:prstGeom>
+          <a:solidFill>
+            <a:srgbClr val="7030A0"/>
+          </a:solidFill>
+          <a:ln>
+            <a:noFill/>
+          </a:ln>
+        </p:spPr>
+        <p:txBody>
+          <a:bodyPr wrap="none" lIns="0" rIns="0" tIns="0" bIns="0"/>
+          <a:lstStyle/>
+          <a:p>
+            <a:pPr algn="ctr"/>
+            <a:r>
+              <a:rPr sz="1700" b="1" i="1">
+                <a:solidFill>
+                  <a:srgbClr val="FFFFFF"/>
+                </a:solidFill>
+                <a:latin typeface="Cambria"/>
+              </a:rPr>
+              <a:t>Standard matter particle assembly at rest in the aether</a:t>
+            </a:r>
+          </a:p>
+        </p:txBody>
+      </p:sp>
+      <p:sp>
+        <p:nvSpPr>
+          <p:cNvPr id="24" name="TextBox 23"/>
+          <p:cNvSpPr txBox="1"/>
+          <p:nvPr/>
+        </p:nvSpPr>
+        <p:spPr>
+          <a:xfrm>
+            <a:off x="4435747" y="934682"/>
+            <a:ext cx="3478709" cy="369332"/>
+          </a:xfrm>
+          <a:prstGeom prst="rect">
+            <a:avLst/>
+          </a:prstGeom>
+          <a:noFill/>
+          <a:ln>
+            <a:noFill/>
+          </a:ln>
+        </p:spPr>
+        <p:txBody>
+          <a:bodyPr wrap="none" lIns="0" rIns="0" tIns="0" bIns="0"/>
+          <a:lstStyle/>
+          <a:p>
+            <a:pPr algn="ctr"/>
+            <a:r>
+              <a:rPr sz="1800" b="0" i="1">
+                <a:solidFill>
+                  <a:srgbClr val="FFFFFF"/>
+                </a:solidFill>
+                <a:latin typeface="Cambria"/>
+              </a:rPr>
+              <a:t>Einstein : Energy = Mass * c²</a:t>
+            </a:r>
+          </a:p>
+        </p:txBody>
+      </p:sp>
+      <p:sp>
+        <p:nvSpPr>
+          <p:cNvPr id="25" name="TextBox 24"/>
+          <p:cNvSpPr txBox="1"/>
+          <p:nvPr/>
+        </p:nvSpPr>
+        <p:spPr>
+          <a:xfrm>
+            <a:off x="4058368" y="1651873"/>
+            <a:ext cx="4233467" cy="369332"/>
+          </a:xfrm>
+          <a:prstGeom prst="rect">
+            <a:avLst/>
+          </a:prstGeom>
+          <a:noFill/>
+          <a:ln>
+            <a:noFill/>
+          </a:ln>
+        </p:spPr>
+        <p:txBody>
+          <a:bodyPr wrap="none" lIns="0" rIns="0" tIns="0" bIns="0"/>
+          <a:lstStyle/>
+          <a:p>
+            <a:pPr algn="ctr"/>
+            <a:r>
+              <a:rPr sz="1800" b="0" i="1">
+                <a:solidFill>
+                  <a:srgbClr val="FFFFFF"/>
+                </a:solidFill>
+                <a:latin typeface="Cambria"/>
+              </a:rPr>
+              <a:t>Nature : Energy(apparent) = Mass * c²</a:t>
+            </a:r>
+          </a:p>
+        </p:txBody>
+      </p:sp>
+      <p:sp>
+        <p:nvSpPr>
+          <p:cNvPr id="26" name="TextBox 25"/>
+          <p:cNvSpPr txBox="1"/>
+          <p:nvPr/>
+        </p:nvSpPr>
+        <p:spPr>
+          <a:xfrm>
+            <a:off x="2693154" y="2369064"/>
+            <a:ext cx="6963894" cy="369332"/>
+          </a:xfrm>
+          <a:prstGeom prst="rect">
+            <a:avLst/>
+          </a:prstGeom>
+          <a:noFill/>
+          <a:ln>
+            <a:noFill/>
+          </a:ln>
+        </p:spPr>
+        <p:txBody>
+          <a:bodyPr wrap="none" lIns="0" rIns="0" tIns="0" bIns="0"/>
+          <a:lstStyle/>
+          <a:p>
+            <a:pPr algn="ctr"/>
+            <a:r>
+              <a:rPr sz="1800" b="0" i="1">
+                <a:solidFill>
+                  <a:srgbClr val="FFFFFF"/>
+                </a:solidFill>
+                <a:latin typeface="Cambria"/>
+              </a:rPr>
+              <a:t>Energy(total) = Energy(apparent) + Energy(shielded) via superposition</a:t>
+            </a:r>
+          </a:p>
+        </p:txBody>
+      </p:sp>
+      <p:sp>
+        <p:nvSpPr>
+          <p:cNvPr id="27" name="TextBox 26"/>
+          <p:cNvSpPr txBox="1"/>
+          <p:nvPr/>
+        </p:nvSpPr>
+        <p:spPr>
+          <a:xfrm>
+            <a:off x="1179767" y="3086255"/>
+            <a:ext cx="9990668" cy="369332"/>
+          </a:xfrm>
+          <a:prstGeom prst="rect">
+            <a:avLst/>
+          </a:prstGeom>
+          <a:solidFill>
+            <a:srgbClr val="7030A0"/>
+          </a:solidFill>
+          <a:ln>
+            <a:noFill/>
+          </a:ln>
+        </p:spPr>
+        <p:txBody>
+          <a:bodyPr wrap="none" lIns="0" rIns="0" tIns="0" bIns="0"/>
+          <a:lstStyle/>
+          <a:p>
+            <a:pPr algn="ctr"/>
+            <a:r>
+              <a:rPr sz="1700" b="1" i="1">
+                <a:solidFill>
+                  <a:srgbClr val="FFFFFF"/>
+                </a:solidFill>
+                <a:latin typeface="Cambria"/>
+              </a:rPr>
+              <a:t>Architrino isolated in a Euclidean void of space and time (velocity not defined)</a:t>
+            </a:r>
+          </a:p>
+        </p:txBody>
+      </p:sp>
+      <p:sp>
+        <p:nvSpPr>
+          <p:cNvPr id="28" name="TextBox 27"/>
+          <p:cNvSpPr txBox="1"/>
+          <p:nvPr/>
+        </p:nvSpPr>
+        <p:spPr>
+          <a:xfrm>
+            <a:off x="1485772" y="3803446"/>
+            <a:ext cx="9030806" cy="369332"/>
+          </a:xfrm>
+          <a:prstGeom prst="rect">
+            <a:avLst/>
+          </a:prstGeom>
+          <a:noFill/>
+          <a:ln>
+            <a:noFill/>
+          </a:ln>
+        </p:spPr>
+        <p:txBody>
+          <a:bodyPr wrap="none" lIns="0" rIns="0" tIns="0" bIns="0"/>
+          <a:lstStyle/>
+          <a:p>
+            <a:pPr algn="ctr"/>
+            <a:r>
+              <a:rPr sz="1650" b="0" i="1">
+                <a:solidFill>
+                  <a:srgbClr val="FFFFFF"/>
+                </a:solidFill>
+                <a:latin typeface="Cambria"/>
+              </a:rPr>
+              <a:t>Let @ represent the universal constant speed of potential emissions.</a:t>
+            </a:r>
+          </a:p>
+        </p:txBody>
+      </p:sp>
+      <p:sp>
+        <p:nvSpPr>
+          <p:cNvPr id="29" name="TextBox 28"/>
+          <p:cNvSpPr txBox="1"/>
+          <p:nvPr/>
+        </p:nvSpPr>
+        <p:spPr>
+          <a:xfrm>
+            <a:off x="3902331" y="4520636"/>
+            <a:ext cx="4545540" cy="369332"/>
+          </a:xfrm>
+          <a:prstGeom prst="rect">
+            <a:avLst/>
+          </a:prstGeom>
+          <a:noFill/>
+          <a:ln>
+            <a:noFill/>
+          </a:ln>
+        </p:spPr>
+        <p:txBody>
+          <a:bodyPr wrap="none" lIns="0" rIns="0" tIns="0" bIns="0"/>
+          <a:lstStyle/>
+          <a:p>
+            <a:pPr algn="ctr"/>
+            <a:r>
+              <a:rPr sz="1800" b="0" i="1">
+                <a:solidFill>
+                  <a:srgbClr val="FFFFFF"/>
+                </a:solidFill>
+                <a:latin typeface="Cambria"/>
+              </a:rPr>
+              <a:t>Energy(total) = Energy(apparent) = q * @²</a:t>
+            </a:r>
+          </a:p>
+        </p:txBody>
+      </p:sp>
+      <p:sp>
+        <p:nvSpPr>
+          <p:cNvPr id="30" name="TextBox 29"/>
+          <p:cNvSpPr txBox="1"/>
+          <p:nvPr/>
+        </p:nvSpPr>
+        <p:spPr>
+          <a:xfrm>
+            <a:off x="2088245" y="5135368"/>
+            <a:ext cx="8173712" cy="1477328"/>
+          </a:xfrm>
+          <a:prstGeom prst="rect">
+            <a:avLst/>
+          </a:prstGeom>
+          <a:noFill/>
+          <a:ln>
+            <a:noFill/>
+          </a:ln>
+        </p:spPr>
+        <p:txBody>
+          <a:bodyPr wrap="none" lIns="0" rIns="0" tIns="0" bIns="0"/>
+          <a:lstStyle/>
+          <a:p>
+            <a:pPr algn="ctr"/>
+            <a:r>
+              <a:rPr sz="1800" b="1" i="1">
+                <a:solidFill>
+                  <a:srgbClr val="7030A0"/>
+                </a:solidFill>
+                <a:latin typeface="Cambria"/>
+              </a:rPr>
+              <a:t>Duality</a:t>
+            </a:r>
+          </a:p>
+          <a:p>
+            <a:pPr algn="ctr"/>
+            <a:r>
+              <a:rPr sz="1600" b="0" i="1">
+                <a:solidFill>
+                  <a:srgbClr val="FFFFFF"/>
+                </a:solidFill>
+                <a:latin typeface="Cambria"/>
+              </a:rPr>
+              <a:t>Architrino causal wakes travel radially from emission at speed @.</a:t>
+            </a:r>
+          </a:p>
+          <a:p>
+            <a:pPr algn="ctr"/>
+            <a:r>
+              <a:rPr sz="1600" b="0" i="1">
+                <a:solidFill>
+                  <a:srgbClr val="FFFFFF"/>
+                </a:solidFill>
+                <a:latin typeface="Cambria"/>
+              </a:rPr>
+              <a:t>Photon structures travel at c, the local speed of light through the aether.</a:t>
+            </a:r>
+          </a:p>
+          <a:p>
+            <a:pPr algn="ctr"/>
+            <a:r>
+              <a:rPr sz="1600" b="0" i="1">
+                <a:solidFill>
+                  <a:srgbClr val="FFFFFF"/>
+                </a:solidFill>
+                <a:latin typeface="Cambria"/>
+              </a:rPr>
+              <a:t>Local c approaches @ as Energy(apparent) of the aether approaches zero.</a:t>
+            </a:r>
+          </a:p>
+        </p:txBody>
+      </p:sp>
     </p:spTree>
     <p:extLst>
       <p:ext uri="{BB962C8B-B14F-4D97-AF65-F5344CB8AC3E}">
-        <ns7:creationId val="3268287473"/>
+        <ns6:creationId val="3268287473"/>
       </p:ext>
     </p:extLst>
   </p:cSld>
